--- a/Curso Gas B/02 - ITC-ICG 02-03-04 - Almacenamiento GLP y plantas GNL/02 - ITC-ICG 02-03-04 - Almacenamiento GLP y plantas GNL - Vídeo 4.pptx
+++ b/Curso Gas B/02 - ITC-ICG 02-03-04 - Almacenamiento GLP y plantas GNL/02 - ITC-ICG 02-03-04 - Almacenamiento GLP y plantas GNL - Vídeo 4.pptx
@@ -19,6 +19,7 @@
     <p:sldId id="267" r:id="rId19"/>
     <p:sldId id="268" r:id="rId20"/>
     <p:sldId id="269" r:id="rId21"/>
+    <p:sldId id="270" r:id="rId22"/>
   </p:sldIdLst>
   <p:sldSz cx="12191695" cy="6858000" type="screen4x3"/>
   <p:notesSz cx="6858000" cy="9144000"/>
@@ -515,12 +516,12 @@
           <a:lstStyle/>
           <a:p>
             <a:r>
-              <a:t>N1: ¿Cómo llega el gas natural adonde no hay gasoducto?</a:t>
-            </a:r>
-          </a:p>
-          <a:p>
-            <a:r>
-              <a:t>N2: Con una planta satélite de GNL. La ITC-ICG cero cuatro regula esos depósitos de gas natural licuado, a temperatura criogénica, muy frío, que abastecen una zona o una industria donde no llega la red. Cambia el producto y cambian dos protagonistas: la norma de referencia pasa a ser la une sesenta mil doscientos diez, y quien monta y mantiene es el especialista criogénico. Es la instrucción más corta de las tres, pero muy preguntable en autorización, plazos de comunicación y controles periódicos, con esa fórmula de volumen por presión. Vamos con ella completa.</a:t>
+              <a:t>N1: ¿Y los pueblos o las fábricas donde no llega el gasoducto? ¿Se quedan sin gas natural?</a:t>
+            </a:r>
+          </a:p>
+          <a:p>
+            <a:r>
+              <a:t>N2: No, se les lleva en camión y en frío. La ITC-ICG cero cuatro regula las plantas satélite de GNL, gas natural licuado: depósitos de gas natural enfriado hasta hacerlo líquido, muy frío, que abastecen una zona o una industria adonde no llega la red. Cambia el producto y cambian dos protagonistas: la norma de referencia ya no es la del GLP, sino la UNE sesenta mil doscientos diez, y quien monta y mantiene no es un instalador cualquiera, sino el especialista criogénico. Es la instrucción más corta de las tres, pero muy preguntable en autorización, plazos y controles, con esa fórmula de uve por pe. Vamos con ella entera y cerramos el tema.</a:t>
             </a:r>
           </a:p>
         </p:txBody>
@@ -590,12 +591,12 @@
           <a:lstStyle/>
           <a:p>
             <a:r>
-              <a:t>N1: ¿Se parece el mantenimiento del GNL al del GLP?</a:t>
-            </a:r>
-          </a:p>
-          <a:p>
-            <a:r>
-              <a:t>N2: Muchísimo. El titular debe tener un contrato de mantenimiento con un especialista criogénico que disponga de servicio de urgencias permanente, encargado de conservar la instalación y hacer las revisiones según la une sesenta mil doscientos diez. Existe un Libro de Mantenimiento donde se anota cada visita, y las empresas titulares con capacidad y medios propios pueden quedar eximidas del contrato. Es casi el mismo texto que la ITC cero tres; el cambio de fondo es quién firma, el especialista criogénico, y la norma, la sesenta mil doscientos diez. Si dominaste el mantenimiento del vídeo tres, este lo tienes medio ganado.</a:t>
+              <a:t>N1: El mantenimiento, ¿es muy distinto del depósito de GLP?</a:t>
+            </a:r>
+          </a:p>
+          <a:p>
+            <a:r>
+              <a:t>N2: Casi calcado, y eso es una buena noticia: si dominaste el mantenimiento del vídeo tres, este lo tienes medio ganado. El titular es el responsable de que la instalación esté siempre en disposición de servicio, y para ello hace falta un contrato de mantenimiento con servicio de urgencias permanente, un Libro de Mantenimiento o archivo documental donde consta cada visita, y existe la posible exención del contrato si el titular acredita capacidad y medios propios. ¿Qué cambia de fondo? Dos cosas que ya conoces: quien firma el mantenimiento es el especialista criogénico, no una instaladora de gas normal, y la norma de referencia es la UNE sesenta mil doscientos diez. Mismo esqueleto, distintos protagonistas.</a:t>
             </a:r>
           </a:p>
         </p:txBody>
@@ -665,12 +666,12 @@
           <a:lstStyle/>
           <a:p>
             <a:r>
-              <a:t>N1: ¿Quién puede hacer el control periódico y cada cuánto?</a:t>
-            </a:r>
-          </a:p>
-          <a:p>
-            <a:r>
-              <a:t>N2: El control periódico se hace cada cinco años, con las pruebas de la une sesenta mil doscientos diez. Y quién lo hace depende de una fórmula: multiplica el volumen geométrico en metros cúbicos por la presión máxima de trabajo en bar. Si el resultado es trescientos o menos, lo puede hacer gente de la casa, el especialista criogénico o el servicio de mantenimiento del usuario, o un organismo de control. Pero si pasa de trescientos, tiene que venir obligatoriamente un organismo de control independiente. Cuanto más grande y más presión, más ojos externos. El resultado se documenta en un certificado por cuadriplicado: usuario, titular, órgano competente y el propio agente. Retén el número: trescientos.</a:t>
+              <a:t>N1: ¿Cada cuánto se controla la planta y quién puede hacerlo?</a:t>
+            </a:r>
+          </a:p>
+          <a:p>
+            <a:r>
+              <a:t>N2: El control periódico general es cada cinco años, con las pruebas y verificaciones de la norma. Y quién puede realizarlo depende de una fórmula muy sencilla, uve por pe: multiplicas el volumen geométrico en metros cúbicos por la presión máxima de trabajo en bares. Si el resultado es trescientos o menos, el control lo puede hacer gente de la casa: el especialista criogénico, el servicio de mantenimiento del propio usuario, o un organismo de control. Pero si el resultado pasa de trescientos, entonces tiene que venir sí o sí un organismo de control independiente. La lógica: cuanto más grande y más presión, más ojos externos exige. Retén el número trescientos, y que el resultado del control va en un certificado por cuadriplicado: usuario, titular, órgano competente y el propio agente.</a:t>
             </a:r>
           </a:p>
         </p:txBody>
@@ -740,12 +741,12 @@
           <a:lstStyle/>
           <a:p>
             <a:r>
-              <a:t>N1: ¿En qué se diferencia la gran prueba del GNL de la del GLP?</a:t>
-            </a:r>
-          </a:p>
-          <a:p>
-            <a:r>
-              <a:t>N2: No mezcles los dos relojes: el control periódico es cada cinco años, pero la prueba de presión es cada quince años. Y aquí está el matiz de examen: en el GNL esa prueba es neumática, con aire o gas, no hidráulica con agua como en el GLP. ¿Por qué? Porque meter agua en un depósito criogénico sería introducir humedad y estropearlo. La realiza un organismo de control asistido por un especialista criogénico, que emite un acta de pruebas. Confundir hidráulica del GLP con neumática del GNL es el error clásico de examen y de obra: en frío, prueba neumática.</a:t>
+              <a:t>N1: La prueba de presión de los quince años, ¿es igual que la del GLP?</a:t>
+            </a:r>
+          </a:p>
+          <a:p>
+            <a:r>
+              <a:t>N2: No, y esta diferencia es de las que más caen. En el GNL, la prueba de presión de cada quince años es neumática, es decir, se hace con aire o gas a presión, no con agua. La realiza un organismo de control asistido por un especialista criogénico, que emite un acta de pruebas al terminar con éxito. ¿Por qué neumática y no hidráulica? Porque meter agua en un depósito criogénico sería introducir humedad, y esa humedad se congelaría y estropearía la instalación. Compara y no lo mezcles: en el depósito de GLP del vídeo anterior la prueba de los quince años era hidráulica, con agua; aquí, en el GNL frío, es neumática, con gas. Confundir hidráulica con neumática es el error clásico, en el examen y en la obra.</a:t>
             </a:r>
           </a:p>
         </p:txBody>
@@ -815,12 +816,12 @@
           <a:lstStyle/>
           <a:p>
             <a:r>
-              <a:t>N1: ¿Qué se hace si la planta deja de recibir gas?</a:t>
-            </a:r>
-          </a:p>
-          <a:p>
-            <a:r>
-              <a:t>N2: Regla clara: si la planta pasa un año sin recibir ninguna carga de GNL, el titular debe inertizarla, es decir, llenarla de nitrógeno u otro gas inerte para que no quede atmósfera inflamable dentro. Lo hace la empresa de mantenimiento y lo supervisa y certifica un organismo de control. Y la frase de oro para el examen: bajo ningún concepto se desmonta una planta ni ninguno de sus depósitos sin inertizar antes. Es la misma filosofía de seguridad que en el GLP del vídeo tres: un depósito vacío de gas inflamable sigue siendo peligroso hasta que lo neutralizas.</a:t>
+              <a:t>N1: Y cuando la planta deja de usarse, ¿misma historia que el depósito de GLP?</a:t>
+            </a:r>
+          </a:p>
+          <a:p>
+            <a:r>
+              <a:t>N2: Misma filosofía de seguridad, sí. Si la planta pasa un año entero sin recibir ninguna carga de GNL, el titular tiene que inertizarla: llenarla de nitrógeno u otro gas inerte para que dentro no quede una atmósfera inflamable. Ese inertizado lo hace la empresa de mantenimiento y lo supervisa y certifica un organismo de control. Y aquí va la frase de oro para el examen: bajo ningún concepto se desmonta una planta ni ninguno de sus depósitos sin haberlos inertizado antes. Es exactamente la misma idea que viste en el depósito de GLP del vídeo tres: un depósito vacío de gas inflamable sigue siendo peligroso hasta que lo neutralizas de verdad. En caso de cese, el distribuidor presenta la resolución de retirada y el titular se ocupa del desmontaje.</a:t>
             </a:r>
           </a:p>
         </p:txBody>
@@ -890,12 +891,97 @@
           <a:lstStyle/>
           <a:p>
             <a:r>
-              <a:t>N1: Tres ideas para cerrar la ITC-ICG cero cuatro y el tema.</a:t>
-            </a:r>
-          </a:p>
-          <a:p>
-            <a:r>
-              <a:t>N2: Primera, la tríada: el GNL es gas natural licuado, criogénico a unos ciento sesenta bajo cero, y va siempre con la une sesenta mil doscientos diez y el especialista criogénico, no una instaladora normal. Segunda, el papeleo de nivel superior: aquí siempre hay proyecto, con planes de emergencia, se necesita autorización previa salvo autoconsumo, y la puesta en servicio se comunica en quince días hábiles. Y tercera, las cifras de mantenimiento: control cada cinco años, con organismo de control obligatorio si volumen por presión pasa de trescientos, prueba neumática, no hidráulica, cada quince años, y si pasa un año sin carga, se inertiza. Nunca se desmonta nada sin inertizar antes. Con esto cierras el tema del almacenamiento.</a:t>
+              <a:t>N1: Antes de cerrar, resúmeme el GNL frente al GLP para no mezclarlos.</a:t>
+            </a:r>
+          </a:p>
+          <a:p>
+            <a:r>
+              <a:t>N2: Cinco líneas y los separas para siempre. Una: GNL va con la norma UNE sesenta mil doscientos diez y con el especialista criogénico, frente al GLP que iba con la sesenta mil doscientos cincuenta y la empresa instaladora. Dos: el GNL necesita autorización previa casi siempre, salvo uso propio y exclusivo, mientras que el centro de envases nunca la necesitaba. Tres: en GNL siempre hay proyecto, con el extra de los planes de emergencia. Cuatro: los controles son cada cinco años, y la fórmula uve por pe con la frontera en trescientos decide quién los hace. Y cinco: la prueba de presión de los quince años es neumática, con gas, no hidráulica, para no meter humedad en el frío. Con esas cinco líneas tienes el vídeo y la diferencia clave del tema.</a:t>
+            </a:r>
+          </a:p>
+        </p:txBody>
+      </p:sp>
+      <p:sp>
+        <p:nvSpPr>
+          <p:cNvPr id="4" name="Slide Number Placeholder 3"/>
+          <p:cNvSpPr>
+            <a:spLocks noGrp="1"/>
+          </p:cNvSpPr>
+          <p:nvPr>
+            <p:ph type="sldNum" idx="5" sz="quarter"/>
+          </p:nvPr>
+        </p:nvSpPr>
+        <p:spPr/>
+      </p:sp>
+    </p:spTree>
+  </p:cSld>
+  <p:clrMapOvr>
+    <a:masterClrMapping/>
+  </p:clrMapOvr>
+</p:notes>
+</file>
+
+<file path=ppt/notesSlides/notesSlide15.xml><?xml version="1.0" encoding="utf-8"?>
+<p:notes xmlns:a="http://schemas.openxmlformats.org/drawingml/2006/main" xmlns:p="http://schemas.openxmlformats.org/presentationml/2006/main" xmlns:r="http://schemas.openxmlformats.org/officeDocument/2006/relationships">
+  <p:cSld>
+    <p:spTree>
+      <p:nvGrpSpPr>
+        <p:cNvPr id="1" name=""/>
+        <p:cNvGrpSpPr/>
+        <p:nvPr/>
+      </p:nvGrpSpPr>
+      <p:grpSpPr>
+        <a:xfrm>
+          <a:off x="0" y="0"/>
+          <a:ext cx="0" cy="0"/>
+          <a:chOff x="0" y="0"/>
+          <a:chExt cx="0" cy="0"/>
+        </a:xfrm>
+      </p:grpSpPr>
+      <p:sp>
+        <p:nvSpPr>
+          <p:cNvPr id="2" name="Slide Image Placeholder 1"/>
+          <p:cNvSpPr>
+            <a:spLocks noGrp="1"/>
+          </p:cNvSpPr>
+          <p:nvPr>
+            <p:ph type="sldImg" idx="2"/>
+          </p:nvPr>
+        </p:nvSpPr>
+        <p:spPr/>
+      </p:sp>
+      <p:sp>
+        <p:nvSpPr>
+          <p:cNvPr id="3" name="Notes Placeholder 2"/>
+          <p:cNvSpPr>
+            <a:spLocks noGrp="1"/>
+          </p:cNvSpPr>
+          <p:nvPr>
+            <p:ph type="body" idx="3" sz="quarter"/>
+          </p:nvPr>
+        </p:nvSpPr>
+        <p:spPr/>
+        <p:txBody>
+          <a:bodyPr/>
+          <a:lstStyle/>
+          <a:p>
+            <a:r>
+              <a:t>N1: Cerramos el vídeo y el tema entero. ¿Qué me llevo de las plantas de GNL?</a:t>
+            </a:r>
+          </a:p>
+          <a:p>
+            <a:r>
+              <a:t>N2: Te llevas la pieza que faltaba del almacenamiento de gas. El GNL es gas natural licuado, criogénico, y todo lo suyo gira en torno a ese frío: por eso lo monta el especialista criogénico con la norma UNE sesenta mil doscientos diez, por eso la prueba de los quince años es neumática y no hidráulica, para no meter humedad, y por eso el papeleo sube de nivel con autorización previa, proyecto siempre y planes de emergencia. Y le has puesto sus cifras: mil metros cúbicos de tope, la fórmula uve por pe con la frontera en trescientos para decidir quién controla, control cada cinco años y comunicación en quince días hábiles.</a:t>
+            </a:r>
+          </a:p>
+          <a:p>
+            <a:r>
+              <a:t>N1: ¿Y qué me llevo del tema completo, ahora que lo he terminado?</a:t>
+            </a:r>
+          </a:p>
+          <a:p>
+            <a:r>
+              <a:t>N2: Que ya sabes dónde y cómo se guarda el gas antes de llegar al usuario, en sus tres formas. Los centros de envases, la nave de las bombonas de la ITC cero dos. Los depósitos fijos de GLP del chalé, con la UNE sesenta mil doscientos cincuenta y la ITC cero tres. Y las plantas satélite de GNL, con la UNE sesenta mil doscientos diez y la ITC cero cuatro. Fíjate en el hilo que las une todas: el gas mal guardado es peligroso, así que cada norma pone distancias, ventilación, pruebas y papeles para que nunca haya una fuga que se embolse o un depósito abandonado que siga siendo una bomba. En el examen te van a cruzar las tres instrucciones, y hoy ya las distingues sin dudar. Has cerrado el tema del almacenamiento de gas de punta a punta. Eres bastante más gasista que cuando empezaste. Nos vemos en el siguiente tema.</a:t>
             </a:r>
           </a:p>
         </p:txBody>
@@ -965,12 +1051,12 @@
           <a:lstStyle/>
           <a:p>
             <a:r>
-              <a:t>N1: Tres cifras que resumen el GNL.</a:t>
-            </a:r>
-          </a:p>
-          <a:p>
-            <a:r>
-              <a:t>N2: La primera es el techo: una planta satélite no pasa de mil metros cúbicos de capacidad conjunta. La segunda es el reloj del mantenimiento: el control periódico se hace cada cinco años. Y la tercera es el número que decide quién puede hacerlo: se multiplica el volumen por la presión, y si el resultado pasa de trescientos, tiene que venir sí o sí un organismo de control. Con estas tres cifras dominas la parte que más cae del vídeo.</a:t>
+              <a:t>N1: Dame las tres cifras que no puedo fallar.</a:t>
+            </a:r>
+          </a:p>
+          <a:p>
+            <a:r>
+              <a:t>N2: Tres números, y son de los que caen. El primero: mil metros cúbicos es el techo de una planta satélite de GNL; por encima de eso ya no es una planta satélite a estos efectos. El segundo: trescientos es la frontera de la fórmula uve por pe, volumen por presión, que decide quién puede hacer los controles. Y el tercero: quince días hábiles es el plazo para comunicar la puesta en servicio a la Comunidad Autónoma, y ojo, hábiles, no naturales. Mil, trescientos y quince días hábiles: apúntalos.</a:t>
             </a:r>
           </a:p>
         </p:txBody>
@@ -1040,12 +1126,12 @@
           <a:lstStyle/>
           <a:p>
             <a:r>
-              <a:t>N1: ¿Qué significa GNL y qué es una planta satélite?</a:t>
-            </a:r>
-          </a:p>
-          <a:p>
-            <a:r>
-              <a:t>N2: GNL es gas natural licuado: el mismo gas natural de la ciudad, pero enfriado a unos ciento sesenta grados bajo cero hasta hacerlo líquido. Al licuarse reduce muchísimo su volumen, y eso permite transportarlo en cisterna a sitios donde no llega el gasoducto. La planta satélite es el depósito local que recibe ese GNL, lo vuelve a gas y lo reparte por la zona o la industria. Piénsala como un gasoducto de mentira: donde no llega la tubería, llega el camión y llena el depósito. Fija esa temperatura, ciento sesenta bajo cero, porque de ahí sale todo lo demás.</a:t>
+              <a:t>N1: Antes de nada, ¿qué es exactamente una planta satélite de GNL?</a:t>
+            </a:r>
+          </a:p>
+          <a:p>
+            <a:r>
+              <a:t>N2: Vamos por partes. GNL significa gas natural licuado: es el mismo gas natural que llega a las ciudades, pero enfriado a unos ciento sesenta grados bajo cero hasta convertirlo en líquido. Al licuarlo, su volumen se reduce muchísimo, y eso permite transportarlo en cisterna a sitios donde no hay gasoducto. La planta satélite es el depósito local que recibe ese GNL, lo vuelve a convertir en gas y lo reparte por la zona. La imagen que mejor lo explica: es un gasoducto de mentira. Donde no llega la tubería, llega el camión, llena el depósito, y de ahí sale el gas como si hubiera red. Esta ITC fija los requisitos y la seguridad para diseñarla, construirla, probarla, instalarla y usarla.</a:t>
             </a:r>
           </a:p>
         </p:txBody>
@@ -1115,12 +1201,12 @@
           <a:lstStyle/>
           <a:p>
             <a:r>
-              <a:t>N1: ¿Hasta cuánto llega esta ITC y qué pasa con los recambios?</a:t>
-            </a:r>
-          </a:p>
-          <a:p>
-            <a:r>
-              <a:t>N2: El límite es mil metros cúbicos de capacidad conjunta de GNL; por encima ya no es una planta satélite a estos efectos. Como en el GLP, la modificación que cambia de categoría se trata como instalación nueva, y para el recambio equivalente, sustituir un depósito por otro similar con hasta un diez por ciento de diferencia de volumen, no hace falta proyecto nuevo. Pero atención a un matiz que el examen adora cruzar: aquí la memoria justificativa la firma el director de obra, mientras que en la ITC cero tres, la de depósitos fijos de GLP, la firmaba la empresa instaladora. Pequeña diferencia, gran pregunta.</a:t>
+              <a:t>N1: ¿Hasta qué tamaño llega esta instrucción?</a:t>
+            </a:r>
+          </a:p>
+          <a:p>
+            <a:r>
+              <a:t>N2: El límite es mil metros cúbicos de capacidad geométrica conjunta de almacenamiento. Por encima de eso ya no es una planta satélite a estos efectos, sino una instalación mayor con otras reglas. Igual que en los depósitos de GLP, se considera modificación la que hace cambiar de categoría, y hay un recambio equivalente: si sustituyes un depósito por otro de características similares, con diferencia de volumen no superior al diez por ciento, sin cambiar la clasificación ni las distancias, no hace falta proyecto nuevo. Pero ojo a un matiz que el examen adora cruzar: aquí la memoria justificativa la firma el director de obra, mientras que en los depósitos fijos de GLP la firmaba la empresa instaladora. Y las reglas de mantenimiento se aplican tanto a las plantas nuevas como a las existentes.</a:t>
             </a:r>
           </a:p>
         </p:txBody>
@@ -1190,12 +1276,12 @@
           <a:lstStyle/>
           <a:p>
             <a:r>
-              <a:t>N1: ¿Quién puede montar y mantener una planta de GNL?</a:t>
-            </a:r>
-          </a:p>
-          <a:p>
-            <a:r>
-              <a:t>N2: Esta es la gran diferencia con el GLP. El GNL está muy frío, es criogénico, y trabajarlo exige formación y materiales específicos. Por eso el montaje y el mantenimiento no los hace una empresa instaladora de gas normal, sino una empresa especializada en trabajos criogénicos y equipos a presión: el especialista criogénico. Asocia siempre la tríada del GNL: gas natural licuado, norma une sesenta mil doscientos diez y especialista criogénico. Compáralo con el depósito de GLP, que iba con la une sesenta mil doscientos cincuenta y una empresa instaladora de gas. Los equipos a presión cumplen además el Real Decreto setecientos sesenta y nueve.</a:t>
+              <a:t>N1: ¿Por qué no puede montar esto el mismo instalador que hace los depósitos de GLP?</a:t>
+            </a:r>
+          </a:p>
+          <a:p>
+            <a:r>
+              <a:t>N2: Por el frío. El GNL está a unos ciento sesenta grados bajo cero, es criogénico, y trabajarlo exige formación y materiales específicos: un material normal se volvería frágil como el cristal a esa temperatura. Por eso el montaje y el mantenimiento no los hace una empresa instaladora de gas corriente, sino una empresa especializada en trabajos criogénicos y equipos a presión, el especialista criogénico. Y la clasificación de la planta se hace según la norma UNE sesenta mil doscientos diez. Grábate la cadena entera para no confundirla con el GLP: GNL, norma UNE sesenta mil doscientos diez, especialista criogénico. Compárala con el depósito de GLP del vídeo anterior: allí era UNE sesenta mil doscientos cincuenta y empresa instaladora de gas.</a:t>
             </a:r>
           </a:p>
         </p:txBody>
@@ -1265,12 +1351,12 @@
           <a:lstStyle/>
           <a:p>
             <a:r>
-              <a:t>N1: ¿Hace falta permiso previo para una planta de GNL?</a:t>
-            </a:r>
-          </a:p>
-          <a:p>
-            <a:r>
-              <a:t>N2: Como regla general, sí. A diferencia de los centros de envases, que nunca lo necesitan, y de los depósitos de GLP, que solo si dan gas a terceros, la planta de GNL sí requiere autorización administrativa previa a la construcción, otorgada por la Comunidad Autónoma. La única excepción es que sea para el uso propio y exclusivo de un usuario, por ejemplo una fábrica que se autoabastece. Regla: GNL, pide permiso antes, salvo autoconsumo exclusivo. Para pedirlo, el titular presenta un proyecto con el modelo oficial de solicitud.</a:t>
+              <a:t>N1: ¿Esta planta necesita permiso antes de construirla?</a:t>
+            </a:r>
+          </a:p>
+          <a:p>
+            <a:r>
+              <a:t>N2: Sí, y aquí está una de las grandes diferencias del tema. Repasa la escala: los centros de envases nunca necesitan autorización; los depósitos de GLP, solo si dan gas a terceros por una red; y la planta de GNL sí requiere autorización administrativa previa a su construcción como regla general, otorgada por el órgano competente de la Comunidad Autónoma. La única excepción es que la planta sea para uso propio y exclusivo de un usuario, por ejemplo una fábrica que se autoabastece. Regla para clavarlo: GNL, pide permiso antes, salvo autoconsumo exclusivo. Para solicitarla se presenta el proyecto con el modelo oficial, y te devuelven un ejemplar diligenciado con la fecha de entrada.</a:t>
             </a:r>
           </a:p>
         </p:txBody>
@@ -1340,12 +1426,12 @@
           <a:lstStyle/>
           <a:p>
             <a:r>
-              <a:t>N1: ¿Vale la memoria técnica en el GNL?</a:t>
-            </a:r>
-          </a:p>
-          <a:p>
-            <a:r>
-              <a:t>N2: No, aquí no hay memoria que valga: toda planta satélite de GNL exige proyecto redactado por técnico facultativo competente. El proyecto incluye el objeto y la ubicación, la normativa, la descripción y los cálculos, la obra civil, el montaje y pruebas, el presupuesto, el pliego de condiciones y los planos. Y fíjate en el extra que no aparecía en el GLP: la documentación de seguridad y los planes de emergencia frente a accidentes graves. El GNL se maneja en instalaciones más serias, así que el papeleo sube de nivel.</a:t>
+              <a:t>N1: ¿Y aquí también vale una memoria técnica como en el GLP pequeño?</a:t>
+            </a:r>
+          </a:p>
+          <a:p>
+            <a:r>
+              <a:t>N2: No, y esto es tajante. En el GNL no hay memoria que valga: toda planta satélite exige proyecto elaborado por técnico facultativo competente. La razón es que el GNL se maneja en instalaciones más serias y con más riesgo, así que el papeleo sube de nivel. El proyecto lleva lo habitual, objeto, ubicación, cálculos, obra civil, montaje y pruebas, presupuesto, pliego y planos, pero fíjate en el extra que no aparecía en el GLP: la documentación de seguridad y los planes de emergencia frente a accidentes graves. Ese añadido de los planes de emergencia es la pista de que estamos en una instalación de categoría superior. Idea de fondo: GNL, siempre proyecto, y con planes de emergencia.</a:t>
             </a:r>
           </a:p>
         </p:txBody>
@@ -1415,12 +1501,12 @@
           <a:lstStyle/>
           <a:p>
             <a:r>
-              <a:t>N1: ¿En qué se apoya la puesta en servicio del GNL?</a:t>
-            </a:r>
-          </a:p>
-          <a:p>
-            <a:r>
-              <a:t>N2: En dos papeles. Antes, el organismo de control, con la empresa de montaje y el director de obra, hace las pruebas en obra de resistencia y estanquidad. Luego el director de obra emite el certificado de dirección de obra, y el organismo de control el certificado de inspección. Con esos dos, la instalación queda en disposición de servicio y el titular llama al suministrador para el primer llenado. Fíjate en un detalle que cae: aquí no hay certificado de instalación de empresa instaladora, como sí lo había en el GLP; manda el director de obra, porque en GNL siempre hay proyecto.</a:t>
+              <a:t>N1: ¿Qué certificados hacen falta aquí para quedar en disposición de servicio?</a:t>
+            </a:r>
+          </a:p>
+          <a:p>
+            <a:r>
+              <a:t>N2: Antes de nada, el organismo de control, asistido por la empresa de montaje y el director de obra, hace las pruebas en obra de la norma para comprobar resistencia y estanquidad. Y luego, la puesta en servicio se apoya en solo dos papeles. Uno: el certificado de dirección de obra, que firma el director de obra, con la lista de componentes y la justificación de homologaciones como anexo. Dos: el certificado de inspección, que emite el organismo de control. Con esos dos, la instalación queda en disposición de servicio. Fíjate en lo que falta respecto al GLP: aquí no hay certificado de instalación de empresa instaladora, porque siempre hay proyecto y quien manda es el director de obra. Menos papeles, pero de más nivel.</a:t>
             </a:r>
           </a:p>
         </p:txBody>
@@ -1490,12 +1576,12 @@
           <a:lstStyle/>
           <a:p>
             <a:r>
-              <a:t>N1: ¿Cuánto tiempo hay para comunicar la puesta en servicio?</a:t>
-            </a:r>
-          </a:p>
-          <a:p>
-            <a:r>
-              <a:t>N2: Cuidado con este plazo, que es muy preguntón. Tras la puesta en servicio, el titular tiene un plazo máximo de quince días hábiles para presentar la documentación por duplicado ante la Comunidad Autónoma: el proyecto constructivo, el certificado de dirección de obra, el de inspección, la documentación de los recipientes a presión y la fecha de puesta en servicio. Son quince días hábiles, que no cuentan domingos ni festivos, y no lo confundas con los treinta días genéricos del articulado del Reglamento para las instalaciones receptoras. Cada instalación tiene su plazo: aquí, quince hábiles.</a:t>
+              <a:t>N1: Una vez en marcha, ¿cuándo aviso a la Administración?</a:t>
+            </a:r>
+          </a:p>
+          <a:p>
+            <a:r>
+              <a:t>N2: Con los dos certificados expedidos, la planta está en disposición de servicio y el titular llama al suministrador para el primer llenado de los depósitos de GNL; antes verifica que la documentación está completa. Y después de la puesta en servicio hay que comunicarla, con un plazo que cae en examen: quince días hábiles, presentando por duplicado ante la Comunidad Autónoma el proyecto, los dos certificados, la documentación de los recipientes a presión y la fecha de puesta en servicio. Mucho cuidado aquí: son quince días hábiles, que no cuentan domingos ni festivos, y no hay que confundirlos con los treinta días genéricos del articulado del Reglamento para instalaciones receptoras. Cada instalación tiene su plazo; en el GNL, quince hábiles.</a:t>
             </a:r>
           </a:p>
         </p:txBody>
@@ -4619,7 +4705,7 @@
                 </a:solidFill>
                 <a:latin typeface="Montserrat"/>
               </a:rPr>
-              <a:t>ITC-ICG 04 · el gas natural licuado y el frío</a:t>
+              <a:t>ITC-ICG 04: el gas natural licuado y el especialista criogénico</a:t>
             </a:r>
           </a:p>
         </p:txBody>
@@ -4750,7 +4836,7 @@
                 </a:solidFill>
                 <a:latin typeface="Montserrat"/>
               </a:rPr>
-              <a:t>010 / 014</a:t>
+              <a:t>010 / 015</a:t>
             </a:r>
           </a:p>
         </p:txBody>
@@ -4852,7 +4938,7 @@
                 </a:solidFill>
                 <a:latin typeface="Montserrat"/>
               </a:rPr>
-              <a:t>El mismo esqueleto</a:t>
+              <a:t>Mismo esqueleto, con el criogénico</a:t>
             </a:r>
           </a:p>
         </p:txBody>
@@ -4950,7 +5036,7 @@
                 </a:solidFill>
                 <a:latin typeface="Montserrat"/>
               </a:rPr>
-              <a:t>Libro de Mantenimiento</a:t>
+              <a:t>Libro de Mantenimiento o archivo</a:t>
             </a:r>
           </a:p>
           <a:p>
@@ -4975,14 +5061,14 @@
                 </a:solidFill>
                 <a:latin typeface="Montserrat"/>
               </a:rPr>
-              <a:t>Posible exención con medios propios</a:t>
-            </a:r>
-          </a:p>
-        </p:txBody>
-      </p:sp>
-      <p:sp>
-        <p:nvSpPr>
-          <p:cNvPr id="8" name="imgph" descr="IMGQ:maintenance logbook binder industrial"/>
+              <a:t>Posible exención si tienes medios</a:t>
+            </a:r>
+          </a:p>
+        </p:txBody>
+      </p:sp>
+      <p:sp>
+        <p:nvSpPr>
+          <p:cNvPr id="8" name="imgph" descr="IMGQ:maintenance engineer cryogenic plant"/>
           <p:cNvSpPr/>
           <p:nvPr/>
         </p:nvSpPr>
@@ -5068,7 +5154,7 @@
                 </a:solidFill>
                 <a:latin typeface="Montserrat"/>
               </a:rPr>
-              <a:t>maintenance logbook binder industrial</a:t>
+              <a:t>maintenance engineer cryogenic plant</a:t>
             </a:r>
           </a:p>
         </p:txBody>
@@ -5165,7 +5251,7 @@
                 </a:solidFill>
                 <a:latin typeface="Montserrat"/>
               </a:rPr>
-              <a:t>011 / 014</a:t>
+              <a:t>011 / 015</a:t>
             </a:r>
           </a:p>
         </p:txBody>
@@ -5267,7 +5353,7 @@
                 </a:solidFill>
                 <a:latin typeface="Montserrat"/>
               </a:rPr>
-              <a:t>La fórmula V × P</a:t>
+              <a:t>Cada 5 años y la fórmula V × P</a:t>
             </a:r>
           </a:p>
         </p:txBody>
@@ -5340,7 +5426,7 @@
                 </a:solidFill>
                 <a:latin typeface="Montserrat"/>
               </a:rPr>
-              <a:t>V × P ≤ 300: criogénico o usuario</a:t>
+              <a:t>V × P: volumen por presión máxima</a:t>
             </a:r>
           </a:p>
           <a:p>
@@ -5365,7 +5451,7 @@
                 </a:solidFill>
                 <a:latin typeface="Montserrat"/>
               </a:rPr>
-              <a:t>V × P &gt; 300: solo organismo de control</a:t>
+              <a:t>300 o menos: criogénico o usuario vale</a:t>
             </a:r>
           </a:p>
           <a:p>
@@ -5390,14 +5476,14 @@
                 </a:solidFill>
                 <a:latin typeface="Montserrat"/>
               </a:rPr>
-              <a:t>Certificado por cuadriplicado</a:t>
-            </a:r>
-          </a:p>
-        </p:txBody>
-      </p:sp>
-      <p:sp>
-        <p:nvSpPr>
-          <p:cNvPr id="8" name="imgph" descr="IMGQ:pressure gauge dial industrial tank"/>
+              <a:t>Más de 300: obligatorio organismo de control</a:t>
+            </a:r>
+          </a:p>
+        </p:txBody>
+      </p:sp>
+      <p:sp>
+        <p:nvSpPr>
+          <p:cNvPr id="8" name="imgph" descr="IMGQ:pressure gauge cryogenic tank"/>
           <p:cNvSpPr/>
           <p:nvPr/>
         </p:nvSpPr>
@@ -5483,7 +5569,7 @@
                 </a:solidFill>
                 <a:latin typeface="Montserrat"/>
               </a:rPr>
-              <a:t>pressure gauge dial industrial tank</a:t>
+              <a:t>pressure gauge cryogenic tank</a:t>
             </a:r>
           </a:p>
         </p:txBody>
@@ -5580,7 +5666,7 @@
                 </a:solidFill>
                 <a:latin typeface="Montserrat"/>
               </a:rPr>
-              <a:t>012 / 014</a:t>
+              <a:t>012 / 015</a:t>
             </a:r>
           </a:p>
         </p:txBody>
@@ -5682,7 +5768,7 @@
                 </a:solidFill>
                 <a:latin typeface="Montserrat"/>
               </a:rPr>
-              <a:t>Neumática cada 15 años</a:t>
+              <a:t>Neumática, no hidráulica</a:t>
             </a:r>
           </a:p>
         </p:txBody>
@@ -5755,7 +5841,7 @@
                 </a:solidFill>
                 <a:latin typeface="Montserrat"/>
               </a:rPr>
-              <a:t>Neumática, no hidráulica</a:t>
+              <a:t>Neumática: con gas, no con agua</a:t>
             </a:r>
           </a:p>
           <a:p>
@@ -5780,7 +5866,7 @@
                 </a:solidFill>
                 <a:latin typeface="Montserrat"/>
               </a:rPr>
-              <a:t>Con gas, para no meter humedad</a:t>
+              <a:t>Evita meter humedad al depósito frío</a:t>
             </a:r>
           </a:p>
           <a:p>
@@ -5805,14 +5891,14 @@
                 </a:solidFill>
                 <a:latin typeface="Montserrat"/>
               </a:rPr>
-              <a:t>Organismo con especialista criogénico</a:t>
-            </a:r>
-          </a:p>
-        </p:txBody>
-      </p:sp>
-      <p:sp>
-        <p:nvSpPr>
-          <p:cNvPr id="8" name="imgph" descr="IMGQ:nitrogen pressure test cryogenic tank"/>
+              <a:t>GLP era hidráulica; GNL es neumática</a:t>
+            </a:r>
+          </a:p>
+        </p:txBody>
+      </p:sp>
+      <p:sp>
+        <p:nvSpPr>
+          <p:cNvPr id="8" name="imgph" descr="IMGQ:nitrogen pressure test cryogenic equipment"/>
           <p:cNvSpPr/>
           <p:nvPr/>
         </p:nvSpPr>
@@ -5898,7 +5984,7 @@
                 </a:solidFill>
                 <a:latin typeface="Montserrat"/>
               </a:rPr>
-              <a:t>nitrogen pressure test cryogenic tank</a:t>
+              <a:t>nitrogen pressure test cryogenic equipment</a:t>
             </a:r>
           </a:p>
         </p:txBody>
@@ -5995,7 +6081,7 @@
                 </a:solidFill>
                 <a:latin typeface="Montserrat"/>
               </a:rPr>
-              <a:t>013 / 014</a:t>
+              <a:t>013 / 015</a:t>
             </a:r>
           </a:p>
         </p:txBody>
@@ -6145,7 +6231,7 @@
                 </a:solidFill>
                 <a:latin typeface="Montserrat"/>
               </a:rPr>
-              <a:t>Un año sin recibir GNL: inertizar</a:t>
+              <a:t>Un año sin recibir GNL: inertizado</a:t>
             </a:r>
           </a:p>
           <a:p>
@@ -6170,7 +6256,7 @@
                 </a:solidFill>
                 <a:latin typeface="Montserrat"/>
               </a:rPr>
-              <a:t>Nitrógeno u otro gas inerte</a:t>
+              <a:t>Con nitrógeno u otro gas inerte</a:t>
             </a:r>
           </a:p>
           <a:p>
@@ -6195,7 +6281,7 @@
                 </a:solidFill>
                 <a:latin typeface="Montserrat"/>
               </a:rPr>
-              <a:t>Lo certifica un organismo de control</a:t>
+              <a:t>Lo supervisa un organismo de control</a:t>
             </a:r>
           </a:p>
           <a:p>
@@ -6220,14 +6306,14 @@
                 </a:solidFill>
                 <a:latin typeface="Montserrat"/>
               </a:rPr>
-              <a:t>Nunca desmontar sin inertizar</a:t>
-            </a:r>
-          </a:p>
-        </p:txBody>
-      </p:sp>
-      <p:sp>
-        <p:nvSpPr>
-          <p:cNvPr id="8" name="imgph" descr="IMGQ:nitrogen purging industrial tank valve"/>
+              <a:t>Nunca desmontar sin inertizar antes</a:t>
+            </a:r>
+          </a:p>
+        </p:txBody>
+      </p:sp>
+      <p:sp>
+        <p:nvSpPr>
+          <p:cNvPr id="8" name="imgph" descr="IMGQ:nitrogen purge industrial gas tank"/>
           <p:cNvSpPr/>
           <p:nvPr/>
         </p:nvSpPr>
@@ -6313,7 +6399,7 @@
                 </a:solidFill>
                 <a:latin typeface="Montserrat"/>
               </a:rPr>
-              <a:t>nitrogen purging industrial tank valve</a:t>
+              <a:t>nitrogen purge industrial gas tank</a:t>
             </a:r>
           </a:p>
         </p:txBody>
@@ -6410,7 +6496,7 @@
                 </a:solidFill>
                 <a:latin typeface="Montserrat"/>
               </a:rPr>
-              <a:t>014 / 014</a:t>
+              <a:t>014 / 015</a:t>
             </a:r>
           </a:p>
         </p:txBody>
@@ -6457,8 +6543,8 @@
         </p:nvSpPr>
         <p:spPr>
           <a:xfrm>
-            <a:off x="822960" y="640080"/>
-            <a:ext cx="10058400" cy="914400"/>
+            <a:off x="822960" y="457200"/>
+            <a:ext cx="8229600" cy="365760"/>
           </a:xfrm>
           <a:prstGeom prst="rect">
             <a:avLst/>
@@ -6472,13 +6558,13 @@
           <a:lstStyle/>
           <a:p>
             <a:r>
-              <a:rPr sz="3000" b="1" i="0">
-                <a:solidFill>
-                  <a:srgbClr val="1E2761"/>
-                </a:solidFill>
-                <a:latin typeface="Montserrat"/>
-              </a:rPr>
-              <a:t>Qué me llevo</a:t>
+              <a:rPr sz="1200" b="1" i="0">
+                <a:solidFill>
+                  <a:srgbClr val="64748B"/>
+                </a:solidFill>
+                <a:latin typeface="Montserrat"/>
+              </a:rPr>
+              <a:t>REPASO RELÁMPAGO</a:t>
             </a:r>
           </a:p>
         </p:txBody>
@@ -6491,8 +6577,8 @@
         </p:nvSpPr>
         <p:spPr>
           <a:xfrm>
-            <a:off x="822960" y="2011680"/>
-            <a:ext cx="10058400" cy="3657600"/>
+            <a:off x="822960" y="868680"/>
+            <a:ext cx="10515600" cy="914400"/>
           </a:xfrm>
           <a:prstGeom prst="rect">
             <a:avLst/>
@@ -6505,78 +6591,586 @@
           </a:bodyPr>
           <a:lstStyle/>
           <a:p>
+            <a:r>
+              <a:rPr sz="2700" b="1" i="0">
+                <a:solidFill>
+                  <a:srgbClr val="1E2761"/>
+                </a:solidFill>
+                <a:latin typeface="Montserrat"/>
+              </a:rPr>
+              <a:t>GNL frente a GLP, en cinco líneas</a:t>
+            </a:r>
+          </a:p>
+        </p:txBody>
+      </p:sp>
+      <p:sp>
+        <p:nvSpPr>
+          <p:cNvPr id="7" name="TextBox 6"/>
+          <p:cNvSpPr txBox="1"/>
+          <p:nvPr/>
+        </p:nvSpPr>
+        <p:spPr>
+          <a:xfrm>
+            <a:off x="822960" y="1920240"/>
+            <a:ext cx="4983480" cy="4206240"/>
+          </a:xfrm>
+          <a:prstGeom prst="rect">
+            <a:avLst/>
+          </a:prstGeom>
+          <a:noFill/>
+        </p:spPr>
+        <p:txBody>
+          <a:bodyPr wrap="square">
+            <a:spAutoFit/>
+          </a:bodyPr>
+          <a:lstStyle/>
+          <a:p>
             <a:pPr>
               <a:spcAft>
-                <a:spcPts val="1400"/>
+                <a:spcPts val="1000"/>
               </a:spcAft>
             </a:pPr>
             <a:r>
-              <a:rPr sz="2000" b="1" i="0">
+              <a:rPr sz="1600" b="1" i="0">
                 <a:solidFill>
                   <a:srgbClr val="2E3A80"/>
                 </a:solidFill>
                 <a:latin typeface="Montserrat"/>
               </a:rPr>
-              <a:t>✓  </a:t>
-            </a:r>
-            <a:r>
-              <a:rPr sz="2000" b="0" i="0">
+              <a:t>•  </a:t>
+            </a:r>
+            <a:r>
+              <a:rPr sz="1600" b="0" i="0">
                 <a:solidFill>
                   <a:srgbClr val="1B2330"/>
                 </a:solidFill>
                 <a:latin typeface="Montserrat"/>
               </a:rPr>
-              <a:t>GNL → UNE 60210 → especialista criogénico</a:t>
+              <a:t>GNL → UNE 60210 → criogénico</a:t>
             </a:r>
           </a:p>
           <a:p>
             <a:pPr>
               <a:spcAft>
-                <a:spcPts val="1400"/>
+                <a:spcPts val="1000"/>
               </a:spcAft>
             </a:pPr>
             <a:r>
-              <a:rPr sz="2000" b="1" i="0">
+              <a:rPr sz="1600" b="1" i="0">
                 <a:solidFill>
                   <a:srgbClr val="2E3A80"/>
                 </a:solidFill>
                 <a:latin typeface="Montserrat"/>
               </a:rPr>
-              <a:t>✓  </a:t>
-            </a:r>
-            <a:r>
-              <a:rPr sz="2000" b="0" i="0">
+              <a:t>•  </a:t>
+            </a:r>
+            <a:r>
+              <a:rPr sz="1600" b="0" i="0">
                 <a:solidFill>
                   <a:srgbClr val="1B2330"/>
                 </a:solidFill>
                 <a:latin typeface="Montserrat"/>
               </a:rPr>
-              <a:t>Siempre proyecto · autorización previa · 15 hábiles</a:t>
+              <a:t>Autorización previa (salvo autoconsumo)</a:t>
             </a:r>
           </a:p>
           <a:p>
             <a:pPr>
               <a:spcAft>
-                <a:spcPts val="1400"/>
+                <a:spcPts val="1000"/>
               </a:spcAft>
             </a:pPr>
             <a:r>
+              <a:rPr sz="1600" b="1" i="0">
+                <a:solidFill>
+                  <a:srgbClr val="2E3A80"/>
+                </a:solidFill>
+                <a:latin typeface="Montserrat"/>
+              </a:rPr>
+              <a:t>•  </a:t>
+            </a:r>
+            <a:r>
+              <a:rPr sz="1600" b="0" i="0">
+                <a:solidFill>
+                  <a:srgbClr val="1B2330"/>
+                </a:solidFill>
+                <a:latin typeface="Montserrat"/>
+              </a:rPr>
+              <a:t>Siempre proyecto + planes de emergencia</a:t>
+            </a:r>
+          </a:p>
+          <a:p>
+            <a:pPr>
+              <a:spcAft>
+                <a:spcPts val="1000"/>
+              </a:spcAft>
+            </a:pPr>
+            <a:r>
+              <a:rPr sz="1600" b="1" i="0">
+                <a:solidFill>
+                  <a:srgbClr val="2E3A80"/>
+                </a:solidFill>
+                <a:latin typeface="Montserrat"/>
+              </a:rPr>
+              <a:t>•  </a:t>
+            </a:r>
+            <a:r>
+              <a:rPr sz="1600" b="0" i="0">
+                <a:solidFill>
+                  <a:srgbClr val="1B2330"/>
+                </a:solidFill>
+                <a:latin typeface="Montserrat"/>
+              </a:rPr>
+              <a:t>Controles: 5 años · V × P · 300</a:t>
+            </a:r>
+          </a:p>
+          <a:p>
+            <a:pPr>
+              <a:spcAft>
+                <a:spcPts val="1000"/>
+              </a:spcAft>
+            </a:pPr>
+            <a:r>
+              <a:rPr sz="1600" b="1" i="0">
+                <a:solidFill>
+                  <a:srgbClr val="2E3A80"/>
+                </a:solidFill>
+                <a:latin typeface="Montserrat"/>
+              </a:rPr>
+              <a:t>•  </a:t>
+            </a:r>
+            <a:r>
+              <a:rPr sz="1600" b="0" i="0">
+                <a:solidFill>
+                  <a:srgbClr val="1B2330"/>
+                </a:solidFill>
+                <a:latin typeface="Montserrat"/>
+              </a:rPr>
+              <a:t>Prueba neumática cada 15 años</a:t>
+            </a:r>
+          </a:p>
+        </p:txBody>
+      </p:sp>
+      <p:sp>
+        <p:nvSpPr>
+          <p:cNvPr id="8" name="imgph" descr="IMGQ:LNG plant overview facility"/>
+          <p:cNvSpPr/>
+          <p:nvPr/>
+        </p:nvSpPr>
+        <p:spPr>
+          <a:xfrm>
+            <a:off x="5806440" y="1051560"/>
+            <a:ext cx="5298947" cy="4629150"/>
+          </a:xfrm>
+          <a:prstGeom prst="roundRect">
+            <a:avLst/>
+          </a:prstGeom>
+          <a:solidFill>
+            <a:srgbClr val="F3F6FB"/>
+          </a:solidFill>
+          <a:ln w="12700">
+            <a:solidFill>
+              <a:srgbClr val="C7D2E6"/>
+            </a:solidFill>
+          </a:ln>
+          <a:effectLst/>
+        </p:spPr>
+        <p:style>
+          <a:lnRef idx="1">
+            <a:schemeClr val="accent1"/>
+          </a:lnRef>
+          <a:fillRef idx="3">
+            <a:schemeClr val="accent1"/>
+          </a:fillRef>
+          <a:effectRef idx="2">
+            <a:schemeClr val="accent1"/>
+          </a:effectRef>
+          <a:fontRef idx="minor">
+            <a:schemeClr val="lt1"/>
+          </a:fontRef>
+        </p:style>
+        <p:txBody>
+          <a:bodyPr rtlCol="0" anchor="ctr"/>
+          <a:lstStyle/>
+          <a:p>
+            <a:pPr algn="ctr"/>
+          </a:p>
+        </p:txBody>
+      </p:sp>
+      <p:sp>
+        <p:nvSpPr>
+          <p:cNvPr id="9" name="TextBox 8"/>
+          <p:cNvSpPr txBox="1"/>
+          <p:nvPr/>
+        </p:nvSpPr>
+        <p:spPr>
+          <a:xfrm>
+            <a:off x="6080760" y="2726055"/>
+            <a:ext cx="4750307" cy="1280160"/>
+          </a:xfrm>
+          <a:prstGeom prst="rect">
+            <a:avLst/>
+          </a:prstGeom>
+          <a:noFill/>
+        </p:spPr>
+        <p:txBody>
+          <a:bodyPr wrap="square">
+            <a:spAutoFit/>
+          </a:bodyPr>
+          <a:lstStyle/>
+          <a:p>
+            <a:pPr algn="ctr"/>
+            <a:r>
+              <a:rPr sz="1400" b="1" i="0">
+                <a:solidFill>
+                  <a:srgbClr val="64748B"/>
+                </a:solidFill>
+                <a:latin typeface="Montserrat"/>
+              </a:rPr>
+              <a:t>IMAGEN REALISTA</a:t>
+            </a:r>
+          </a:p>
+          <a:p>
+            <a:pPr algn="ctr"/>
+            <a:r>
+              <a:rPr sz="1100" b="0" i="1">
+                <a:solidFill>
+                  <a:srgbClr val="64748B"/>
+                </a:solidFill>
+                <a:latin typeface="Montserrat"/>
+              </a:rPr>
+              <a:t>LNG plant overview facility</a:t>
+            </a:r>
+          </a:p>
+        </p:txBody>
+      </p:sp>
+    </p:spTree>
+  </p:cSld>
+  <p:clrMapOvr>
+    <a:masterClrMapping/>
+  </p:clrMapOvr>
+</p:sld>
+</file>
+
+<file path=ppt/slides/slide15.xml><?xml version="1.0" encoding="utf-8"?>
+<p:sld xmlns:a="http://schemas.openxmlformats.org/drawingml/2006/main" xmlns:p="http://schemas.openxmlformats.org/presentationml/2006/main" xmlns:r="http://schemas.openxmlformats.org/officeDocument/2006/relationships">
+  <p:cSld>
+    <p:spTree>
+      <p:nvGrpSpPr>
+        <p:cNvPr id="1" name=""/>
+        <p:cNvGrpSpPr/>
+        <p:nvPr/>
+      </p:nvGrpSpPr>
+      <p:grpSpPr/>
+      <p:sp>
+        <p:nvSpPr>
+          <p:cNvPr id="2" name="Rectangle 1"/>
+          <p:cNvSpPr/>
+          <p:nvPr/>
+        </p:nvSpPr>
+        <p:spPr>
+          <a:xfrm>
+            <a:off x="0" y="0"/>
+            <a:ext cx="12191695" cy="6858000"/>
+          </a:xfrm>
+          <a:prstGeom prst="rect">
+            <a:avLst/>
+          </a:prstGeom>
+          <a:solidFill>
+            <a:srgbClr val="1E2761"/>
+          </a:solidFill>
+          <a:ln>
+            <a:noFill/>
+          </a:ln>
+          <a:effectLst/>
+        </p:spPr>
+        <p:style>
+          <a:lnRef idx="1">
+            <a:schemeClr val="accent1"/>
+          </a:lnRef>
+          <a:fillRef idx="3">
+            <a:schemeClr val="accent1"/>
+          </a:fillRef>
+          <a:effectRef idx="2">
+            <a:schemeClr val="accent1"/>
+          </a:effectRef>
+          <a:fontRef idx="minor">
+            <a:schemeClr val="lt1"/>
+          </a:fontRef>
+        </p:style>
+        <p:txBody>
+          <a:bodyPr rtlCol="0" anchor="ctr"/>
+          <a:lstStyle/>
+          <a:p>
+            <a:pPr algn="ctr"/>
+          </a:p>
+        </p:txBody>
+      </p:sp>
+      <p:sp>
+        <p:nvSpPr>
+          <p:cNvPr id="3" name="TextBox 2"/>
+          <p:cNvSpPr txBox="1"/>
+          <p:nvPr/>
+        </p:nvSpPr>
+        <p:spPr>
+          <a:xfrm>
+            <a:off x="822960" y="640080"/>
+            <a:ext cx="10515600" cy="457200"/>
+          </a:xfrm>
+          <a:prstGeom prst="rect">
+            <a:avLst/>
+          </a:prstGeom>
+          <a:noFill/>
+        </p:spPr>
+        <p:txBody>
+          <a:bodyPr wrap="square">
+            <a:spAutoFit/>
+          </a:bodyPr>
+          <a:lstStyle/>
+          <a:p>
+            <a:r>
+              <a:rPr sz="1400" b="1" i="0">
+                <a:solidFill>
+                  <a:srgbClr val="CADCFC"/>
+                </a:solidFill>
+                <a:latin typeface="Montserrat"/>
+              </a:rPr>
+              <a:t>LO QUE YA DOMINAS</a:t>
+            </a:r>
+          </a:p>
+        </p:txBody>
+      </p:sp>
+      <p:sp>
+        <p:nvSpPr>
+          <p:cNvPr id="4" name="TextBox 3"/>
+          <p:cNvSpPr txBox="1"/>
+          <p:nvPr/>
+        </p:nvSpPr>
+        <p:spPr>
+          <a:xfrm>
+            <a:off x="822960" y="1143000"/>
+            <a:ext cx="10515600" cy="1097280"/>
+          </a:xfrm>
+          <a:prstGeom prst="rect">
+            <a:avLst/>
+          </a:prstGeom>
+          <a:noFill/>
+        </p:spPr>
+        <p:txBody>
+          <a:bodyPr wrap="square">
+            <a:spAutoFit/>
+          </a:bodyPr>
+          <a:lstStyle/>
+          <a:p>
+            <a:r>
+              <a:rPr sz="3400" b="1" i="0">
+                <a:solidFill>
+                  <a:srgbClr val="FFFFFF"/>
+                </a:solidFill>
+                <a:latin typeface="Montserrat"/>
+              </a:rPr>
+              <a:t>Has cerrado el almacenamiento de gas de punta a punta</a:t>
+            </a:r>
+          </a:p>
+        </p:txBody>
+      </p:sp>
+      <p:sp>
+        <p:nvSpPr>
+          <p:cNvPr id="5" name="TextBox 4"/>
+          <p:cNvSpPr txBox="1"/>
+          <p:nvPr/>
+        </p:nvSpPr>
+        <p:spPr>
+          <a:xfrm>
+            <a:off x="822960" y="2514600"/>
+            <a:ext cx="10515600" cy="2834640"/>
+          </a:xfrm>
+          <a:prstGeom prst="rect">
+            <a:avLst/>
+          </a:prstGeom>
+          <a:noFill/>
+        </p:spPr>
+        <p:txBody>
+          <a:bodyPr wrap="square">
+            <a:spAutoFit/>
+          </a:bodyPr>
+          <a:lstStyle/>
+          <a:p>
+            <a:pPr>
+              <a:spcAft>
+                <a:spcPts val="1200"/>
+              </a:spcAft>
+            </a:pPr>
+            <a:r>
               <a:rPr sz="2000" b="1" i="0">
                 <a:solidFill>
-                  <a:srgbClr val="2E3A80"/>
+                  <a:srgbClr val="CADCFC"/>
                 </a:solidFill>
                 <a:latin typeface="Montserrat"/>
               </a:rPr>
               <a:t>✓  </a:t>
             </a:r>
             <a:r>
-              <a:rPr sz="2000" b="0" i="0">
-                <a:solidFill>
-                  <a:srgbClr val="1B2330"/>
-                </a:solidFill>
-                <a:latin typeface="Montserrat"/>
-              </a:rPr>
-              <a:t>V×P: 300 · presión neumática · inertizar</a:t>
+              <a:rPr sz="1900" b="0" i="0">
+                <a:solidFill>
+                  <a:srgbClr val="FFFFFF"/>
+                </a:solidFill>
+                <a:latin typeface="Montserrat"/>
+              </a:rPr>
+              <a:t>Distingues GNL de GLP: norma, técnico y pruebas</a:t>
+            </a:r>
+          </a:p>
+          <a:p>
+            <a:pPr>
+              <a:spcAft>
+                <a:spcPts val="1200"/>
+              </a:spcAft>
+            </a:pPr>
+            <a:r>
+              <a:rPr sz="2000" b="1" i="0">
+                <a:solidFill>
+                  <a:srgbClr val="CADCFC"/>
+                </a:solidFill>
+                <a:latin typeface="Montserrat"/>
+              </a:rPr>
+              <a:t>✓  </a:t>
+            </a:r>
+            <a:r>
+              <a:rPr sz="1900" b="0" i="0">
+                <a:solidFill>
+                  <a:srgbClr val="FFFFFF"/>
+                </a:solidFill>
+                <a:latin typeface="Montserrat"/>
+              </a:rPr>
+              <a:t>Sabes cuándo hay autorización, proyecto y qué plazo comunicar</a:t>
+            </a:r>
+          </a:p>
+          <a:p>
+            <a:pPr>
+              <a:spcAft>
+                <a:spcPts val="1200"/>
+              </a:spcAft>
+            </a:pPr>
+            <a:r>
+              <a:rPr sz="2000" b="1" i="0">
+                <a:solidFill>
+                  <a:srgbClr val="CADCFC"/>
+                </a:solidFill>
+                <a:latin typeface="Montserrat"/>
+              </a:rPr>
+              <a:t>✓  </a:t>
+            </a:r>
+            <a:r>
+              <a:rPr sz="1900" b="0" i="0">
+                <a:solidFill>
+                  <a:srgbClr val="FFFFFF"/>
+                </a:solidFill>
+                <a:latin typeface="Montserrat"/>
+              </a:rPr>
+              <a:t>Aplicas la fórmula V × P y el corte en 300</a:t>
+            </a:r>
+          </a:p>
+          <a:p>
+            <a:pPr>
+              <a:spcAft>
+                <a:spcPts val="1200"/>
+              </a:spcAft>
+            </a:pPr>
+            <a:r>
+              <a:rPr sz="2000" b="1" i="0">
+                <a:solidFill>
+                  <a:srgbClr val="CADCFC"/>
+                </a:solidFill>
+                <a:latin typeface="Montserrat"/>
+              </a:rPr>
+              <a:t>✓  </a:t>
+            </a:r>
+            <a:r>
+              <a:rPr sz="1900" b="0" i="0">
+                <a:solidFill>
+                  <a:srgbClr val="FFFFFF"/>
+                </a:solidFill>
+                <a:latin typeface="Montserrat"/>
+              </a:rPr>
+              <a:t>Cierras el tema: envases, depósitos fijos y plantas de GNL</a:t>
+            </a:r>
+          </a:p>
+        </p:txBody>
+      </p:sp>
+      <p:sp>
+        <p:nvSpPr>
+          <p:cNvPr id="6" name="Rounded Rectangle 5"/>
+          <p:cNvSpPr/>
+          <p:nvPr/>
+        </p:nvSpPr>
+        <p:spPr>
+          <a:xfrm>
+            <a:off x="822960" y="5532120"/>
+            <a:ext cx="10515600" cy="777240"/>
+          </a:xfrm>
+          <a:prstGeom prst="roundRect">
+            <a:avLst/>
+          </a:prstGeom>
+          <a:solidFill>
+            <a:srgbClr val="2E3A80"/>
+          </a:solidFill>
+          <a:ln>
+            <a:noFill/>
+          </a:ln>
+          <a:effectLst/>
+        </p:spPr>
+        <p:style>
+          <a:lnRef idx="1">
+            <a:schemeClr val="accent1"/>
+          </a:lnRef>
+          <a:fillRef idx="3">
+            <a:schemeClr val="accent1"/>
+          </a:fillRef>
+          <a:effectRef idx="2">
+            <a:schemeClr val="accent1"/>
+          </a:effectRef>
+          <a:fontRef idx="minor">
+            <a:schemeClr val="lt1"/>
+          </a:fontRef>
+        </p:style>
+        <p:txBody>
+          <a:bodyPr rtlCol="0" anchor="ctr"/>
+          <a:lstStyle/>
+          <a:p>
+            <a:pPr algn="ctr"/>
+          </a:p>
+        </p:txBody>
+      </p:sp>
+      <p:sp>
+        <p:nvSpPr>
+          <p:cNvPr id="7" name="TextBox 6"/>
+          <p:cNvSpPr txBox="1"/>
+          <p:nvPr/>
+        </p:nvSpPr>
+        <p:spPr>
+          <a:xfrm>
+            <a:off x="1051560" y="5605272"/>
+            <a:ext cx="10058400" cy="640080"/>
+          </a:xfrm>
+          <a:prstGeom prst="rect">
+            <a:avLst/>
+          </a:prstGeom>
+          <a:noFill/>
+        </p:spPr>
+        <p:txBody>
+          <a:bodyPr wrap="square">
+            <a:spAutoFit/>
+          </a:bodyPr>
+          <a:lstStyle/>
+          <a:p>
+            <a:r>
+              <a:rPr sz="1500" b="1" i="1">
+                <a:solidFill>
+                  <a:srgbClr val="CADCFC"/>
+                </a:solidFill>
+                <a:latin typeface="Montserrat"/>
+              </a:rPr>
+              <a:t>Tema 02 completo. Ya dominas dónde y cómo se guarda el gas antes de llegar al usuario.</a:t>
             </a:r>
           </a:p>
         </p:txBody>
@@ -6673,7 +7267,7 @@
                 </a:solidFill>
                 <a:latin typeface="Montserrat"/>
               </a:rPr>
-              <a:t>002 / 014</a:t>
+              <a:t>002 / 015</a:t>
             </a:r>
           </a:p>
         </p:txBody>
@@ -6857,7 +7451,7 @@
                 </a:solidFill>
                 <a:latin typeface="Montserrat"/>
               </a:rPr>
-              <a:t>capacidad máxima de la planta</a:t>
+              <a:t>tope de una planta satélite</a:t>
             </a:r>
           </a:p>
         </p:txBody>
@@ -6938,7 +7532,7 @@
                 </a:solidFill>
                 <a:latin typeface="Montserrat"/>
               </a:rPr>
-              <a:t>5</a:t>
+              <a:t>300</a:t>
             </a:r>
           </a:p>
         </p:txBody>
@@ -6973,7 +7567,7 @@
                 </a:solidFill>
                 <a:latin typeface="Montserrat"/>
               </a:rPr>
-              <a:t>años entre controles periódicos</a:t>
+              <a:t>frontera de la fórmula V × P</a:t>
             </a:r>
           </a:p>
         </p:txBody>
@@ -7054,7 +7648,7 @@
                 </a:solidFill>
                 <a:latin typeface="Montserrat"/>
               </a:rPr>
-              <a:t>300</a:t>
+              <a:t>15 días</a:t>
             </a:r>
           </a:p>
         </p:txBody>
@@ -7089,7 +7683,7 @@
                 </a:solidFill>
                 <a:latin typeface="Montserrat"/>
               </a:rPr>
-              <a:t>umbral de la fórmula V × P</a:t>
+              <a:t>hábiles para comunicar</a:t>
             </a:r>
           </a:p>
         </p:txBody>
@@ -7186,7 +7780,7 @@
                 </a:solidFill>
                 <a:latin typeface="Montserrat"/>
               </a:rPr>
-              <a:t>003 / 014</a:t>
+              <a:t>003 / 015</a:t>
             </a:r>
           </a:p>
         </p:txBody>
@@ -7336,7 +7930,7 @@
                 </a:solidFill>
                 <a:latin typeface="Montserrat"/>
               </a:rPr>
-              <a:t>GNL = gas natural licuado</a:t>
+              <a:t>GNL: gas natural licuado, muy frío</a:t>
             </a:r>
           </a:p>
           <a:p>
@@ -7361,7 +7955,7 @@
                 </a:solidFill>
                 <a:latin typeface="Montserrat"/>
               </a:rPr>
-              <a:t>Enfriado a unos 160 °C bajo cero</a:t>
+              <a:t>Enfriado a unos -160 °C</a:t>
             </a:r>
           </a:p>
           <a:p>
@@ -7386,7 +7980,7 @@
                 </a:solidFill>
                 <a:latin typeface="Montserrat"/>
               </a:rPr>
-              <a:t>Depósito local que recibe y reparte</a:t>
+              <a:t>Un gasoducto de mentira</a:t>
             </a:r>
           </a:p>
           <a:p>
@@ -7411,14 +8005,14 @@
                 </a:solidFill>
                 <a:latin typeface="Montserrat"/>
               </a:rPr>
-              <a:t>Un gasoducto de mentira</a:t>
-            </a:r>
-          </a:p>
-        </p:txBody>
-      </p:sp>
-      <p:sp>
-        <p:nvSpPr>
-          <p:cNvPr id="8" name="imgph" descr="IMGQ:lng cryogenic tank industrial plant"/>
+              <a:t>El camión llena el depósito local</a:t>
+            </a:r>
+          </a:p>
+        </p:txBody>
+      </p:sp>
+      <p:sp>
+        <p:nvSpPr>
+          <p:cNvPr id="8" name="imgph" descr="IMGQ:LNG cryogenic storage tank plant"/>
           <p:cNvSpPr/>
           <p:nvPr/>
         </p:nvSpPr>
@@ -7504,7 +8098,7 @@
                 </a:solidFill>
                 <a:latin typeface="Montserrat"/>
               </a:rPr>
-              <a:t>lng cryogenic tank industrial plant</a:t>
+              <a:t>LNG cryogenic storage tank plant</a:t>
             </a:r>
           </a:p>
         </p:txBody>
@@ -7601,7 +8195,7 @@
                 </a:solidFill>
                 <a:latin typeface="Montserrat"/>
               </a:rPr>
-              <a:t>004 / 014</a:t>
+              <a:t>004 / 015</a:t>
             </a:r>
           </a:p>
         </p:txBody>
@@ -7703,7 +8297,7 @@
                 </a:solidFill>
                 <a:latin typeface="Montserrat"/>
               </a:rPr>
-              <a:t>El techo y el recambio</a:t>
+              <a:t>El techo: 1.000 m³</a:t>
             </a:r>
           </a:p>
         </p:txBody>
@@ -7751,7 +8345,7 @@
                 </a:solidFill>
                 <a:latin typeface="Montserrat"/>
               </a:rPr>
-              <a:t>Hasta 1.000 m³ de capacidad conjunta</a:t>
+              <a:t>Capacidad conjunta hasta 1.000 m³</a:t>
             </a:r>
           </a:p>
           <a:p>
@@ -7776,7 +8370,7 @@
                 </a:solidFill>
                 <a:latin typeface="Montserrat"/>
               </a:rPr>
-              <a:t>Cambio de categoría = como nueva</a:t>
+              <a:t>Recambio equivalente: ±10 %</a:t>
             </a:r>
           </a:p>
           <a:p>
@@ -7801,7 +8395,7 @@
                 </a:solidFill>
                 <a:latin typeface="Montserrat"/>
               </a:rPr>
-              <a:t>Recambio similar: ≤ ±10%</a:t>
+              <a:t>Aquí firma el director de obra</a:t>
             </a:r>
           </a:p>
           <a:p>
@@ -7826,14 +8420,14 @@
                 </a:solidFill>
                 <a:latin typeface="Montserrat"/>
               </a:rPr>
-              <a:t>Firma el director de obra</a:t>
-            </a:r>
-          </a:p>
-        </p:txBody>
-      </p:sp>
-      <p:sp>
-        <p:nvSpPr>
-          <p:cNvPr id="8" name="imgph" descr="IMGQ:lng storage tank facility fence"/>
+              <a:t>Mantenimiento: también a las existentes</a:t>
+            </a:r>
+          </a:p>
+        </p:txBody>
+      </p:sp>
+      <p:sp>
+        <p:nvSpPr>
+          <p:cNvPr id="8" name="imgph" descr="IMGQ:LNG tanker truck unloading plant"/>
           <p:cNvSpPr/>
           <p:nvPr/>
         </p:nvSpPr>
@@ -7919,7 +8513,7 @@
                 </a:solidFill>
                 <a:latin typeface="Montserrat"/>
               </a:rPr>
-              <a:t>lng storage tank facility fence</a:t>
+              <a:t>LNG tanker truck unloading plant</a:t>
             </a:r>
           </a:p>
         </p:txBody>
@@ -8016,7 +8610,7 @@
                 </a:solidFill>
                 <a:latin typeface="Montserrat"/>
               </a:rPr>
-              <a:t>005 / 014</a:t>
+              <a:t>005 / 015</a:t>
             </a:r>
           </a:p>
         </p:txBody>
@@ -8084,7 +8678,7 @@
                 </a:solidFill>
                 <a:latin typeface="Montserrat"/>
               </a:rPr>
-              <a:t>APARTADO 4 · DISEÑO</a:t>
+              <a:t>APARTADOS 3 Y 4 · NORMA</a:t>
             </a:r>
           </a:p>
         </p:txBody>
@@ -8118,7 +8712,7 @@
                 </a:solidFill>
                 <a:latin typeface="Montserrat"/>
               </a:rPr>
-              <a:t>Entra el especialista criogénico</a:t>
+              <a:t>UNE 60210 y el criogénico</a:t>
             </a:r>
           </a:p>
         </p:txBody>
@@ -8166,7 +8760,7 @@
                 </a:solidFill>
                 <a:latin typeface="Montserrat"/>
               </a:rPr>
-              <a:t>Montaje: empresa criogénica</a:t>
+              <a:t>Se clasifica según UNE 60210</a:t>
             </a:r>
           </a:p>
           <a:p>
@@ -8191,7 +8785,7 @@
                 </a:solidFill>
                 <a:latin typeface="Montserrat"/>
               </a:rPr>
-              <a:t>No vale un instalador de gas normal</a:t>
+              <a:t>Monta un especialista criogénico</a:t>
             </a:r>
           </a:p>
           <a:p>
@@ -8216,7 +8810,7 @@
                 </a:solidFill>
                 <a:latin typeface="Montserrat"/>
               </a:rPr>
-              <a:t>Referencia: UNE 60210</a:t>
+              <a:t>No vale un instalador de gas normal</a:t>
             </a:r>
           </a:p>
           <a:p>
@@ -8241,14 +8835,14 @@
                 </a:solidFill>
                 <a:latin typeface="Montserrat"/>
               </a:rPr>
-              <a:t>Equipos a presión: RD 769/1999</a:t>
-            </a:r>
-          </a:p>
-        </p:txBody>
-      </p:sp>
-      <p:sp>
-        <p:nvSpPr>
-          <p:cNvPr id="8" name="imgph" descr="IMGQ:worker cryogenic insulated pipe valve"/>
+              <a:t>GNL → UNE 60210 → criogénico</a:t>
+            </a:r>
+          </a:p>
+        </p:txBody>
+      </p:sp>
+      <p:sp>
+        <p:nvSpPr>
+          <p:cNvPr id="8" name="imgph" descr="IMGQ:cryogenic pipes valves industrial"/>
           <p:cNvSpPr/>
           <p:nvPr/>
         </p:nvSpPr>
@@ -8334,7 +8928,7 @@
                 </a:solidFill>
                 <a:latin typeface="Montserrat"/>
               </a:rPr>
-              <a:t>worker cryogenic insulated pipe valve</a:t>
+              <a:t>cryogenic pipes valves industrial</a:t>
             </a:r>
           </a:p>
         </p:txBody>
@@ -8431,7 +9025,7 @@
                 </a:solidFill>
                 <a:latin typeface="Montserrat"/>
               </a:rPr>
-              <a:t>006 / 014</a:t>
+              <a:t>006 / 015</a:t>
             </a:r>
           </a:p>
         </p:txBody>
@@ -8581,7 +9175,7 @@
                 </a:solidFill>
                 <a:latin typeface="Montserrat"/>
               </a:rPr>
-              <a:t>Autorización administrativa previa</a:t>
+              <a:t>Autorización previa a construir</a:t>
             </a:r>
           </a:p>
           <a:p>
@@ -8606,7 +9200,7 @@
                 </a:solidFill>
                 <a:latin typeface="Montserrat"/>
               </a:rPr>
-              <a:t>Salvo uso propio y exclusivo</a:t>
+              <a:t>La otorga la Comunidad Autónoma</a:t>
             </a:r>
           </a:p>
           <a:p>
@@ -8631,7 +9225,7 @@
                 </a:solidFill>
                 <a:latin typeface="Montserrat"/>
               </a:rPr>
-              <a:t>Solicitud en modelo oficial</a:t>
+              <a:t>Excepción: uso propio y exclusivo</a:t>
             </a:r>
           </a:p>
           <a:p>
@@ -8656,14 +9250,14 @@
                 </a:solidFill>
                 <a:latin typeface="Montserrat"/>
               </a:rPr>
-              <a:t>La otorga la Comunidad Autónoma</a:t>
-            </a:r>
-          </a:p>
-        </p:txBody>
-      </p:sp>
-      <p:sp>
-        <p:nvSpPr>
-          <p:cNvPr id="8" name="imgph" descr="IMGQ:government office stamp application"/>
+              <a:t>Se solicita con proyecto y modelo oficial</a:t>
+            </a:r>
+          </a:p>
+        </p:txBody>
+      </p:sp>
+      <p:sp>
+        <p:nvSpPr>
+          <p:cNvPr id="8" name="imgph" descr="IMGQ:government permit stamp document"/>
           <p:cNvSpPr/>
           <p:nvPr/>
         </p:nvSpPr>
@@ -8749,7 +9343,7 @@
                 </a:solidFill>
                 <a:latin typeface="Montserrat"/>
               </a:rPr>
-              <a:t>government office stamp application</a:t>
+              <a:t>government permit stamp document</a:t>
             </a:r>
           </a:p>
         </p:txBody>
@@ -8846,7 +9440,7 @@
                 </a:solidFill>
                 <a:latin typeface="Montserrat"/>
               </a:rPr>
-              <a:t>007 / 014</a:t>
+              <a:t>007 / 015</a:t>
             </a:r>
           </a:p>
         </p:txBody>
@@ -8996,7 +9590,7 @@
                 </a:solidFill>
                 <a:latin typeface="Montserrat"/>
               </a:rPr>
-              <a:t>Proyecto de técnico competente</a:t>
+              <a:t>Toda planta de GNL exige proyecto</a:t>
             </a:r>
           </a:p>
           <a:p>
@@ -9021,7 +9615,7 @@
                 </a:solidFill>
                 <a:latin typeface="Montserrat"/>
               </a:rPr>
-              <a:t>Nada de memoria técnica aquí</a:t>
+              <a:t>Lo firma técnico facultativo competente</a:t>
             </a:r>
           </a:p>
           <a:p>
@@ -9046,7 +9640,7 @@
                 </a:solidFill>
                 <a:latin typeface="Montserrat"/>
               </a:rPr>
-              <a:t>Obra civil, cálculos, planos</a:t>
+              <a:t>Nada de memoria técnica</a:t>
             </a:r>
           </a:p>
           <a:p>
@@ -9078,7 +9672,7 @@
       </p:sp>
       <p:sp>
         <p:nvSpPr>
-          <p:cNvPr id="8" name="imgph" descr="IMGQ:engineer safety plan documents desk"/>
+          <p:cNvPr id="8" name="imgph" descr="IMGQ:safety emergency plan engineering documents"/>
           <p:cNvSpPr/>
           <p:nvPr/>
         </p:nvSpPr>
@@ -9164,7 +9758,7 @@
                 </a:solidFill>
                 <a:latin typeface="Montserrat"/>
               </a:rPr>
-              <a:t>engineer safety plan documents desk</a:t>
+              <a:t>safety emergency plan engineering documents</a:t>
             </a:r>
           </a:p>
         </p:txBody>
@@ -9261,7 +9855,7 @@
                 </a:solidFill>
                 <a:latin typeface="Montserrat"/>
               </a:rPr>
-              <a:t>008 / 014</a:t>
+              <a:t>008 / 015</a:t>
             </a:r>
           </a:p>
         </p:txBody>
@@ -9329,7 +9923,7 @@
                 </a:solidFill>
                 <a:latin typeface="Montserrat"/>
               </a:rPr>
-              <a:t>APARTADO 5.3–5.5 · CERTIFICADOS</a:t>
+              <a:t>APARTADOS 5.3 Y 5.4 · CERTIFICADOS</a:t>
             </a:r>
           </a:p>
         </p:txBody>
@@ -9411,7 +10005,7 @@
                 </a:solidFill>
                 <a:latin typeface="Montserrat"/>
               </a:rPr>
-              <a:t>Pruebas en obra del organismo</a:t>
+              <a:t>Pruebas en obra: organismo de control</a:t>
             </a:r>
           </a:p>
           <a:p>
@@ -9486,14 +10080,14 @@
                 </a:solidFill>
                 <a:latin typeface="Montserrat"/>
               </a:rPr>
-              <a:t>Sin certificado de instalación</a:t>
-            </a:r>
-          </a:p>
-        </p:txBody>
-      </p:sp>
-      <p:sp>
-        <p:nvSpPr>
-          <p:cNvPr id="8" name="imgph" descr="IMGQ:inspector checking industrial equipment"/>
+              <a:t>Aquí no hay certificado de instalación</a:t>
+            </a:r>
+          </a:p>
+        </p:txBody>
+      </p:sp>
+      <p:sp>
+        <p:nvSpPr>
+          <p:cNvPr id="8" name="imgph" descr="IMGQ:inspector signing certificate site"/>
           <p:cNvSpPr/>
           <p:nvPr/>
         </p:nvSpPr>
@@ -9579,7 +10173,7 @@
                 </a:solidFill>
                 <a:latin typeface="Montserrat"/>
               </a:rPr>
-              <a:t>inspector checking industrial equipment</a:t>
+              <a:t>inspector signing certificate site</a:t>
             </a:r>
           </a:p>
         </p:txBody>
@@ -9676,7 +10270,7 @@
                 </a:solidFill>
                 <a:latin typeface="Montserrat"/>
               </a:rPr>
-              <a:t>009 / 014</a:t>
+              <a:t>009 / 015</a:t>
             </a:r>
           </a:p>
         </p:txBody>
@@ -9744,7 +10338,7 @@
                 </a:solidFill>
                 <a:latin typeface="Montserrat"/>
               </a:rPr>
-              <a:t>APARTADO 5.6 · COMUNICACIÓN</a:t>
+              <a:t>APARTADOS 5.5 Y 5.6 · COMUNICACIÓN</a:t>
             </a:r>
           </a:p>
         </p:txBody>
@@ -9778,7 +10372,7 @@
                 </a:solidFill>
                 <a:latin typeface="Montserrat"/>
               </a:rPr>
-              <a:t>15 días hábiles</a:t>
+              <a:t>15 días hábiles, no naturales</a:t>
             </a:r>
           </a:p>
         </p:txBody>
@@ -9826,7 +10420,7 @@
                 </a:solidFill>
                 <a:latin typeface="Montserrat"/>
               </a:rPr>
-              <a:t>Tras la puesta en servicio</a:t>
+              <a:t>Con los dos certificados: primer llenado</a:t>
             </a:r>
           </a:p>
           <a:p>
@@ -9851,7 +10445,7 @@
                 </a:solidFill>
                 <a:latin typeface="Montserrat"/>
               </a:rPr>
-              <a:t>Plazo: 15 días hábiles</a:t>
+              <a:t>Comunicar en 15 días hábiles</a:t>
             </a:r>
           </a:p>
           <a:p>
@@ -9876,7 +10470,7 @@
                 </a:solidFill>
                 <a:latin typeface="Montserrat"/>
               </a:rPr>
-              <a:t>Proyecto y certificados</a:t>
+              <a:t>Por duplicado a la Comunidad Autónoma</a:t>
             </a:r>
           </a:p>
           <a:p>
@@ -9908,7 +10502,7 @@
       </p:sp>
       <p:sp>
         <p:nvSpPr>
-          <p:cNvPr id="8" name="imgph" descr="IMGQ:calendar deadline office desk"/>
+          <p:cNvPr id="8" name="imgph" descr="IMGQ:calendar deadline paperwork desk"/>
           <p:cNvSpPr/>
           <p:nvPr/>
         </p:nvSpPr>
@@ -9994,7 +10588,7 @@
                 </a:solidFill>
                 <a:latin typeface="Montserrat"/>
               </a:rPr>
-              <a:t>calendar deadline office desk</a:t>
+              <a:t>calendar deadline paperwork desk</a:t>
             </a:r>
           </a:p>
         </p:txBody>

--- a/Curso Gas B/02 - ITC-ICG 02-03-04 - Almacenamiento GLP y plantas GNL/02 - ITC-ICG 02-03-04 - Almacenamiento GLP y plantas GNL - Vídeo 4.pptx
+++ b/Curso Gas B/02 - ITC-ICG 02-03-04 - Almacenamiento GLP y plantas GNL/02 - ITC-ICG 02-03-04 - Almacenamiento GLP y plantas GNL - Vídeo 4.pptx
@@ -20,6 +20,7 @@
     <p:sldId id="268" r:id="rId20"/>
     <p:sldId id="269" r:id="rId21"/>
     <p:sldId id="270" r:id="rId22"/>
+    <p:sldId id="271" r:id="rId23"/>
   </p:sldIdLst>
   <p:sldSz cx="12191695" cy="6858000" type="screen4x3"/>
   <p:notesSz cx="6858000" cy="9144000"/>
@@ -591,12 +592,12 @@
           <a:lstStyle/>
           <a:p>
             <a:r>
-              <a:t>N1: El mantenimiento, ¿es muy distinto del depósito de GLP?</a:t>
-            </a:r>
-          </a:p>
-          <a:p>
-            <a:r>
-              <a:t>N2: Casi calcado, y eso es una buena noticia: si dominaste el mantenimiento del vídeo tres, este lo tienes medio ganado. El titular es el responsable de que la instalación esté siempre en disposición de servicio, y para ello hace falta un contrato de mantenimiento con servicio de urgencias permanente, un Libro de Mantenimiento o archivo documental donde consta cada visita, y existe la posible exención del contrato si el titular acredita capacidad y medios propios. ¿Qué cambia de fondo? Dos cosas que ya conoces: quien firma el mantenimiento es el especialista criogénico, no una instaladora de gas normal, y la norma de referencia es la UNE sesenta mil doscientos diez. Mismo esqueleto, distintos protagonistas.</a:t>
+              <a:t>N1: Una vez en marcha, ¿cuándo aviso a la Administración?</a:t>
+            </a:r>
+          </a:p>
+          <a:p>
+            <a:r>
+              <a:t>N2: Con los dos certificados expedidos, la planta está en disposición de servicio y el titular llama al suministrador para el primer llenado de los depósitos de GNL; antes verifica que la documentación está completa. Y después de la puesta en servicio hay que comunicarla, con un plazo que cae en examen: quince días hábiles, presentando por duplicado ante la Comunidad Autónoma el proyecto, los dos certificados, la documentación de los recipientes a presión y la fecha de puesta en servicio. Mucho cuidado aquí: son quince días hábiles, que no cuentan domingos ni festivos, y no hay que confundirlos con los treinta días genéricos del articulado del Reglamento para instalaciones receptoras. Cada instalación tiene su plazo; en el GNL, quince hábiles.</a:t>
             </a:r>
           </a:p>
         </p:txBody>
@@ -666,12 +667,12 @@
           <a:lstStyle/>
           <a:p>
             <a:r>
-              <a:t>N1: ¿Cada cuánto se controla la planta y quién puede hacerlo?</a:t>
-            </a:r>
-          </a:p>
-          <a:p>
-            <a:r>
-              <a:t>N2: El control periódico general es cada cinco años, con las pruebas y verificaciones de la norma. Y quién puede realizarlo depende de una fórmula muy sencilla, uve por pe: multiplicas el volumen geométrico en metros cúbicos por la presión máxima de trabajo en bares. Si el resultado es trescientos o menos, el control lo puede hacer gente de la casa: el especialista criogénico, el servicio de mantenimiento del propio usuario, o un organismo de control. Pero si el resultado pasa de trescientos, entonces tiene que venir sí o sí un organismo de control independiente. La lógica: cuanto más grande y más presión, más ojos externos exige. Retén el número trescientos, y que el resultado del control va en un certificado por cuadriplicado: usuario, titular, órgano competente y el propio agente.</a:t>
+              <a:t>N1: El mantenimiento, ¿es muy distinto del depósito de GLP?</a:t>
+            </a:r>
+          </a:p>
+          <a:p>
+            <a:r>
+              <a:t>N2: Casi calcado, y eso es una buena noticia: si dominaste el mantenimiento del vídeo tres, este lo tienes medio ganado. El titular es el responsable de que la instalación esté siempre en disposición de servicio, y para ello hace falta un contrato de mantenimiento con servicio de urgencias permanente, un Libro de Mantenimiento o archivo documental donde consta cada visita, y existe la posible exención del contrato si el titular acredita capacidad y medios propios. ¿Qué cambia de fondo? Dos cosas que ya conoces: quien firma el mantenimiento es el especialista criogénico, no una instaladora de gas normal, y la norma de referencia es la UNE sesenta mil doscientos diez. Mismo esqueleto, distintos protagonistas.</a:t>
             </a:r>
           </a:p>
         </p:txBody>
@@ -741,12 +742,12 @@
           <a:lstStyle/>
           <a:p>
             <a:r>
-              <a:t>N1: La prueba de presión de los quince años, ¿es igual que la del GLP?</a:t>
-            </a:r>
-          </a:p>
-          <a:p>
-            <a:r>
-              <a:t>N2: No, y esta diferencia es de las que más caen. En el GNL, la prueba de presión de cada quince años es neumática, es decir, se hace con aire o gas a presión, no con agua. La realiza un organismo de control asistido por un especialista criogénico, que emite un acta de pruebas al terminar con éxito. ¿Por qué neumática y no hidráulica? Porque meter agua en un depósito criogénico sería introducir humedad, y esa humedad se congelaría y estropearía la instalación. Compara y no lo mezcles: en el depósito de GLP del vídeo anterior la prueba de los quince años era hidráulica, con agua; aquí, en el GNL frío, es neumática, con gas. Confundir hidráulica con neumática es el error clásico, en el examen y en la obra.</a:t>
+              <a:t>N1: ¿Cada cuánto se controla la planta y quién puede hacerlo?</a:t>
+            </a:r>
+          </a:p>
+          <a:p>
+            <a:r>
+              <a:t>N2: El control periódico general es cada cinco años, con las pruebas y verificaciones de la norma. Y quién puede realizarlo depende de una fórmula muy sencilla, uve por pe: multiplicas el volumen geométrico en metros cúbicos por la presión máxima de trabajo en bares. Si el resultado es trescientos o menos, el control lo puede hacer gente de la casa: el especialista criogénico, el servicio de mantenimiento del propio usuario, o un organismo de control. Pero si el resultado pasa de trescientos, entonces tiene que venir sí o sí un organismo de control independiente. La lógica: cuanto más grande y más presión, más ojos externos exige. Retén el número trescientos, y que el resultado del control va en un certificado por cuadriplicado: usuario, titular, órgano competente y el propio agente.</a:t>
             </a:r>
           </a:p>
         </p:txBody>
@@ -816,12 +817,12 @@
           <a:lstStyle/>
           <a:p>
             <a:r>
-              <a:t>N1: Y cuando la planta deja de usarse, ¿misma historia que el depósito de GLP?</a:t>
-            </a:r>
-          </a:p>
-          <a:p>
-            <a:r>
-              <a:t>N2: Misma filosofía de seguridad, sí. Si la planta pasa un año entero sin recibir ninguna carga de GNL, el titular tiene que inertizarla: llenarla de nitrógeno u otro gas inerte para que dentro no quede una atmósfera inflamable. Ese inertizado lo hace la empresa de mantenimiento y lo supervisa y certifica un organismo de control. Y aquí va la frase de oro para el examen: bajo ningún concepto se desmonta una planta ni ninguno de sus depósitos sin haberlos inertizado antes. Es exactamente la misma idea que viste en el depósito de GLP del vídeo tres: un depósito vacío de gas inflamable sigue siendo peligroso hasta que lo neutralizas de verdad. En caso de cese, el distribuidor presenta la resolución de retirada y el titular se ocupa del desmontaje.</a:t>
+              <a:t>N1: La prueba de presión de los quince años, ¿es igual que la del GLP?</a:t>
+            </a:r>
+          </a:p>
+          <a:p>
+            <a:r>
+              <a:t>N2: No, y esta diferencia es de las que más caen. En el GNL, la prueba de presión de cada quince años es neumática, es decir, se hace con aire o gas a presión, no con agua. La realiza un organismo de control asistido por un especialista criogénico, que emite un acta de pruebas al terminar con éxito. ¿Por qué neumática y no hidráulica? Porque meter agua en un depósito criogénico sería introducir humedad, y esa humedad se congelaría y estropearía la instalación. Compara y no lo mezcles: en el depósito de GLP del vídeo anterior la prueba de los quince años era hidráulica, con agua; aquí, en el GNL frío, es neumática, con gas. Confundir hidráulica con neumática es el error clásico, en el examen y en la obra.</a:t>
             </a:r>
           </a:p>
         </p:txBody>
@@ -891,12 +892,12 @@
           <a:lstStyle/>
           <a:p>
             <a:r>
-              <a:t>N1: Antes de cerrar, resúmeme el GNL frente al GLP para no mezclarlos.</a:t>
-            </a:r>
-          </a:p>
-          <a:p>
-            <a:r>
-              <a:t>N2: Cinco líneas y los separas para siempre. Una: GNL va con la norma UNE sesenta mil doscientos diez y con el especialista criogénico, frente al GLP que iba con la sesenta mil doscientos cincuenta y la empresa instaladora. Dos: el GNL necesita autorización previa casi siempre, salvo uso propio y exclusivo, mientras que el centro de envases nunca la necesitaba. Tres: en GNL siempre hay proyecto, con el extra de los planes de emergencia. Cuatro: los controles son cada cinco años, y la fórmula uve por pe con la frontera en trescientos decide quién los hace. Y cinco: la prueba de presión de los quince años es neumática, con gas, no hidráulica, para no meter humedad en el frío. Con esas cinco líneas tienes el vídeo y la diferencia clave del tema.</a:t>
+              <a:t>N1: Y cuando la planta deja de usarse, ¿misma historia que el depósito de GLP?</a:t>
+            </a:r>
+          </a:p>
+          <a:p>
+            <a:r>
+              <a:t>N2: Misma filosofía de seguridad, sí. Si la planta pasa un año entero sin recibir ninguna carga de GNL, el titular tiene que inertizarla: llenarla de nitrógeno u otro gas inerte para que dentro no quede una atmósfera inflamable. Ese inertizado lo hace la empresa de mantenimiento y lo supervisa y certifica un organismo de control. Y aquí va la frase de oro para el examen: bajo ningún concepto se desmonta una planta ni ninguno de sus depósitos sin haberlos inertizado antes. Es exactamente la misma idea que viste en el depósito de GLP del vídeo tres: un depósito vacío de gas inflamable sigue siendo peligroso hasta que lo neutralizas de verdad. En caso de cese, el distribuidor presenta la resolución de retirada y el titular se ocupa del desmontaje.</a:t>
             </a:r>
           </a:p>
         </p:txBody>
@@ -966,6 +967,81 @@
           <a:lstStyle/>
           <a:p>
             <a:r>
+              <a:t>N1: Antes de cerrar, resúmeme el GNL frente al GLP para no mezclarlos.</a:t>
+            </a:r>
+          </a:p>
+          <a:p>
+            <a:r>
+              <a:t>N2: Cinco líneas y los separas para siempre. Una: GNL va con la norma UNE sesenta mil doscientos diez y con el especialista criogénico, frente al GLP que iba con la sesenta mil doscientos cincuenta y la empresa instaladora. Dos: el GNL necesita autorización previa casi siempre, salvo uso propio y exclusivo, mientras que el centro de envases nunca la necesitaba. Tres: en GNL siempre hay proyecto, con el extra de los planes de emergencia. Cuatro: los controles son cada cinco años, y la fórmula uve por pe con la frontera en trescientos decide quién los hace. Y cinco: la prueba de presión de los quince años es neumática, con gas, no hidráulica, para no meter humedad en el frío. Con esas cinco líneas tienes el vídeo y la diferencia clave del tema.</a:t>
+            </a:r>
+          </a:p>
+        </p:txBody>
+      </p:sp>
+      <p:sp>
+        <p:nvSpPr>
+          <p:cNvPr id="4" name="Slide Number Placeholder 3"/>
+          <p:cNvSpPr>
+            <a:spLocks noGrp="1"/>
+          </p:cNvSpPr>
+          <p:nvPr>
+            <p:ph type="sldNum" idx="5" sz="quarter"/>
+          </p:nvPr>
+        </p:nvSpPr>
+        <p:spPr/>
+      </p:sp>
+    </p:spTree>
+  </p:cSld>
+  <p:clrMapOvr>
+    <a:masterClrMapping/>
+  </p:clrMapOvr>
+</p:notes>
+</file>
+
+<file path=ppt/notesSlides/notesSlide16.xml><?xml version="1.0" encoding="utf-8"?>
+<p:notes xmlns:a="http://schemas.openxmlformats.org/drawingml/2006/main" xmlns:p="http://schemas.openxmlformats.org/presentationml/2006/main" xmlns:r="http://schemas.openxmlformats.org/officeDocument/2006/relationships">
+  <p:cSld>
+    <p:spTree>
+      <p:nvGrpSpPr>
+        <p:cNvPr id="1" name=""/>
+        <p:cNvGrpSpPr/>
+        <p:nvPr/>
+      </p:nvGrpSpPr>
+      <p:grpSpPr>
+        <a:xfrm>
+          <a:off x="0" y="0"/>
+          <a:ext cx="0" cy="0"/>
+          <a:chOff x="0" y="0"/>
+          <a:chExt cx="0" cy="0"/>
+        </a:xfrm>
+      </p:grpSpPr>
+      <p:sp>
+        <p:nvSpPr>
+          <p:cNvPr id="2" name="Slide Image Placeholder 1"/>
+          <p:cNvSpPr>
+            <a:spLocks noGrp="1"/>
+          </p:cNvSpPr>
+          <p:nvPr>
+            <p:ph type="sldImg" idx="2"/>
+          </p:nvPr>
+        </p:nvSpPr>
+        <p:spPr/>
+      </p:sp>
+      <p:sp>
+        <p:nvSpPr>
+          <p:cNvPr id="3" name="Notes Placeholder 2"/>
+          <p:cNvSpPr>
+            <a:spLocks noGrp="1"/>
+          </p:cNvSpPr>
+          <p:nvPr>
+            <p:ph type="body" idx="3" sz="quarter"/>
+          </p:nvPr>
+        </p:nvSpPr>
+        <p:spPr/>
+        <p:txBody>
+          <a:bodyPr/>
+          <a:lstStyle/>
+          <a:p>
+            <a:r>
               <a:t>N1: Cerramos el vídeo y el tema entero. ¿Qué me llevo de las plantas de GNL?</a:t>
             </a:r>
           </a:p>
@@ -1124,16 +1200,7 @@
         <p:txBody>
           <a:bodyPr/>
           <a:lstStyle/>
-          <a:p>
-            <a:r>
-              <a:t>N1: Antes de nada, ¿qué es exactamente una planta satélite de GNL?</a:t>
-            </a:r>
-          </a:p>
-          <a:p>
-            <a:r>
-              <a:t>N2: Vamos por partes. GNL significa gas natural licuado: es el mismo gas natural que llega a las ciudades, pero enfriado a unos ciento sesenta grados bajo cero hasta convertirlo en líquido. Al licuarlo, su volumen se reduce muchísimo, y eso permite transportarlo en cisterna a sitios donde no hay gasoducto. La planta satélite es el depósito local que recibe ese GNL, lo vuelve a convertir en gas y lo reparte por la zona. La imagen que mejor lo explica: es un gasoducto de mentira. Donde no llega la tubería, llega el camión, llena el depósito, y de ahí sale el gas como si hubiera red. Esta ITC fija los requisitos y la seguridad para diseñarla, construirla, probarla, instalarla y usarla.</a:t>
-            </a:r>
-          </a:p>
+          <a:p/>
         </p:txBody>
       </p:sp>
       <p:sp>
@@ -1201,12 +1268,12 @@
           <a:lstStyle/>
           <a:p>
             <a:r>
-              <a:t>N1: ¿Hasta qué tamaño llega esta instrucción?</a:t>
-            </a:r>
-          </a:p>
-          <a:p>
-            <a:r>
-              <a:t>N2: El límite es mil metros cúbicos de capacidad geométrica conjunta de almacenamiento. Por encima de eso ya no es una planta satélite a estos efectos, sino una instalación mayor con otras reglas. Igual que en los depósitos de GLP, se considera modificación la que hace cambiar de categoría, y hay un recambio equivalente: si sustituyes un depósito por otro de características similares, con diferencia de volumen no superior al diez por ciento, sin cambiar la clasificación ni las distancias, no hace falta proyecto nuevo. Pero ojo a un matiz que el examen adora cruzar: aquí la memoria justificativa la firma el director de obra, mientras que en los depósitos fijos de GLP la firmaba la empresa instaladora. Y las reglas de mantenimiento se aplican tanto a las plantas nuevas como a las existentes.</a:t>
+              <a:t>N1: Antes de nada, ¿qué es exactamente una planta satélite de GNL?</a:t>
+            </a:r>
+          </a:p>
+          <a:p>
+            <a:r>
+              <a:t>N2: Vamos por partes. GNL significa gas natural licuado: es el mismo gas natural que llega a las ciudades, pero enfriado a unos ciento sesenta grados bajo cero hasta convertirlo en líquido. Al licuarlo, su volumen se reduce muchísimo, y eso permite transportarlo en cisterna a sitios donde no hay gasoducto. La planta satélite es el depósito local que recibe ese GNL, lo vuelve a convertir en gas y lo reparte por la zona. La imagen que mejor lo explica: es un gasoducto de mentira. Donde no llega la tubería, llega el camión, llena el depósito, y de ahí sale el gas como si hubiera red. Esta ITC fija los requisitos y la seguridad para diseñarla, construirla, probarla, instalarla y usarla.</a:t>
             </a:r>
           </a:p>
         </p:txBody>
@@ -1276,12 +1343,12 @@
           <a:lstStyle/>
           <a:p>
             <a:r>
-              <a:t>N1: ¿Por qué no puede montar esto el mismo instalador que hace los depósitos de GLP?</a:t>
-            </a:r>
-          </a:p>
-          <a:p>
-            <a:r>
-              <a:t>N2: Por el frío. El GNL está a unos ciento sesenta grados bajo cero, es criogénico, y trabajarlo exige formación y materiales específicos: un material normal se volvería frágil como el cristal a esa temperatura. Por eso el montaje y el mantenimiento no los hace una empresa instaladora de gas corriente, sino una empresa especializada en trabajos criogénicos y equipos a presión, el especialista criogénico. Y la clasificación de la planta se hace según la norma UNE sesenta mil doscientos diez. Grábate la cadena entera para no confundirla con el GLP: GNL, norma UNE sesenta mil doscientos diez, especialista criogénico. Compárala con el depósito de GLP del vídeo anterior: allí era UNE sesenta mil doscientos cincuenta y empresa instaladora de gas.</a:t>
+              <a:t>N1: ¿Hasta qué tamaño llega esta instrucción?</a:t>
+            </a:r>
+          </a:p>
+          <a:p>
+            <a:r>
+              <a:t>N2: El límite es mil metros cúbicos de capacidad geométrica conjunta de almacenamiento. Por encima de eso ya no es una planta satélite a estos efectos, sino una instalación mayor con otras reglas. Igual que en los depósitos de GLP, se considera modificación la que hace cambiar de categoría, y hay un recambio equivalente: si sustituyes un depósito por otro de características similares, con diferencia de volumen no superior al diez por ciento, sin cambiar la clasificación ni las distancias, no hace falta proyecto nuevo. Pero ojo a un matiz que el examen adora cruzar: aquí la memoria justificativa la firma el director de obra, mientras que en los depósitos fijos de GLP la firmaba la empresa instaladora. Y las reglas de mantenimiento se aplican tanto a las plantas nuevas como a las existentes.</a:t>
             </a:r>
           </a:p>
         </p:txBody>
@@ -1351,12 +1418,12 @@
           <a:lstStyle/>
           <a:p>
             <a:r>
-              <a:t>N1: ¿Esta planta necesita permiso antes de construirla?</a:t>
-            </a:r>
-          </a:p>
-          <a:p>
-            <a:r>
-              <a:t>N2: Sí, y aquí está una de las grandes diferencias del tema. Repasa la escala: los centros de envases nunca necesitan autorización; los depósitos de GLP, solo si dan gas a terceros por una red; y la planta de GNL sí requiere autorización administrativa previa a su construcción como regla general, otorgada por el órgano competente de la Comunidad Autónoma. La única excepción es que la planta sea para uso propio y exclusivo de un usuario, por ejemplo una fábrica que se autoabastece. Regla para clavarlo: GNL, pide permiso antes, salvo autoconsumo exclusivo. Para solicitarla se presenta el proyecto con el modelo oficial, y te devuelven un ejemplar diligenciado con la fecha de entrada.</a:t>
+              <a:t>N1: ¿Por qué no puede montar esto el mismo instalador que hace los depósitos de GLP?</a:t>
+            </a:r>
+          </a:p>
+          <a:p>
+            <a:r>
+              <a:t>N2: Por el frío. El GNL está a unos ciento sesenta grados bajo cero, es criogénico, y trabajarlo exige formación y materiales específicos: un material normal se volvería frágil como el cristal a esa temperatura. Por eso el montaje y el mantenimiento no los hace una empresa instaladora de gas corriente, sino una empresa especializada en trabajos criogénicos y equipos a presión, el especialista criogénico. Y la clasificación de la planta se hace según la norma UNE sesenta mil doscientos diez. Grábate la cadena entera para no confundirla con el GLP: GNL, norma UNE sesenta mil doscientos diez, especialista criogénico. Compárala con el depósito de GLP del vídeo anterior: allí era UNE sesenta mil doscientos cincuenta y empresa instaladora de gas.</a:t>
             </a:r>
           </a:p>
         </p:txBody>
@@ -1426,12 +1493,12 @@
           <a:lstStyle/>
           <a:p>
             <a:r>
-              <a:t>N1: ¿Y aquí también vale una memoria técnica como en el GLP pequeño?</a:t>
-            </a:r>
-          </a:p>
-          <a:p>
-            <a:r>
-              <a:t>N2: No, y esto es tajante. En el GNL no hay memoria que valga: toda planta satélite exige proyecto elaborado por técnico facultativo competente. La razón es que el GNL se maneja en instalaciones más serias y con más riesgo, así que el papeleo sube de nivel. El proyecto lleva lo habitual, objeto, ubicación, cálculos, obra civil, montaje y pruebas, presupuesto, pliego y planos, pero fíjate en el extra que no aparecía en el GLP: la documentación de seguridad y los planes de emergencia frente a accidentes graves. Ese añadido de los planes de emergencia es la pista de que estamos en una instalación de categoría superior. Idea de fondo: GNL, siempre proyecto, y con planes de emergencia.</a:t>
+              <a:t>N1: ¿Esta planta necesita permiso antes de construirla?</a:t>
+            </a:r>
+          </a:p>
+          <a:p>
+            <a:r>
+              <a:t>N2: Sí, y aquí está una de las grandes diferencias del tema. Repasa la escala: los centros de envases nunca necesitan autorización; los depósitos de GLP, solo si dan gas a terceros por una red; y la planta de GNL sí requiere autorización administrativa previa a su construcción como regla general, otorgada por el órgano competente de la Comunidad Autónoma. La única excepción es que la planta sea para uso propio y exclusivo de un usuario, por ejemplo una fábrica que se autoabastece. Regla para clavarlo: GNL, pide permiso antes, salvo autoconsumo exclusivo. Para solicitarla se presenta el proyecto con el modelo oficial, y te devuelven un ejemplar diligenciado con la fecha de entrada.</a:t>
             </a:r>
           </a:p>
         </p:txBody>
@@ -1501,12 +1568,12 @@
           <a:lstStyle/>
           <a:p>
             <a:r>
-              <a:t>N1: ¿Qué certificados hacen falta aquí para quedar en disposición de servicio?</a:t>
-            </a:r>
-          </a:p>
-          <a:p>
-            <a:r>
-              <a:t>N2: Antes de nada, el organismo de control, asistido por la empresa de montaje y el director de obra, hace las pruebas en obra de la norma para comprobar resistencia y estanquidad. Y luego, la puesta en servicio se apoya en solo dos papeles. Uno: el certificado de dirección de obra, que firma el director de obra, con la lista de componentes y la justificación de homologaciones como anexo. Dos: el certificado de inspección, que emite el organismo de control. Con esos dos, la instalación queda en disposición de servicio. Fíjate en lo que falta respecto al GLP: aquí no hay certificado de instalación de empresa instaladora, porque siempre hay proyecto y quien manda es el director de obra. Menos papeles, pero de más nivel.</a:t>
+              <a:t>N1: ¿Y aquí también vale una memoria técnica como en el GLP pequeño?</a:t>
+            </a:r>
+          </a:p>
+          <a:p>
+            <a:r>
+              <a:t>N2: No, y esto es tajante. En el GNL no hay memoria que valga: toda planta satélite exige proyecto elaborado por técnico facultativo competente. La razón es que el GNL se maneja en instalaciones más serias y con más riesgo, así que el papeleo sube de nivel. El proyecto lleva lo habitual, objeto, ubicación, cálculos, obra civil, montaje y pruebas, presupuesto, pliego y planos, pero fíjate en el extra que no aparecía en el GLP: la documentación de seguridad y los planes de emergencia frente a accidentes graves. Ese añadido de los planes de emergencia es la pista de que estamos en una instalación de categoría superior. Idea de fondo: GNL, siempre proyecto, y con planes de emergencia.</a:t>
             </a:r>
           </a:p>
         </p:txBody>
@@ -1576,12 +1643,12 @@
           <a:lstStyle/>
           <a:p>
             <a:r>
-              <a:t>N1: Una vez en marcha, ¿cuándo aviso a la Administración?</a:t>
-            </a:r>
-          </a:p>
-          <a:p>
-            <a:r>
-              <a:t>N2: Con los dos certificados expedidos, la planta está en disposición de servicio y el titular llama al suministrador para el primer llenado de los depósitos de GNL; antes verifica que la documentación está completa. Y después de la puesta en servicio hay que comunicarla, con un plazo que cae en examen: quince días hábiles, presentando por duplicado ante la Comunidad Autónoma el proyecto, los dos certificados, la documentación de los recipientes a presión y la fecha de puesta en servicio. Mucho cuidado aquí: son quince días hábiles, que no cuentan domingos ni festivos, y no hay que confundirlos con los treinta días genéricos del articulado del Reglamento para instalaciones receptoras. Cada instalación tiene su plazo; en el GNL, quince hábiles.</a:t>
+              <a:t>N1: ¿Qué certificados hacen falta aquí para quedar en disposición de servicio?</a:t>
+            </a:r>
+          </a:p>
+          <a:p>
+            <a:r>
+              <a:t>N2: Antes de nada, el organismo de control, asistido por la empresa de montaje y el director de obra, hace las pruebas en obra de la norma para comprobar resistencia y estanquidad. Y luego, la puesta en servicio se apoya en solo dos papeles. Uno: el certificado de dirección de obra, que firma el director de obra, con la lista de componentes y la justificación de homologaciones como anexo. Dos: el certificado de inspección, que emite el organismo de control. Con esos dos, la instalación queda en disposición de servicio. Fíjate en lo que falta respecto al GLP: aquí no hay certificado de instalación de empresa instaladora, porque siempre hay proyecto y quien manda es el director de obra. Menos papeles, pero de más nivel.</a:t>
             </a:r>
           </a:p>
         </p:txBody>
@@ -4656,7 +4723,7 @@
             <a:r>
               <a:rPr sz="1400" b="1" i="0">
                 <a:solidFill>
-                  <a:srgbClr val="CADCFC"/>
+                  <a:srgbClr val="F4A24C"/>
                 </a:solidFill>
                 <a:latin typeface="Montserrat"/>
               </a:rPr>
@@ -4667,13 +4734,57 @@
       </p:sp>
       <p:sp>
         <p:nvSpPr>
-          <p:cNvPr id="4" name="TextBox 3"/>
+          <p:cNvPr id="4" name="Rounded Rectangle 3"/>
+          <p:cNvSpPr/>
+          <p:nvPr/>
+        </p:nvSpPr>
+        <p:spPr>
+          <a:xfrm>
+            <a:off x="868680" y="2057400"/>
+            <a:ext cx="1463040" cy="82296"/>
+          </a:xfrm>
+          <a:prstGeom prst="roundRect">
+            <a:avLst/>
+          </a:prstGeom>
+          <a:solidFill>
+            <a:srgbClr val="E8801A"/>
+          </a:solidFill>
+          <a:ln>
+            <a:noFill/>
+          </a:ln>
+          <a:effectLst/>
+        </p:spPr>
+        <p:style>
+          <a:lnRef idx="1">
+            <a:schemeClr val="accent1"/>
+          </a:lnRef>
+          <a:fillRef idx="3">
+            <a:schemeClr val="accent1"/>
+          </a:fillRef>
+          <a:effectRef idx="2">
+            <a:schemeClr val="accent1"/>
+          </a:effectRef>
+          <a:fontRef idx="minor">
+            <a:schemeClr val="lt1"/>
+          </a:fontRef>
+        </p:style>
+        <p:txBody>
+          <a:bodyPr rtlCol="0" anchor="ctr"/>
+          <a:lstStyle/>
+          <a:p>
+            <a:pPr algn="ctr"/>
+          </a:p>
+        </p:txBody>
+      </p:sp>
+      <p:sp>
+        <p:nvSpPr>
+          <p:cNvPr id="5" name="TextBox 4"/>
           <p:cNvSpPr txBox="1"/>
           <p:nvPr/>
         </p:nvSpPr>
         <p:spPr>
           <a:xfrm>
-            <a:off x="822960" y="2194560"/>
+            <a:off x="822960" y="2286000"/>
             <a:ext cx="10515600" cy="2011680"/>
           </a:xfrm>
           <a:prstGeom prst="rect">
@@ -4712,7 +4823,7 @@
       </p:sp>
       <p:sp>
         <p:nvSpPr>
-          <p:cNvPr id="5" name="TextBox 4"/>
+          <p:cNvPr id="6" name="TextBox 5"/>
           <p:cNvSpPr txBox="1"/>
           <p:nvPr/>
         </p:nvSpPr>
@@ -4836,7 +4947,7 @@
                 </a:solidFill>
                 <a:latin typeface="Montserrat"/>
               </a:rPr>
-              <a:t>010 / 015</a:t>
+              <a:t>010 / 016</a:t>
             </a:r>
           </a:p>
         </p:txBody>
@@ -4884,7 +4995,7 @@
         <p:spPr>
           <a:xfrm>
             <a:off x="822960" y="457200"/>
-            <a:ext cx="8229600" cy="365760"/>
+            <a:ext cx="10058400" cy="365760"/>
           </a:xfrm>
           <a:prstGeom prst="rect">
             <a:avLst/>
@@ -4898,13 +5009,13 @@
           <a:lstStyle/>
           <a:p>
             <a:r>
-              <a:rPr sz="1200" b="1" i="0">
-                <a:solidFill>
-                  <a:srgbClr val="64748B"/>
-                </a:solidFill>
-                <a:latin typeface="Montserrat"/>
-              </a:rPr>
-              <a:t>APARTADO 6.1 · MANTENIMIENTO</a:t>
+              <a:rPr sz="1300" b="1" i="0">
+                <a:solidFill>
+                  <a:srgbClr val="E8801A"/>
+                </a:solidFill>
+                <a:latin typeface="Montserrat"/>
+              </a:rPr>
+              <a:t>APARTADOS 5.5 Y 5.6 · COMUNICACIÓN</a:t>
             </a:r>
           </a:p>
         </p:txBody>
@@ -4932,26 +5043,70 @@
           <a:lstStyle/>
           <a:p>
             <a:r>
-              <a:rPr sz="2700" b="1" i="0">
+              <a:rPr sz="2800" b="1" i="0">
                 <a:solidFill>
                   <a:srgbClr val="1E2761"/>
                 </a:solidFill>
                 <a:latin typeface="Montserrat"/>
               </a:rPr>
-              <a:t>Mismo esqueleto, con el criogénico</a:t>
-            </a:r>
-          </a:p>
-        </p:txBody>
-      </p:sp>
-      <p:sp>
-        <p:nvSpPr>
-          <p:cNvPr id="7" name="TextBox 6"/>
+              <a:t>15 días hábiles, no naturales</a:t>
+            </a:r>
+          </a:p>
+        </p:txBody>
+      </p:sp>
+      <p:sp>
+        <p:nvSpPr>
+          <p:cNvPr id="7" name="Rounded Rectangle 6"/>
+          <p:cNvSpPr/>
+          <p:nvPr/>
+        </p:nvSpPr>
+        <p:spPr>
+          <a:xfrm>
+            <a:off x="868680" y="1627632"/>
+            <a:ext cx="2011680" cy="73152"/>
+          </a:xfrm>
+          <a:prstGeom prst="roundRect">
+            <a:avLst/>
+          </a:prstGeom>
+          <a:solidFill>
+            <a:srgbClr val="E8801A"/>
+          </a:solidFill>
+          <a:ln>
+            <a:noFill/>
+          </a:ln>
+          <a:effectLst/>
+        </p:spPr>
+        <p:style>
+          <a:lnRef idx="1">
+            <a:schemeClr val="accent1"/>
+          </a:lnRef>
+          <a:fillRef idx="3">
+            <a:schemeClr val="accent1"/>
+          </a:fillRef>
+          <a:effectRef idx="2">
+            <a:schemeClr val="accent1"/>
+          </a:effectRef>
+          <a:fontRef idx="minor">
+            <a:schemeClr val="lt1"/>
+          </a:fontRef>
+        </p:style>
+        <p:txBody>
+          <a:bodyPr rtlCol="0" anchor="ctr"/>
+          <a:lstStyle/>
+          <a:p>
+            <a:pPr algn="ctr"/>
+          </a:p>
+        </p:txBody>
+      </p:sp>
+      <p:sp>
+        <p:nvSpPr>
+          <p:cNvPr id="8" name="TextBox 7"/>
           <p:cNvSpPr txBox="1"/>
           <p:nvPr/>
         </p:nvSpPr>
         <p:spPr>
           <a:xfrm>
-            <a:off x="822960" y="1920240"/>
+            <a:off x="822960" y="1965960"/>
             <a:ext cx="4983480" cy="4206240"/>
           </a:xfrm>
           <a:prstGeom prst="rect">
@@ -4967,17 +5122,17 @@
           <a:p>
             <a:pPr>
               <a:spcAft>
-                <a:spcPts val="1000"/>
+                <a:spcPts val="1100"/>
               </a:spcAft>
             </a:pPr>
             <a:r>
               <a:rPr sz="1600" b="1" i="0">
                 <a:solidFill>
-                  <a:srgbClr val="2E3A80"/>
-                </a:solidFill>
-                <a:latin typeface="Montserrat"/>
-              </a:rPr>
-              <a:t>•  </a:t>
+                  <a:srgbClr val="E8801A"/>
+                </a:solidFill>
+                <a:latin typeface="Montserrat"/>
+              </a:rPr>
+              <a:t>▸  </a:t>
             </a:r>
             <a:r>
               <a:rPr sz="1600" b="0" i="0">
@@ -4986,23 +5141,23 @@
                 </a:solidFill>
                 <a:latin typeface="Montserrat"/>
               </a:rPr>
-              <a:t>Contrato con especialista criogénico</a:t>
+              <a:t>Con los dos certificados: primer llenado</a:t>
             </a:r>
           </a:p>
           <a:p>
             <a:pPr>
               <a:spcAft>
-                <a:spcPts val="1000"/>
+                <a:spcPts val="1100"/>
               </a:spcAft>
             </a:pPr>
             <a:r>
               <a:rPr sz="1600" b="1" i="0">
                 <a:solidFill>
-                  <a:srgbClr val="2E3A80"/>
-                </a:solidFill>
-                <a:latin typeface="Montserrat"/>
-              </a:rPr>
-              <a:t>•  </a:t>
+                  <a:srgbClr val="E8801A"/>
+                </a:solidFill>
+                <a:latin typeface="Montserrat"/>
+              </a:rPr>
+              <a:t>▸  </a:t>
             </a:r>
             <a:r>
               <a:rPr sz="1600" b="0" i="0">
@@ -5011,23 +5166,23 @@
                 </a:solidFill>
                 <a:latin typeface="Montserrat"/>
               </a:rPr>
-              <a:t>Servicio de urgencias permanente</a:t>
+              <a:t>Comunicar en 15 días hábiles</a:t>
             </a:r>
           </a:p>
           <a:p>
             <a:pPr>
               <a:spcAft>
-                <a:spcPts val="1000"/>
+                <a:spcPts val="1100"/>
               </a:spcAft>
             </a:pPr>
             <a:r>
               <a:rPr sz="1600" b="1" i="0">
                 <a:solidFill>
-                  <a:srgbClr val="2E3A80"/>
-                </a:solidFill>
-                <a:latin typeface="Montserrat"/>
-              </a:rPr>
-              <a:t>•  </a:t>
+                  <a:srgbClr val="E8801A"/>
+                </a:solidFill>
+                <a:latin typeface="Montserrat"/>
+              </a:rPr>
+              <a:t>▸  </a:t>
             </a:r>
             <a:r>
               <a:rPr sz="1600" b="0" i="0">
@@ -5036,23 +5191,23 @@
                 </a:solidFill>
                 <a:latin typeface="Montserrat"/>
               </a:rPr>
-              <a:t>Libro de Mantenimiento o archivo</a:t>
+              <a:t>Por duplicado a la Comunidad Autónoma</a:t>
             </a:r>
           </a:p>
           <a:p>
             <a:pPr>
               <a:spcAft>
-                <a:spcPts val="1000"/>
+                <a:spcPts val="1100"/>
               </a:spcAft>
             </a:pPr>
             <a:r>
               <a:rPr sz="1600" b="1" i="0">
                 <a:solidFill>
-                  <a:srgbClr val="2E3A80"/>
-                </a:solidFill>
-                <a:latin typeface="Montserrat"/>
-              </a:rPr>
-              <a:t>•  </a:t>
+                  <a:srgbClr val="E8801A"/>
+                </a:solidFill>
+                <a:latin typeface="Montserrat"/>
+              </a:rPr>
+              <a:t>▸  </a:t>
             </a:r>
             <a:r>
               <a:rPr sz="1600" b="0" i="0">
@@ -5061,14 +5216,14 @@
                 </a:solidFill>
                 <a:latin typeface="Montserrat"/>
               </a:rPr>
-              <a:t>Posible exención si tienes medios</a:t>
-            </a:r>
-          </a:p>
-        </p:txBody>
-      </p:sp>
-      <p:sp>
-        <p:nvSpPr>
-          <p:cNvPr id="8" name="imgph" descr="IMGQ:maintenance engineer cryogenic plant"/>
+              <a:t>No confundir con los 30 del articulado</a:t>
+            </a:r>
+          </a:p>
+        </p:txBody>
+      </p:sp>
+      <p:sp>
+        <p:nvSpPr>
+          <p:cNvPr id="9" name="imgph" descr="IMGQ:calendar deadline paperwork desk"/>
           <p:cNvSpPr/>
           <p:nvPr/>
         </p:nvSpPr>
@@ -5114,7 +5269,7 @@
       </p:sp>
       <p:sp>
         <p:nvSpPr>
-          <p:cNvPr id="9" name="TextBox 8"/>
+          <p:cNvPr id="10" name="TextBox 9"/>
           <p:cNvSpPr txBox="1"/>
           <p:nvPr/>
         </p:nvSpPr>
@@ -5154,7 +5309,7 @@
                 </a:solidFill>
                 <a:latin typeface="Montserrat"/>
               </a:rPr>
-              <a:t>maintenance engineer cryogenic plant</a:t>
+              <a:t>calendar deadline paperwork desk</a:t>
             </a:r>
           </a:p>
         </p:txBody>
@@ -5251,7 +5406,7 @@
                 </a:solidFill>
                 <a:latin typeface="Montserrat"/>
               </a:rPr>
-              <a:t>011 / 015</a:t>
+              <a:t>011 / 016</a:t>
             </a:r>
           </a:p>
         </p:txBody>
@@ -5299,7 +5454,7 @@
         <p:spPr>
           <a:xfrm>
             <a:off x="822960" y="457200"/>
-            <a:ext cx="8229600" cy="365760"/>
+            <a:ext cx="10058400" cy="365760"/>
           </a:xfrm>
           <a:prstGeom prst="rect">
             <a:avLst/>
@@ -5313,13 +5468,13 @@
           <a:lstStyle/>
           <a:p>
             <a:r>
-              <a:rPr sz="1200" b="1" i="0">
-                <a:solidFill>
-                  <a:srgbClr val="64748B"/>
-                </a:solidFill>
-                <a:latin typeface="Montserrat"/>
-              </a:rPr>
-              <a:t>APARTADO 6.2 · CONTROLES</a:t>
+              <a:rPr sz="1300" b="1" i="0">
+                <a:solidFill>
+                  <a:srgbClr val="E8801A"/>
+                </a:solidFill>
+                <a:latin typeface="Montserrat"/>
+              </a:rPr>
+              <a:t>APARTADO 6.1 · MANTENIMIENTO</a:t>
             </a:r>
           </a:p>
         </p:txBody>
@@ -5347,26 +5502,70 @@
           <a:lstStyle/>
           <a:p>
             <a:r>
-              <a:rPr sz="2700" b="1" i="0">
+              <a:rPr sz="2800" b="1" i="0">
                 <a:solidFill>
                   <a:srgbClr val="1E2761"/>
                 </a:solidFill>
                 <a:latin typeface="Montserrat"/>
               </a:rPr>
-              <a:t>Cada 5 años y la fórmula V × P</a:t>
-            </a:r>
-          </a:p>
-        </p:txBody>
-      </p:sp>
-      <p:sp>
-        <p:nvSpPr>
-          <p:cNvPr id="7" name="TextBox 6"/>
+              <a:t>Mismo esqueleto, con el criogénico</a:t>
+            </a:r>
+          </a:p>
+        </p:txBody>
+      </p:sp>
+      <p:sp>
+        <p:nvSpPr>
+          <p:cNvPr id="7" name="Rounded Rectangle 6"/>
+          <p:cNvSpPr/>
+          <p:nvPr/>
+        </p:nvSpPr>
+        <p:spPr>
+          <a:xfrm>
+            <a:off x="868680" y="1627632"/>
+            <a:ext cx="2011680" cy="73152"/>
+          </a:xfrm>
+          <a:prstGeom prst="roundRect">
+            <a:avLst/>
+          </a:prstGeom>
+          <a:solidFill>
+            <a:srgbClr val="E8801A"/>
+          </a:solidFill>
+          <a:ln>
+            <a:noFill/>
+          </a:ln>
+          <a:effectLst/>
+        </p:spPr>
+        <p:style>
+          <a:lnRef idx="1">
+            <a:schemeClr val="accent1"/>
+          </a:lnRef>
+          <a:fillRef idx="3">
+            <a:schemeClr val="accent1"/>
+          </a:fillRef>
+          <a:effectRef idx="2">
+            <a:schemeClr val="accent1"/>
+          </a:effectRef>
+          <a:fontRef idx="minor">
+            <a:schemeClr val="lt1"/>
+          </a:fontRef>
+        </p:style>
+        <p:txBody>
+          <a:bodyPr rtlCol="0" anchor="ctr"/>
+          <a:lstStyle/>
+          <a:p>
+            <a:pPr algn="ctr"/>
+          </a:p>
+        </p:txBody>
+      </p:sp>
+      <p:sp>
+        <p:nvSpPr>
+          <p:cNvPr id="8" name="TextBox 7"/>
           <p:cNvSpPr txBox="1"/>
           <p:nvPr/>
         </p:nvSpPr>
         <p:spPr>
           <a:xfrm>
-            <a:off x="822960" y="1920240"/>
+            <a:off x="822960" y="1965960"/>
             <a:ext cx="4983480" cy="4206240"/>
           </a:xfrm>
           <a:prstGeom prst="rect">
@@ -5382,17 +5581,17 @@
           <a:p>
             <a:pPr>
               <a:spcAft>
-                <a:spcPts val="1000"/>
+                <a:spcPts val="1100"/>
               </a:spcAft>
             </a:pPr>
             <a:r>
               <a:rPr sz="1600" b="1" i="0">
                 <a:solidFill>
-                  <a:srgbClr val="2E3A80"/>
-                </a:solidFill>
-                <a:latin typeface="Montserrat"/>
-              </a:rPr>
-              <a:t>•  </a:t>
+                  <a:srgbClr val="E8801A"/>
+                </a:solidFill>
+                <a:latin typeface="Montserrat"/>
+              </a:rPr>
+              <a:t>▸  </a:t>
             </a:r>
             <a:r>
               <a:rPr sz="1600" b="0" i="0">
@@ -5401,23 +5600,23 @@
                 </a:solidFill>
                 <a:latin typeface="Montserrat"/>
               </a:rPr>
-              <a:t>Control periódico cada 5 años</a:t>
+              <a:t>Contrato con especialista criogénico</a:t>
             </a:r>
           </a:p>
           <a:p>
             <a:pPr>
               <a:spcAft>
-                <a:spcPts val="1000"/>
+                <a:spcPts val="1100"/>
               </a:spcAft>
             </a:pPr>
             <a:r>
               <a:rPr sz="1600" b="1" i="0">
                 <a:solidFill>
-                  <a:srgbClr val="2E3A80"/>
-                </a:solidFill>
-                <a:latin typeface="Montserrat"/>
-              </a:rPr>
-              <a:t>•  </a:t>
+                  <a:srgbClr val="E8801A"/>
+                </a:solidFill>
+                <a:latin typeface="Montserrat"/>
+              </a:rPr>
+              <a:t>▸  </a:t>
             </a:r>
             <a:r>
               <a:rPr sz="1600" b="0" i="0">
@@ -5426,23 +5625,23 @@
                 </a:solidFill>
                 <a:latin typeface="Montserrat"/>
               </a:rPr>
-              <a:t>V × P: volumen por presión máxima</a:t>
+              <a:t>Servicio de urgencias permanente</a:t>
             </a:r>
           </a:p>
           <a:p>
             <a:pPr>
               <a:spcAft>
-                <a:spcPts val="1000"/>
+                <a:spcPts val="1100"/>
               </a:spcAft>
             </a:pPr>
             <a:r>
               <a:rPr sz="1600" b="1" i="0">
                 <a:solidFill>
-                  <a:srgbClr val="2E3A80"/>
-                </a:solidFill>
-                <a:latin typeface="Montserrat"/>
-              </a:rPr>
-              <a:t>•  </a:t>
+                  <a:srgbClr val="E8801A"/>
+                </a:solidFill>
+                <a:latin typeface="Montserrat"/>
+              </a:rPr>
+              <a:t>▸  </a:t>
             </a:r>
             <a:r>
               <a:rPr sz="1600" b="0" i="0">
@@ -5451,23 +5650,23 @@
                 </a:solidFill>
                 <a:latin typeface="Montserrat"/>
               </a:rPr>
-              <a:t>300 o menos: criogénico o usuario vale</a:t>
+              <a:t>Libro de Mantenimiento o archivo</a:t>
             </a:r>
           </a:p>
           <a:p>
             <a:pPr>
               <a:spcAft>
-                <a:spcPts val="1000"/>
+                <a:spcPts val="1100"/>
               </a:spcAft>
             </a:pPr>
             <a:r>
               <a:rPr sz="1600" b="1" i="0">
                 <a:solidFill>
-                  <a:srgbClr val="2E3A80"/>
-                </a:solidFill>
-                <a:latin typeface="Montserrat"/>
-              </a:rPr>
-              <a:t>•  </a:t>
+                  <a:srgbClr val="E8801A"/>
+                </a:solidFill>
+                <a:latin typeface="Montserrat"/>
+              </a:rPr>
+              <a:t>▸  </a:t>
             </a:r>
             <a:r>
               <a:rPr sz="1600" b="0" i="0">
@@ -5476,14 +5675,14 @@
                 </a:solidFill>
                 <a:latin typeface="Montserrat"/>
               </a:rPr>
-              <a:t>Más de 300: obligatorio organismo de control</a:t>
-            </a:r>
-          </a:p>
-        </p:txBody>
-      </p:sp>
-      <p:sp>
-        <p:nvSpPr>
-          <p:cNvPr id="8" name="imgph" descr="IMGQ:pressure gauge cryogenic tank"/>
+              <a:t>Posible exención si tienes medios</a:t>
+            </a:r>
+          </a:p>
+        </p:txBody>
+      </p:sp>
+      <p:sp>
+        <p:nvSpPr>
+          <p:cNvPr id="9" name="imgph" descr="IMGQ:maintenance engineer cryogenic plant"/>
           <p:cNvSpPr/>
           <p:nvPr/>
         </p:nvSpPr>
@@ -5529,7 +5728,7 @@
       </p:sp>
       <p:sp>
         <p:nvSpPr>
-          <p:cNvPr id="9" name="TextBox 8"/>
+          <p:cNvPr id="10" name="TextBox 9"/>
           <p:cNvSpPr txBox="1"/>
           <p:nvPr/>
         </p:nvSpPr>
@@ -5569,7 +5768,7 @@
                 </a:solidFill>
                 <a:latin typeface="Montserrat"/>
               </a:rPr>
-              <a:t>pressure gauge cryogenic tank</a:t>
+              <a:t>maintenance engineer cryogenic plant</a:t>
             </a:r>
           </a:p>
         </p:txBody>
@@ -5666,7 +5865,7 @@
                 </a:solidFill>
                 <a:latin typeface="Montserrat"/>
               </a:rPr>
-              <a:t>012 / 015</a:t>
+              <a:t>012 / 016</a:t>
             </a:r>
           </a:p>
         </p:txBody>
@@ -5714,7 +5913,7 @@
         <p:spPr>
           <a:xfrm>
             <a:off x="822960" y="457200"/>
-            <a:ext cx="8229600" cy="365760"/>
+            <a:ext cx="10058400" cy="365760"/>
           </a:xfrm>
           <a:prstGeom prst="rect">
             <a:avLst/>
@@ -5728,13 +5927,13 @@
           <a:lstStyle/>
           <a:p>
             <a:r>
-              <a:rPr sz="1200" b="1" i="0">
-                <a:solidFill>
-                  <a:srgbClr val="64748B"/>
-                </a:solidFill>
-                <a:latin typeface="Montserrat"/>
-              </a:rPr>
-              <a:t>APARTADO 6.2 · PRUEBA DE PRESIÓN</a:t>
+              <a:rPr sz="1300" b="1" i="0">
+                <a:solidFill>
+                  <a:srgbClr val="E8801A"/>
+                </a:solidFill>
+                <a:latin typeface="Montserrat"/>
+              </a:rPr>
+              <a:t>APARTADO 6.2 · CONTROLES</a:t>
             </a:r>
           </a:p>
         </p:txBody>
@@ -5762,26 +5961,70 @@
           <a:lstStyle/>
           <a:p>
             <a:r>
-              <a:rPr sz="2700" b="1" i="0">
+              <a:rPr sz="2800" b="1" i="0">
                 <a:solidFill>
                   <a:srgbClr val="1E2761"/>
                 </a:solidFill>
                 <a:latin typeface="Montserrat"/>
               </a:rPr>
-              <a:t>Neumática, no hidráulica</a:t>
-            </a:r>
-          </a:p>
-        </p:txBody>
-      </p:sp>
-      <p:sp>
-        <p:nvSpPr>
-          <p:cNvPr id="7" name="TextBox 6"/>
+              <a:t>Cada 5 años y la fórmula V × P</a:t>
+            </a:r>
+          </a:p>
+        </p:txBody>
+      </p:sp>
+      <p:sp>
+        <p:nvSpPr>
+          <p:cNvPr id="7" name="Rounded Rectangle 6"/>
+          <p:cNvSpPr/>
+          <p:nvPr/>
+        </p:nvSpPr>
+        <p:spPr>
+          <a:xfrm>
+            <a:off x="868680" y="1627632"/>
+            <a:ext cx="2011680" cy="73152"/>
+          </a:xfrm>
+          <a:prstGeom prst="roundRect">
+            <a:avLst/>
+          </a:prstGeom>
+          <a:solidFill>
+            <a:srgbClr val="E8801A"/>
+          </a:solidFill>
+          <a:ln>
+            <a:noFill/>
+          </a:ln>
+          <a:effectLst/>
+        </p:spPr>
+        <p:style>
+          <a:lnRef idx="1">
+            <a:schemeClr val="accent1"/>
+          </a:lnRef>
+          <a:fillRef idx="3">
+            <a:schemeClr val="accent1"/>
+          </a:fillRef>
+          <a:effectRef idx="2">
+            <a:schemeClr val="accent1"/>
+          </a:effectRef>
+          <a:fontRef idx="minor">
+            <a:schemeClr val="lt1"/>
+          </a:fontRef>
+        </p:style>
+        <p:txBody>
+          <a:bodyPr rtlCol="0" anchor="ctr"/>
+          <a:lstStyle/>
+          <a:p>
+            <a:pPr algn="ctr"/>
+          </a:p>
+        </p:txBody>
+      </p:sp>
+      <p:sp>
+        <p:nvSpPr>
+          <p:cNvPr id="8" name="TextBox 7"/>
           <p:cNvSpPr txBox="1"/>
           <p:nvPr/>
         </p:nvSpPr>
         <p:spPr>
           <a:xfrm>
-            <a:off x="822960" y="1920240"/>
+            <a:off x="822960" y="1965960"/>
             <a:ext cx="4983480" cy="4206240"/>
           </a:xfrm>
           <a:prstGeom prst="rect">
@@ -5797,17 +6040,17 @@
           <a:p>
             <a:pPr>
               <a:spcAft>
-                <a:spcPts val="1000"/>
+                <a:spcPts val="1100"/>
               </a:spcAft>
             </a:pPr>
             <a:r>
               <a:rPr sz="1600" b="1" i="0">
                 <a:solidFill>
-                  <a:srgbClr val="2E3A80"/>
-                </a:solidFill>
-                <a:latin typeface="Montserrat"/>
-              </a:rPr>
-              <a:t>•  </a:t>
+                  <a:srgbClr val="E8801A"/>
+                </a:solidFill>
+                <a:latin typeface="Montserrat"/>
+              </a:rPr>
+              <a:t>▸  </a:t>
             </a:r>
             <a:r>
               <a:rPr sz="1600" b="0" i="0">
@@ -5816,23 +6059,23 @@
                 </a:solidFill>
                 <a:latin typeface="Montserrat"/>
               </a:rPr>
-              <a:t>Prueba de presión cada 15 años</a:t>
+              <a:t>Control periódico cada 5 años</a:t>
             </a:r>
           </a:p>
           <a:p>
             <a:pPr>
               <a:spcAft>
-                <a:spcPts val="1000"/>
+                <a:spcPts val="1100"/>
               </a:spcAft>
             </a:pPr>
             <a:r>
               <a:rPr sz="1600" b="1" i="0">
                 <a:solidFill>
-                  <a:srgbClr val="2E3A80"/>
-                </a:solidFill>
-                <a:latin typeface="Montserrat"/>
-              </a:rPr>
-              <a:t>•  </a:t>
+                  <a:srgbClr val="E8801A"/>
+                </a:solidFill>
+                <a:latin typeface="Montserrat"/>
+              </a:rPr>
+              <a:t>▸  </a:t>
             </a:r>
             <a:r>
               <a:rPr sz="1600" b="0" i="0">
@@ -5841,23 +6084,23 @@
                 </a:solidFill>
                 <a:latin typeface="Montserrat"/>
               </a:rPr>
-              <a:t>Neumática: con gas, no con agua</a:t>
+              <a:t>V × P: volumen por presión máxima</a:t>
             </a:r>
           </a:p>
           <a:p>
             <a:pPr>
               <a:spcAft>
-                <a:spcPts val="1000"/>
+                <a:spcPts val="1100"/>
               </a:spcAft>
             </a:pPr>
             <a:r>
               <a:rPr sz="1600" b="1" i="0">
                 <a:solidFill>
-                  <a:srgbClr val="2E3A80"/>
-                </a:solidFill>
-                <a:latin typeface="Montserrat"/>
-              </a:rPr>
-              <a:t>•  </a:t>
+                  <a:srgbClr val="E8801A"/>
+                </a:solidFill>
+                <a:latin typeface="Montserrat"/>
+              </a:rPr>
+              <a:t>▸  </a:t>
             </a:r>
             <a:r>
               <a:rPr sz="1600" b="0" i="0">
@@ -5866,23 +6109,23 @@
                 </a:solidFill>
                 <a:latin typeface="Montserrat"/>
               </a:rPr>
-              <a:t>Evita meter humedad al depósito frío</a:t>
+              <a:t>300 o menos: criogénico o usuario vale</a:t>
             </a:r>
           </a:p>
           <a:p>
             <a:pPr>
               <a:spcAft>
-                <a:spcPts val="1000"/>
+                <a:spcPts val="1100"/>
               </a:spcAft>
             </a:pPr>
             <a:r>
               <a:rPr sz="1600" b="1" i="0">
                 <a:solidFill>
-                  <a:srgbClr val="2E3A80"/>
-                </a:solidFill>
-                <a:latin typeface="Montserrat"/>
-              </a:rPr>
-              <a:t>•  </a:t>
+                  <a:srgbClr val="E8801A"/>
+                </a:solidFill>
+                <a:latin typeface="Montserrat"/>
+              </a:rPr>
+              <a:t>▸  </a:t>
             </a:r>
             <a:r>
               <a:rPr sz="1600" b="0" i="0">
@@ -5891,14 +6134,14 @@
                 </a:solidFill>
                 <a:latin typeface="Montserrat"/>
               </a:rPr>
-              <a:t>GLP era hidráulica; GNL es neumática</a:t>
-            </a:r>
-          </a:p>
-        </p:txBody>
-      </p:sp>
-      <p:sp>
-        <p:nvSpPr>
-          <p:cNvPr id="8" name="imgph" descr="IMGQ:nitrogen pressure test cryogenic equipment"/>
+              <a:t>Más de 300: obligatorio organismo de control</a:t>
+            </a:r>
+          </a:p>
+        </p:txBody>
+      </p:sp>
+      <p:sp>
+        <p:nvSpPr>
+          <p:cNvPr id="9" name="imgph" descr="IMGQ:pressure gauge cryogenic tank"/>
           <p:cNvSpPr/>
           <p:nvPr/>
         </p:nvSpPr>
@@ -5944,7 +6187,7 @@
       </p:sp>
       <p:sp>
         <p:nvSpPr>
-          <p:cNvPr id="9" name="TextBox 8"/>
+          <p:cNvPr id="10" name="TextBox 9"/>
           <p:cNvSpPr txBox="1"/>
           <p:nvPr/>
         </p:nvSpPr>
@@ -5984,7 +6227,7 @@
                 </a:solidFill>
                 <a:latin typeface="Montserrat"/>
               </a:rPr>
-              <a:t>nitrogen pressure test cryogenic equipment</a:t>
+              <a:t>pressure gauge cryogenic tank</a:t>
             </a:r>
           </a:p>
         </p:txBody>
@@ -6081,7 +6324,7 @@
                 </a:solidFill>
                 <a:latin typeface="Montserrat"/>
               </a:rPr>
-              <a:t>013 / 015</a:t>
+              <a:t>013 / 016</a:t>
             </a:r>
           </a:p>
         </p:txBody>
@@ -6129,7 +6372,7 @@
         <p:spPr>
           <a:xfrm>
             <a:off x="822960" y="457200"/>
-            <a:ext cx="8229600" cy="365760"/>
+            <a:ext cx="10058400" cy="365760"/>
           </a:xfrm>
           <a:prstGeom prst="rect">
             <a:avLst/>
@@ -6143,13 +6386,13 @@
           <a:lstStyle/>
           <a:p>
             <a:r>
-              <a:rPr sz="1200" b="1" i="0">
-                <a:solidFill>
-                  <a:srgbClr val="64748B"/>
-                </a:solidFill>
-                <a:latin typeface="Montserrat"/>
-              </a:rPr>
-              <a:t>APARTADO 6.3 · RETIRADA</a:t>
+              <a:rPr sz="1300" b="1" i="0">
+                <a:solidFill>
+                  <a:srgbClr val="E8801A"/>
+                </a:solidFill>
+                <a:latin typeface="Montserrat"/>
+              </a:rPr>
+              <a:t>APARTADO 6.2 · PRUEBA DE PRESIÓN</a:t>
             </a:r>
           </a:p>
         </p:txBody>
@@ -6177,26 +6420,70 @@
           <a:lstStyle/>
           <a:p>
             <a:r>
-              <a:rPr sz="2700" b="1" i="0">
+              <a:rPr sz="2800" b="1" i="0">
                 <a:solidFill>
                   <a:srgbClr val="1E2761"/>
                 </a:solidFill>
                 <a:latin typeface="Montserrat"/>
               </a:rPr>
-              <a:t>Un año sin carga: inertizar</a:t>
-            </a:r>
-          </a:p>
-        </p:txBody>
-      </p:sp>
-      <p:sp>
-        <p:nvSpPr>
-          <p:cNvPr id="7" name="TextBox 6"/>
+              <a:t>Neumática, no hidráulica</a:t>
+            </a:r>
+          </a:p>
+        </p:txBody>
+      </p:sp>
+      <p:sp>
+        <p:nvSpPr>
+          <p:cNvPr id="7" name="Rounded Rectangle 6"/>
+          <p:cNvSpPr/>
+          <p:nvPr/>
+        </p:nvSpPr>
+        <p:spPr>
+          <a:xfrm>
+            <a:off x="868680" y="1627632"/>
+            <a:ext cx="2011680" cy="73152"/>
+          </a:xfrm>
+          <a:prstGeom prst="roundRect">
+            <a:avLst/>
+          </a:prstGeom>
+          <a:solidFill>
+            <a:srgbClr val="E8801A"/>
+          </a:solidFill>
+          <a:ln>
+            <a:noFill/>
+          </a:ln>
+          <a:effectLst/>
+        </p:spPr>
+        <p:style>
+          <a:lnRef idx="1">
+            <a:schemeClr val="accent1"/>
+          </a:lnRef>
+          <a:fillRef idx="3">
+            <a:schemeClr val="accent1"/>
+          </a:fillRef>
+          <a:effectRef idx="2">
+            <a:schemeClr val="accent1"/>
+          </a:effectRef>
+          <a:fontRef idx="minor">
+            <a:schemeClr val="lt1"/>
+          </a:fontRef>
+        </p:style>
+        <p:txBody>
+          <a:bodyPr rtlCol="0" anchor="ctr"/>
+          <a:lstStyle/>
+          <a:p>
+            <a:pPr algn="ctr"/>
+          </a:p>
+        </p:txBody>
+      </p:sp>
+      <p:sp>
+        <p:nvSpPr>
+          <p:cNvPr id="8" name="TextBox 7"/>
           <p:cNvSpPr txBox="1"/>
           <p:nvPr/>
         </p:nvSpPr>
         <p:spPr>
           <a:xfrm>
-            <a:off x="822960" y="1920240"/>
+            <a:off x="822960" y="1965960"/>
             <a:ext cx="4983480" cy="4206240"/>
           </a:xfrm>
           <a:prstGeom prst="rect">
@@ -6212,17 +6499,17 @@
           <a:p>
             <a:pPr>
               <a:spcAft>
-                <a:spcPts val="1000"/>
+                <a:spcPts val="1100"/>
               </a:spcAft>
             </a:pPr>
             <a:r>
               <a:rPr sz="1600" b="1" i="0">
                 <a:solidFill>
-                  <a:srgbClr val="2E3A80"/>
-                </a:solidFill>
-                <a:latin typeface="Montserrat"/>
-              </a:rPr>
-              <a:t>•  </a:t>
+                  <a:srgbClr val="E8801A"/>
+                </a:solidFill>
+                <a:latin typeface="Montserrat"/>
+              </a:rPr>
+              <a:t>▸  </a:t>
             </a:r>
             <a:r>
               <a:rPr sz="1600" b="0" i="0">
@@ -6231,23 +6518,23 @@
                 </a:solidFill>
                 <a:latin typeface="Montserrat"/>
               </a:rPr>
-              <a:t>Un año sin recibir GNL: inertizado</a:t>
+              <a:t>Prueba de presión cada 15 años</a:t>
             </a:r>
           </a:p>
           <a:p>
             <a:pPr>
               <a:spcAft>
-                <a:spcPts val="1000"/>
+                <a:spcPts val="1100"/>
               </a:spcAft>
             </a:pPr>
             <a:r>
               <a:rPr sz="1600" b="1" i="0">
                 <a:solidFill>
-                  <a:srgbClr val="2E3A80"/>
-                </a:solidFill>
-                <a:latin typeface="Montserrat"/>
-              </a:rPr>
-              <a:t>•  </a:t>
+                  <a:srgbClr val="E8801A"/>
+                </a:solidFill>
+                <a:latin typeface="Montserrat"/>
+              </a:rPr>
+              <a:t>▸  </a:t>
             </a:r>
             <a:r>
               <a:rPr sz="1600" b="0" i="0">
@@ -6256,23 +6543,23 @@
                 </a:solidFill>
                 <a:latin typeface="Montserrat"/>
               </a:rPr>
-              <a:t>Con nitrógeno u otro gas inerte</a:t>
+              <a:t>Neumática: con gas, no con agua</a:t>
             </a:r>
           </a:p>
           <a:p>
             <a:pPr>
               <a:spcAft>
-                <a:spcPts val="1000"/>
+                <a:spcPts val="1100"/>
               </a:spcAft>
             </a:pPr>
             <a:r>
               <a:rPr sz="1600" b="1" i="0">
                 <a:solidFill>
-                  <a:srgbClr val="2E3A80"/>
-                </a:solidFill>
-                <a:latin typeface="Montserrat"/>
-              </a:rPr>
-              <a:t>•  </a:t>
+                  <a:srgbClr val="E8801A"/>
+                </a:solidFill>
+                <a:latin typeface="Montserrat"/>
+              </a:rPr>
+              <a:t>▸  </a:t>
             </a:r>
             <a:r>
               <a:rPr sz="1600" b="0" i="0">
@@ -6281,23 +6568,23 @@
                 </a:solidFill>
                 <a:latin typeface="Montserrat"/>
               </a:rPr>
-              <a:t>Lo supervisa un organismo de control</a:t>
+              <a:t>Evita meter humedad al depósito frío</a:t>
             </a:r>
           </a:p>
           <a:p>
             <a:pPr>
               <a:spcAft>
-                <a:spcPts val="1000"/>
+                <a:spcPts val="1100"/>
               </a:spcAft>
             </a:pPr>
             <a:r>
               <a:rPr sz="1600" b="1" i="0">
                 <a:solidFill>
-                  <a:srgbClr val="2E3A80"/>
-                </a:solidFill>
-                <a:latin typeface="Montserrat"/>
-              </a:rPr>
-              <a:t>•  </a:t>
+                  <a:srgbClr val="E8801A"/>
+                </a:solidFill>
+                <a:latin typeface="Montserrat"/>
+              </a:rPr>
+              <a:t>▸  </a:t>
             </a:r>
             <a:r>
               <a:rPr sz="1600" b="0" i="0">
@@ -6306,14 +6593,14 @@
                 </a:solidFill>
                 <a:latin typeface="Montserrat"/>
               </a:rPr>
-              <a:t>Nunca desmontar sin inertizar antes</a:t>
-            </a:r>
-          </a:p>
-        </p:txBody>
-      </p:sp>
-      <p:sp>
-        <p:nvSpPr>
-          <p:cNvPr id="8" name="imgph" descr="IMGQ:nitrogen purge industrial gas tank"/>
+              <a:t>GLP era hidráulica; GNL es neumática</a:t>
+            </a:r>
+          </a:p>
+        </p:txBody>
+      </p:sp>
+      <p:sp>
+        <p:nvSpPr>
+          <p:cNvPr id="9" name="imgph" descr="IMGQ:nitrogen pressure test cryogenic equipment"/>
           <p:cNvSpPr/>
           <p:nvPr/>
         </p:nvSpPr>
@@ -6359,7 +6646,7 @@
       </p:sp>
       <p:sp>
         <p:nvSpPr>
-          <p:cNvPr id="9" name="TextBox 8"/>
+          <p:cNvPr id="10" name="TextBox 9"/>
           <p:cNvSpPr txBox="1"/>
           <p:nvPr/>
         </p:nvSpPr>
@@ -6399,7 +6686,7 @@
                 </a:solidFill>
                 <a:latin typeface="Montserrat"/>
               </a:rPr>
-              <a:t>nitrogen purge industrial gas tank</a:t>
+              <a:t>nitrogen pressure test cryogenic equipment</a:t>
             </a:r>
           </a:p>
         </p:txBody>
@@ -6496,7 +6783,7 @@
                 </a:solidFill>
                 <a:latin typeface="Montserrat"/>
               </a:rPr>
-              <a:t>014 / 015</a:t>
+              <a:t>014 / 016</a:t>
             </a:r>
           </a:p>
         </p:txBody>
@@ -6544,7 +6831,7 @@
         <p:spPr>
           <a:xfrm>
             <a:off x="822960" y="457200"/>
-            <a:ext cx="8229600" cy="365760"/>
+            <a:ext cx="10058400" cy="365760"/>
           </a:xfrm>
           <a:prstGeom prst="rect">
             <a:avLst/>
@@ -6558,13 +6845,13 @@
           <a:lstStyle/>
           <a:p>
             <a:r>
-              <a:rPr sz="1200" b="1" i="0">
-                <a:solidFill>
-                  <a:srgbClr val="64748B"/>
-                </a:solidFill>
-                <a:latin typeface="Montserrat"/>
-              </a:rPr>
-              <a:t>REPASO RELÁMPAGO</a:t>
+              <a:rPr sz="1300" b="1" i="0">
+                <a:solidFill>
+                  <a:srgbClr val="E8801A"/>
+                </a:solidFill>
+                <a:latin typeface="Montserrat"/>
+              </a:rPr>
+              <a:t>APARTADO 6.3 · RETIRADA</a:t>
             </a:r>
           </a:p>
         </p:txBody>
@@ -6592,26 +6879,70 @@
           <a:lstStyle/>
           <a:p>
             <a:r>
-              <a:rPr sz="2700" b="1" i="0">
+              <a:rPr sz="2800" b="1" i="0">
                 <a:solidFill>
                   <a:srgbClr val="1E2761"/>
                 </a:solidFill>
                 <a:latin typeface="Montserrat"/>
               </a:rPr>
-              <a:t>GNL frente a GLP, en cinco líneas</a:t>
-            </a:r>
-          </a:p>
-        </p:txBody>
-      </p:sp>
-      <p:sp>
-        <p:nvSpPr>
-          <p:cNvPr id="7" name="TextBox 6"/>
+              <a:t>Un año sin carga: inertizar</a:t>
+            </a:r>
+          </a:p>
+        </p:txBody>
+      </p:sp>
+      <p:sp>
+        <p:nvSpPr>
+          <p:cNvPr id="7" name="Rounded Rectangle 6"/>
+          <p:cNvSpPr/>
+          <p:nvPr/>
+        </p:nvSpPr>
+        <p:spPr>
+          <a:xfrm>
+            <a:off x="868680" y="1627632"/>
+            <a:ext cx="2011680" cy="73152"/>
+          </a:xfrm>
+          <a:prstGeom prst="roundRect">
+            <a:avLst/>
+          </a:prstGeom>
+          <a:solidFill>
+            <a:srgbClr val="E8801A"/>
+          </a:solidFill>
+          <a:ln>
+            <a:noFill/>
+          </a:ln>
+          <a:effectLst/>
+        </p:spPr>
+        <p:style>
+          <a:lnRef idx="1">
+            <a:schemeClr val="accent1"/>
+          </a:lnRef>
+          <a:fillRef idx="3">
+            <a:schemeClr val="accent1"/>
+          </a:fillRef>
+          <a:effectRef idx="2">
+            <a:schemeClr val="accent1"/>
+          </a:effectRef>
+          <a:fontRef idx="minor">
+            <a:schemeClr val="lt1"/>
+          </a:fontRef>
+        </p:style>
+        <p:txBody>
+          <a:bodyPr rtlCol="0" anchor="ctr"/>
+          <a:lstStyle/>
+          <a:p>
+            <a:pPr algn="ctr"/>
+          </a:p>
+        </p:txBody>
+      </p:sp>
+      <p:sp>
+        <p:nvSpPr>
+          <p:cNvPr id="8" name="TextBox 7"/>
           <p:cNvSpPr txBox="1"/>
           <p:nvPr/>
         </p:nvSpPr>
         <p:spPr>
           <a:xfrm>
-            <a:off x="822960" y="1920240"/>
+            <a:off x="822960" y="1965960"/>
             <a:ext cx="4983480" cy="4206240"/>
           </a:xfrm>
           <a:prstGeom prst="rect">
@@ -6627,17 +6958,17 @@
           <a:p>
             <a:pPr>
               <a:spcAft>
-                <a:spcPts val="1000"/>
+                <a:spcPts val="1100"/>
               </a:spcAft>
             </a:pPr>
             <a:r>
               <a:rPr sz="1600" b="1" i="0">
                 <a:solidFill>
-                  <a:srgbClr val="2E3A80"/>
-                </a:solidFill>
-                <a:latin typeface="Montserrat"/>
-              </a:rPr>
-              <a:t>•  </a:t>
+                  <a:srgbClr val="E8801A"/>
+                </a:solidFill>
+                <a:latin typeface="Montserrat"/>
+              </a:rPr>
+              <a:t>▸  </a:t>
             </a:r>
             <a:r>
               <a:rPr sz="1600" b="0" i="0">
@@ -6646,23 +6977,23 @@
                 </a:solidFill>
                 <a:latin typeface="Montserrat"/>
               </a:rPr>
-              <a:t>GNL → UNE 60210 → criogénico</a:t>
+              <a:t>Un año sin recibir GNL: inertizado</a:t>
             </a:r>
           </a:p>
           <a:p>
             <a:pPr>
               <a:spcAft>
-                <a:spcPts val="1000"/>
+                <a:spcPts val="1100"/>
               </a:spcAft>
             </a:pPr>
             <a:r>
               <a:rPr sz="1600" b="1" i="0">
                 <a:solidFill>
-                  <a:srgbClr val="2E3A80"/>
-                </a:solidFill>
-                <a:latin typeface="Montserrat"/>
-              </a:rPr>
-              <a:t>•  </a:t>
+                  <a:srgbClr val="E8801A"/>
+                </a:solidFill>
+                <a:latin typeface="Montserrat"/>
+              </a:rPr>
+              <a:t>▸  </a:t>
             </a:r>
             <a:r>
               <a:rPr sz="1600" b="0" i="0">
@@ -6671,23 +7002,23 @@
                 </a:solidFill>
                 <a:latin typeface="Montserrat"/>
               </a:rPr>
-              <a:t>Autorización previa (salvo autoconsumo)</a:t>
+              <a:t>Con nitrógeno u otro gas inerte</a:t>
             </a:r>
           </a:p>
           <a:p>
             <a:pPr>
               <a:spcAft>
-                <a:spcPts val="1000"/>
+                <a:spcPts val="1100"/>
               </a:spcAft>
             </a:pPr>
             <a:r>
               <a:rPr sz="1600" b="1" i="0">
                 <a:solidFill>
-                  <a:srgbClr val="2E3A80"/>
-                </a:solidFill>
-                <a:latin typeface="Montserrat"/>
-              </a:rPr>
-              <a:t>•  </a:t>
+                  <a:srgbClr val="E8801A"/>
+                </a:solidFill>
+                <a:latin typeface="Montserrat"/>
+              </a:rPr>
+              <a:t>▸  </a:t>
             </a:r>
             <a:r>
               <a:rPr sz="1600" b="0" i="0">
@@ -6696,23 +7027,23 @@
                 </a:solidFill>
                 <a:latin typeface="Montserrat"/>
               </a:rPr>
-              <a:t>Siempre proyecto + planes de emergencia</a:t>
+              <a:t>Lo supervisa un organismo de control</a:t>
             </a:r>
           </a:p>
           <a:p>
             <a:pPr>
               <a:spcAft>
-                <a:spcPts val="1000"/>
+                <a:spcPts val="1100"/>
               </a:spcAft>
             </a:pPr>
             <a:r>
               <a:rPr sz="1600" b="1" i="0">
                 <a:solidFill>
-                  <a:srgbClr val="2E3A80"/>
-                </a:solidFill>
-                <a:latin typeface="Montserrat"/>
-              </a:rPr>
-              <a:t>•  </a:t>
+                  <a:srgbClr val="E8801A"/>
+                </a:solidFill>
+                <a:latin typeface="Montserrat"/>
+              </a:rPr>
+              <a:t>▸  </a:t>
             </a:r>
             <a:r>
               <a:rPr sz="1600" b="0" i="0">
@@ -6721,39 +7052,14 @@
                 </a:solidFill>
                 <a:latin typeface="Montserrat"/>
               </a:rPr>
-              <a:t>Controles: 5 años · V × P · 300</a:t>
-            </a:r>
-          </a:p>
-          <a:p>
-            <a:pPr>
-              <a:spcAft>
-                <a:spcPts val="1000"/>
-              </a:spcAft>
-            </a:pPr>
-            <a:r>
-              <a:rPr sz="1600" b="1" i="0">
-                <a:solidFill>
-                  <a:srgbClr val="2E3A80"/>
-                </a:solidFill>
-                <a:latin typeface="Montserrat"/>
-              </a:rPr>
-              <a:t>•  </a:t>
-            </a:r>
-            <a:r>
-              <a:rPr sz="1600" b="0" i="0">
-                <a:solidFill>
-                  <a:srgbClr val="1B2330"/>
-                </a:solidFill>
-                <a:latin typeface="Montserrat"/>
-              </a:rPr>
-              <a:t>Prueba neumática cada 15 años</a:t>
-            </a:r>
-          </a:p>
-        </p:txBody>
-      </p:sp>
-      <p:sp>
-        <p:nvSpPr>
-          <p:cNvPr id="8" name="imgph" descr="IMGQ:LNG plant overview facility"/>
+              <a:t>Nunca desmontar sin inertizar antes</a:t>
+            </a:r>
+          </a:p>
+        </p:txBody>
+      </p:sp>
+      <p:sp>
+        <p:nvSpPr>
+          <p:cNvPr id="9" name="imgph" descr="IMGQ:nitrogen purge industrial gas tank"/>
           <p:cNvSpPr/>
           <p:nvPr/>
         </p:nvSpPr>
@@ -6799,7 +7105,7 @@
       </p:sp>
       <p:sp>
         <p:nvSpPr>
-          <p:cNvPr id="9" name="TextBox 8"/>
+          <p:cNvPr id="10" name="TextBox 9"/>
           <p:cNvSpPr txBox="1"/>
           <p:nvPr/>
         </p:nvSpPr>
@@ -6839,7 +7145,7 @@
                 </a:solidFill>
                 <a:latin typeface="Montserrat"/>
               </a:rPr>
-              <a:t>LNG plant overview facility</a:t>
+              <a:t>nitrogen purge industrial gas tank</a:t>
             </a:r>
           </a:p>
         </p:txBody>
@@ -6877,6 +7183,490 @@
             <a:avLst/>
           </a:prstGeom>
           <a:solidFill>
+            <a:srgbClr val="FFFFFF"/>
+          </a:solidFill>
+          <a:ln>
+            <a:noFill/>
+          </a:ln>
+          <a:effectLst/>
+        </p:spPr>
+        <p:style>
+          <a:lnRef idx="1">
+            <a:schemeClr val="accent1"/>
+          </a:lnRef>
+          <a:fillRef idx="3">
+            <a:schemeClr val="accent1"/>
+          </a:fillRef>
+          <a:effectRef idx="2">
+            <a:schemeClr val="accent1"/>
+          </a:effectRef>
+          <a:fontRef idx="minor">
+            <a:schemeClr val="lt1"/>
+          </a:fontRef>
+        </p:style>
+        <p:txBody>
+          <a:bodyPr rtlCol="0" anchor="ctr"/>
+          <a:lstStyle/>
+          <a:p>
+            <a:pPr algn="ctr"/>
+          </a:p>
+        </p:txBody>
+      </p:sp>
+      <p:sp>
+        <p:nvSpPr>
+          <p:cNvPr id="3" name="TextBox 2"/>
+          <p:cNvSpPr txBox="1"/>
+          <p:nvPr/>
+        </p:nvSpPr>
+        <p:spPr>
+          <a:xfrm>
+            <a:off x="10607040" y="320040"/>
+            <a:ext cx="1371600" cy="365760"/>
+          </a:xfrm>
+          <a:prstGeom prst="rect">
+            <a:avLst/>
+          </a:prstGeom>
+          <a:noFill/>
+        </p:spPr>
+        <p:txBody>
+          <a:bodyPr wrap="square">
+            <a:spAutoFit/>
+          </a:bodyPr>
+          <a:lstStyle/>
+          <a:p>
+            <a:pPr algn="r"/>
+            <a:r>
+              <a:rPr sz="1000" b="1" i="0">
+                <a:solidFill>
+                  <a:srgbClr val="64748B"/>
+                </a:solidFill>
+                <a:latin typeface="Montserrat"/>
+              </a:rPr>
+              <a:t>015 / 016</a:t>
+            </a:r>
+          </a:p>
+        </p:txBody>
+      </p:sp>
+      <p:sp>
+        <p:nvSpPr>
+          <p:cNvPr id="4" name="TextBox 3"/>
+          <p:cNvSpPr txBox="1"/>
+          <p:nvPr/>
+        </p:nvSpPr>
+        <p:spPr>
+          <a:xfrm>
+            <a:off x="457200" y="6419088"/>
+            <a:ext cx="8229600" cy="365760"/>
+          </a:xfrm>
+          <a:prstGeom prst="rect">
+            <a:avLst/>
+          </a:prstGeom>
+          <a:noFill/>
+        </p:spPr>
+        <p:txBody>
+          <a:bodyPr wrap="square">
+            <a:spAutoFit/>
+          </a:bodyPr>
+          <a:lstStyle/>
+          <a:p>
+            <a:r>
+              <a:rPr sz="900" b="0" i="0">
+                <a:solidFill>
+                  <a:srgbClr val="64748B"/>
+                </a:solidFill>
+                <a:latin typeface="Montserrat"/>
+              </a:rPr>
+              <a:t>Curso Gas B · Tema 02 · Plantas satélite de GNL (ITC-ICG 04)</a:t>
+            </a:r>
+          </a:p>
+        </p:txBody>
+      </p:sp>
+      <p:sp>
+        <p:nvSpPr>
+          <p:cNvPr id="5" name="TextBox 4"/>
+          <p:cNvSpPr txBox="1"/>
+          <p:nvPr/>
+        </p:nvSpPr>
+        <p:spPr>
+          <a:xfrm>
+            <a:off x="822960" y="457200"/>
+            <a:ext cx="10058400" cy="365760"/>
+          </a:xfrm>
+          <a:prstGeom prst="rect">
+            <a:avLst/>
+          </a:prstGeom>
+          <a:noFill/>
+        </p:spPr>
+        <p:txBody>
+          <a:bodyPr wrap="square">
+            <a:spAutoFit/>
+          </a:bodyPr>
+          <a:lstStyle/>
+          <a:p>
+            <a:r>
+              <a:rPr sz="1300" b="1" i="0">
+                <a:solidFill>
+                  <a:srgbClr val="E8801A"/>
+                </a:solidFill>
+                <a:latin typeface="Montserrat"/>
+              </a:rPr>
+              <a:t>REPASO RELÁMPAGO</a:t>
+            </a:r>
+          </a:p>
+        </p:txBody>
+      </p:sp>
+      <p:sp>
+        <p:nvSpPr>
+          <p:cNvPr id="6" name="TextBox 5"/>
+          <p:cNvSpPr txBox="1"/>
+          <p:nvPr/>
+        </p:nvSpPr>
+        <p:spPr>
+          <a:xfrm>
+            <a:off x="822960" y="868680"/>
+            <a:ext cx="10515600" cy="914400"/>
+          </a:xfrm>
+          <a:prstGeom prst="rect">
+            <a:avLst/>
+          </a:prstGeom>
+          <a:noFill/>
+        </p:spPr>
+        <p:txBody>
+          <a:bodyPr wrap="square">
+            <a:spAutoFit/>
+          </a:bodyPr>
+          <a:lstStyle/>
+          <a:p>
+            <a:r>
+              <a:rPr sz="2800" b="1" i="0">
+                <a:solidFill>
+                  <a:srgbClr val="1E2761"/>
+                </a:solidFill>
+                <a:latin typeface="Montserrat"/>
+              </a:rPr>
+              <a:t>GNL frente a GLP, en cinco líneas</a:t>
+            </a:r>
+          </a:p>
+        </p:txBody>
+      </p:sp>
+      <p:sp>
+        <p:nvSpPr>
+          <p:cNvPr id="7" name="Rounded Rectangle 6"/>
+          <p:cNvSpPr/>
+          <p:nvPr/>
+        </p:nvSpPr>
+        <p:spPr>
+          <a:xfrm>
+            <a:off x="868680" y="1627632"/>
+            <a:ext cx="2011680" cy="73152"/>
+          </a:xfrm>
+          <a:prstGeom prst="roundRect">
+            <a:avLst/>
+          </a:prstGeom>
+          <a:solidFill>
+            <a:srgbClr val="E8801A"/>
+          </a:solidFill>
+          <a:ln>
+            <a:noFill/>
+          </a:ln>
+          <a:effectLst/>
+        </p:spPr>
+        <p:style>
+          <a:lnRef idx="1">
+            <a:schemeClr val="accent1"/>
+          </a:lnRef>
+          <a:fillRef idx="3">
+            <a:schemeClr val="accent1"/>
+          </a:fillRef>
+          <a:effectRef idx="2">
+            <a:schemeClr val="accent1"/>
+          </a:effectRef>
+          <a:fontRef idx="minor">
+            <a:schemeClr val="lt1"/>
+          </a:fontRef>
+        </p:style>
+        <p:txBody>
+          <a:bodyPr rtlCol="0" anchor="ctr"/>
+          <a:lstStyle/>
+          <a:p>
+            <a:pPr algn="ctr"/>
+          </a:p>
+        </p:txBody>
+      </p:sp>
+      <p:sp>
+        <p:nvSpPr>
+          <p:cNvPr id="8" name="TextBox 7"/>
+          <p:cNvSpPr txBox="1"/>
+          <p:nvPr/>
+        </p:nvSpPr>
+        <p:spPr>
+          <a:xfrm>
+            <a:off x="822960" y="1965960"/>
+            <a:ext cx="4983480" cy="4206240"/>
+          </a:xfrm>
+          <a:prstGeom prst="rect">
+            <a:avLst/>
+          </a:prstGeom>
+          <a:noFill/>
+        </p:spPr>
+        <p:txBody>
+          <a:bodyPr wrap="square">
+            <a:spAutoFit/>
+          </a:bodyPr>
+          <a:lstStyle/>
+          <a:p>
+            <a:pPr>
+              <a:spcAft>
+                <a:spcPts val="1100"/>
+              </a:spcAft>
+            </a:pPr>
+            <a:r>
+              <a:rPr sz="1600" b="1" i="0">
+                <a:solidFill>
+                  <a:srgbClr val="E8801A"/>
+                </a:solidFill>
+                <a:latin typeface="Montserrat"/>
+              </a:rPr>
+              <a:t>▸  </a:t>
+            </a:r>
+            <a:r>
+              <a:rPr sz="1600" b="0" i="0">
+                <a:solidFill>
+                  <a:srgbClr val="1B2330"/>
+                </a:solidFill>
+                <a:latin typeface="Montserrat"/>
+              </a:rPr>
+              <a:t>GNL → UNE 60210 → criogénico</a:t>
+            </a:r>
+          </a:p>
+          <a:p>
+            <a:pPr>
+              <a:spcAft>
+                <a:spcPts val="1100"/>
+              </a:spcAft>
+            </a:pPr>
+            <a:r>
+              <a:rPr sz="1600" b="1" i="0">
+                <a:solidFill>
+                  <a:srgbClr val="E8801A"/>
+                </a:solidFill>
+                <a:latin typeface="Montserrat"/>
+              </a:rPr>
+              <a:t>▸  </a:t>
+            </a:r>
+            <a:r>
+              <a:rPr sz="1600" b="0" i="0">
+                <a:solidFill>
+                  <a:srgbClr val="1B2330"/>
+                </a:solidFill>
+                <a:latin typeface="Montserrat"/>
+              </a:rPr>
+              <a:t>Autorización previa (salvo autoconsumo)</a:t>
+            </a:r>
+          </a:p>
+          <a:p>
+            <a:pPr>
+              <a:spcAft>
+                <a:spcPts val="1100"/>
+              </a:spcAft>
+            </a:pPr>
+            <a:r>
+              <a:rPr sz="1600" b="1" i="0">
+                <a:solidFill>
+                  <a:srgbClr val="E8801A"/>
+                </a:solidFill>
+                <a:latin typeface="Montserrat"/>
+              </a:rPr>
+              <a:t>▸  </a:t>
+            </a:r>
+            <a:r>
+              <a:rPr sz="1600" b="0" i="0">
+                <a:solidFill>
+                  <a:srgbClr val="1B2330"/>
+                </a:solidFill>
+                <a:latin typeface="Montserrat"/>
+              </a:rPr>
+              <a:t>Siempre proyecto + planes de emergencia</a:t>
+            </a:r>
+          </a:p>
+          <a:p>
+            <a:pPr>
+              <a:spcAft>
+                <a:spcPts val="1100"/>
+              </a:spcAft>
+            </a:pPr>
+            <a:r>
+              <a:rPr sz="1600" b="1" i="0">
+                <a:solidFill>
+                  <a:srgbClr val="E8801A"/>
+                </a:solidFill>
+                <a:latin typeface="Montserrat"/>
+              </a:rPr>
+              <a:t>▸  </a:t>
+            </a:r>
+            <a:r>
+              <a:rPr sz="1600" b="0" i="0">
+                <a:solidFill>
+                  <a:srgbClr val="1B2330"/>
+                </a:solidFill>
+                <a:latin typeface="Montserrat"/>
+              </a:rPr>
+              <a:t>Controles: 5 años · V × P · 300</a:t>
+            </a:r>
+          </a:p>
+          <a:p>
+            <a:pPr>
+              <a:spcAft>
+                <a:spcPts val="1100"/>
+              </a:spcAft>
+            </a:pPr>
+            <a:r>
+              <a:rPr sz="1600" b="1" i="0">
+                <a:solidFill>
+                  <a:srgbClr val="E8801A"/>
+                </a:solidFill>
+                <a:latin typeface="Montserrat"/>
+              </a:rPr>
+              <a:t>▸  </a:t>
+            </a:r>
+            <a:r>
+              <a:rPr sz="1600" b="0" i="0">
+                <a:solidFill>
+                  <a:srgbClr val="1B2330"/>
+                </a:solidFill>
+                <a:latin typeface="Montserrat"/>
+              </a:rPr>
+              <a:t>Prueba neumática cada 15 años</a:t>
+            </a:r>
+          </a:p>
+        </p:txBody>
+      </p:sp>
+      <p:sp>
+        <p:nvSpPr>
+          <p:cNvPr id="9" name="imgph" descr="IMGQ:LNG plant overview facility"/>
+          <p:cNvSpPr/>
+          <p:nvPr/>
+        </p:nvSpPr>
+        <p:spPr>
+          <a:xfrm>
+            <a:off x="5806440" y="1051560"/>
+            <a:ext cx="5298947" cy="4629150"/>
+          </a:xfrm>
+          <a:prstGeom prst="roundRect">
+            <a:avLst/>
+          </a:prstGeom>
+          <a:solidFill>
+            <a:srgbClr val="F3F6FB"/>
+          </a:solidFill>
+          <a:ln w="12700">
+            <a:solidFill>
+              <a:srgbClr val="C7D2E6"/>
+            </a:solidFill>
+          </a:ln>
+          <a:effectLst/>
+        </p:spPr>
+        <p:style>
+          <a:lnRef idx="1">
+            <a:schemeClr val="accent1"/>
+          </a:lnRef>
+          <a:fillRef idx="3">
+            <a:schemeClr val="accent1"/>
+          </a:fillRef>
+          <a:effectRef idx="2">
+            <a:schemeClr val="accent1"/>
+          </a:effectRef>
+          <a:fontRef idx="minor">
+            <a:schemeClr val="lt1"/>
+          </a:fontRef>
+        </p:style>
+        <p:txBody>
+          <a:bodyPr rtlCol="0" anchor="ctr"/>
+          <a:lstStyle/>
+          <a:p>
+            <a:pPr algn="ctr"/>
+          </a:p>
+        </p:txBody>
+      </p:sp>
+      <p:sp>
+        <p:nvSpPr>
+          <p:cNvPr id="10" name="TextBox 9"/>
+          <p:cNvSpPr txBox="1"/>
+          <p:nvPr/>
+        </p:nvSpPr>
+        <p:spPr>
+          <a:xfrm>
+            <a:off x="6080760" y="2726055"/>
+            <a:ext cx="4750307" cy="1280160"/>
+          </a:xfrm>
+          <a:prstGeom prst="rect">
+            <a:avLst/>
+          </a:prstGeom>
+          <a:noFill/>
+        </p:spPr>
+        <p:txBody>
+          <a:bodyPr wrap="square">
+            <a:spAutoFit/>
+          </a:bodyPr>
+          <a:lstStyle/>
+          <a:p>
+            <a:pPr algn="ctr"/>
+            <a:r>
+              <a:rPr sz="1400" b="1" i="0">
+                <a:solidFill>
+                  <a:srgbClr val="64748B"/>
+                </a:solidFill>
+                <a:latin typeface="Montserrat"/>
+              </a:rPr>
+              <a:t>IMAGEN REALISTA</a:t>
+            </a:r>
+          </a:p>
+          <a:p>
+            <a:pPr algn="ctr"/>
+            <a:r>
+              <a:rPr sz="1100" b="0" i="1">
+                <a:solidFill>
+                  <a:srgbClr val="64748B"/>
+                </a:solidFill>
+                <a:latin typeface="Montserrat"/>
+              </a:rPr>
+              <a:t>LNG plant overview facility</a:t>
+            </a:r>
+          </a:p>
+        </p:txBody>
+      </p:sp>
+    </p:spTree>
+  </p:cSld>
+  <p:clrMapOvr>
+    <a:masterClrMapping/>
+  </p:clrMapOvr>
+</p:sld>
+</file>
+
+<file path=ppt/slides/slide16.xml><?xml version="1.0" encoding="utf-8"?>
+<p:sld xmlns:a="http://schemas.openxmlformats.org/drawingml/2006/main" xmlns:p="http://schemas.openxmlformats.org/presentationml/2006/main" xmlns:r="http://schemas.openxmlformats.org/officeDocument/2006/relationships">
+  <p:cSld>
+    <p:spTree>
+      <p:nvGrpSpPr>
+        <p:cNvPr id="1" name=""/>
+        <p:cNvGrpSpPr/>
+        <p:nvPr/>
+      </p:nvGrpSpPr>
+      <p:grpSpPr/>
+      <p:sp>
+        <p:nvSpPr>
+          <p:cNvPr id="2" name="Rectangle 1"/>
+          <p:cNvSpPr/>
+          <p:nvPr/>
+        </p:nvSpPr>
+        <p:spPr>
+          <a:xfrm>
+            <a:off x="0" y="0"/>
+            <a:ext cx="12191695" cy="6858000"/>
+          </a:xfrm>
+          <a:prstGeom prst="rect">
+            <a:avLst/>
+          </a:prstGeom>
+          <a:solidFill>
             <a:srgbClr val="1E2761"/>
           </a:solidFill>
           <a:ln>
@@ -6931,7 +7721,7 @@
             <a:r>
               <a:rPr sz="1400" b="1" i="0">
                 <a:solidFill>
-                  <a:srgbClr val="CADCFC"/>
+                  <a:srgbClr val="F4A24C"/>
                 </a:solidFill>
                 <a:latin typeface="Montserrat"/>
               </a:rPr>
@@ -6942,13 +7732,57 @@
       </p:sp>
       <p:sp>
         <p:nvSpPr>
-          <p:cNvPr id="4" name="TextBox 3"/>
+          <p:cNvPr id="4" name="Rounded Rectangle 3"/>
+          <p:cNvSpPr/>
+          <p:nvPr/>
+        </p:nvSpPr>
+        <p:spPr>
+          <a:xfrm>
+            <a:off x="868680" y="1051560"/>
+            <a:ext cx="1463040" cy="82296"/>
+          </a:xfrm>
+          <a:prstGeom prst="roundRect">
+            <a:avLst/>
+          </a:prstGeom>
+          <a:solidFill>
+            <a:srgbClr val="E8801A"/>
+          </a:solidFill>
+          <a:ln>
+            <a:noFill/>
+          </a:ln>
+          <a:effectLst/>
+        </p:spPr>
+        <p:style>
+          <a:lnRef idx="1">
+            <a:schemeClr val="accent1"/>
+          </a:lnRef>
+          <a:fillRef idx="3">
+            <a:schemeClr val="accent1"/>
+          </a:fillRef>
+          <a:effectRef idx="2">
+            <a:schemeClr val="accent1"/>
+          </a:effectRef>
+          <a:fontRef idx="minor">
+            <a:schemeClr val="lt1"/>
+          </a:fontRef>
+        </p:style>
+        <p:txBody>
+          <a:bodyPr rtlCol="0" anchor="ctr"/>
+          <a:lstStyle/>
+          <a:p>
+            <a:pPr algn="ctr"/>
+          </a:p>
+        </p:txBody>
+      </p:sp>
+      <p:sp>
+        <p:nvSpPr>
+          <p:cNvPr id="5" name="TextBox 4"/>
           <p:cNvSpPr txBox="1"/>
           <p:nvPr/>
         </p:nvSpPr>
         <p:spPr>
           <a:xfrm>
-            <a:off x="822960" y="1143000"/>
+            <a:off x="822960" y="1234440"/>
             <a:ext cx="10515600" cy="1097280"/>
           </a:xfrm>
           <a:prstGeom prst="rect">
@@ -6976,14 +7810,14 @@
       </p:sp>
       <p:sp>
         <p:nvSpPr>
-          <p:cNvPr id="5" name="TextBox 4"/>
+          <p:cNvPr id="6" name="TextBox 5"/>
           <p:cNvSpPr txBox="1"/>
           <p:nvPr/>
         </p:nvSpPr>
         <p:spPr>
           <a:xfrm>
-            <a:off x="822960" y="2514600"/>
-            <a:ext cx="10515600" cy="2834640"/>
+            <a:off x="822960" y="2606040"/>
+            <a:ext cx="10515600" cy="2743200"/>
           </a:xfrm>
           <a:prstGeom prst="rect">
             <a:avLst/>
@@ -7004,7 +7838,7 @@
             <a:r>
               <a:rPr sz="2000" b="1" i="0">
                 <a:solidFill>
-                  <a:srgbClr val="CADCFC"/>
+                  <a:srgbClr val="F4A24C"/>
                 </a:solidFill>
                 <a:latin typeface="Montserrat"/>
               </a:rPr>
@@ -7029,7 +7863,7 @@
             <a:r>
               <a:rPr sz="2000" b="1" i="0">
                 <a:solidFill>
-                  <a:srgbClr val="CADCFC"/>
+                  <a:srgbClr val="F4A24C"/>
                 </a:solidFill>
                 <a:latin typeface="Montserrat"/>
               </a:rPr>
@@ -7054,7 +7888,7 @@
             <a:r>
               <a:rPr sz="2000" b="1" i="0">
                 <a:solidFill>
-                  <a:srgbClr val="CADCFC"/>
+                  <a:srgbClr val="F4A24C"/>
                 </a:solidFill>
                 <a:latin typeface="Montserrat"/>
               </a:rPr>
@@ -7079,7 +7913,7 @@
             <a:r>
               <a:rPr sz="2000" b="1" i="0">
                 <a:solidFill>
-                  <a:srgbClr val="CADCFC"/>
+                  <a:srgbClr val="F4A24C"/>
                 </a:solidFill>
                 <a:latin typeface="Montserrat"/>
               </a:rPr>
@@ -7099,20 +7933,20 @@
       </p:sp>
       <p:sp>
         <p:nvSpPr>
-          <p:cNvPr id="6" name="Rounded Rectangle 5"/>
+          <p:cNvPr id="7" name="Rounded Rectangle 6"/>
           <p:cNvSpPr/>
           <p:nvPr/>
         </p:nvSpPr>
         <p:spPr>
           <a:xfrm>
             <a:off x="822960" y="5532120"/>
-            <a:ext cx="10515600" cy="777240"/>
+            <a:ext cx="10515600" cy="822960"/>
           </a:xfrm>
           <a:prstGeom prst="roundRect">
             <a:avLst/>
           </a:prstGeom>
           <a:solidFill>
-            <a:srgbClr val="2E3A80"/>
+            <a:srgbClr val="E8801A"/>
           </a:solidFill>
           <a:ln>
             <a:noFill/>
@@ -7143,13 +7977,13 @@
       </p:sp>
       <p:sp>
         <p:nvSpPr>
-          <p:cNvPr id="7" name="TextBox 6"/>
+          <p:cNvPr id="8" name="TextBox 7"/>
           <p:cNvSpPr txBox="1"/>
           <p:nvPr/>
         </p:nvSpPr>
         <p:spPr>
           <a:xfrm>
-            <a:off x="1051560" y="5605272"/>
+            <a:off x="1051560" y="5623560"/>
             <a:ext cx="10058400" cy="640080"/>
           </a:xfrm>
           <a:prstGeom prst="rect">
@@ -7166,7 +8000,7 @@
             <a:r>
               <a:rPr sz="1500" b="1" i="1">
                 <a:solidFill>
-                  <a:srgbClr val="CADCFC"/>
+                  <a:srgbClr val="1E2761"/>
                 </a:solidFill>
                 <a:latin typeface="Montserrat"/>
               </a:rPr>
@@ -7267,7 +8101,7 @@
                 </a:solidFill>
                 <a:latin typeface="Montserrat"/>
               </a:rPr>
-              <a:t>002 / 015</a:t>
+              <a:t>002 / 016</a:t>
             </a:r>
           </a:p>
         </p:txBody>
@@ -7331,7 +8165,7 @@
             <a:r>
               <a:rPr sz="2700" b="1" i="0">
                 <a:solidFill>
-                  <a:srgbClr val="1E2761"/>
+                  <a:srgbClr val="E8801A"/>
                 </a:solidFill>
                 <a:latin typeface="Montserrat"/>
               </a:rPr>
@@ -7343,6 +8177,50 @@
       <p:sp>
         <p:nvSpPr>
           <p:cNvPr id="6" name="Rounded Rectangle 5"/>
+          <p:cNvSpPr/>
+          <p:nvPr/>
+        </p:nvSpPr>
+        <p:spPr>
+          <a:xfrm>
+            <a:off x="868680" y="1234440"/>
+            <a:ext cx="1463040" cy="73152"/>
+          </a:xfrm>
+          <a:prstGeom prst="roundRect">
+            <a:avLst/>
+          </a:prstGeom>
+          <a:solidFill>
+            <a:srgbClr val="1E2761"/>
+          </a:solidFill>
+          <a:ln>
+            <a:noFill/>
+          </a:ln>
+          <a:effectLst/>
+        </p:spPr>
+        <p:style>
+          <a:lnRef idx="1">
+            <a:schemeClr val="accent1"/>
+          </a:lnRef>
+          <a:fillRef idx="3">
+            <a:schemeClr val="accent1"/>
+          </a:fillRef>
+          <a:effectRef idx="2">
+            <a:schemeClr val="accent1"/>
+          </a:effectRef>
+          <a:fontRef idx="minor">
+            <a:schemeClr val="lt1"/>
+          </a:fontRef>
+        </p:style>
+        <p:txBody>
+          <a:bodyPr rtlCol="0" anchor="ctr"/>
+          <a:lstStyle/>
+          <a:p>
+            <a:pPr algn="ctr"/>
+          </a:p>
+        </p:txBody>
+      </p:sp>
+      <p:sp>
+        <p:nvSpPr>
+          <p:cNvPr id="7" name="Rounded Rectangle 6"/>
           <p:cNvSpPr/>
           <p:nvPr/>
         </p:nvSpPr>
@@ -7388,7 +8266,7 @@
       </p:sp>
       <p:sp>
         <p:nvSpPr>
-          <p:cNvPr id="7" name="TextBox 6"/>
+          <p:cNvPr id="8" name="TextBox 7"/>
           <p:cNvSpPr txBox="1"/>
           <p:nvPr/>
         </p:nvSpPr>
@@ -7423,7 +8301,7 @@
       </p:sp>
       <p:sp>
         <p:nvSpPr>
-          <p:cNvPr id="8" name="TextBox 7"/>
+          <p:cNvPr id="9" name="TextBox 8"/>
           <p:cNvSpPr txBox="1"/>
           <p:nvPr/>
         </p:nvSpPr>
@@ -7458,7 +8336,7 @@
       </p:sp>
       <p:sp>
         <p:nvSpPr>
-          <p:cNvPr id="9" name="Rounded Rectangle 8"/>
+          <p:cNvPr id="10" name="Rounded Rectangle 9"/>
           <p:cNvSpPr/>
           <p:nvPr/>
         </p:nvSpPr>
@@ -7504,7 +8382,7 @@
       </p:sp>
       <p:sp>
         <p:nvSpPr>
-          <p:cNvPr id="10" name="TextBox 9"/>
+          <p:cNvPr id="11" name="TextBox 10"/>
           <p:cNvSpPr txBox="1"/>
           <p:nvPr/>
         </p:nvSpPr>
@@ -7539,7 +8417,7 @@
       </p:sp>
       <p:sp>
         <p:nvSpPr>
-          <p:cNvPr id="11" name="TextBox 10"/>
+          <p:cNvPr id="12" name="TextBox 11"/>
           <p:cNvSpPr txBox="1"/>
           <p:nvPr/>
         </p:nvSpPr>
@@ -7574,7 +8452,7 @@
       </p:sp>
       <p:sp>
         <p:nvSpPr>
-          <p:cNvPr id="12" name="Rounded Rectangle 11"/>
+          <p:cNvPr id="13" name="Rounded Rectangle 12"/>
           <p:cNvSpPr/>
           <p:nvPr/>
         </p:nvSpPr>
@@ -7620,7 +8498,7 @@
       </p:sp>
       <p:sp>
         <p:nvSpPr>
-          <p:cNvPr id="13" name="TextBox 12"/>
+          <p:cNvPr id="14" name="TextBox 13"/>
           <p:cNvSpPr txBox="1"/>
           <p:nvPr/>
         </p:nvSpPr>
@@ -7655,7 +8533,7 @@
       </p:sp>
       <p:sp>
         <p:nvSpPr>
-          <p:cNvPr id="14" name="TextBox 13"/>
+          <p:cNvPr id="15" name="TextBox 14"/>
           <p:cNvSpPr txBox="1"/>
           <p:nvPr/>
         </p:nvSpPr>
@@ -7780,7 +8658,7 @@
                 </a:solidFill>
                 <a:latin typeface="Montserrat"/>
               </a:rPr>
-              <a:t>003 / 015</a:t>
+              <a:t>003 / 016</a:t>
             </a:r>
           </a:p>
         </p:txBody>
@@ -7827,7 +8705,7 @@
         </p:nvSpPr>
         <p:spPr>
           <a:xfrm>
-            <a:off x="822960" y="457200"/>
+            <a:off x="822960" y="502920"/>
             <a:ext cx="8229600" cy="365760"/>
           </a:xfrm>
           <a:prstGeom prst="rect">
@@ -7842,13 +8720,13 @@
           <a:lstStyle/>
           <a:p>
             <a:r>
-              <a:rPr sz="1200" b="1" i="0">
-                <a:solidFill>
-                  <a:srgbClr val="64748B"/>
-                </a:solidFill>
-                <a:latin typeface="Montserrat"/>
-              </a:rPr>
-              <a:t>APARTADO 1 · OBJETO</a:t>
+              <a:rPr sz="1300" b="1" i="0">
+                <a:solidFill>
+                  <a:srgbClr val="E8801A"/>
+                </a:solidFill>
+                <a:latin typeface="Montserrat"/>
+              </a:rPr>
+              <a:t>PARTES DE ESTE VÍDEO</a:t>
             </a:r>
           </a:p>
         </p:txBody>
@@ -7861,7 +8739,7 @@
         </p:nvSpPr>
         <p:spPr>
           <a:xfrm>
-            <a:off x="822960" y="868680"/>
+            <a:off x="822960" y="914400"/>
             <a:ext cx="10515600" cy="914400"/>
           </a:xfrm>
           <a:prstGeom prst="rect">
@@ -7882,155 +8760,30 @@
                 </a:solidFill>
                 <a:latin typeface="Montserrat"/>
               </a:rPr>
-              <a:t>¿Qué es una planta satélite?</a:t>
-            </a:r>
-          </a:p>
-        </p:txBody>
-      </p:sp>
-      <p:sp>
-        <p:nvSpPr>
-          <p:cNvPr id="7" name="TextBox 6"/>
-          <p:cNvSpPr txBox="1"/>
-          <p:nvPr/>
-        </p:nvSpPr>
-        <p:spPr>
-          <a:xfrm>
-            <a:off x="822960" y="1920240"/>
-            <a:ext cx="4983480" cy="4206240"/>
-          </a:xfrm>
-          <a:prstGeom prst="rect">
-            <a:avLst/>
-          </a:prstGeom>
-          <a:noFill/>
-        </p:spPr>
-        <p:txBody>
-          <a:bodyPr wrap="square">
-            <a:spAutoFit/>
-          </a:bodyPr>
-          <a:lstStyle/>
-          <a:p>
-            <a:pPr>
-              <a:spcAft>
-                <a:spcPts val="1000"/>
-              </a:spcAft>
-            </a:pPr>
-            <a:r>
-              <a:rPr sz="1600" b="1" i="0">
-                <a:solidFill>
-                  <a:srgbClr val="2E3A80"/>
-                </a:solidFill>
-                <a:latin typeface="Montserrat"/>
-              </a:rPr>
-              <a:t>•  </a:t>
-            </a:r>
-            <a:r>
-              <a:rPr sz="1600" b="0" i="0">
-                <a:solidFill>
-                  <a:srgbClr val="1B2330"/>
-                </a:solidFill>
-                <a:latin typeface="Montserrat"/>
-              </a:rPr>
-              <a:t>GNL: gas natural licuado, muy frío</a:t>
-            </a:r>
-          </a:p>
-          <a:p>
-            <a:pPr>
-              <a:spcAft>
-                <a:spcPts val="1000"/>
-              </a:spcAft>
-            </a:pPr>
-            <a:r>
-              <a:rPr sz="1600" b="1" i="0">
-                <a:solidFill>
-                  <a:srgbClr val="2E3A80"/>
-                </a:solidFill>
-                <a:latin typeface="Montserrat"/>
-              </a:rPr>
-              <a:t>•  </a:t>
-            </a:r>
-            <a:r>
-              <a:rPr sz="1600" b="0" i="0">
-                <a:solidFill>
-                  <a:srgbClr val="1B2330"/>
-                </a:solidFill>
-                <a:latin typeface="Montserrat"/>
-              </a:rPr>
-              <a:t>Enfriado a unos -160 °C</a:t>
-            </a:r>
-          </a:p>
-          <a:p>
-            <a:pPr>
-              <a:spcAft>
-                <a:spcPts val="1000"/>
-              </a:spcAft>
-            </a:pPr>
-            <a:r>
-              <a:rPr sz="1600" b="1" i="0">
-                <a:solidFill>
-                  <a:srgbClr val="2E3A80"/>
-                </a:solidFill>
-                <a:latin typeface="Montserrat"/>
-              </a:rPr>
-              <a:t>•  </a:t>
-            </a:r>
-            <a:r>
-              <a:rPr sz="1600" b="0" i="0">
-                <a:solidFill>
-                  <a:srgbClr val="1B2330"/>
-                </a:solidFill>
-                <a:latin typeface="Montserrat"/>
-              </a:rPr>
-              <a:t>Un gasoducto de mentira</a:t>
-            </a:r>
-          </a:p>
-          <a:p>
-            <a:pPr>
-              <a:spcAft>
-                <a:spcPts val="1000"/>
-              </a:spcAft>
-            </a:pPr>
-            <a:r>
-              <a:rPr sz="1600" b="1" i="0">
-                <a:solidFill>
-                  <a:srgbClr val="2E3A80"/>
-                </a:solidFill>
-                <a:latin typeface="Montserrat"/>
-              </a:rPr>
-              <a:t>•  </a:t>
-            </a:r>
-            <a:r>
-              <a:rPr sz="1600" b="0" i="0">
-                <a:solidFill>
-                  <a:srgbClr val="1B2330"/>
-                </a:solidFill>
-                <a:latin typeface="Montserrat"/>
-              </a:rPr>
-              <a:t>El camión llena el depósito local</a:t>
-            </a:r>
-          </a:p>
-        </p:txBody>
-      </p:sp>
-      <p:sp>
-        <p:nvSpPr>
-          <p:cNvPr id="8" name="imgph" descr="IMGQ:LNG cryogenic storage tank plant"/>
+              <a:t>En este vídeo</a:t>
+            </a:r>
+          </a:p>
+        </p:txBody>
+      </p:sp>
+      <p:sp>
+        <p:nvSpPr>
+          <p:cNvPr id="7" name="Rounded Rectangle 6"/>
           <p:cNvSpPr/>
           <p:nvPr/>
         </p:nvSpPr>
         <p:spPr>
           <a:xfrm>
-            <a:off x="5806440" y="1051560"/>
-            <a:ext cx="5298947" cy="4629150"/>
+            <a:off x="868680" y="1673352"/>
+            <a:ext cx="2011680" cy="73152"/>
           </a:xfrm>
           <a:prstGeom prst="roundRect">
             <a:avLst/>
           </a:prstGeom>
           <a:solidFill>
-            <a:srgbClr val="F3F6FB"/>
+            <a:srgbClr val="E8801A"/>
           </a:solidFill>
-          <a:ln w="12700">
-            <a:solidFill>
-              <a:srgbClr val="C7D2E6"/>
-            </a:solidFill>
+          <a:ln>
+            <a:noFill/>
           </a:ln>
           <a:effectLst/>
         </p:spPr>
@@ -8058,14 +8811,14 @@
       </p:sp>
       <p:sp>
         <p:nvSpPr>
-          <p:cNvPr id="9" name="TextBox 8"/>
+          <p:cNvPr id="8" name="TextBox 7"/>
           <p:cNvSpPr txBox="1"/>
           <p:nvPr/>
         </p:nvSpPr>
         <p:spPr>
           <a:xfrm>
-            <a:off x="6080760" y="2726055"/>
-            <a:ext cx="4750307" cy="1280160"/>
+            <a:off x="822960" y="2103120"/>
+            <a:ext cx="10515600" cy="4023360"/>
           </a:xfrm>
           <a:prstGeom prst="rect">
             <a:avLst/>
@@ -8078,27 +8831,228 @@
           </a:bodyPr>
           <a:lstStyle/>
           <a:p>
-            <a:pPr algn="ctr"/>
-            <a:r>
-              <a:rPr sz="1400" b="1" i="0">
-                <a:solidFill>
-                  <a:srgbClr val="64748B"/>
-                </a:solidFill>
-                <a:latin typeface="Montserrat"/>
-              </a:rPr>
-              <a:t>IMAGEN REALISTA</a:t>
-            </a:r>
-          </a:p>
-          <a:p>
-            <a:pPr algn="ctr"/>
-            <a:r>
-              <a:rPr sz="1100" b="0" i="1">
-                <a:solidFill>
-                  <a:srgbClr val="64748B"/>
-                </a:solidFill>
-                <a:latin typeface="Montserrat"/>
-              </a:rPr>
-              <a:t>LNG cryogenic storage tank plant</a:t>
+            <a:pPr>
+              <a:spcAft>
+                <a:spcPts val="900"/>
+              </a:spcAft>
+            </a:pPr>
+            <a:r>
+              <a:rPr sz="1800" b="1" i="0">
+                <a:solidFill>
+                  <a:srgbClr val="E8801A"/>
+                </a:solidFill>
+                <a:latin typeface="Montserrat"/>
+              </a:rPr>
+              <a:t>01   </a:t>
+            </a:r>
+            <a:r>
+              <a:rPr sz="1700" b="0" i="0">
+                <a:solidFill>
+                  <a:srgbClr val="1B2330"/>
+                </a:solidFill>
+                <a:latin typeface="Montserrat"/>
+              </a:rPr>
+              <a:t>Apartado 1</a:t>
+            </a:r>
+          </a:p>
+          <a:p>
+            <a:pPr>
+              <a:spcAft>
+                <a:spcPts val="900"/>
+              </a:spcAft>
+            </a:pPr>
+            <a:r>
+              <a:rPr sz="1800" b="1" i="0">
+                <a:solidFill>
+                  <a:srgbClr val="E8801A"/>
+                </a:solidFill>
+                <a:latin typeface="Montserrat"/>
+              </a:rPr>
+              <a:t>02   </a:t>
+            </a:r>
+            <a:r>
+              <a:rPr sz="1700" b="0" i="0">
+                <a:solidFill>
+                  <a:srgbClr val="1B2330"/>
+                </a:solidFill>
+                <a:latin typeface="Montserrat"/>
+              </a:rPr>
+              <a:t>Apartado 2</a:t>
+            </a:r>
+          </a:p>
+          <a:p>
+            <a:pPr>
+              <a:spcAft>
+                <a:spcPts val="900"/>
+              </a:spcAft>
+            </a:pPr>
+            <a:r>
+              <a:rPr sz="1800" b="1" i="0">
+                <a:solidFill>
+                  <a:srgbClr val="E8801A"/>
+                </a:solidFill>
+                <a:latin typeface="Montserrat"/>
+              </a:rPr>
+              <a:t>03   </a:t>
+            </a:r>
+            <a:r>
+              <a:rPr sz="1700" b="0" i="0">
+                <a:solidFill>
+                  <a:srgbClr val="1B2330"/>
+                </a:solidFill>
+                <a:latin typeface="Montserrat"/>
+              </a:rPr>
+              <a:t>Apartados 3 y 4</a:t>
+            </a:r>
+          </a:p>
+          <a:p>
+            <a:pPr>
+              <a:spcAft>
+                <a:spcPts val="900"/>
+              </a:spcAft>
+            </a:pPr>
+            <a:r>
+              <a:rPr sz="1800" b="1" i="0">
+                <a:solidFill>
+                  <a:srgbClr val="E8801A"/>
+                </a:solidFill>
+                <a:latin typeface="Montserrat"/>
+              </a:rPr>
+              <a:t>04   </a:t>
+            </a:r>
+            <a:r>
+              <a:rPr sz="1700" b="0" i="0">
+                <a:solidFill>
+                  <a:srgbClr val="1B2330"/>
+                </a:solidFill>
+                <a:latin typeface="Montserrat"/>
+              </a:rPr>
+              <a:t>Apartado 5.1</a:t>
+            </a:r>
+          </a:p>
+          <a:p>
+            <a:pPr>
+              <a:spcAft>
+                <a:spcPts val="900"/>
+              </a:spcAft>
+            </a:pPr>
+            <a:r>
+              <a:rPr sz="1800" b="1" i="0">
+                <a:solidFill>
+                  <a:srgbClr val="E8801A"/>
+                </a:solidFill>
+                <a:latin typeface="Montserrat"/>
+              </a:rPr>
+              <a:t>05   </a:t>
+            </a:r>
+            <a:r>
+              <a:rPr sz="1700" b="0" i="0">
+                <a:solidFill>
+                  <a:srgbClr val="1B2330"/>
+                </a:solidFill>
+                <a:latin typeface="Montserrat"/>
+              </a:rPr>
+              <a:t>Apartado 5.2</a:t>
+            </a:r>
+          </a:p>
+          <a:p>
+            <a:pPr>
+              <a:spcAft>
+                <a:spcPts val="900"/>
+              </a:spcAft>
+            </a:pPr>
+            <a:r>
+              <a:rPr sz="1800" b="1" i="0">
+                <a:solidFill>
+                  <a:srgbClr val="E8801A"/>
+                </a:solidFill>
+                <a:latin typeface="Montserrat"/>
+              </a:rPr>
+              <a:t>06   </a:t>
+            </a:r>
+            <a:r>
+              <a:rPr sz="1700" b="0" i="0">
+                <a:solidFill>
+                  <a:srgbClr val="1B2330"/>
+                </a:solidFill>
+                <a:latin typeface="Montserrat"/>
+              </a:rPr>
+              <a:t>Apartados 5.3 y 5.4</a:t>
+            </a:r>
+          </a:p>
+          <a:p>
+            <a:pPr>
+              <a:spcAft>
+                <a:spcPts val="900"/>
+              </a:spcAft>
+            </a:pPr>
+            <a:r>
+              <a:rPr sz="1800" b="1" i="0">
+                <a:solidFill>
+                  <a:srgbClr val="E8801A"/>
+                </a:solidFill>
+                <a:latin typeface="Montserrat"/>
+              </a:rPr>
+              <a:t>07   </a:t>
+            </a:r>
+            <a:r>
+              <a:rPr sz="1700" b="0" i="0">
+                <a:solidFill>
+                  <a:srgbClr val="1B2330"/>
+                </a:solidFill>
+                <a:latin typeface="Montserrat"/>
+              </a:rPr>
+              <a:t>Apartados 5.5 y 5.6</a:t>
+            </a:r>
+          </a:p>
+          <a:p>
+            <a:pPr>
+              <a:spcAft>
+                <a:spcPts val="900"/>
+              </a:spcAft>
+            </a:pPr>
+            <a:r>
+              <a:rPr sz="1800" b="1" i="0">
+                <a:solidFill>
+                  <a:srgbClr val="E8801A"/>
+                </a:solidFill>
+                <a:latin typeface="Montserrat"/>
+              </a:rPr>
+              <a:t>08   </a:t>
+            </a:r>
+            <a:r>
+              <a:rPr sz="1700" b="0" i="0">
+                <a:solidFill>
+                  <a:srgbClr val="1B2330"/>
+                </a:solidFill>
+                <a:latin typeface="Montserrat"/>
+              </a:rPr>
+              <a:t>Apartado 6.1</a:t>
+            </a:r>
+          </a:p>
+          <a:p>
+            <a:pPr>
+              <a:spcAft>
+                <a:spcPts val="900"/>
+              </a:spcAft>
+            </a:pPr>
+            <a:r>
+              <a:rPr sz="1800" b="1" i="0">
+                <a:solidFill>
+                  <a:srgbClr val="E8801A"/>
+                </a:solidFill>
+                <a:latin typeface="Montserrat"/>
+              </a:rPr>
+              <a:t>09   </a:t>
+            </a:r>
+            <a:r>
+              <a:rPr sz="1700" b="0" i="0">
+                <a:solidFill>
+                  <a:srgbClr val="1B2330"/>
+                </a:solidFill>
+                <a:latin typeface="Montserrat"/>
+              </a:rPr>
+              <a:t>Apartado 6.2</a:t>
             </a:r>
           </a:p>
         </p:txBody>
@@ -8195,7 +9149,7 @@
                 </a:solidFill>
                 <a:latin typeface="Montserrat"/>
               </a:rPr>
-              <a:t>004 / 015</a:t>
+              <a:t>004 / 016</a:t>
             </a:r>
           </a:p>
         </p:txBody>
@@ -8243,7 +9197,7 @@
         <p:spPr>
           <a:xfrm>
             <a:off x="822960" y="457200"/>
-            <a:ext cx="8229600" cy="365760"/>
+            <a:ext cx="10058400" cy="365760"/>
           </a:xfrm>
           <a:prstGeom prst="rect">
             <a:avLst/>
@@ -8257,13 +9211,13 @@
           <a:lstStyle/>
           <a:p>
             <a:r>
-              <a:rPr sz="1200" b="1" i="0">
-                <a:solidFill>
-                  <a:srgbClr val="64748B"/>
-                </a:solidFill>
-                <a:latin typeface="Montserrat"/>
-              </a:rPr>
-              <a:t>APARTADO 2 · CAMPO</a:t>
+              <a:rPr sz="1300" b="1" i="0">
+                <a:solidFill>
+                  <a:srgbClr val="E8801A"/>
+                </a:solidFill>
+                <a:latin typeface="Montserrat"/>
+              </a:rPr>
+              <a:t>APARTADO 1 · OBJETO</a:t>
             </a:r>
           </a:p>
         </p:txBody>
@@ -8291,26 +9245,70 @@
           <a:lstStyle/>
           <a:p>
             <a:r>
-              <a:rPr sz="2700" b="1" i="0">
+              <a:rPr sz="2800" b="1" i="0">
                 <a:solidFill>
                   <a:srgbClr val="1E2761"/>
                 </a:solidFill>
                 <a:latin typeface="Montserrat"/>
               </a:rPr>
-              <a:t>El techo: 1.000 m³</a:t>
-            </a:r>
-          </a:p>
-        </p:txBody>
-      </p:sp>
-      <p:sp>
-        <p:nvSpPr>
-          <p:cNvPr id="7" name="TextBox 6"/>
+              <a:t>¿Qué es una planta satélite?</a:t>
+            </a:r>
+          </a:p>
+        </p:txBody>
+      </p:sp>
+      <p:sp>
+        <p:nvSpPr>
+          <p:cNvPr id="7" name="Rounded Rectangle 6"/>
+          <p:cNvSpPr/>
+          <p:nvPr/>
+        </p:nvSpPr>
+        <p:spPr>
+          <a:xfrm>
+            <a:off x="868680" y="1627632"/>
+            <a:ext cx="2011680" cy="73152"/>
+          </a:xfrm>
+          <a:prstGeom prst="roundRect">
+            <a:avLst/>
+          </a:prstGeom>
+          <a:solidFill>
+            <a:srgbClr val="E8801A"/>
+          </a:solidFill>
+          <a:ln>
+            <a:noFill/>
+          </a:ln>
+          <a:effectLst/>
+        </p:spPr>
+        <p:style>
+          <a:lnRef idx="1">
+            <a:schemeClr val="accent1"/>
+          </a:lnRef>
+          <a:fillRef idx="3">
+            <a:schemeClr val="accent1"/>
+          </a:fillRef>
+          <a:effectRef idx="2">
+            <a:schemeClr val="accent1"/>
+          </a:effectRef>
+          <a:fontRef idx="minor">
+            <a:schemeClr val="lt1"/>
+          </a:fontRef>
+        </p:style>
+        <p:txBody>
+          <a:bodyPr rtlCol="0" anchor="ctr"/>
+          <a:lstStyle/>
+          <a:p>
+            <a:pPr algn="ctr"/>
+          </a:p>
+        </p:txBody>
+      </p:sp>
+      <p:sp>
+        <p:nvSpPr>
+          <p:cNvPr id="8" name="TextBox 7"/>
           <p:cNvSpPr txBox="1"/>
           <p:nvPr/>
         </p:nvSpPr>
         <p:spPr>
           <a:xfrm>
-            <a:off x="822960" y="1920240"/>
+            <a:off x="822960" y="1965960"/>
             <a:ext cx="4983480" cy="4206240"/>
           </a:xfrm>
           <a:prstGeom prst="rect">
@@ -8326,17 +9324,17 @@
           <a:p>
             <a:pPr>
               <a:spcAft>
-                <a:spcPts val="1000"/>
+                <a:spcPts val="1100"/>
               </a:spcAft>
             </a:pPr>
             <a:r>
               <a:rPr sz="1600" b="1" i="0">
                 <a:solidFill>
-                  <a:srgbClr val="2E3A80"/>
-                </a:solidFill>
-                <a:latin typeface="Montserrat"/>
-              </a:rPr>
-              <a:t>•  </a:t>
+                  <a:srgbClr val="E8801A"/>
+                </a:solidFill>
+                <a:latin typeface="Montserrat"/>
+              </a:rPr>
+              <a:t>▸  </a:t>
             </a:r>
             <a:r>
               <a:rPr sz="1600" b="0" i="0">
@@ -8345,23 +9343,23 @@
                 </a:solidFill>
                 <a:latin typeface="Montserrat"/>
               </a:rPr>
-              <a:t>Capacidad conjunta hasta 1.000 m³</a:t>
+              <a:t>GNL: gas natural licuado, muy frío</a:t>
             </a:r>
           </a:p>
           <a:p>
             <a:pPr>
               <a:spcAft>
-                <a:spcPts val="1000"/>
+                <a:spcPts val="1100"/>
               </a:spcAft>
             </a:pPr>
             <a:r>
               <a:rPr sz="1600" b="1" i="0">
                 <a:solidFill>
-                  <a:srgbClr val="2E3A80"/>
-                </a:solidFill>
-                <a:latin typeface="Montserrat"/>
-              </a:rPr>
-              <a:t>•  </a:t>
+                  <a:srgbClr val="E8801A"/>
+                </a:solidFill>
+                <a:latin typeface="Montserrat"/>
+              </a:rPr>
+              <a:t>▸  </a:t>
             </a:r>
             <a:r>
               <a:rPr sz="1600" b="0" i="0">
@@ -8370,23 +9368,23 @@
                 </a:solidFill>
                 <a:latin typeface="Montserrat"/>
               </a:rPr>
-              <a:t>Recambio equivalente: ±10 %</a:t>
+              <a:t>Enfriado a unos -160 °C</a:t>
             </a:r>
           </a:p>
           <a:p>
             <a:pPr>
               <a:spcAft>
-                <a:spcPts val="1000"/>
+                <a:spcPts val="1100"/>
               </a:spcAft>
             </a:pPr>
             <a:r>
               <a:rPr sz="1600" b="1" i="0">
                 <a:solidFill>
-                  <a:srgbClr val="2E3A80"/>
-                </a:solidFill>
-                <a:latin typeface="Montserrat"/>
-              </a:rPr>
-              <a:t>•  </a:t>
+                  <a:srgbClr val="E8801A"/>
+                </a:solidFill>
+                <a:latin typeface="Montserrat"/>
+              </a:rPr>
+              <a:t>▸  </a:t>
             </a:r>
             <a:r>
               <a:rPr sz="1600" b="0" i="0">
@@ -8395,23 +9393,23 @@
                 </a:solidFill>
                 <a:latin typeface="Montserrat"/>
               </a:rPr>
-              <a:t>Aquí firma el director de obra</a:t>
+              <a:t>Un gasoducto de mentira</a:t>
             </a:r>
           </a:p>
           <a:p>
             <a:pPr>
               <a:spcAft>
-                <a:spcPts val="1000"/>
+                <a:spcPts val="1100"/>
               </a:spcAft>
             </a:pPr>
             <a:r>
               <a:rPr sz="1600" b="1" i="0">
                 <a:solidFill>
-                  <a:srgbClr val="2E3A80"/>
-                </a:solidFill>
-                <a:latin typeface="Montserrat"/>
-              </a:rPr>
-              <a:t>•  </a:t>
+                  <a:srgbClr val="E8801A"/>
+                </a:solidFill>
+                <a:latin typeface="Montserrat"/>
+              </a:rPr>
+              <a:t>▸  </a:t>
             </a:r>
             <a:r>
               <a:rPr sz="1600" b="0" i="0">
@@ -8420,14 +9418,14 @@
                 </a:solidFill>
                 <a:latin typeface="Montserrat"/>
               </a:rPr>
-              <a:t>Mantenimiento: también a las existentes</a:t>
-            </a:r>
-          </a:p>
-        </p:txBody>
-      </p:sp>
-      <p:sp>
-        <p:nvSpPr>
-          <p:cNvPr id="8" name="imgph" descr="IMGQ:LNG tanker truck unloading plant"/>
+              <a:t>El camión llena el depósito local</a:t>
+            </a:r>
+          </a:p>
+        </p:txBody>
+      </p:sp>
+      <p:sp>
+        <p:nvSpPr>
+          <p:cNvPr id="9" name="imgph" descr="IMGQ:LNG cryogenic storage tank plant"/>
           <p:cNvSpPr/>
           <p:nvPr/>
         </p:nvSpPr>
@@ -8473,7 +9471,7 @@
       </p:sp>
       <p:sp>
         <p:nvSpPr>
-          <p:cNvPr id="9" name="TextBox 8"/>
+          <p:cNvPr id="10" name="TextBox 9"/>
           <p:cNvSpPr txBox="1"/>
           <p:nvPr/>
         </p:nvSpPr>
@@ -8513,7 +9511,7 @@
                 </a:solidFill>
                 <a:latin typeface="Montserrat"/>
               </a:rPr>
-              <a:t>LNG tanker truck unloading plant</a:t>
+              <a:t>LNG cryogenic storage tank plant</a:t>
             </a:r>
           </a:p>
         </p:txBody>
@@ -8610,7 +9608,7 @@
                 </a:solidFill>
                 <a:latin typeface="Montserrat"/>
               </a:rPr>
-              <a:t>005 / 015</a:t>
+              <a:t>005 / 016</a:t>
             </a:r>
           </a:p>
         </p:txBody>
@@ -8658,7 +9656,7 @@
         <p:spPr>
           <a:xfrm>
             <a:off x="822960" y="457200"/>
-            <a:ext cx="8229600" cy="365760"/>
+            <a:ext cx="10058400" cy="365760"/>
           </a:xfrm>
           <a:prstGeom prst="rect">
             <a:avLst/>
@@ -8672,13 +9670,13 @@
           <a:lstStyle/>
           <a:p>
             <a:r>
-              <a:rPr sz="1200" b="1" i="0">
-                <a:solidFill>
-                  <a:srgbClr val="64748B"/>
-                </a:solidFill>
-                <a:latin typeface="Montserrat"/>
-              </a:rPr>
-              <a:t>APARTADOS 3 Y 4 · NORMA</a:t>
+              <a:rPr sz="1300" b="1" i="0">
+                <a:solidFill>
+                  <a:srgbClr val="E8801A"/>
+                </a:solidFill>
+                <a:latin typeface="Montserrat"/>
+              </a:rPr>
+              <a:t>APARTADO 2 · CAMPO</a:t>
             </a:r>
           </a:p>
         </p:txBody>
@@ -8706,26 +9704,70 @@
           <a:lstStyle/>
           <a:p>
             <a:r>
-              <a:rPr sz="2700" b="1" i="0">
+              <a:rPr sz="2800" b="1" i="0">
                 <a:solidFill>
                   <a:srgbClr val="1E2761"/>
                 </a:solidFill>
                 <a:latin typeface="Montserrat"/>
               </a:rPr>
-              <a:t>UNE 60210 y el criogénico</a:t>
-            </a:r>
-          </a:p>
-        </p:txBody>
-      </p:sp>
-      <p:sp>
-        <p:nvSpPr>
-          <p:cNvPr id="7" name="TextBox 6"/>
+              <a:t>El techo: 1.000 m³</a:t>
+            </a:r>
+          </a:p>
+        </p:txBody>
+      </p:sp>
+      <p:sp>
+        <p:nvSpPr>
+          <p:cNvPr id="7" name="Rounded Rectangle 6"/>
+          <p:cNvSpPr/>
+          <p:nvPr/>
+        </p:nvSpPr>
+        <p:spPr>
+          <a:xfrm>
+            <a:off x="868680" y="1627632"/>
+            <a:ext cx="2011680" cy="73152"/>
+          </a:xfrm>
+          <a:prstGeom prst="roundRect">
+            <a:avLst/>
+          </a:prstGeom>
+          <a:solidFill>
+            <a:srgbClr val="E8801A"/>
+          </a:solidFill>
+          <a:ln>
+            <a:noFill/>
+          </a:ln>
+          <a:effectLst/>
+        </p:spPr>
+        <p:style>
+          <a:lnRef idx="1">
+            <a:schemeClr val="accent1"/>
+          </a:lnRef>
+          <a:fillRef idx="3">
+            <a:schemeClr val="accent1"/>
+          </a:fillRef>
+          <a:effectRef idx="2">
+            <a:schemeClr val="accent1"/>
+          </a:effectRef>
+          <a:fontRef idx="minor">
+            <a:schemeClr val="lt1"/>
+          </a:fontRef>
+        </p:style>
+        <p:txBody>
+          <a:bodyPr rtlCol="0" anchor="ctr"/>
+          <a:lstStyle/>
+          <a:p>
+            <a:pPr algn="ctr"/>
+          </a:p>
+        </p:txBody>
+      </p:sp>
+      <p:sp>
+        <p:nvSpPr>
+          <p:cNvPr id="8" name="TextBox 7"/>
           <p:cNvSpPr txBox="1"/>
           <p:nvPr/>
         </p:nvSpPr>
         <p:spPr>
           <a:xfrm>
-            <a:off x="822960" y="1920240"/>
+            <a:off x="822960" y="1965960"/>
             <a:ext cx="4983480" cy="4206240"/>
           </a:xfrm>
           <a:prstGeom prst="rect">
@@ -8741,17 +9783,17 @@
           <a:p>
             <a:pPr>
               <a:spcAft>
-                <a:spcPts val="1000"/>
+                <a:spcPts val="1100"/>
               </a:spcAft>
             </a:pPr>
             <a:r>
               <a:rPr sz="1600" b="1" i="0">
                 <a:solidFill>
-                  <a:srgbClr val="2E3A80"/>
-                </a:solidFill>
-                <a:latin typeface="Montserrat"/>
-              </a:rPr>
-              <a:t>•  </a:t>
+                  <a:srgbClr val="E8801A"/>
+                </a:solidFill>
+                <a:latin typeface="Montserrat"/>
+              </a:rPr>
+              <a:t>▸  </a:t>
             </a:r>
             <a:r>
               <a:rPr sz="1600" b="0" i="0">
@@ -8760,23 +9802,23 @@
                 </a:solidFill>
                 <a:latin typeface="Montserrat"/>
               </a:rPr>
-              <a:t>Se clasifica según UNE 60210</a:t>
+              <a:t>Capacidad conjunta hasta 1.000 m³</a:t>
             </a:r>
           </a:p>
           <a:p>
             <a:pPr>
               <a:spcAft>
-                <a:spcPts val="1000"/>
+                <a:spcPts val="1100"/>
               </a:spcAft>
             </a:pPr>
             <a:r>
               <a:rPr sz="1600" b="1" i="0">
                 <a:solidFill>
-                  <a:srgbClr val="2E3A80"/>
-                </a:solidFill>
-                <a:latin typeface="Montserrat"/>
-              </a:rPr>
-              <a:t>•  </a:t>
+                  <a:srgbClr val="E8801A"/>
+                </a:solidFill>
+                <a:latin typeface="Montserrat"/>
+              </a:rPr>
+              <a:t>▸  </a:t>
             </a:r>
             <a:r>
               <a:rPr sz="1600" b="0" i="0">
@@ -8785,23 +9827,23 @@
                 </a:solidFill>
                 <a:latin typeface="Montserrat"/>
               </a:rPr>
-              <a:t>Monta un especialista criogénico</a:t>
+              <a:t>Recambio equivalente: ±10 %</a:t>
             </a:r>
           </a:p>
           <a:p>
             <a:pPr>
               <a:spcAft>
-                <a:spcPts val="1000"/>
+                <a:spcPts val="1100"/>
               </a:spcAft>
             </a:pPr>
             <a:r>
               <a:rPr sz="1600" b="1" i="0">
                 <a:solidFill>
-                  <a:srgbClr val="2E3A80"/>
-                </a:solidFill>
-                <a:latin typeface="Montserrat"/>
-              </a:rPr>
-              <a:t>•  </a:t>
+                  <a:srgbClr val="E8801A"/>
+                </a:solidFill>
+                <a:latin typeface="Montserrat"/>
+              </a:rPr>
+              <a:t>▸  </a:t>
             </a:r>
             <a:r>
               <a:rPr sz="1600" b="0" i="0">
@@ -8810,23 +9852,23 @@
                 </a:solidFill>
                 <a:latin typeface="Montserrat"/>
               </a:rPr>
-              <a:t>No vale un instalador de gas normal</a:t>
+              <a:t>Aquí firma el director de obra</a:t>
             </a:r>
           </a:p>
           <a:p>
             <a:pPr>
               <a:spcAft>
-                <a:spcPts val="1000"/>
+                <a:spcPts val="1100"/>
               </a:spcAft>
             </a:pPr>
             <a:r>
               <a:rPr sz="1600" b="1" i="0">
                 <a:solidFill>
-                  <a:srgbClr val="2E3A80"/>
-                </a:solidFill>
-                <a:latin typeface="Montserrat"/>
-              </a:rPr>
-              <a:t>•  </a:t>
+                  <a:srgbClr val="E8801A"/>
+                </a:solidFill>
+                <a:latin typeface="Montserrat"/>
+              </a:rPr>
+              <a:t>▸  </a:t>
             </a:r>
             <a:r>
               <a:rPr sz="1600" b="0" i="0">
@@ -8835,14 +9877,14 @@
                 </a:solidFill>
                 <a:latin typeface="Montserrat"/>
               </a:rPr>
-              <a:t>GNL → UNE 60210 → criogénico</a:t>
-            </a:r>
-          </a:p>
-        </p:txBody>
-      </p:sp>
-      <p:sp>
-        <p:nvSpPr>
-          <p:cNvPr id="8" name="imgph" descr="IMGQ:cryogenic pipes valves industrial"/>
+              <a:t>Mantenimiento: también a las existentes</a:t>
+            </a:r>
+          </a:p>
+        </p:txBody>
+      </p:sp>
+      <p:sp>
+        <p:nvSpPr>
+          <p:cNvPr id="9" name="imgph" descr="IMGQ:LNG tanker truck unloading plant"/>
           <p:cNvSpPr/>
           <p:nvPr/>
         </p:nvSpPr>
@@ -8888,7 +9930,7 @@
       </p:sp>
       <p:sp>
         <p:nvSpPr>
-          <p:cNvPr id="9" name="TextBox 8"/>
+          <p:cNvPr id="10" name="TextBox 9"/>
           <p:cNvSpPr txBox="1"/>
           <p:nvPr/>
         </p:nvSpPr>
@@ -8928,7 +9970,7 @@
                 </a:solidFill>
                 <a:latin typeface="Montserrat"/>
               </a:rPr>
-              <a:t>cryogenic pipes valves industrial</a:t>
+              <a:t>LNG tanker truck unloading plant</a:t>
             </a:r>
           </a:p>
         </p:txBody>
@@ -9025,7 +10067,7 @@
                 </a:solidFill>
                 <a:latin typeface="Montserrat"/>
               </a:rPr>
-              <a:t>006 / 015</a:t>
+              <a:t>006 / 016</a:t>
             </a:r>
           </a:p>
         </p:txBody>
@@ -9073,7 +10115,7 @@
         <p:spPr>
           <a:xfrm>
             <a:off x="822960" y="457200"/>
-            <a:ext cx="8229600" cy="365760"/>
+            <a:ext cx="10058400" cy="365760"/>
           </a:xfrm>
           <a:prstGeom prst="rect">
             <a:avLst/>
@@ -9087,13 +10129,13 @@
           <a:lstStyle/>
           <a:p>
             <a:r>
-              <a:rPr sz="1200" b="1" i="0">
-                <a:solidFill>
-                  <a:srgbClr val="64748B"/>
-                </a:solidFill>
-                <a:latin typeface="Montserrat"/>
-              </a:rPr>
-              <a:t>APARTADO 5.1 · AUTORIZACIÓN</a:t>
+              <a:rPr sz="1300" b="1" i="0">
+                <a:solidFill>
+                  <a:srgbClr val="E8801A"/>
+                </a:solidFill>
+                <a:latin typeface="Montserrat"/>
+              </a:rPr>
+              <a:t>APARTADOS 3 Y 4 · NORMA</a:t>
             </a:r>
           </a:p>
         </p:txBody>
@@ -9121,26 +10163,70 @@
           <a:lstStyle/>
           <a:p>
             <a:r>
-              <a:rPr sz="2700" b="1" i="0">
+              <a:rPr sz="2800" b="1" i="0">
                 <a:solidFill>
                   <a:srgbClr val="1E2761"/>
                 </a:solidFill>
                 <a:latin typeface="Montserrat"/>
               </a:rPr>
-              <a:t>Aquí sí, casi siempre</a:t>
-            </a:r>
-          </a:p>
-        </p:txBody>
-      </p:sp>
-      <p:sp>
-        <p:nvSpPr>
-          <p:cNvPr id="7" name="TextBox 6"/>
+              <a:t>UNE 60210 y el criogénico</a:t>
+            </a:r>
+          </a:p>
+        </p:txBody>
+      </p:sp>
+      <p:sp>
+        <p:nvSpPr>
+          <p:cNvPr id="7" name="Rounded Rectangle 6"/>
+          <p:cNvSpPr/>
+          <p:nvPr/>
+        </p:nvSpPr>
+        <p:spPr>
+          <a:xfrm>
+            <a:off x="868680" y="1627632"/>
+            <a:ext cx="2011680" cy="73152"/>
+          </a:xfrm>
+          <a:prstGeom prst="roundRect">
+            <a:avLst/>
+          </a:prstGeom>
+          <a:solidFill>
+            <a:srgbClr val="E8801A"/>
+          </a:solidFill>
+          <a:ln>
+            <a:noFill/>
+          </a:ln>
+          <a:effectLst/>
+        </p:spPr>
+        <p:style>
+          <a:lnRef idx="1">
+            <a:schemeClr val="accent1"/>
+          </a:lnRef>
+          <a:fillRef idx="3">
+            <a:schemeClr val="accent1"/>
+          </a:fillRef>
+          <a:effectRef idx="2">
+            <a:schemeClr val="accent1"/>
+          </a:effectRef>
+          <a:fontRef idx="minor">
+            <a:schemeClr val="lt1"/>
+          </a:fontRef>
+        </p:style>
+        <p:txBody>
+          <a:bodyPr rtlCol="0" anchor="ctr"/>
+          <a:lstStyle/>
+          <a:p>
+            <a:pPr algn="ctr"/>
+          </a:p>
+        </p:txBody>
+      </p:sp>
+      <p:sp>
+        <p:nvSpPr>
+          <p:cNvPr id="8" name="TextBox 7"/>
           <p:cNvSpPr txBox="1"/>
           <p:nvPr/>
         </p:nvSpPr>
         <p:spPr>
           <a:xfrm>
-            <a:off x="822960" y="1920240"/>
+            <a:off x="822960" y="1965960"/>
             <a:ext cx="4983480" cy="4206240"/>
           </a:xfrm>
           <a:prstGeom prst="rect">
@@ -9156,17 +10242,17 @@
           <a:p>
             <a:pPr>
               <a:spcAft>
-                <a:spcPts val="1000"/>
+                <a:spcPts val="1100"/>
               </a:spcAft>
             </a:pPr>
             <a:r>
               <a:rPr sz="1600" b="1" i="0">
                 <a:solidFill>
-                  <a:srgbClr val="2E3A80"/>
-                </a:solidFill>
-                <a:latin typeface="Montserrat"/>
-              </a:rPr>
-              <a:t>•  </a:t>
+                  <a:srgbClr val="E8801A"/>
+                </a:solidFill>
+                <a:latin typeface="Montserrat"/>
+              </a:rPr>
+              <a:t>▸  </a:t>
             </a:r>
             <a:r>
               <a:rPr sz="1600" b="0" i="0">
@@ -9175,23 +10261,23 @@
                 </a:solidFill>
                 <a:latin typeface="Montserrat"/>
               </a:rPr>
-              <a:t>Autorización previa a construir</a:t>
+              <a:t>Se clasifica según UNE 60210</a:t>
             </a:r>
           </a:p>
           <a:p>
             <a:pPr>
               <a:spcAft>
-                <a:spcPts val="1000"/>
+                <a:spcPts val="1100"/>
               </a:spcAft>
             </a:pPr>
             <a:r>
               <a:rPr sz="1600" b="1" i="0">
                 <a:solidFill>
-                  <a:srgbClr val="2E3A80"/>
-                </a:solidFill>
-                <a:latin typeface="Montserrat"/>
-              </a:rPr>
-              <a:t>•  </a:t>
+                  <a:srgbClr val="E8801A"/>
+                </a:solidFill>
+                <a:latin typeface="Montserrat"/>
+              </a:rPr>
+              <a:t>▸  </a:t>
             </a:r>
             <a:r>
               <a:rPr sz="1600" b="0" i="0">
@@ -9200,23 +10286,23 @@
                 </a:solidFill>
                 <a:latin typeface="Montserrat"/>
               </a:rPr>
-              <a:t>La otorga la Comunidad Autónoma</a:t>
+              <a:t>Monta un especialista criogénico</a:t>
             </a:r>
           </a:p>
           <a:p>
             <a:pPr>
               <a:spcAft>
-                <a:spcPts val="1000"/>
+                <a:spcPts val="1100"/>
               </a:spcAft>
             </a:pPr>
             <a:r>
               <a:rPr sz="1600" b="1" i="0">
                 <a:solidFill>
-                  <a:srgbClr val="2E3A80"/>
-                </a:solidFill>
-                <a:latin typeface="Montserrat"/>
-              </a:rPr>
-              <a:t>•  </a:t>
+                  <a:srgbClr val="E8801A"/>
+                </a:solidFill>
+                <a:latin typeface="Montserrat"/>
+              </a:rPr>
+              <a:t>▸  </a:t>
             </a:r>
             <a:r>
               <a:rPr sz="1600" b="0" i="0">
@@ -9225,23 +10311,23 @@
                 </a:solidFill>
                 <a:latin typeface="Montserrat"/>
               </a:rPr>
-              <a:t>Excepción: uso propio y exclusivo</a:t>
+              <a:t>No vale un instalador de gas normal</a:t>
             </a:r>
           </a:p>
           <a:p>
             <a:pPr>
               <a:spcAft>
-                <a:spcPts val="1000"/>
+                <a:spcPts val="1100"/>
               </a:spcAft>
             </a:pPr>
             <a:r>
               <a:rPr sz="1600" b="1" i="0">
                 <a:solidFill>
-                  <a:srgbClr val="2E3A80"/>
-                </a:solidFill>
-                <a:latin typeface="Montserrat"/>
-              </a:rPr>
-              <a:t>•  </a:t>
+                  <a:srgbClr val="E8801A"/>
+                </a:solidFill>
+                <a:latin typeface="Montserrat"/>
+              </a:rPr>
+              <a:t>▸  </a:t>
             </a:r>
             <a:r>
               <a:rPr sz="1600" b="0" i="0">
@@ -9250,14 +10336,14 @@
                 </a:solidFill>
                 <a:latin typeface="Montserrat"/>
               </a:rPr>
-              <a:t>Se solicita con proyecto y modelo oficial</a:t>
-            </a:r>
-          </a:p>
-        </p:txBody>
-      </p:sp>
-      <p:sp>
-        <p:nvSpPr>
-          <p:cNvPr id="8" name="imgph" descr="IMGQ:government permit stamp document"/>
+              <a:t>GNL → UNE 60210 → criogénico</a:t>
+            </a:r>
+          </a:p>
+        </p:txBody>
+      </p:sp>
+      <p:sp>
+        <p:nvSpPr>
+          <p:cNvPr id="9" name="imgph" descr="IMGQ:cryogenic pipes valves industrial"/>
           <p:cNvSpPr/>
           <p:nvPr/>
         </p:nvSpPr>
@@ -9303,7 +10389,7 @@
       </p:sp>
       <p:sp>
         <p:nvSpPr>
-          <p:cNvPr id="9" name="TextBox 8"/>
+          <p:cNvPr id="10" name="TextBox 9"/>
           <p:cNvSpPr txBox="1"/>
           <p:nvPr/>
         </p:nvSpPr>
@@ -9343,7 +10429,7 @@
                 </a:solidFill>
                 <a:latin typeface="Montserrat"/>
               </a:rPr>
-              <a:t>government permit stamp document</a:t>
+              <a:t>cryogenic pipes valves industrial</a:t>
             </a:r>
           </a:p>
         </p:txBody>
@@ -9440,7 +10526,7 @@
                 </a:solidFill>
                 <a:latin typeface="Montserrat"/>
               </a:rPr>
-              <a:t>007 / 015</a:t>
+              <a:t>007 / 016</a:t>
             </a:r>
           </a:p>
         </p:txBody>
@@ -9488,7 +10574,7 @@
         <p:spPr>
           <a:xfrm>
             <a:off x="822960" y="457200"/>
-            <a:ext cx="8229600" cy="365760"/>
+            <a:ext cx="10058400" cy="365760"/>
           </a:xfrm>
           <a:prstGeom prst="rect">
             <a:avLst/>
@@ -9502,13 +10588,13 @@
           <a:lstStyle/>
           <a:p>
             <a:r>
-              <a:rPr sz="1200" b="1" i="0">
-                <a:solidFill>
-                  <a:srgbClr val="64748B"/>
-                </a:solidFill>
-                <a:latin typeface="Montserrat"/>
-              </a:rPr>
-              <a:t>APARTADO 5.2 · DOCUMENTACIÓN</a:t>
+              <a:rPr sz="1300" b="1" i="0">
+                <a:solidFill>
+                  <a:srgbClr val="E8801A"/>
+                </a:solidFill>
+                <a:latin typeface="Montserrat"/>
+              </a:rPr>
+              <a:t>APARTADO 5.1 · AUTORIZACIÓN</a:t>
             </a:r>
           </a:p>
         </p:txBody>
@@ -9536,26 +10622,70 @@
           <a:lstStyle/>
           <a:p>
             <a:r>
-              <a:rPr sz="2700" b="1" i="0">
+              <a:rPr sz="2800" b="1" i="0">
                 <a:solidFill>
                   <a:srgbClr val="1E2761"/>
                 </a:solidFill>
                 <a:latin typeface="Montserrat"/>
               </a:rPr>
-              <a:t>Siempre proyecto</a:t>
-            </a:r>
-          </a:p>
-        </p:txBody>
-      </p:sp>
-      <p:sp>
-        <p:nvSpPr>
-          <p:cNvPr id="7" name="TextBox 6"/>
+              <a:t>Aquí sí, casi siempre</a:t>
+            </a:r>
+          </a:p>
+        </p:txBody>
+      </p:sp>
+      <p:sp>
+        <p:nvSpPr>
+          <p:cNvPr id="7" name="Rounded Rectangle 6"/>
+          <p:cNvSpPr/>
+          <p:nvPr/>
+        </p:nvSpPr>
+        <p:spPr>
+          <a:xfrm>
+            <a:off x="868680" y="1627632"/>
+            <a:ext cx="2011680" cy="73152"/>
+          </a:xfrm>
+          <a:prstGeom prst="roundRect">
+            <a:avLst/>
+          </a:prstGeom>
+          <a:solidFill>
+            <a:srgbClr val="E8801A"/>
+          </a:solidFill>
+          <a:ln>
+            <a:noFill/>
+          </a:ln>
+          <a:effectLst/>
+        </p:spPr>
+        <p:style>
+          <a:lnRef idx="1">
+            <a:schemeClr val="accent1"/>
+          </a:lnRef>
+          <a:fillRef idx="3">
+            <a:schemeClr val="accent1"/>
+          </a:fillRef>
+          <a:effectRef idx="2">
+            <a:schemeClr val="accent1"/>
+          </a:effectRef>
+          <a:fontRef idx="minor">
+            <a:schemeClr val="lt1"/>
+          </a:fontRef>
+        </p:style>
+        <p:txBody>
+          <a:bodyPr rtlCol="0" anchor="ctr"/>
+          <a:lstStyle/>
+          <a:p>
+            <a:pPr algn="ctr"/>
+          </a:p>
+        </p:txBody>
+      </p:sp>
+      <p:sp>
+        <p:nvSpPr>
+          <p:cNvPr id="8" name="TextBox 7"/>
           <p:cNvSpPr txBox="1"/>
           <p:nvPr/>
         </p:nvSpPr>
         <p:spPr>
           <a:xfrm>
-            <a:off x="822960" y="1920240"/>
+            <a:off x="822960" y="1965960"/>
             <a:ext cx="4983480" cy="4206240"/>
           </a:xfrm>
           <a:prstGeom prst="rect">
@@ -9571,17 +10701,17 @@
           <a:p>
             <a:pPr>
               <a:spcAft>
-                <a:spcPts val="1000"/>
+                <a:spcPts val="1100"/>
               </a:spcAft>
             </a:pPr>
             <a:r>
               <a:rPr sz="1600" b="1" i="0">
                 <a:solidFill>
-                  <a:srgbClr val="2E3A80"/>
-                </a:solidFill>
-                <a:latin typeface="Montserrat"/>
-              </a:rPr>
-              <a:t>•  </a:t>
+                  <a:srgbClr val="E8801A"/>
+                </a:solidFill>
+                <a:latin typeface="Montserrat"/>
+              </a:rPr>
+              <a:t>▸  </a:t>
             </a:r>
             <a:r>
               <a:rPr sz="1600" b="0" i="0">
@@ -9590,23 +10720,23 @@
                 </a:solidFill>
                 <a:latin typeface="Montserrat"/>
               </a:rPr>
-              <a:t>Toda planta de GNL exige proyecto</a:t>
+              <a:t>Autorización previa a construir</a:t>
             </a:r>
           </a:p>
           <a:p>
             <a:pPr>
               <a:spcAft>
-                <a:spcPts val="1000"/>
+                <a:spcPts val="1100"/>
               </a:spcAft>
             </a:pPr>
             <a:r>
               <a:rPr sz="1600" b="1" i="0">
                 <a:solidFill>
-                  <a:srgbClr val="2E3A80"/>
-                </a:solidFill>
-                <a:latin typeface="Montserrat"/>
-              </a:rPr>
-              <a:t>•  </a:t>
+                  <a:srgbClr val="E8801A"/>
+                </a:solidFill>
+                <a:latin typeface="Montserrat"/>
+              </a:rPr>
+              <a:t>▸  </a:t>
             </a:r>
             <a:r>
               <a:rPr sz="1600" b="0" i="0">
@@ -9615,23 +10745,23 @@
                 </a:solidFill>
                 <a:latin typeface="Montserrat"/>
               </a:rPr>
-              <a:t>Lo firma técnico facultativo competente</a:t>
+              <a:t>La otorga la Comunidad Autónoma</a:t>
             </a:r>
           </a:p>
           <a:p>
             <a:pPr>
               <a:spcAft>
-                <a:spcPts val="1000"/>
+                <a:spcPts val="1100"/>
               </a:spcAft>
             </a:pPr>
             <a:r>
               <a:rPr sz="1600" b="1" i="0">
                 <a:solidFill>
-                  <a:srgbClr val="2E3A80"/>
-                </a:solidFill>
-                <a:latin typeface="Montserrat"/>
-              </a:rPr>
-              <a:t>•  </a:t>
+                  <a:srgbClr val="E8801A"/>
+                </a:solidFill>
+                <a:latin typeface="Montserrat"/>
+              </a:rPr>
+              <a:t>▸  </a:t>
             </a:r>
             <a:r>
               <a:rPr sz="1600" b="0" i="0">
@@ -9640,23 +10770,23 @@
                 </a:solidFill>
                 <a:latin typeface="Montserrat"/>
               </a:rPr>
-              <a:t>Nada de memoria técnica</a:t>
+              <a:t>Excepción: uso propio y exclusivo</a:t>
             </a:r>
           </a:p>
           <a:p>
             <a:pPr>
               <a:spcAft>
-                <a:spcPts val="1000"/>
+                <a:spcPts val="1100"/>
               </a:spcAft>
             </a:pPr>
             <a:r>
               <a:rPr sz="1600" b="1" i="0">
                 <a:solidFill>
-                  <a:srgbClr val="2E3A80"/>
-                </a:solidFill>
-                <a:latin typeface="Montserrat"/>
-              </a:rPr>
-              <a:t>•  </a:t>
+                  <a:srgbClr val="E8801A"/>
+                </a:solidFill>
+                <a:latin typeface="Montserrat"/>
+              </a:rPr>
+              <a:t>▸  </a:t>
             </a:r>
             <a:r>
               <a:rPr sz="1600" b="0" i="0">
@@ -9665,14 +10795,14 @@
                 </a:solidFill>
                 <a:latin typeface="Montserrat"/>
               </a:rPr>
-              <a:t>Extra: planes de emergencia</a:t>
-            </a:r>
-          </a:p>
-        </p:txBody>
-      </p:sp>
-      <p:sp>
-        <p:nvSpPr>
-          <p:cNvPr id="8" name="imgph" descr="IMGQ:safety emergency plan engineering documents"/>
+              <a:t>Se solicita con proyecto y modelo oficial</a:t>
+            </a:r>
+          </a:p>
+        </p:txBody>
+      </p:sp>
+      <p:sp>
+        <p:nvSpPr>
+          <p:cNvPr id="9" name="imgph" descr="IMGQ:government permit stamp document"/>
           <p:cNvSpPr/>
           <p:nvPr/>
         </p:nvSpPr>
@@ -9718,7 +10848,7 @@
       </p:sp>
       <p:sp>
         <p:nvSpPr>
-          <p:cNvPr id="9" name="TextBox 8"/>
+          <p:cNvPr id="10" name="TextBox 9"/>
           <p:cNvSpPr txBox="1"/>
           <p:nvPr/>
         </p:nvSpPr>
@@ -9758,7 +10888,7 @@
                 </a:solidFill>
                 <a:latin typeface="Montserrat"/>
               </a:rPr>
-              <a:t>safety emergency plan engineering documents</a:t>
+              <a:t>government permit stamp document</a:t>
             </a:r>
           </a:p>
         </p:txBody>
@@ -9855,7 +10985,7 @@
                 </a:solidFill>
                 <a:latin typeface="Montserrat"/>
               </a:rPr>
-              <a:t>008 / 015</a:t>
+              <a:t>008 / 016</a:t>
             </a:r>
           </a:p>
         </p:txBody>
@@ -9903,7 +11033,7 @@
         <p:spPr>
           <a:xfrm>
             <a:off x="822960" y="457200"/>
-            <a:ext cx="8229600" cy="365760"/>
+            <a:ext cx="10058400" cy="365760"/>
           </a:xfrm>
           <a:prstGeom prst="rect">
             <a:avLst/>
@@ -9917,13 +11047,13 @@
           <a:lstStyle/>
           <a:p>
             <a:r>
-              <a:rPr sz="1200" b="1" i="0">
-                <a:solidFill>
-                  <a:srgbClr val="64748B"/>
-                </a:solidFill>
-                <a:latin typeface="Montserrat"/>
-              </a:rPr>
-              <a:t>APARTADOS 5.3 Y 5.4 · CERTIFICADOS</a:t>
+              <a:rPr sz="1300" b="1" i="0">
+                <a:solidFill>
+                  <a:srgbClr val="E8801A"/>
+                </a:solidFill>
+                <a:latin typeface="Montserrat"/>
+              </a:rPr>
+              <a:t>APARTADO 5.2 · DOCUMENTACIÓN</a:t>
             </a:r>
           </a:p>
         </p:txBody>
@@ -9951,26 +11081,70 @@
           <a:lstStyle/>
           <a:p>
             <a:r>
-              <a:rPr sz="2700" b="1" i="0">
+              <a:rPr sz="2800" b="1" i="0">
                 <a:solidFill>
                   <a:srgbClr val="1E2761"/>
                 </a:solidFill>
                 <a:latin typeface="Montserrat"/>
               </a:rPr>
-              <a:t>Dos papeles y hay gas</a:t>
-            </a:r>
-          </a:p>
-        </p:txBody>
-      </p:sp>
-      <p:sp>
-        <p:nvSpPr>
-          <p:cNvPr id="7" name="TextBox 6"/>
+              <a:t>Siempre proyecto</a:t>
+            </a:r>
+          </a:p>
+        </p:txBody>
+      </p:sp>
+      <p:sp>
+        <p:nvSpPr>
+          <p:cNvPr id="7" name="Rounded Rectangle 6"/>
+          <p:cNvSpPr/>
+          <p:nvPr/>
+        </p:nvSpPr>
+        <p:spPr>
+          <a:xfrm>
+            <a:off x="868680" y="1627632"/>
+            <a:ext cx="2011680" cy="73152"/>
+          </a:xfrm>
+          <a:prstGeom prst="roundRect">
+            <a:avLst/>
+          </a:prstGeom>
+          <a:solidFill>
+            <a:srgbClr val="E8801A"/>
+          </a:solidFill>
+          <a:ln>
+            <a:noFill/>
+          </a:ln>
+          <a:effectLst/>
+        </p:spPr>
+        <p:style>
+          <a:lnRef idx="1">
+            <a:schemeClr val="accent1"/>
+          </a:lnRef>
+          <a:fillRef idx="3">
+            <a:schemeClr val="accent1"/>
+          </a:fillRef>
+          <a:effectRef idx="2">
+            <a:schemeClr val="accent1"/>
+          </a:effectRef>
+          <a:fontRef idx="minor">
+            <a:schemeClr val="lt1"/>
+          </a:fontRef>
+        </p:style>
+        <p:txBody>
+          <a:bodyPr rtlCol="0" anchor="ctr"/>
+          <a:lstStyle/>
+          <a:p>
+            <a:pPr algn="ctr"/>
+          </a:p>
+        </p:txBody>
+      </p:sp>
+      <p:sp>
+        <p:nvSpPr>
+          <p:cNvPr id="8" name="TextBox 7"/>
           <p:cNvSpPr txBox="1"/>
           <p:nvPr/>
         </p:nvSpPr>
         <p:spPr>
           <a:xfrm>
-            <a:off x="822960" y="1920240"/>
+            <a:off x="822960" y="1965960"/>
             <a:ext cx="4983480" cy="4206240"/>
           </a:xfrm>
           <a:prstGeom prst="rect">
@@ -9986,17 +11160,17 @@
           <a:p>
             <a:pPr>
               <a:spcAft>
-                <a:spcPts val="1000"/>
+                <a:spcPts val="1100"/>
               </a:spcAft>
             </a:pPr>
             <a:r>
               <a:rPr sz="1600" b="1" i="0">
                 <a:solidFill>
-                  <a:srgbClr val="2E3A80"/>
-                </a:solidFill>
-                <a:latin typeface="Montserrat"/>
-              </a:rPr>
-              <a:t>•  </a:t>
+                  <a:srgbClr val="E8801A"/>
+                </a:solidFill>
+                <a:latin typeface="Montserrat"/>
+              </a:rPr>
+              <a:t>▸  </a:t>
             </a:r>
             <a:r>
               <a:rPr sz="1600" b="0" i="0">
@@ -10005,23 +11179,23 @@
                 </a:solidFill>
                 <a:latin typeface="Montserrat"/>
               </a:rPr>
-              <a:t>Pruebas en obra: organismo de control</a:t>
+              <a:t>Toda planta de GNL exige proyecto</a:t>
             </a:r>
           </a:p>
           <a:p>
             <a:pPr>
               <a:spcAft>
-                <a:spcPts val="1000"/>
+                <a:spcPts val="1100"/>
               </a:spcAft>
             </a:pPr>
             <a:r>
               <a:rPr sz="1600" b="1" i="0">
                 <a:solidFill>
-                  <a:srgbClr val="2E3A80"/>
-                </a:solidFill>
-                <a:latin typeface="Montserrat"/>
-              </a:rPr>
-              <a:t>•  </a:t>
+                  <a:srgbClr val="E8801A"/>
+                </a:solidFill>
+                <a:latin typeface="Montserrat"/>
+              </a:rPr>
+              <a:t>▸  </a:t>
             </a:r>
             <a:r>
               <a:rPr sz="1600" b="0" i="0">
@@ -10030,23 +11204,23 @@
                 </a:solidFill>
                 <a:latin typeface="Montserrat"/>
               </a:rPr>
-              <a:t>Certificado de dirección de obra</a:t>
+              <a:t>Lo firma técnico facultativo competente</a:t>
             </a:r>
           </a:p>
           <a:p>
             <a:pPr>
               <a:spcAft>
-                <a:spcPts val="1000"/>
+                <a:spcPts val="1100"/>
               </a:spcAft>
             </a:pPr>
             <a:r>
               <a:rPr sz="1600" b="1" i="0">
                 <a:solidFill>
-                  <a:srgbClr val="2E3A80"/>
-                </a:solidFill>
-                <a:latin typeface="Montserrat"/>
-              </a:rPr>
-              <a:t>•  </a:t>
+                  <a:srgbClr val="E8801A"/>
+                </a:solidFill>
+                <a:latin typeface="Montserrat"/>
+              </a:rPr>
+              <a:t>▸  </a:t>
             </a:r>
             <a:r>
               <a:rPr sz="1600" b="0" i="0">
@@ -10055,23 +11229,23 @@
                 </a:solidFill>
                 <a:latin typeface="Montserrat"/>
               </a:rPr>
-              <a:t>Certificado de inspección</a:t>
+              <a:t>Nada de memoria técnica</a:t>
             </a:r>
           </a:p>
           <a:p>
             <a:pPr>
               <a:spcAft>
-                <a:spcPts val="1000"/>
+                <a:spcPts val="1100"/>
               </a:spcAft>
             </a:pPr>
             <a:r>
               <a:rPr sz="1600" b="1" i="0">
                 <a:solidFill>
-                  <a:srgbClr val="2E3A80"/>
-                </a:solidFill>
-                <a:latin typeface="Montserrat"/>
-              </a:rPr>
-              <a:t>•  </a:t>
+                  <a:srgbClr val="E8801A"/>
+                </a:solidFill>
+                <a:latin typeface="Montserrat"/>
+              </a:rPr>
+              <a:t>▸  </a:t>
             </a:r>
             <a:r>
               <a:rPr sz="1600" b="0" i="0">
@@ -10080,14 +11254,14 @@
                 </a:solidFill>
                 <a:latin typeface="Montserrat"/>
               </a:rPr>
-              <a:t>Aquí no hay certificado de instalación</a:t>
-            </a:r>
-          </a:p>
-        </p:txBody>
-      </p:sp>
-      <p:sp>
-        <p:nvSpPr>
-          <p:cNvPr id="8" name="imgph" descr="IMGQ:inspector signing certificate site"/>
+              <a:t>Extra: planes de emergencia</a:t>
+            </a:r>
+          </a:p>
+        </p:txBody>
+      </p:sp>
+      <p:sp>
+        <p:nvSpPr>
+          <p:cNvPr id="9" name="imgph" descr="IMGQ:safety emergency plan engineering documents"/>
           <p:cNvSpPr/>
           <p:nvPr/>
         </p:nvSpPr>
@@ -10133,7 +11307,7 @@
       </p:sp>
       <p:sp>
         <p:nvSpPr>
-          <p:cNvPr id="9" name="TextBox 8"/>
+          <p:cNvPr id="10" name="TextBox 9"/>
           <p:cNvSpPr txBox="1"/>
           <p:nvPr/>
         </p:nvSpPr>
@@ -10173,7 +11347,7 @@
                 </a:solidFill>
                 <a:latin typeface="Montserrat"/>
               </a:rPr>
-              <a:t>inspector signing certificate site</a:t>
+              <a:t>safety emergency plan engineering documents</a:t>
             </a:r>
           </a:p>
         </p:txBody>
@@ -10270,7 +11444,7 @@
                 </a:solidFill>
                 <a:latin typeface="Montserrat"/>
               </a:rPr>
-              <a:t>009 / 015</a:t>
+              <a:t>009 / 016</a:t>
             </a:r>
           </a:p>
         </p:txBody>
@@ -10318,7 +11492,7 @@
         <p:spPr>
           <a:xfrm>
             <a:off x="822960" y="457200"/>
-            <a:ext cx="8229600" cy="365760"/>
+            <a:ext cx="10058400" cy="365760"/>
           </a:xfrm>
           <a:prstGeom prst="rect">
             <a:avLst/>
@@ -10332,13 +11506,13 @@
           <a:lstStyle/>
           <a:p>
             <a:r>
-              <a:rPr sz="1200" b="1" i="0">
-                <a:solidFill>
-                  <a:srgbClr val="64748B"/>
-                </a:solidFill>
-                <a:latin typeface="Montserrat"/>
-              </a:rPr>
-              <a:t>APARTADOS 5.5 Y 5.6 · COMUNICACIÓN</a:t>
+              <a:rPr sz="1300" b="1" i="0">
+                <a:solidFill>
+                  <a:srgbClr val="E8801A"/>
+                </a:solidFill>
+                <a:latin typeface="Montserrat"/>
+              </a:rPr>
+              <a:t>APARTADOS 5.3 Y 5.4 · CERTIFICADOS</a:t>
             </a:r>
           </a:p>
         </p:txBody>
@@ -10366,26 +11540,70 @@
           <a:lstStyle/>
           <a:p>
             <a:r>
-              <a:rPr sz="2700" b="1" i="0">
+              <a:rPr sz="2800" b="1" i="0">
                 <a:solidFill>
                   <a:srgbClr val="1E2761"/>
                 </a:solidFill>
                 <a:latin typeface="Montserrat"/>
               </a:rPr>
-              <a:t>15 días hábiles, no naturales</a:t>
-            </a:r>
-          </a:p>
-        </p:txBody>
-      </p:sp>
-      <p:sp>
-        <p:nvSpPr>
-          <p:cNvPr id="7" name="TextBox 6"/>
+              <a:t>Dos papeles y hay gas</a:t>
+            </a:r>
+          </a:p>
+        </p:txBody>
+      </p:sp>
+      <p:sp>
+        <p:nvSpPr>
+          <p:cNvPr id="7" name="Rounded Rectangle 6"/>
+          <p:cNvSpPr/>
+          <p:nvPr/>
+        </p:nvSpPr>
+        <p:spPr>
+          <a:xfrm>
+            <a:off x="868680" y="1627632"/>
+            <a:ext cx="2011680" cy="73152"/>
+          </a:xfrm>
+          <a:prstGeom prst="roundRect">
+            <a:avLst/>
+          </a:prstGeom>
+          <a:solidFill>
+            <a:srgbClr val="E8801A"/>
+          </a:solidFill>
+          <a:ln>
+            <a:noFill/>
+          </a:ln>
+          <a:effectLst/>
+        </p:spPr>
+        <p:style>
+          <a:lnRef idx="1">
+            <a:schemeClr val="accent1"/>
+          </a:lnRef>
+          <a:fillRef idx="3">
+            <a:schemeClr val="accent1"/>
+          </a:fillRef>
+          <a:effectRef idx="2">
+            <a:schemeClr val="accent1"/>
+          </a:effectRef>
+          <a:fontRef idx="minor">
+            <a:schemeClr val="lt1"/>
+          </a:fontRef>
+        </p:style>
+        <p:txBody>
+          <a:bodyPr rtlCol="0" anchor="ctr"/>
+          <a:lstStyle/>
+          <a:p>
+            <a:pPr algn="ctr"/>
+          </a:p>
+        </p:txBody>
+      </p:sp>
+      <p:sp>
+        <p:nvSpPr>
+          <p:cNvPr id="8" name="TextBox 7"/>
           <p:cNvSpPr txBox="1"/>
           <p:nvPr/>
         </p:nvSpPr>
         <p:spPr>
           <a:xfrm>
-            <a:off x="822960" y="1920240"/>
+            <a:off x="822960" y="1965960"/>
             <a:ext cx="4983480" cy="4206240"/>
           </a:xfrm>
           <a:prstGeom prst="rect">
@@ -10401,17 +11619,17 @@
           <a:p>
             <a:pPr>
               <a:spcAft>
-                <a:spcPts val="1000"/>
+                <a:spcPts val="1100"/>
               </a:spcAft>
             </a:pPr>
             <a:r>
               <a:rPr sz="1600" b="1" i="0">
                 <a:solidFill>
-                  <a:srgbClr val="2E3A80"/>
-                </a:solidFill>
-                <a:latin typeface="Montserrat"/>
-              </a:rPr>
-              <a:t>•  </a:t>
+                  <a:srgbClr val="E8801A"/>
+                </a:solidFill>
+                <a:latin typeface="Montserrat"/>
+              </a:rPr>
+              <a:t>▸  </a:t>
             </a:r>
             <a:r>
               <a:rPr sz="1600" b="0" i="0">
@@ -10420,23 +11638,23 @@
                 </a:solidFill>
                 <a:latin typeface="Montserrat"/>
               </a:rPr>
-              <a:t>Con los dos certificados: primer llenado</a:t>
+              <a:t>Pruebas en obra: organismo de control</a:t>
             </a:r>
           </a:p>
           <a:p>
             <a:pPr>
               <a:spcAft>
-                <a:spcPts val="1000"/>
+                <a:spcPts val="1100"/>
               </a:spcAft>
             </a:pPr>
             <a:r>
               <a:rPr sz="1600" b="1" i="0">
                 <a:solidFill>
-                  <a:srgbClr val="2E3A80"/>
-                </a:solidFill>
-                <a:latin typeface="Montserrat"/>
-              </a:rPr>
-              <a:t>•  </a:t>
+                  <a:srgbClr val="E8801A"/>
+                </a:solidFill>
+                <a:latin typeface="Montserrat"/>
+              </a:rPr>
+              <a:t>▸  </a:t>
             </a:r>
             <a:r>
               <a:rPr sz="1600" b="0" i="0">
@@ -10445,23 +11663,23 @@
                 </a:solidFill>
                 <a:latin typeface="Montserrat"/>
               </a:rPr>
-              <a:t>Comunicar en 15 días hábiles</a:t>
+              <a:t>Certificado de dirección de obra</a:t>
             </a:r>
           </a:p>
           <a:p>
             <a:pPr>
               <a:spcAft>
-                <a:spcPts val="1000"/>
+                <a:spcPts val="1100"/>
               </a:spcAft>
             </a:pPr>
             <a:r>
               <a:rPr sz="1600" b="1" i="0">
                 <a:solidFill>
-                  <a:srgbClr val="2E3A80"/>
-                </a:solidFill>
-                <a:latin typeface="Montserrat"/>
-              </a:rPr>
-              <a:t>•  </a:t>
+                  <a:srgbClr val="E8801A"/>
+                </a:solidFill>
+                <a:latin typeface="Montserrat"/>
+              </a:rPr>
+              <a:t>▸  </a:t>
             </a:r>
             <a:r>
               <a:rPr sz="1600" b="0" i="0">
@@ -10470,23 +11688,23 @@
                 </a:solidFill>
                 <a:latin typeface="Montserrat"/>
               </a:rPr>
-              <a:t>Por duplicado a la Comunidad Autónoma</a:t>
+              <a:t>Certificado de inspección</a:t>
             </a:r>
           </a:p>
           <a:p>
             <a:pPr>
               <a:spcAft>
-                <a:spcPts val="1000"/>
+                <a:spcPts val="1100"/>
               </a:spcAft>
             </a:pPr>
             <a:r>
               <a:rPr sz="1600" b="1" i="0">
                 <a:solidFill>
-                  <a:srgbClr val="2E3A80"/>
-                </a:solidFill>
-                <a:latin typeface="Montserrat"/>
-              </a:rPr>
-              <a:t>•  </a:t>
+                  <a:srgbClr val="E8801A"/>
+                </a:solidFill>
+                <a:latin typeface="Montserrat"/>
+              </a:rPr>
+              <a:t>▸  </a:t>
             </a:r>
             <a:r>
               <a:rPr sz="1600" b="0" i="0">
@@ -10495,14 +11713,14 @@
                 </a:solidFill>
                 <a:latin typeface="Montserrat"/>
               </a:rPr>
-              <a:t>No confundir con los 30 del articulado</a:t>
-            </a:r>
-          </a:p>
-        </p:txBody>
-      </p:sp>
-      <p:sp>
-        <p:nvSpPr>
-          <p:cNvPr id="8" name="imgph" descr="IMGQ:calendar deadline paperwork desk"/>
+              <a:t>Aquí no hay certificado de instalación</a:t>
+            </a:r>
+          </a:p>
+        </p:txBody>
+      </p:sp>
+      <p:sp>
+        <p:nvSpPr>
+          <p:cNvPr id="9" name="imgph" descr="IMGQ:inspector signing certificate site"/>
           <p:cNvSpPr/>
           <p:nvPr/>
         </p:nvSpPr>
@@ -10548,7 +11766,7 @@
       </p:sp>
       <p:sp>
         <p:nvSpPr>
-          <p:cNvPr id="9" name="TextBox 8"/>
+          <p:cNvPr id="10" name="TextBox 9"/>
           <p:cNvSpPr txBox="1"/>
           <p:nvPr/>
         </p:nvSpPr>
@@ -10588,7 +11806,7 @@
                 </a:solidFill>
                 <a:latin typeface="Montserrat"/>
               </a:rPr>
-              <a:t>calendar deadline paperwork desk</a:t>
+              <a:t>inspector signing certificate site</a:t>
             </a:r>
           </a:p>
         </p:txBody>

--- a/Curso Gas B/02 - ITC-ICG 02-03-04 - Almacenamiento GLP y plantas GNL/02 - ITC-ICG 02-03-04 - Almacenamiento GLP y plantas GNL - Vídeo 4.pptx
+++ b/Curso Gas B/02 - ITC-ICG 02-03-04 - Almacenamiento GLP y plantas GNL/02 - ITC-ICG 02-03-04 - Almacenamiento GLP y plantas GNL - Vídeo 4.pptx
@@ -21,6 +21,10 @@
     <p:sldId id="269" r:id="rId21"/>
     <p:sldId id="270" r:id="rId22"/>
     <p:sldId id="271" r:id="rId23"/>
+    <p:sldId id="272" r:id="rId24"/>
+    <p:sldId id="273" r:id="rId25"/>
+    <p:sldId id="274" r:id="rId26"/>
+    <p:sldId id="275" r:id="rId27"/>
   </p:sldIdLst>
   <p:sldSz cx="12191695" cy="6858000" type="screen4x3"/>
   <p:notesSz cx="6858000" cy="9144000"/>
@@ -592,12 +596,12 @@
           <a:lstStyle/>
           <a:p>
             <a:r>
-              <a:t>N1: Una vez en marcha, ¿cuándo aviso a la Administración?</a:t>
-            </a:r>
-          </a:p>
-          <a:p>
-            <a:r>
-              <a:t>N2: Con los dos certificados expedidos, la planta está en disposición de servicio y el titular llama al suministrador para el primer llenado de los depósitos de GNL; antes verifica que la documentación está completa. Y después de la puesta en servicio hay que comunicarla, con un plazo que cae en examen: quince días hábiles, presentando por duplicado ante la Comunidad Autónoma el proyecto, los dos certificados, la documentación de los recipientes a presión y la fecha de puesta en servicio. Mucho cuidado aquí: son quince días hábiles, que no cuentan domingos ni festivos, y no hay que confundirlos con los treinta días genéricos del articulado del Reglamento para instalaciones receptoras. Cada instalación tiene su plazo; en el GNL, quince hábiles.</a:t>
+              <a:t>N1: ¿Y aquí también vale una memoria técnica como en el GLP pequeño?</a:t>
+            </a:r>
+          </a:p>
+          <a:p>
+            <a:r>
+              <a:t>N2: No, y esto es tajante. En el GNL no hay memoria que valga: toda planta satélite exige proyecto elaborado por técnico facultativo competente. La razón es que el GNL se maneja en instalaciones más serias y con más riesgo, así que el papeleo sube de nivel. El proyecto lleva lo habitual, objeto, ubicación, cálculos, obra civil, montaje y pruebas, presupuesto, pliego y planos, pero fíjate en el extra que no aparecía en el GLP: la documentación de seguridad y los planes de emergencia frente a accidentes graves. Ese añadido de los planes de emergencia es la pista de que estamos en una instalación de categoría superior. Idea de fondo: GNL, siempre proyecto, y con planes de emergencia.</a:t>
             </a:r>
           </a:p>
         </p:txBody>
@@ -667,12 +671,12 @@
           <a:lstStyle/>
           <a:p>
             <a:r>
-              <a:t>N1: El mantenimiento, ¿es muy distinto del depósito de GLP?</a:t>
-            </a:r>
-          </a:p>
-          <a:p>
-            <a:r>
-              <a:t>N2: Casi calcado, y eso es una buena noticia: si dominaste el mantenimiento del vídeo tres, este lo tienes medio ganado. El titular es el responsable de que la instalación esté siempre en disposición de servicio, y para ello hace falta un contrato de mantenimiento con servicio de urgencias permanente, un Libro de Mantenimiento o archivo documental donde consta cada visita, y existe la posible exención del contrato si el titular acredita capacidad y medios propios. ¿Qué cambia de fondo? Dos cosas que ya conoces: quien firma el mantenimiento es el especialista criogénico, no una instaladora de gas normal, y la norma de referencia es la UNE sesenta mil doscientos diez. Mismo esqueleto, distintos protagonistas.</a:t>
+              <a:t>N1: ¿Qué certificados hacen falta aquí para quedar en disposición de servicio?</a:t>
+            </a:r>
+          </a:p>
+          <a:p>
+            <a:r>
+              <a:t>N2: Antes de nada, el organismo de control, asistido por la empresa de montaje y el director de obra, hace las pruebas en obra de la norma para comprobar resistencia y estanquidad. Y luego, la puesta en servicio se apoya en solo dos papeles. Uno: el certificado de dirección de obra, que firma el director de obra, con la lista de componentes y la justificación de homologaciones como anexo. Dos: el certificado de inspección, que emite el organismo de control. Con esos dos, la instalación queda en disposición de servicio. Fíjate en lo que falta respecto al GLP: aquí no hay certificado de instalación de empresa instaladora, porque siempre hay proyecto y quien manda es el director de obra. Menos papeles, pero de más nivel.</a:t>
             </a:r>
           </a:p>
         </p:txBody>
@@ -742,12 +746,12 @@
           <a:lstStyle/>
           <a:p>
             <a:r>
-              <a:t>N1: ¿Cada cuánto se controla la planta y quién puede hacerlo?</a:t>
-            </a:r>
-          </a:p>
-          <a:p>
-            <a:r>
-              <a:t>N2: El control periódico general es cada cinco años, con las pruebas y verificaciones de la norma. Y quién puede realizarlo depende de una fórmula muy sencilla, uve por pe: multiplicas el volumen geométrico en metros cúbicos por la presión máxima de trabajo en bares. Si el resultado es trescientos o menos, el control lo puede hacer gente de la casa: el especialista criogénico, el servicio de mantenimiento del propio usuario, o un organismo de control. Pero si el resultado pasa de trescientos, entonces tiene que venir sí o sí un organismo de control independiente. La lógica: cuanto más grande y más presión, más ojos externos exige. Retén el número trescientos, y que el resultado del control va en un certificado por cuadriplicado: usuario, titular, órgano competente y el propio agente.</a:t>
+              <a:t>N1: Una vez en marcha, ¿cuándo aviso a la Administración?</a:t>
+            </a:r>
+          </a:p>
+          <a:p>
+            <a:r>
+              <a:t>N2: Con los dos certificados expedidos, la planta está en disposición de servicio y el titular llama al suministrador para el primer llenado de los depósitos de GNL; antes verifica que la documentación está completa. Y después de la puesta en servicio hay que comunicarla, con un plazo que cae en examen: quince días hábiles, presentando por duplicado ante la Comunidad Autónoma el proyecto, los dos certificados, la documentación de los recipientes a presión y la fecha de puesta en servicio. Mucho cuidado aquí: son quince días hábiles, que no cuentan domingos ni festivos, y no hay que confundirlos con los treinta días genéricos del articulado del Reglamento para instalaciones receptoras. Cada instalación tiene su plazo; en el GNL, quince hábiles.</a:t>
             </a:r>
           </a:p>
         </p:txBody>
@@ -817,12 +821,12 @@
           <a:lstStyle/>
           <a:p>
             <a:r>
-              <a:t>N1: La prueba de presión de los quince años, ¿es igual que la del GLP?</a:t>
-            </a:r>
-          </a:p>
-          <a:p>
-            <a:r>
-              <a:t>N2: No, y esta diferencia es de las que más caen. En el GNL, la prueba de presión de cada quince años es neumática, es decir, se hace con aire o gas a presión, no con agua. La realiza un organismo de control asistido por un especialista criogénico, que emite un acta de pruebas al terminar con éxito. ¿Por qué neumática y no hidráulica? Porque meter agua en un depósito criogénico sería introducir humedad, y esa humedad se congelaría y estropearía la instalación. Compara y no lo mezcles: en el depósito de GLP del vídeo anterior la prueba de los quince años era hidráulica, con agua; aquí, en el GNL frío, es neumática, con gas. Confundir hidráulica con neumática es el error clásico, en el examen y en la obra.</a:t>
+              <a:t>N1: El mantenimiento, ¿es muy distinto del depósito de GLP?</a:t>
+            </a:r>
+          </a:p>
+          <a:p>
+            <a:r>
+              <a:t>N2: Casi calcado, y eso es una buena noticia: si dominaste el mantenimiento del vídeo tres, este lo tienes medio ganado. El titular es el responsable de que la instalación esté siempre en disposición de servicio, y para ello hace falta un contrato de mantenimiento con servicio de urgencias permanente, un Libro de Mantenimiento o archivo documental donde consta cada visita, y existe la posible exención del contrato si el titular acredita capacidad y medios propios. ¿Qué cambia de fondo? Dos cosas que ya conoces: quien firma el mantenimiento es el especialista criogénico, no una instaladora de gas normal, y la norma de referencia es la UNE sesenta mil doscientos diez. Mismo esqueleto, distintos protagonistas.</a:t>
             </a:r>
           </a:p>
         </p:txBody>
@@ -892,12 +896,12 @@
           <a:lstStyle/>
           <a:p>
             <a:r>
-              <a:t>N1: Y cuando la planta deja de usarse, ¿misma historia que el depósito de GLP?</a:t>
-            </a:r>
-          </a:p>
-          <a:p>
-            <a:r>
-              <a:t>N2: Misma filosofía de seguridad, sí. Si la planta pasa un año entero sin recibir ninguna carga de GNL, el titular tiene que inertizarla: llenarla de nitrógeno u otro gas inerte para que dentro no quede una atmósfera inflamable. Ese inertizado lo hace la empresa de mantenimiento y lo supervisa y certifica un organismo de control. Y aquí va la frase de oro para el examen: bajo ningún concepto se desmonta una planta ni ninguno de sus depósitos sin haberlos inertizado antes. Es exactamente la misma idea que viste en el depósito de GLP del vídeo tres: un depósito vacío de gas inflamable sigue siendo peligroso hasta que lo neutralizas de verdad. En caso de cese, el distribuidor presenta la resolución de retirada y el titular se ocupa del desmontaje.</a:t>
+              <a:t>N1: ¿Cada cuánto se controla la planta y quién puede hacerlo?</a:t>
+            </a:r>
+          </a:p>
+          <a:p>
+            <a:r>
+              <a:t>N2: El control periódico general es cada cinco años, con las pruebas y verificaciones de la norma. Y quién puede realizarlo depende de una fórmula muy sencilla, uve por pe: multiplicas el volumen geométrico en metros cúbicos por la presión máxima de trabajo en bares. Si el resultado es trescientos o menos, el control lo puede hacer gente de la casa: el especialista criogénico, el servicio de mantenimiento del propio usuario, o un organismo de control. Pero si el resultado pasa de trescientos, entonces tiene que venir sí o sí un organismo de control independiente. La lógica: cuanto más grande y más presión, más ojos externos exige. Retén el número trescientos, y que el resultado del control va en un certificado por cuadriplicado: usuario, titular, órgano competente y el propio agente.</a:t>
             </a:r>
           </a:p>
         </p:txBody>
@@ -967,12 +971,12 @@
           <a:lstStyle/>
           <a:p>
             <a:r>
-              <a:t>N1: Antes de cerrar, resúmeme el GNL frente al GLP para no mezclarlos.</a:t>
-            </a:r>
-          </a:p>
-          <a:p>
-            <a:r>
-              <a:t>N2: Cinco líneas y los separas para siempre. Una: GNL va con la norma UNE sesenta mil doscientos diez y con el especialista criogénico, frente al GLP que iba con la sesenta mil doscientos cincuenta y la empresa instaladora. Dos: el GNL necesita autorización previa casi siempre, salvo uso propio y exclusivo, mientras que el centro de envases nunca la necesitaba. Tres: en GNL siempre hay proyecto, con el extra de los planes de emergencia. Cuatro: los controles son cada cinco años, y la fórmula uve por pe con la frontera en trescientos decide quién los hace. Y cinco: la prueba de presión de los quince años es neumática, con gas, no hidráulica, para no meter humedad en el frío. Con esas cinco líneas tienes el vídeo y la diferencia clave del tema.</a:t>
+              <a:t>N1: Multiplica volumen por presión. Si pasa de trescientos, ¿quién controla?</a:t>
+            </a:r>
+          </a:p>
+          <a:p>
+            <a:r>
+              <a:t>N2: Cuanto más grande y más presión, más ojos externos exige.</a:t>
             </a:r>
           </a:p>
         </p:txBody>
@@ -1042,22 +1046,237 @@
           <a:lstStyle/>
           <a:p>
             <a:r>
-              <a:t>N1: Cerramos el vídeo y el tema entero. ¿Qué me llevo de las plantas de GNL?</a:t>
-            </a:r>
-          </a:p>
-          <a:p>
-            <a:r>
-              <a:t>N2: Te llevas la pieza que faltaba del almacenamiento de gas. El GNL es gas natural licuado, criogénico, y todo lo suyo gira en torno a ese frío: por eso lo monta el especialista criogénico con la norma UNE sesenta mil doscientos diez, por eso la prueba de los quince años es neumática y no hidráulica, para no meter humedad, y por eso el papeleo sube de nivel con autorización previa, proyecto siempre y planes de emergencia. Y le has puesto sus cifras: mil metros cúbicos de tope, la fórmula uve por pe con la frontera en trescientos para decidir quién controla, control cada cinco años y comunicación en quince días hábiles.</a:t>
-            </a:r>
-          </a:p>
-          <a:p>
-            <a:r>
-              <a:t>N1: ¿Y qué me llevo del tema completo, ahora que lo he terminado?</a:t>
-            </a:r>
-          </a:p>
-          <a:p>
-            <a:r>
-              <a:t>N2: Que ya sabes dónde y cómo se guarda el gas antes de llegar al usuario, en sus tres formas. Los centros de envases, la nave de las bombonas de la ITC cero dos. Los depósitos fijos de GLP del chalé, con la UNE sesenta mil doscientos cincuenta y la ITC cero tres. Y las plantas satélite de GNL, con la UNE sesenta mil doscientos diez y la ITC cero cuatro. Fíjate en el hilo que las une todas: el gas mal guardado es peligroso, así que cada norma pone distancias, ventilación, pruebas y papeles para que nunca haya una fuga que se embolse o un depósito abandonado que siga siendo una bomba. En el examen te van a cruzar las tres instrucciones, y hoy ya las distingues sin dudar. Has cerrado el tema del almacenamiento de gas de punta a punta. Eres bastante más gasista que cuando empezaste. Nos vemos en el siguiente tema.</a:t>
+              <a:t>N1: ¿Por qué el organismo de control?</a:t>
+            </a:r>
+          </a:p>
+          <a:p>
+            <a:r>
+              <a:t>N2: Porque la fórmula uve por pe mide el riesgo: si el volumen por la presión pasa de trescientos, la planta es lo bastante seria como para exigir un organismo de control independiente. Si es trescientos o menos, vale gente de la casa, el especialista criogénico o el propio usuario. El número que decide es el trescientos.</a:t>
+            </a:r>
+          </a:p>
+        </p:txBody>
+      </p:sp>
+      <p:sp>
+        <p:nvSpPr>
+          <p:cNvPr id="4" name="Slide Number Placeholder 3"/>
+          <p:cNvSpPr>
+            <a:spLocks noGrp="1"/>
+          </p:cNvSpPr>
+          <p:nvPr>
+            <p:ph type="sldNum" idx="5" sz="quarter"/>
+          </p:nvPr>
+        </p:nvSpPr>
+        <p:spPr/>
+      </p:sp>
+    </p:spTree>
+  </p:cSld>
+  <p:clrMapOvr>
+    <a:masterClrMapping/>
+  </p:clrMapOvr>
+</p:notes>
+</file>
+
+<file path=ppt/notesSlides/notesSlide17.xml><?xml version="1.0" encoding="utf-8"?>
+<p:notes xmlns:a="http://schemas.openxmlformats.org/drawingml/2006/main" xmlns:p="http://schemas.openxmlformats.org/presentationml/2006/main" xmlns:r="http://schemas.openxmlformats.org/officeDocument/2006/relationships">
+  <p:cSld>
+    <p:spTree>
+      <p:nvGrpSpPr>
+        <p:cNvPr id="1" name=""/>
+        <p:cNvGrpSpPr/>
+        <p:nvPr/>
+      </p:nvGrpSpPr>
+      <p:grpSpPr>
+        <a:xfrm>
+          <a:off x="0" y="0"/>
+          <a:ext cx="0" cy="0"/>
+          <a:chOff x="0" y="0"/>
+          <a:chExt cx="0" cy="0"/>
+        </a:xfrm>
+      </p:grpSpPr>
+      <p:sp>
+        <p:nvSpPr>
+          <p:cNvPr id="2" name="Slide Image Placeholder 1"/>
+          <p:cNvSpPr>
+            <a:spLocks noGrp="1"/>
+          </p:cNvSpPr>
+          <p:nvPr>
+            <p:ph type="sldImg" idx="2"/>
+          </p:nvPr>
+        </p:nvSpPr>
+        <p:spPr/>
+      </p:sp>
+      <p:sp>
+        <p:nvSpPr>
+          <p:cNvPr id="3" name="Notes Placeholder 2"/>
+          <p:cNvSpPr>
+            <a:spLocks noGrp="1"/>
+          </p:cNvSpPr>
+          <p:nvPr>
+            <p:ph type="body" idx="3" sz="quarter"/>
+          </p:nvPr>
+        </p:nvSpPr>
+        <p:spPr/>
+        <p:txBody>
+          <a:bodyPr/>
+          <a:lstStyle/>
+          <a:p>
+            <a:r>
+              <a:t>N1: La prueba de presión de los quince años, ¿es igual que la del GLP?</a:t>
+            </a:r>
+          </a:p>
+          <a:p>
+            <a:r>
+              <a:t>N2: No, y esta diferencia es de las que más caen. En el GNL, la prueba de presión de cada quince años es neumática, es decir, se hace con aire o gas a presión, no con agua. La realiza un organismo de control asistido por un especialista criogénico, que emite un acta de pruebas al terminar con éxito. ¿Por qué neumática y no hidráulica? Porque meter agua en un depósito criogénico sería introducir humedad, y esa humedad se congelaría y estropearía la instalación. Compara y no lo mezcles: en el depósito de GLP del vídeo anterior la prueba de los quince años era hidráulica, con agua; aquí, en el GNL frío, es neumática, con gas. Confundir hidráulica con neumática es el error clásico, en el examen y en la obra.</a:t>
+            </a:r>
+          </a:p>
+        </p:txBody>
+      </p:sp>
+      <p:sp>
+        <p:nvSpPr>
+          <p:cNvPr id="4" name="Slide Number Placeholder 3"/>
+          <p:cNvSpPr>
+            <a:spLocks noGrp="1"/>
+          </p:cNvSpPr>
+          <p:nvPr>
+            <p:ph type="sldNum" idx="5" sz="quarter"/>
+          </p:nvPr>
+        </p:nvSpPr>
+        <p:spPr/>
+      </p:sp>
+    </p:spTree>
+  </p:cSld>
+  <p:clrMapOvr>
+    <a:masterClrMapping/>
+  </p:clrMapOvr>
+</p:notes>
+</file>
+
+<file path=ppt/notesSlides/notesSlide18.xml><?xml version="1.0" encoding="utf-8"?>
+<p:notes xmlns:a="http://schemas.openxmlformats.org/drawingml/2006/main" xmlns:p="http://schemas.openxmlformats.org/presentationml/2006/main" xmlns:r="http://schemas.openxmlformats.org/officeDocument/2006/relationships">
+  <p:cSld>
+    <p:spTree>
+      <p:nvGrpSpPr>
+        <p:cNvPr id="1" name=""/>
+        <p:cNvGrpSpPr/>
+        <p:nvPr/>
+      </p:nvGrpSpPr>
+      <p:grpSpPr>
+        <a:xfrm>
+          <a:off x="0" y="0"/>
+          <a:ext cx="0" cy="0"/>
+          <a:chOff x="0" y="0"/>
+          <a:chExt cx="0" cy="0"/>
+        </a:xfrm>
+      </p:grpSpPr>
+      <p:sp>
+        <p:nvSpPr>
+          <p:cNvPr id="2" name="Slide Image Placeholder 1"/>
+          <p:cNvSpPr>
+            <a:spLocks noGrp="1"/>
+          </p:cNvSpPr>
+          <p:nvPr>
+            <p:ph type="sldImg" idx="2"/>
+          </p:nvPr>
+        </p:nvSpPr>
+        <p:spPr/>
+      </p:sp>
+      <p:sp>
+        <p:nvSpPr>
+          <p:cNvPr id="3" name="Notes Placeholder 2"/>
+          <p:cNvSpPr>
+            <a:spLocks noGrp="1"/>
+          </p:cNvSpPr>
+          <p:nvPr>
+            <p:ph type="body" idx="3" sz="quarter"/>
+          </p:nvPr>
+        </p:nvSpPr>
+        <p:spPr/>
+        <p:txBody>
+          <a:bodyPr/>
+          <a:lstStyle/>
+          <a:p>
+            <a:r>
+              <a:t>N1: Y cuando la planta deja de usarse, ¿misma historia que el depósito de GLP?</a:t>
+            </a:r>
+          </a:p>
+          <a:p>
+            <a:r>
+              <a:t>N2: Misma filosofía de seguridad, sí. Si la planta pasa un año entero sin recibir ninguna carga de GNL, el titular tiene que inertizarla: llenarla de nitrógeno u otro gas inerte para que dentro no quede una atmósfera inflamable. Ese inertizado lo hace la empresa de mantenimiento y lo supervisa y certifica un organismo de control. Y aquí va la frase de oro para el examen: bajo ningún concepto se desmonta una planta ni ninguno de sus depósitos sin haberlos inertizado antes. Es exactamente la misma idea que viste en el depósito de GLP del vídeo tres: un depósito vacío de gas inflamable sigue siendo peligroso hasta que lo neutralizas de verdad. En caso de cese, el distribuidor presenta la resolución de retirada y el titular se ocupa del desmontaje.</a:t>
+            </a:r>
+          </a:p>
+        </p:txBody>
+      </p:sp>
+      <p:sp>
+        <p:nvSpPr>
+          <p:cNvPr id="4" name="Slide Number Placeholder 3"/>
+          <p:cNvSpPr>
+            <a:spLocks noGrp="1"/>
+          </p:cNvSpPr>
+          <p:nvPr>
+            <p:ph type="sldNum" idx="5" sz="quarter"/>
+          </p:nvPr>
+        </p:nvSpPr>
+        <p:spPr/>
+      </p:sp>
+    </p:spTree>
+  </p:cSld>
+  <p:clrMapOvr>
+    <a:masterClrMapping/>
+  </p:clrMapOvr>
+</p:notes>
+</file>
+
+<file path=ppt/notesSlides/notesSlide19.xml><?xml version="1.0" encoding="utf-8"?>
+<p:notes xmlns:a="http://schemas.openxmlformats.org/drawingml/2006/main" xmlns:p="http://schemas.openxmlformats.org/presentationml/2006/main" xmlns:r="http://schemas.openxmlformats.org/officeDocument/2006/relationships">
+  <p:cSld>
+    <p:spTree>
+      <p:nvGrpSpPr>
+        <p:cNvPr id="1" name=""/>
+        <p:cNvGrpSpPr/>
+        <p:nvPr/>
+      </p:nvGrpSpPr>
+      <p:grpSpPr>
+        <a:xfrm>
+          <a:off x="0" y="0"/>
+          <a:ext cx="0" cy="0"/>
+          <a:chOff x="0" y="0"/>
+          <a:chExt cx="0" cy="0"/>
+        </a:xfrm>
+      </p:grpSpPr>
+      <p:sp>
+        <p:nvSpPr>
+          <p:cNvPr id="2" name="Slide Image Placeholder 1"/>
+          <p:cNvSpPr>
+            <a:spLocks noGrp="1"/>
+          </p:cNvSpPr>
+          <p:nvPr>
+            <p:ph type="sldImg" idx="2"/>
+          </p:nvPr>
+        </p:nvSpPr>
+        <p:spPr/>
+      </p:sp>
+      <p:sp>
+        <p:nvSpPr>
+          <p:cNvPr id="3" name="Notes Placeholder 2"/>
+          <p:cNvSpPr>
+            <a:spLocks noGrp="1"/>
+          </p:cNvSpPr>
+          <p:nvPr>
+            <p:ph type="body" idx="3" sz="quarter"/>
+          </p:nvPr>
+        </p:nvSpPr>
+        <p:spPr/>
+        <p:txBody>
+          <a:bodyPr/>
+          <a:lstStyle/>
+          <a:p>
+            <a:r>
+              <a:t>N1: Antes de cerrar, resúmeme el GNL frente al GLP para no mezclarlos.</a:t>
+            </a:r>
+          </a:p>
+          <a:p>
+            <a:r>
+              <a:t>N2: Cinco líneas y los separas para siempre. Una: GNL va con la norma UNE sesenta mil doscientos diez y con el especialista criogénico, frente al GLP que iba con la sesenta mil doscientos cincuenta y la empresa instaladora. Dos: el GNL necesita autorización previa casi siempre, salvo uso propio y exclusivo, mientras que el centro de envases nunca la necesitaba. Tres: en GNL siempre hay proyecto, con el extra de los planes de emergencia. Cuatro: los controles son cada cinco años, y la fórmula uve por pe con la frontera en trescientos decide quién los hace. Y cinco: la prueba de presión de los quince años es neumática, con gas, no hidráulica, para no meter humedad en el frío. Con esas cinco líneas tienes el vídeo y la diferencia clave del tema.</a:t>
             </a:r>
           </a:p>
         </p:txBody>
@@ -1157,6 +1376,91 @@
 </p:notes>
 </file>
 
+<file path=ppt/notesSlides/notesSlide20.xml><?xml version="1.0" encoding="utf-8"?>
+<p:notes xmlns:a="http://schemas.openxmlformats.org/drawingml/2006/main" xmlns:p="http://schemas.openxmlformats.org/presentationml/2006/main" xmlns:r="http://schemas.openxmlformats.org/officeDocument/2006/relationships">
+  <p:cSld>
+    <p:spTree>
+      <p:nvGrpSpPr>
+        <p:cNvPr id="1" name=""/>
+        <p:cNvGrpSpPr/>
+        <p:nvPr/>
+      </p:nvGrpSpPr>
+      <p:grpSpPr>
+        <a:xfrm>
+          <a:off x="0" y="0"/>
+          <a:ext cx="0" cy="0"/>
+          <a:chOff x="0" y="0"/>
+          <a:chExt cx="0" cy="0"/>
+        </a:xfrm>
+      </p:grpSpPr>
+      <p:sp>
+        <p:nvSpPr>
+          <p:cNvPr id="2" name="Slide Image Placeholder 1"/>
+          <p:cNvSpPr>
+            <a:spLocks noGrp="1"/>
+          </p:cNvSpPr>
+          <p:nvPr>
+            <p:ph type="sldImg" idx="2"/>
+          </p:nvPr>
+        </p:nvSpPr>
+        <p:spPr/>
+      </p:sp>
+      <p:sp>
+        <p:nvSpPr>
+          <p:cNvPr id="3" name="Notes Placeholder 2"/>
+          <p:cNvSpPr>
+            <a:spLocks noGrp="1"/>
+          </p:cNvSpPr>
+          <p:nvPr>
+            <p:ph type="body" idx="3" sz="quarter"/>
+          </p:nvPr>
+        </p:nvSpPr>
+        <p:spPr/>
+        <p:txBody>
+          <a:bodyPr/>
+          <a:lstStyle/>
+          <a:p>
+            <a:r>
+              <a:t>N1: Cerramos el vídeo y el tema entero. ¿Qué me llevo de las plantas de GNL?</a:t>
+            </a:r>
+          </a:p>
+          <a:p>
+            <a:r>
+              <a:t>N2: Te llevas la pieza que faltaba del almacenamiento de gas. El GNL es gas natural licuado, criogénico, y todo lo suyo gira en torno a ese frío: por eso lo monta el especialista criogénico con la norma UNE sesenta mil doscientos diez, por eso la prueba de los quince años es neumática y no hidráulica, para no meter humedad, y por eso el papeleo sube de nivel con autorización previa, proyecto siempre y planes de emergencia. Y le has puesto sus cifras: mil metros cúbicos de tope, la fórmula uve por pe con la frontera en trescientos para decidir quién controla, control cada cinco años y comunicación en quince días hábiles.</a:t>
+            </a:r>
+          </a:p>
+          <a:p>
+            <a:r>
+              <a:t>N1: ¿Y qué me llevo del tema completo, ahora que lo he terminado?</a:t>
+            </a:r>
+          </a:p>
+          <a:p>
+            <a:r>
+              <a:t>N2: Que ya sabes dónde y cómo se guarda el gas antes de llegar al usuario, en sus tres formas. Los centros de envases, la nave de las bombonas de la ITC cero dos. Los depósitos fijos de GLP del chalé, con la UNE sesenta mil doscientos cincuenta y la ITC cero tres. Y las plantas satélite de GNL, con la UNE sesenta mil doscientos diez y la ITC cero cuatro. Fíjate en el hilo que las une todas: el gas mal guardado es peligroso, así que cada norma pone distancias, ventilación, pruebas y papeles para que nunca haya una fuga que se embolse o un depósito abandonado que siga siendo una bomba. En el examen te van a cruzar las tres instrucciones, y hoy ya las distingues sin dudar. Has cerrado el tema del almacenamiento de gas de punta a punta. Eres bastante más gasista que cuando empezaste. Nos vemos en el siguiente tema.</a:t>
+            </a:r>
+          </a:p>
+        </p:txBody>
+      </p:sp>
+      <p:sp>
+        <p:nvSpPr>
+          <p:cNvPr id="4" name="Slide Number Placeholder 3"/>
+          <p:cNvSpPr>
+            <a:spLocks noGrp="1"/>
+          </p:cNvSpPr>
+          <p:nvPr>
+            <p:ph type="sldNum" idx="5" sz="quarter"/>
+          </p:nvPr>
+        </p:nvSpPr>
+        <p:spPr/>
+      </p:sp>
+    </p:spTree>
+  </p:cSld>
+  <p:clrMapOvr>
+    <a:masterClrMapping/>
+  </p:clrMapOvr>
+</p:notes>
+</file>
+
 <file path=ppt/notesSlides/notesSlide3.xml><?xml version="1.0" encoding="utf-8"?>
 <p:notes xmlns:a="http://schemas.openxmlformats.org/drawingml/2006/main" xmlns:p="http://schemas.openxmlformats.org/presentationml/2006/main" xmlns:r="http://schemas.openxmlformats.org/officeDocument/2006/relationships">
   <p:cSld>
@@ -1493,12 +1797,12 @@
           <a:lstStyle/>
           <a:p>
             <a:r>
-              <a:t>N1: ¿Esta planta necesita permiso antes de construirla?</a:t>
-            </a:r>
-          </a:p>
-          <a:p>
-            <a:r>
-              <a:t>N2: Sí, y aquí está una de las grandes diferencias del tema. Repasa la escala: los centros de envases nunca necesitan autorización; los depósitos de GLP, solo si dan gas a terceros por una red; y la planta de GNL sí requiere autorización administrativa previa a su construcción como regla general, otorgada por el órgano competente de la Comunidad Autónoma. La única excepción es que la planta sea para uso propio y exclusivo de un usuario, por ejemplo una fábrica que se autoabastece. Regla para clavarlo: GNL, pide permiso antes, salvo autoconsumo exclusivo. Para solicitarla se presenta el proyecto con el modelo oficial, y te devuelven un ejemplar diligenciado con la fecha de entrada.</a:t>
+              <a:t>N1: El GNL va muy frío. ¿Quién puede trabajarlo?</a:t>
+            </a:r>
+          </a:p>
+          <a:p>
+            <a:r>
+              <a:t>N2: Piensa en que a esa temperatura un material normal se vuelve frágil como el cristal.</a:t>
             </a:r>
           </a:p>
         </p:txBody>
@@ -1568,12 +1872,12 @@
           <a:lstStyle/>
           <a:p>
             <a:r>
-              <a:t>N1: ¿Y aquí también vale una memoria técnica como en el GLP pequeño?</a:t>
-            </a:r>
-          </a:p>
-          <a:p>
-            <a:r>
-              <a:t>N2: No, y esto es tajante. En el GNL no hay memoria que valga: toda planta satélite exige proyecto elaborado por técnico facultativo competente. La razón es que el GNL se maneja en instalaciones más serias y con más riesgo, así que el papeleo sube de nivel. El proyecto lleva lo habitual, objeto, ubicación, cálculos, obra civil, montaje y pruebas, presupuesto, pliego y planos, pero fíjate en el extra que no aparecía en el GLP: la documentación de seguridad y los planes de emergencia frente a accidentes graves. Ese añadido de los planes de emergencia es la pista de que estamos en una instalación de categoría superior. Idea de fondo: GNL, siempre proyecto, y con planes de emergencia.</a:t>
+              <a:t>N1: ¿Por qué el criogénico y no un instalador cualquiera?</a:t>
+            </a:r>
+          </a:p>
+          <a:p>
+            <a:r>
+              <a:t>N2: Porque el gas natural licuado está a unos ciento sesenta grados bajo cero, y trabajarlo pide formación y materiales especiales. Por eso lo monta y lo mantiene el especialista criogénico, y la norma de referencia es la une sesenta mil doscientos diez. La cadena para no confundirla con el GLP: gas natural licuado, norma sesenta mil doscientos diez, especialista criogénico.</a:t>
             </a:r>
           </a:p>
         </p:txBody>
@@ -1643,12 +1947,12 @@
           <a:lstStyle/>
           <a:p>
             <a:r>
-              <a:t>N1: ¿Qué certificados hacen falta aquí para quedar en disposición de servicio?</a:t>
-            </a:r>
-          </a:p>
-          <a:p>
-            <a:r>
-              <a:t>N2: Antes de nada, el organismo de control, asistido por la empresa de montaje y el director de obra, hace las pruebas en obra de la norma para comprobar resistencia y estanquidad. Y luego, la puesta en servicio se apoya en solo dos papeles. Uno: el certificado de dirección de obra, que firma el director de obra, con la lista de componentes y la justificación de homologaciones como anexo. Dos: el certificado de inspección, que emite el organismo de control. Con esos dos, la instalación queda en disposición de servicio. Fíjate en lo que falta respecto al GLP: aquí no hay certificado de instalación de empresa instaladora, porque siempre hay proyecto y quien manda es el director de obra. Menos papeles, pero de más nivel.</a:t>
+              <a:t>N1: ¿Esta planta necesita permiso antes de construirla?</a:t>
+            </a:r>
+          </a:p>
+          <a:p>
+            <a:r>
+              <a:t>N2: Sí, y aquí está una de las grandes diferencias del tema. Repasa la escala: los centros de envases nunca necesitan autorización; los depósitos de GLP, solo si dan gas a terceros por una red; y la planta de GNL sí requiere autorización administrativa previa a su construcción como regla general, otorgada por el órgano competente de la Comunidad Autónoma. La única excepción es que la planta sea para uso propio y exclusivo de un usuario, por ejemplo una fábrica que se autoabastece. Regla para clavarlo: GNL, pide permiso antes, salvo autoconsumo exclusivo. Para solicitarla se presenta el proyecto con el modelo oficial, y te devuelven un ejemplar diligenciado con la fecha de entrada.</a:t>
             </a:r>
           </a:p>
         </p:txBody>
@@ -4734,7 +5038,7 @@
       </p:sp>
       <p:sp>
         <p:nvSpPr>
-          <p:cNvPr id="4" name="Rounded Rectangle 3"/>
+          <p:cNvPr id="4" name="Rectangle 3"/>
           <p:cNvSpPr/>
           <p:nvPr/>
         </p:nvSpPr>
@@ -4743,7 +5047,7 @@
             <a:off x="868680" y="2057400"/>
             <a:ext cx="1463040" cy="82296"/>
           </a:xfrm>
-          <a:prstGeom prst="roundRect">
+          <a:prstGeom prst="rect">
             <a:avLst/>
           </a:prstGeom>
           <a:solidFill>
@@ -4860,6 +5164,18 @@
   <p:clrMapOvr>
     <a:masterClrMapping/>
   </p:clrMapOvr>
+  <mc:AlternateContent xmlns:mc="http://schemas.openxmlformats.org/markup-compatibility/2006">
+    <mc:Choice xmlns:p14="http://schemas.microsoft.com/office/powerpoint/2010/main" Requires="p14">
+      <p:transition spd="med" p14:dur="700">
+        <p14:cube dir="l"/>
+      </p:transition>
+    </mc:Choice>
+    <mc:Fallback>
+      <p:transition spd="med">
+        <p:push dir="l"/>
+      </p:transition>
+    </mc:Fallback>
+  </mc:AlternateContent>
 </p:sld>
 </file>
 
@@ -4947,7 +5263,7 @@
                 </a:solidFill>
                 <a:latin typeface="Montserrat"/>
               </a:rPr>
-              <a:t>010 / 016</a:t>
+              <a:t>010 / 020</a:t>
             </a:r>
           </a:p>
         </p:txBody>
@@ -5015,7 +5331,7 @@
                 </a:solidFill>
                 <a:latin typeface="Montserrat"/>
               </a:rPr>
-              <a:t>APARTADOS 5.5 Y 5.6 · COMUNICACIÓN</a:t>
+              <a:t>APARTADO 5.2 · DOCUMENTACIÓN</a:t>
             </a:r>
           </a:p>
         </p:txBody>
@@ -5049,14 +5365,14 @@
                 </a:solidFill>
                 <a:latin typeface="Montserrat"/>
               </a:rPr>
-              <a:t>15 días hábiles, no naturales</a:t>
-            </a:r>
-          </a:p>
-        </p:txBody>
-      </p:sp>
-      <p:sp>
-        <p:nvSpPr>
-          <p:cNvPr id="7" name="Rounded Rectangle 6"/>
+              <a:t>Siempre proyecto</a:t>
+            </a:r>
+          </a:p>
+        </p:txBody>
+      </p:sp>
+      <p:sp>
+        <p:nvSpPr>
+          <p:cNvPr id="7" name="Rectangle 6"/>
           <p:cNvSpPr/>
           <p:nvPr/>
         </p:nvSpPr>
@@ -5065,7 +5381,7 @@
             <a:off x="868680" y="1627632"/>
             <a:ext cx="2011680" cy="73152"/>
           </a:xfrm>
-          <a:prstGeom prst="roundRect">
+          <a:prstGeom prst="rect">
             <a:avLst/>
           </a:prstGeom>
           <a:solidFill>
@@ -5107,7 +5423,7 @@
         <p:spPr>
           <a:xfrm>
             <a:off x="822960" y="1965960"/>
-            <a:ext cx="4983480" cy="4206240"/>
+            <a:ext cx="5029200" cy="4206240"/>
           </a:xfrm>
           <a:prstGeom prst="rect">
             <a:avLst/>
@@ -5141,7 +5457,7 @@
                 </a:solidFill>
                 <a:latin typeface="Montserrat"/>
               </a:rPr>
-              <a:t>Con los dos certificados: primer llenado</a:t>
+              <a:t>Toda planta de GNL exige proyecto</a:t>
             </a:r>
           </a:p>
           <a:p>
@@ -5166,7 +5482,7 @@
                 </a:solidFill>
                 <a:latin typeface="Montserrat"/>
               </a:rPr>
-              <a:t>Comunicar en 15 días hábiles</a:t>
+              <a:t>Lo firma técnico facultativo competente</a:t>
             </a:r>
           </a:p>
           <a:p>
@@ -5191,7 +5507,7 @@
                 </a:solidFill>
                 <a:latin typeface="Montserrat"/>
               </a:rPr>
-              <a:t>Por duplicado a la Comunidad Autónoma</a:t>
+              <a:t>Nada de memoria técnica</a:t>
             </a:r>
           </a:p>
           <a:p>
@@ -5216,21 +5532,21 @@
                 </a:solidFill>
                 <a:latin typeface="Montserrat"/>
               </a:rPr>
-              <a:t>No confundir con los 30 del articulado</a:t>
-            </a:r>
-          </a:p>
-        </p:txBody>
-      </p:sp>
-      <p:sp>
-        <p:nvSpPr>
-          <p:cNvPr id="9" name="imgph" descr="IMGQ:calendar deadline paperwork desk"/>
+              <a:t>Extra: planes de emergencia</a:t>
+            </a:r>
+          </a:p>
+        </p:txBody>
+      </p:sp>
+      <p:sp>
+        <p:nvSpPr>
+          <p:cNvPr id="9" name="imgph" descr="IMGQ:safety emergency plan engineering documents"/>
           <p:cNvSpPr/>
           <p:nvPr/>
         </p:nvSpPr>
         <p:spPr>
           <a:xfrm>
-            <a:off x="5806440" y="1051560"/>
-            <a:ext cx="5298947" cy="4629150"/>
+            <a:off x="6080760" y="1965960"/>
+            <a:ext cx="5303520" cy="4572000"/>
           </a:xfrm>
           <a:prstGeom prst="roundRect">
             <a:avLst/>
@@ -5275,8 +5591,8 @@
         </p:nvSpPr>
         <p:spPr>
           <a:xfrm>
-            <a:off x="6080760" y="2726055"/>
-            <a:ext cx="4750307" cy="1280160"/>
+            <a:off x="6355080" y="3611880"/>
+            <a:ext cx="4754880" cy="1280160"/>
           </a:xfrm>
           <a:prstGeom prst="rect">
             <a:avLst/>
@@ -5297,7 +5613,7 @@
                 </a:solidFill>
                 <a:latin typeface="Montserrat"/>
               </a:rPr>
-              <a:t>IMAGEN REALISTA</a:t>
+              <a:t>IMAGEN</a:t>
             </a:r>
           </a:p>
           <a:p>
@@ -5309,7 +5625,7 @@
                 </a:solidFill>
                 <a:latin typeface="Montserrat"/>
               </a:rPr>
-              <a:t>calendar deadline paperwork desk</a:t>
+              <a:t>safety emergency plan engineering documents</a:t>
             </a:r>
           </a:p>
         </p:txBody>
@@ -5319,6 +5635,18 @@
   <p:clrMapOvr>
     <a:masterClrMapping/>
   </p:clrMapOvr>
+  <mc:AlternateContent xmlns:mc="http://schemas.openxmlformats.org/markup-compatibility/2006">
+    <mc:Choice xmlns:p14="http://schemas.microsoft.com/office/powerpoint/2010/main" Requires="p14">
+      <p:transition spd="med" p14:dur="700">
+        <p14:cube dir="r"/>
+      </p:transition>
+    </mc:Choice>
+    <mc:Fallback>
+      <p:transition spd="med">
+        <p:push dir="r"/>
+      </p:transition>
+    </mc:Fallback>
+  </mc:AlternateContent>
 </p:sld>
 </file>
 
@@ -5406,7 +5734,7 @@
                 </a:solidFill>
                 <a:latin typeface="Montserrat"/>
               </a:rPr>
-              <a:t>011 / 016</a:t>
+              <a:t>011 / 020</a:t>
             </a:r>
           </a:p>
         </p:txBody>
@@ -5474,7 +5802,7 @@
                 </a:solidFill>
                 <a:latin typeface="Montserrat"/>
               </a:rPr>
-              <a:t>APARTADO 6.1 · MANTENIMIENTO</a:t>
+              <a:t>APARTADOS 5.3 Y 5.4 · CERTIFICADOS</a:t>
             </a:r>
           </a:p>
         </p:txBody>
@@ -5508,14 +5836,14 @@
                 </a:solidFill>
                 <a:latin typeface="Montserrat"/>
               </a:rPr>
-              <a:t>Mismo esqueleto, con el criogénico</a:t>
-            </a:r>
-          </a:p>
-        </p:txBody>
-      </p:sp>
-      <p:sp>
-        <p:nvSpPr>
-          <p:cNvPr id="7" name="Rounded Rectangle 6"/>
+              <a:t>Dos papeles y hay gas</a:t>
+            </a:r>
+          </a:p>
+        </p:txBody>
+      </p:sp>
+      <p:sp>
+        <p:nvSpPr>
+          <p:cNvPr id="7" name="Rectangle 6"/>
           <p:cNvSpPr/>
           <p:nvPr/>
         </p:nvSpPr>
@@ -5524,7 +5852,7 @@
             <a:off x="868680" y="1627632"/>
             <a:ext cx="2011680" cy="73152"/>
           </a:xfrm>
-          <a:prstGeom prst="roundRect">
+          <a:prstGeom prst="rect">
             <a:avLst/>
           </a:prstGeom>
           <a:solidFill>
@@ -5565,8 +5893,8 @@
         </p:nvSpPr>
         <p:spPr>
           <a:xfrm>
-            <a:off x="822960" y="1965960"/>
-            <a:ext cx="4983480" cy="4206240"/>
+            <a:off x="6355080" y="1965960"/>
+            <a:ext cx="5029200" cy="4206240"/>
           </a:xfrm>
           <a:prstGeom prst="rect">
             <a:avLst/>
@@ -5600,7 +5928,7 @@
                 </a:solidFill>
                 <a:latin typeface="Montserrat"/>
               </a:rPr>
-              <a:t>Contrato con especialista criogénico</a:t>
+              <a:t>Pruebas en obra: organismo de control</a:t>
             </a:r>
           </a:p>
           <a:p>
@@ -5625,7 +5953,7 @@
                 </a:solidFill>
                 <a:latin typeface="Montserrat"/>
               </a:rPr>
-              <a:t>Servicio de urgencias permanente</a:t>
+              <a:t>Certificado de dirección de obra</a:t>
             </a:r>
           </a:p>
           <a:p>
@@ -5650,7 +5978,7 @@
                 </a:solidFill>
                 <a:latin typeface="Montserrat"/>
               </a:rPr>
-              <a:t>Libro de Mantenimiento o archivo</a:t>
+              <a:t>Certificado de inspección</a:t>
             </a:r>
           </a:p>
           <a:p>
@@ -5675,21 +6003,21 @@
                 </a:solidFill>
                 <a:latin typeface="Montserrat"/>
               </a:rPr>
-              <a:t>Posible exención si tienes medios</a:t>
-            </a:r>
-          </a:p>
-        </p:txBody>
-      </p:sp>
-      <p:sp>
-        <p:nvSpPr>
-          <p:cNvPr id="9" name="imgph" descr="IMGQ:maintenance engineer cryogenic plant"/>
+              <a:t>Aquí no hay certificado de instalación</a:t>
+            </a:r>
+          </a:p>
+        </p:txBody>
+      </p:sp>
+      <p:sp>
+        <p:nvSpPr>
+          <p:cNvPr id="9" name="imgph" descr="IMGQ:inspector signing certificate site"/>
           <p:cNvSpPr/>
           <p:nvPr/>
         </p:nvSpPr>
         <p:spPr>
           <a:xfrm>
-            <a:off x="5806440" y="1051560"/>
-            <a:ext cx="5298947" cy="4629150"/>
+            <a:off x="822960" y="1965960"/>
+            <a:ext cx="5303520" cy="4572000"/>
           </a:xfrm>
           <a:prstGeom prst="roundRect">
             <a:avLst/>
@@ -5734,8 +6062,8 @@
         </p:nvSpPr>
         <p:spPr>
           <a:xfrm>
-            <a:off x="6080760" y="2726055"/>
-            <a:ext cx="4750307" cy="1280160"/>
+            <a:off x="1097280" y="3611880"/>
+            <a:ext cx="4754880" cy="1280160"/>
           </a:xfrm>
           <a:prstGeom prst="rect">
             <a:avLst/>
@@ -5756,7 +6084,7 @@
                 </a:solidFill>
                 <a:latin typeface="Montserrat"/>
               </a:rPr>
-              <a:t>IMAGEN REALISTA</a:t>
+              <a:t>IMAGEN</a:t>
             </a:r>
           </a:p>
           <a:p>
@@ -5768,7 +6096,7 @@
                 </a:solidFill>
                 <a:latin typeface="Montserrat"/>
               </a:rPr>
-              <a:t>maintenance engineer cryogenic plant</a:t>
+              <a:t>inspector signing certificate site</a:t>
             </a:r>
           </a:p>
         </p:txBody>
@@ -5778,6 +6106,18 @@
   <p:clrMapOvr>
     <a:masterClrMapping/>
   </p:clrMapOvr>
+  <mc:AlternateContent xmlns:mc="http://schemas.openxmlformats.org/markup-compatibility/2006">
+    <mc:Choice xmlns:p14="http://schemas.microsoft.com/office/powerpoint/2010/main" Requires="p14">
+      <p:transition spd="med" p14:dur="700">
+        <p14:cube dir="l"/>
+      </p:transition>
+    </mc:Choice>
+    <mc:Fallback>
+      <p:transition spd="med">
+        <p:push dir="l"/>
+      </p:transition>
+    </mc:Fallback>
+  </mc:AlternateContent>
 </p:sld>
 </file>
 
@@ -5865,7 +6205,7 @@
                 </a:solidFill>
                 <a:latin typeface="Montserrat"/>
               </a:rPr>
-              <a:t>012 / 016</a:t>
+              <a:t>012 / 020</a:t>
             </a:r>
           </a:p>
         </p:txBody>
@@ -5933,7 +6273,7 @@
                 </a:solidFill>
                 <a:latin typeface="Montserrat"/>
               </a:rPr>
-              <a:t>APARTADO 6.2 · CONTROLES</a:t>
+              <a:t>APARTADOS 5.5 Y 5.6 · COMUNICACIÓN</a:t>
             </a:r>
           </a:p>
         </p:txBody>
@@ -5967,14 +6307,14 @@
                 </a:solidFill>
                 <a:latin typeface="Montserrat"/>
               </a:rPr>
-              <a:t>Cada 5 años y la fórmula V × P</a:t>
-            </a:r>
-          </a:p>
-        </p:txBody>
-      </p:sp>
-      <p:sp>
-        <p:nvSpPr>
-          <p:cNvPr id="7" name="Rounded Rectangle 6"/>
+              <a:t>15 días hábiles, no naturales</a:t>
+            </a:r>
+          </a:p>
+        </p:txBody>
+      </p:sp>
+      <p:sp>
+        <p:nvSpPr>
+          <p:cNvPr id="7" name="Rectangle 6"/>
           <p:cNvSpPr/>
           <p:nvPr/>
         </p:nvSpPr>
@@ -5983,7 +6323,7 @@
             <a:off x="868680" y="1627632"/>
             <a:ext cx="2011680" cy="73152"/>
           </a:xfrm>
-          <a:prstGeom prst="roundRect">
+          <a:prstGeom prst="rect">
             <a:avLst/>
           </a:prstGeom>
           <a:solidFill>
@@ -6025,7 +6365,7 @@
         <p:spPr>
           <a:xfrm>
             <a:off x="822960" y="1965960"/>
-            <a:ext cx="4983480" cy="4206240"/>
+            <a:ext cx="5029200" cy="4206240"/>
           </a:xfrm>
           <a:prstGeom prst="rect">
             <a:avLst/>
@@ -6059,7 +6399,7 @@
                 </a:solidFill>
                 <a:latin typeface="Montserrat"/>
               </a:rPr>
-              <a:t>Control periódico cada 5 años</a:t>
+              <a:t>Con los dos certificados: primer llenado</a:t>
             </a:r>
           </a:p>
           <a:p>
@@ -6084,7 +6424,7 @@
                 </a:solidFill>
                 <a:latin typeface="Montserrat"/>
               </a:rPr>
-              <a:t>V × P: volumen por presión máxima</a:t>
+              <a:t>Comunicar en 15 días hábiles</a:t>
             </a:r>
           </a:p>
           <a:p>
@@ -6109,7 +6449,7 @@
                 </a:solidFill>
                 <a:latin typeface="Montserrat"/>
               </a:rPr>
-              <a:t>300 o menos: criogénico o usuario vale</a:t>
+              <a:t>Por duplicado a la Comunidad Autónoma</a:t>
             </a:r>
           </a:p>
           <a:p>
@@ -6134,21 +6474,21 @@
                 </a:solidFill>
                 <a:latin typeface="Montserrat"/>
               </a:rPr>
-              <a:t>Más de 300: obligatorio organismo de control</a:t>
-            </a:r>
-          </a:p>
-        </p:txBody>
-      </p:sp>
-      <p:sp>
-        <p:nvSpPr>
-          <p:cNvPr id="9" name="imgph" descr="IMGQ:pressure gauge cryogenic tank"/>
+              <a:t>No confundir con los 30 del articulado</a:t>
+            </a:r>
+          </a:p>
+        </p:txBody>
+      </p:sp>
+      <p:sp>
+        <p:nvSpPr>
+          <p:cNvPr id="9" name="imgph" descr="IMGQ:calendar deadline paperwork desk"/>
           <p:cNvSpPr/>
           <p:nvPr/>
         </p:nvSpPr>
         <p:spPr>
           <a:xfrm>
-            <a:off x="5806440" y="1051560"/>
-            <a:ext cx="5298947" cy="4629150"/>
+            <a:off x="6080760" y="1965960"/>
+            <a:ext cx="5303520" cy="4572000"/>
           </a:xfrm>
           <a:prstGeom prst="roundRect">
             <a:avLst/>
@@ -6193,8 +6533,8 @@
         </p:nvSpPr>
         <p:spPr>
           <a:xfrm>
-            <a:off x="6080760" y="2726055"/>
-            <a:ext cx="4750307" cy="1280160"/>
+            <a:off x="6355080" y="3611880"/>
+            <a:ext cx="4754880" cy="1280160"/>
           </a:xfrm>
           <a:prstGeom prst="rect">
             <a:avLst/>
@@ -6215,7 +6555,7 @@
                 </a:solidFill>
                 <a:latin typeface="Montserrat"/>
               </a:rPr>
-              <a:t>IMAGEN REALISTA</a:t>
+              <a:t>IMAGEN</a:t>
             </a:r>
           </a:p>
           <a:p>
@@ -6227,7 +6567,7 @@
                 </a:solidFill>
                 <a:latin typeface="Montserrat"/>
               </a:rPr>
-              <a:t>pressure gauge cryogenic tank</a:t>
+              <a:t>calendar deadline paperwork desk</a:t>
             </a:r>
           </a:p>
         </p:txBody>
@@ -6237,6 +6577,18 @@
   <p:clrMapOvr>
     <a:masterClrMapping/>
   </p:clrMapOvr>
+  <mc:AlternateContent xmlns:mc="http://schemas.openxmlformats.org/markup-compatibility/2006">
+    <mc:Choice xmlns:p14="http://schemas.microsoft.com/office/powerpoint/2010/main" Requires="p14">
+      <p:transition spd="med" p14:dur="700">
+        <p14:cube dir="r"/>
+      </p:transition>
+    </mc:Choice>
+    <mc:Fallback>
+      <p:transition spd="med">
+        <p:push dir="r"/>
+      </p:transition>
+    </mc:Fallback>
+  </mc:AlternateContent>
 </p:sld>
 </file>
 
@@ -6324,7 +6676,7 @@
                 </a:solidFill>
                 <a:latin typeface="Montserrat"/>
               </a:rPr>
-              <a:t>013 / 016</a:t>
+              <a:t>013 / 020</a:t>
             </a:r>
           </a:p>
         </p:txBody>
@@ -6392,7 +6744,7 @@
                 </a:solidFill>
                 <a:latin typeface="Montserrat"/>
               </a:rPr>
-              <a:t>APARTADO 6.2 · PRUEBA DE PRESIÓN</a:t>
+              <a:t>APARTADO 6.1 · MANTENIMIENTO</a:t>
             </a:r>
           </a:p>
         </p:txBody>
@@ -6426,14 +6778,14 @@
                 </a:solidFill>
                 <a:latin typeface="Montserrat"/>
               </a:rPr>
-              <a:t>Neumática, no hidráulica</a:t>
-            </a:r>
-          </a:p>
-        </p:txBody>
-      </p:sp>
-      <p:sp>
-        <p:nvSpPr>
-          <p:cNvPr id="7" name="Rounded Rectangle 6"/>
+              <a:t>Mismo esqueleto, con el criogénico</a:t>
+            </a:r>
+          </a:p>
+        </p:txBody>
+      </p:sp>
+      <p:sp>
+        <p:nvSpPr>
+          <p:cNvPr id="7" name="Rectangle 6"/>
           <p:cNvSpPr/>
           <p:nvPr/>
         </p:nvSpPr>
@@ -6442,7 +6794,7 @@
             <a:off x="868680" y="1627632"/>
             <a:ext cx="2011680" cy="73152"/>
           </a:xfrm>
-          <a:prstGeom prst="roundRect">
+          <a:prstGeom prst="rect">
             <a:avLst/>
           </a:prstGeom>
           <a:solidFill>
@@ -6483,8 +6835,8 @@
         </p:nvSpPr>
         <p:spPr>
           <a:xfrm>
-            <a:off x="822960" y="1965960"/>
-            <a:ext cx="4983480" cy="4206240"/>
+            <a:off x="6355080" y="1965960"/>
+            <a:ext cx="5029200" cy="4206240"/>
           </a:xfrm>
           <a:prstGeom prst="rect">
             <a:avLst/>
@@ -6518,7 +6870,7 @@
                 </a:solidFill>
                 <a:latin typeface="Montserrat"/>
               </a:rPr>
-              <a:t>Prueba de presión cada 15 años</a:t>
+              <a:t>Contrato con especialista criogénico</a:t>
             </a:r>
           </a:p>
           <a:p>
@@ -6543,7 +6895,7 @@
                 </a:solidFill>
                 <a:latin typeface="Montserrat"/>
               </a:rPr>
-              <a:t>Neumática: con gas, no con agua</a:t>
+              <a:t>Servicio de urgencias permanente</a:t>
             </a:r>
           </a:p>
           <a:p>
@@ -6568,7 +6920,7 @@
                 </a:solidFill>
                 <a:latin typeface="Montserrat"/>
               </a:rPr>
-              <a:t>Evita meter humedad al depósito frío</a:t>
+              <a:t>Libro de Mantenimiento o archivo</a:t>
             </a:r>
           </a:p>
           <a:p>
@@ -6593,21 +6945,21 @@
                 </a:solidFill>
                 <a:latin typeface="Montserrat"/>
               </a:rPr>
-              <a:t>GLP era hidráulica; GNL es neumática</a:t>
-            </a:r>
-          </a:p>
-        </p:txBody>
-      </p:sp>
-      <p:sp>
-        <p:nvSpPr>
-          <p:cNvPr id="9" name="imgph" descr="IMGQ:nitrogen pressure test cryogenic equipment"/>
+              <a:t>Posible exención si tienes medios</a:t>
+            </a:r>
+          </a:p>
+        </p:txBody>
+      </p:sp>
+      <p:sp>
+        <p:nvSpPr>
+          <p:cNvPr id="9" name="imgph" descr="IMGQ:maintenance engineer cryogenic plant"/>
           <p:cNvSpPr/>
           <p:nvPr/>
         </p:nvSpPr>
         <p:spPr>
           <a:xfrm>
-            <a:off x="5806440" y="1051560"/>
-            <a:ext cx="5298947" cy="4629150"/>
+            <a:off x="822960" y="1965960"/>
+            <a:ext cx="5303520" cy="4572000"/>
           </a:xfrm>
           <a:prstGeom prst="roundRect">
             <a:avLst/>
@@ -6652,8 +7004,8 @@
         </p:nvSpPr>
         <p:spPr>
           <a:xfrm>
-            <a:off x="6080760" y="2726055"/>
-            <a:ext cx="4750307" cy="1280160"/>
+            <a:off x="1097280" y="3611880"/>
+            <a:ext cx="4754880" cy="1280160"/>
           </a:xfrm>
           <a:prstGeom prst="rect">
             <a:avLst/>
@@ -6674,7 +7026,7 @@
                 </a:solidFill>
                 <a:latin typeface="Montserrat"/>
               </a:rPr>
-              <a:t>IMAGEN REALISTA</a:t>
+              <a:t>IMAGEN</a:t>
             </a:r>
           </a:p>
           <a:p>
@@ -6686,7 +7038,7 @@
                 </a:solidFill>
                 <a:latin typeface="Montserrat"/>
               </a:rPr>
-              <a:t>nitrogen pressure test cryogenic equipment</a:t>
+              <a:t>maintenance engineer cryogenic plant</a:t>
             </a:r>
           </a:p>
         </p:txBody>
@@ -6696,6 +7048,18 @@
   <p:clrMapOvr>
     <a:masterClrMapping/>
   </p:clrMapOvr>
+  <mc:AlternateContent xmlns:mc="http://schemas.openxmlformats.org/markup-compatibility/2006">
+    <mc:Choice xmlns:p14="http://schemas.microsoft.com/office/powerpoint/2010/main" Requires="p14">
+      <p:transition spd="med" p14:dur="700">
+        <p14:cube dir="l"/>
+      </p:transition>
+    </mc:Choice>
+    <mc:Fallback>
+      <p:transition spd="med">
+        <p:push dir="l"/>
+      </p:transition>
+    </mc:Fallback>
+  </mc:AlternateContent>
 </p:sld>
 </file>
 
@@ -6783,7 +7147,7 @@
                 </a:solidFill>
                 <a:latin typeface="Montserrat"/>
               </a:rPr>
-              <a:t>014 / 016</a:t>
+              <a:t>014 / 020</a:t>
             </a:r>
           </a:p>
         </p:txBody>
@@ -6851,7 +7215,7 @@
                 </a:solidFill>
                 <a:latin typeface="Montserrat"/>
               </a:rPr>
-              <a:t>APARTADO 6.3 · RETIRADA</a:t>
+              <a:t>APARTADO 6.2 · CONTROLES</a:t>
             </a:r>
           </a:p>
         </p:txBody>
@@ -6885,14 +7249,14 @@
                 </a:solidFill>
                 <a:latin typeface="Montserrat"/>
               </a:rPr>
-              <a:t>Un año sin carga: inertizar</a:t>
-            </a:r>
-          </a:p>
-        </p:txBody>
-      </p:sp>
-      <p:sp>
-        <p:nvSpPr>
-          <p:cNvPr id="7" name="Rounded Rectangle 6"/>
+              <a:t>Cada 5 años y la fórmula V × P</a:t>
+            </a:r>
+          </a:p>
+        </p:txBody>
+      </p:sp>
+      <p:sp>
+        <p:nvSpPr>
+          <p:cNvPr id="7" name="Rectangle 6"/>
           <p:cNvSpPr/>
           <p:nvPr/>
         </p:nvSpPr>
@@ -6901,7 +7265,7 @@
             <a:off x="868680" y="1627632"/>
             <a:ext cx="2011680" cy="73152"/>
           </a:xfrm>
-          <a:prstGeom prst="roundRect">
+          <a:prstGeom prst="rect">
             <a:avLst/>
           </a:prstGeom>
           <a:solidFill>
@@ -6943,7 +7307,7 @@
         <p:spPr>
           <a:xfrm>
             <a:off x="822960" y="1965960"/>
-            <a:ext cx="4983480" cy="4206240"/>
+            <a:ext cx="5029200" cy="4206240"/>
           </a:xfrm>
           <a:prstGeom prst="rect">
             <a:avLst/>
@@ -6977,7 +7341,7 @@
                 </a:solidFill>
                 <a:latin typeface="Montserrat"/>
               </a:rPr>
-              <a:t>Un año sin recibir GNL: inertizado</a:t>
+              <a:t>Control periódico cada 5 años</a:t>
             </a:r>
           </a:p>
           <a:p>
@@ -7002,7 +7366,7 @@
                 </a:solidFill>
                 <a:latin typeface="Montserrat"/>
               </a:rPr>
-              <a:t>Con nitrógeno u otro gas inerte</a:t>
+              <a:t>V × P: volumen por presión máxima</a:t>
             </a:r>
           </a:p>
           <a:p>
@@ -7027,7 +7391,7 @@
                 </a:solidFill>
                 <a:latin typeface="Montserrat"/>
               </a:rPr>
-              <a:t>Lo supervisa un organismo de control</a:t>
+              <a:t>300 o menos: criogénico o usuario vale</a:t>
             </a:r>
           </a:p>
           <a:p>
@@ -7052,21 +7416,21 @@
                 </a:solidFill>
                 <a:latin typeface="Montserrat"/>
               </a:rPr>
-              <a:t>Nunca desmontar sin inertizar antes</a:t>
-            </a:r>
-          </a:p>
-        </p:txBody>
-      </p:sp>
-      <p:sp>
-        <p:nvSpPr>
-          <p:cNvPr id="9" name="imgph" descr="IMGQ:nitrogen purge industrial gas tank"/>
+              <a:t>Más de 300: obligatorio organismo de control</a:t>
+            </a:r>
+          </a:p>
+        </p:txBody>
+      </p:sp>
+      <p:sp>
+        <p:nvSpPr>
+          <p:cNvPr id="9" name="imgph" descr="IMGQ:pressure gauge cryogenic tank"/>
           <p:cNvSpPr/>
           <p:nvPr/>
         </p:nvSpPr>
         <p:spPr>
           <a:xfrm>
-            <a:off x="5806440" y="1051560"/>
-            <a:ext cx="5298947" cy="4629150"/>
+            <a:off x="6080760" y="1965960"/>
+            <a:ext cx="5303520" cy="4572000"/>
           </a:xfrm>
           <a:prstGeom prst="roundRect">
             <a:avLst/>
@@ -7111,8 +7475,8 @@
         </p:nvSpPr>
         <p:spPr>
           <a:xfrm>
-            <a:off x="6080760" y="2726055"/>
-            <a:ext cx="4750307" cy="1280160"/>
+            <a:off x="6355080" y="3611880"/>
+            <a:ext cx="4754880" cy="1280160"/>
           </a:xfrm>
           <a:prstGeom prst="rect">
             <a:avLst/>
@@ -7133,7 +7497,7 @@
                 </a:solidFill>
                 <a:latin typeface="Montserrat"/>
               </a:rPr>
-              <a:t>IMAGEN REALISTA</a:t>
+              <a:t>IMAGEN</a:t>
             </a:r>
           </a:p>
           <a:p>
@@ -7145,7 +7509,7 @@
                 </a:solidFill>
                 <a:latin typeface="Montserrat"/>
               </a:rPr>
-              <a:t>nitrogen purge industrial gas tank</a:t>
+              <a:t>pressure gauge cryogenic tank</a:t>
             </a:r>
           </a:p>
         </p:txBody>
@@ -7155,6 +7519,18 @@
   <p:clrMapOvr>
     <a:masterClrMapping/>
   </p:clrMapOvr>
+  <mc:AlternateContent xmlns:mc="http://schemas.openxmlformats.org/markup-compatibility/2006">
+    <mc:Choice xmlns:p14="http://schemas.microsoft.com/office/powerpoint/2010/main" Requires="p14">
+      <p:transition spd="med" p14:dur="700">
+        <p14:cube dir="r"/>
+      </p:transition>
+    </mc:Choice>
+    <mc:Fallback>
+      <p:transition spd="med">
+        <p:push dir="r"/>
+      </p:transition>
+    </mc:Fallback>
+  </mc:AlternateContent>
 </p:sld>
 </file>
 
@@ -7242,7 +7618,7 @@
                 </a:solidFill>
                 <a:latin typeface="Montserrat"/>
               </a:rPr>
-              <a:t>015 / 016</a:t>
+              <a:t>015 / 020</a:t>
             </a:r>
           </a:p>
         </p:txBody>
@@ -7283,84 +7659,16 @@
       </p:sp>
       <p:sp>
         <p:nvSpPr>
-          <p:cNvPr id="5" name="TextBox 4"/>
-          <p:cNvSpPr txBox="1"/>
-          <p:nvPr/>
-        </p:nvSpPr>
-        <p:spPr>
-          <a:xfrm>
-            <a:off x="822960" y="457200"/>
-            <a:ext cx="10058400" cy="365760"/>
-          </a:xfrm>
-          <a:prstGeom prst="rect">
-            <a:avLst/>
-          </a:prstGeom>
-          <a:noFill/>
-        </p:spPr>
-        <p:txBody>
-          <a:bodyPr wrap="square">
-            <a:spAutoFit/>
-          </a:bodyPr>
-          <a:lstStyle/>
-          <a:p>
-            <a:r>
-              <a:rPr sz="1300" b="1" i="0">
-                <a:solidFill>
-                  <a:srgbClr val="E8801A"/>
-                </a:solidFill>
-                <a:latin typeface="Montserrat"/>
-              </a:rPr>
-              <a:t>REPASO RELÁMPAGO</a:t>
-            </a:r>
-          </a:p>
-        </p:txBody>
-      </p:sp>
-      <p:sp>
-        <p:nvSpPr>
-          <p:cNvPr id="6" name="TextBox 5"/>
-          <p:cNvSpPr txBox="1"/>
-          <p:nvPr/>
-        </p:nvSpPr>
-        <p:spPr>
-          <a:xfrm>
-            <a:off x="822960" y="868680"/>
-            <a:ext cx="10515600" cy="914400"/>
-          </a:xfrm>
-          <a:prstGeom prst="rect">
-            <a:avLst/>
-          </a:prstGeom>
-          <a:noFill/>
-        </p:spPr>
-        <p:txBody>
-          <a:bodyPr wrap="square">
-            <a:spAutoFit/>
-          </a:bodyPr>
-          <a:lstStyle/>
-          <a:p>
-            <a:r>
-              <a:rPr sz="2800" b="1" i="0">
-                <a:solidFill>
-                  <a:srgbClr val="1E2761"/>
-                </a:solidFill>
-                <a:latin typeface="Montserrat"/>
-              </a:rPr>
-              <a:t>GNL frente a GLP, en cinco líneas</a:t>
-            </a:r>
-          </a:p>
-        </p:txBody>
-      </p:sp>
-      <p:sp>
-        <p:nvSpPr>
-          <p:cNvPr id="7" name="Rounded Rectangle 6"/>
+          <p:cNvPr id="5" name="Rectangle 4"/>
           <p:cNvSpPr/>
           <p:nvPr/>
         </p:nvSpPr>
         <p:spPr>
           <a:xfrm>
-            <a:off x="868680" y="1627632"/>
-            <a:ext cx="2011680" cy="73152"/>
-          </a:xfrm>
-          <a:prstGeom prst="roundRect">
+            <a:off x="0" y="0"/>
+            <a:ext cx="12191695" cy="1143000"/>
+          </a:xfrm>
+          <a:prstGeom prst="rect">
             <a:avLst/>
           </a:prstGeom>
           <a:solidFill>
@@ -7395,14 +7703,14 @@
       </p:sp>
       <p:sp>
         <p:nvSpPr>
-          <p:cNvPr id="8" name="TextBox 7"/>
+          <p:cNvPr id="6" name="TextBox 5"/>
           <p:cNvSpPr txBox="1"/>
           <p:nvPr/>
         </p:nvSpPr>
         <p:spPr>
           <a:xfrm>
-            <a:off x="822960" y="1965960"/>
-            <a:ext cx="4983480" cy="4206240"/>
+            <a:off x="822960" y="274320"/>
+            <a:ext cx="10515600" cy="640080"/>
           </a:xfrm>
           <a:prstGeom prst="rect">
             <a:avLst/>
@@ -7415,142 +7723,62 @@
           </a:bodyPr>
           <a:lstStyle/>
           <a:p>
-            <a:pPr>
-              <a:spcAft>
-                <a:spcPts val="1100"/>
-              </a:spcAft>
-            </a:pPr>
-            <a:r>
-              <a:rPr sz="1600" b="1" i="0">
-                <a:solidFill>
-                  <a:srgbClr val="E8801A"/>
-                </a:solidFill>
-                <a:latin typeface="Montserrat"/>
-              </a:rPr>
-              <a:t>▸  </a:t>
-            </a:r>
-            <a:r>
-              <a:rPr sz="1600" b="0" i="0">
-                <a:solidFill>
-                  <a:srgbClr val="1B2330"/>
-                </a:solidFill>
-                <a:latin typeface="Montserrat"/>
-              </a:rPr>
-              <a:t>GNL → UNE 60210 → criogénico</a:t>
-            </a:r>
-          </a:p>
-          <a:p>
-            <a:pPr>
-              <a:spcAft>
-                <a:spcPts val="1100"/>
-              </a:spcAft>
-            </a:pPr>
-            <a:r>
-              <a:rPr sz="1600" b="1" i="0">
-                <a:solidFill>
-                  <a:srgbClr val="E8801A"/>
-                </a:solidFill>
-                <a:latin typeface="Montserrat"/>
-              </a:rPr>
-              <a:t>▸  </a:t>
-            </a:r>
-            <a:r>
-              <a:rPr sz="1600" b="0" i="0">
-                <a:solidFill>
-                  <a:srgbClr val="1B2330"/>
-                </a:solidFill>
-                <a:latin typeface="Montserrat"/>
-              </a:rPr>
-              <a:t>Autorización previa (salvo autoconsumo)</a:t>
-            </a:r>
-          </a:p>
-          <a:p>
-            <a:pPr>
-              <a:spcAft>
-                <a:spcPts val="1100"/>
-              </a:spcAft>
-            </a:pPr>
-            <a:r>
-              <a:rPr sz="1600" b="1" i="0">
-                <a:solidFill>
-                  <a:srgbClr val="E8801A"/>
-                </a:solidFill>
-                <a:latin typeface="Montserrat"/>
-              </a:rPr>
-              <a:t>▸  </a:t>
-            </a:r>
-            <a:r>
-              <a:rPr sz="1600" b="0" i="0">
-                <a:solidFill>
-                  <a:srgbClr val="1B2330"/>
-                </a:solidFill>
-                <a:latin typeface="Montserrat"/>
-              </a:rPr>
-              <a:t>Siempre proyecto + planes de emergencia</a:t>
-            </a:r>
-          </a:p>
-          <a:p>
-            <a:pPr>
-              <a:spcAft>
-                <a:spcPts val="1100"/>
-              </a:spcAft>
-            </a:pPr>
-            <a:r>
-              <a:rPr sz="1600" b="1" i="0">
-                <a:solidFill>
-                  <a:srgbClr val="E8801A"/>
-                </a:solidFill>
-                <a:latin typeface="Montserrat"/>
-              </a:rPr>
-              <a:t>▸  </a:t>
-            </a:r>
-            <a:r>
-              <a:rPr sz="1600" b="0" i="0">
-                <a:solidFill>
-                  <a:srgbClr val="1B2330"/>
-                </a:solidFill>
-                <a:latin typeface="Montserrat"/>
-              </a:rPr>
-              <a:t>Controles: 5 años · V × P · 300</a:t>
-            </a:r>
-          </a:p>
-          <a:p>
-            <a:pPr>
-              <a:spcAft>
-                <a:spcPts val="1100"/>
-              </a:spcAft>
-            </a:pPr>
-            <a:r>
-              <a:rPr sz="1600" b="1" i="0">
-                <a:solidFill>
-                  <a:srgbClr val="E8801A"/>
-                </a:solidFill>
-                <a:latin typeface="Montserrat"/>
-              </a:rPr>
-              <a:t>▸  </a:t>
-            </a:r>
-            <a:r>
-              <a:rPr sz="1600" b="0" i="0">
-                <a:solidFill>
-                  <a:srgbClr val="1B2330"/>
-                </a:solidFill>
-                <a:latin typeface="Montserrat"/>
-              </a:rPr>
-              <a:t>Prueba neumática cada 15 años</a:t>
-            </a:r>
-          </a:p>
-        </p:txBody>
-      </p:sp>
-      <p:sp>
-        <p:nvSpPr>
-          <p:cNvPr id="9" name="imgph" descr="IMGQ:LNG plant overview facility"/>
+            <a:r>
+              <a:rPr sz="2400" b="1" i="0">
+                <a:solidFill>
+                  <a:srgbClr val="FFFFFF"/>
+                </a:solidFill>
+                <a:latin typeface="Montserrat"/>
+              </a:rPr>
+              <a:t>⚡  PREGUNTA RÁPIDA</a:t>
+            </a:r>
+          </a:p>
+        </p:txBody>
+      </p:sp>
+      <p:sp>
+        <p:nvSpPr>
+          <p:cNvPr id="7" name="TextBox 6"/>
+          <p:cNvSpPr txBox="1"/>
+          <p:nvPr/>
+        </p:nvSpPr>
+        <p:spPr>
+          <a:xfrm>
+            <a:off x="822960" y="1508760"/>
+            <a:ext cx="10515600" cy="1371600"/>
+          </a:xfrm>
+          <a:prstGeom prst="rect">
+            <a:avLst/>
+          </a:prstGeom>
+          <a:noFill/>
+        </p:spPr>
+        <p:txBody>
+          <a:bodyPr wrap="square">
+            <a:spAutoFit/>
+          </a:bodyPr>
+          <a:lstStyle/>
+          <a:p>
+            <a:r>
+              <a:rPr sz="2400" b="1" i="0">
+                <a:solidFill>
+                  <a:srgbClr val="1E2761"/>
+                </a:solidFill>
+                <a:latin typeface="Montserrat"/>
+              </a:rPr>
+              <a:t>En el control de una planta de GNL, si V × P supera 300, ¿quién debe hacerlo?</a:t>
+            </a:r>
+          </a:p>
+        </p:txBody>
+      </p:sp>
+      <p:sp>
+        <p:nvSpPr>
+          <p:cNvPr id="8" name="Rounded Rectangle 7"/>
           <p:cNvSpPr/>
           <p:nvPr/>
         </p:nvSpPr>
         <p:spPr>
           <a:xfrm>
-            <a:off x="5806440" y="1051560"/>
-            <a:ext cx="5298947" cy="4629150"/>
+            <a:off x="822960" y="3291840"/>
+            <a:ext cx="4983480" cy="1143000"/>
           </a:xfrm>
           <a:prstGeom prst="roundRect">
             <a:avLst/>
@@ -7589,14 +7817,58 @@
       </p:sp>
       <p:sp>
         <p:nvSpPr>
+          <p:cNvPr id="9" name="Rectangle 8"/>
+          <p:cNvSpPr/>
+          <p:nvPr/>
+        </p:nvSpPr>
+        <p:spPr>
+          <a:xfrm>
+            <a:off x="822960" y="3291840"/>
+            <a:ext cx="640080" cy="1143000"/>
+          </a:xfrm>
+          <a:prstGeom prst="rect">
+            <a:avLst/>
+          </a:prstGeom>
+          <a:solidFill>
+            <a:srgbClr val="1E2761"/>
+          </a:solidFill>
+          <a:ln>
+            <a:noFill/>
+          </a:ln>
+          <a:effectLst/>
+        </p:spPr>
+        <p:style>
+          <a:lnRef idx="1">
+            <a:schemeClr val="accent1"/>
+          </a:lnRef>
+          <a:fillRef idx="3">
+            <a:schemeClr val="accent1"/>
+          </a:fillRef>
+          <a:effectRef idx="2">
+            <a:schemeClr val="accent1"/>
+          </a:effectRef>
+          <a:fontRef idx="minor">
+            <a:schemeClr val="lt1"/>
+          </a:fontRef>
+        </p:style>
+        <p:txBody>
+          <a:bodyPr rtlCol="0" anchor="ctr"/>
+          <a:lstStyle/>
+          <a:p>
+            <a:pPr algn="ctr"/>
+          </a:p>
+        </p:txBody>
+      </p:sp>
+      <p:sp>
+        <p:nvSpPr>
           <p:cNvPr id="10" name="TextBox 9"/>
           <p:cNvSpPr txBox="1"/>
           <p:nvPr/>
         </p:nvSpPr>
         <p:spPr>
           <a:xfrm>
-            <a:off x="6080760" y="2726055"/>
-            <a:ext cx="4750307" cy="1280160"/>
+            <a:off x="822960" y="3611880"/>
+            <a:ext cx="640080" cy="548640"/>
           </a:xfrm>
           <a:prstGeom prst="rect">
             <a:avLst/>
@@ -7611,25 +7883,524 @@
           <a:p>
             <a:pPr algn="ctr"/>
             <a:r>
-              <a:rPr sz="1400" b="1" i="0">
-                <a:solidFill>
-                  <a:srgbClr val="64748B"/>
-                </a:solidFill>
-                <a:latin typeface="Montserrat"/>
-              </a:rPr>
-              <a:t>IMAGEN REALISTA</a:t>
-            </a:r>
-          </a:p>
+              <a:rPr sz="2200" b="1" i="0">
+                <a:solidFill>
+                  <a:srgbClr val="FFFFFF"/>
+                </a:solidFill>
+                <a:latin typeface="Montserrat"/>
+              </a:rPr>
+              <a:t>A</a:t>
+            </a:r>
+          </a:p>
+        </p:txBody>
+      </p:sp>
+      <p:sp>
+        <p:nvSpPr>
+          <p:cNvPr id="11" name="TextBox 10"/>
+          <p:cNvSpPr txBox="1"/>
+          <p:nvPr/>
+        </p:nvSpPr>
+        <p:spPr>
+          <a:xfrm>
+            <a:off x="1600200" y="3474720"/>
+            <a:ext cx="4114800" cy="868680"/>
+          </a:xfrm>
+          <a:prstGeom prst="rect">
+            <a:avLst/>
+          </a:prstGeom>
+          <a:noFill/>
+        </p:spPr>
+        <p:txBody>
+          <a:bodyPr wrap="square">
+            <a:spAutoFit/>
+          </a:bodyPr>
+          <a:lstStyle/>
+          <a:p>
+            <a:r>
+              <a:rPr sz="1400" b="0" i="0">
+                <a:solidFill>
+                  <a:srgbClr val="1B2330"/>
+                </a:solidFill>
+                <a:latin typeface="Montserrat"/>
+              </a:rPr>
+              <a:t>El propio usuario</a:t>
+            </a:r>
+          </a:p>
+        </p:txBody>
+      </p:sp>
+      <p:sp>
+        <p:nvSpPr>
+          <p:cNvPr id="12" name="Rounded Rectangle 11"/>
+          <p:cNvSpPr/>
+          <p:nvPr/>
+        </p:nvSpPr>
+        <p:spPr>
+          <a:xfrm>
+            <a:off x="6355080" y="3291840"/>
+            <a:ext cx="4983480" cy="1143000"/>
+          </a:xfrm>
+          <a:prstGeom prst="roundRect">
+            <a:avLst/>
+          </a:prstGeom>
+          <a:solidFill>
+            <a:srgbClr val="F3F6FB"/>
+          </a:solidFill>
+          <a:ln w="12700">
+            <a:solidFill>
+              <a:srgbClr val="C7D2E6"/>
+            </a:solidFill>
+          </a:ln>
+          <a:effectLst/>
+        </p:spPr>
+        <p:style>
+          <a:lnRef idx="1">
+            <a:schemeClr val="accent1"/>
+          </a:lnRef>
+          <a:fillRef idx="3">
+            <a:schemeClr val="accent1"/>
+          </a:fillRef>
+          <a:effectRef idx="2">
+            <a:schemeClr val="accent1"/>
+          </a:effectRef>
+          <a:fontRef idx="minor">
+            <a:schemeClr val="lt1"/>
+          </a:fontRef>
+        </p:style>
+        <p:txBody>
+          <a:bodyPr rtlCol="0" anchor="ctr"/>
+          <a:lstStyle/>
           <a:p>
             <a:pPr algn="ctr"/>
-            <a:r>
-              <a:rPr sz="1100" b="0" i="1">
-                <a:solidFill>
-                  <a:srgbClr val="64748B"/>
-                </a:solidFill>
-                <a:latin typeface="Montserrat"/>
-              </a:rPr>
-              <a:t>LNG plant overview facility</a:t>
+          </a:p>
+        </p:txBody>
+      </p:sp>
+      <p:sp>
+        <p:nvSpPr>
+          <p:cNvPr id="13" name="Rectangle 12"/>
+          <p:cNvSpPr/>
+          <p:nvPr/>
+        </p:nvSpPr>
+        <p:spPr>
+          <a:xfrm>
+            <a:off x="6355080" y="3291840"/>
+            <a:ext cx="640080" cy="1143000"/>
+          </a:xfrm>
+          <a:prstGeom prst="rect">
+            <a:avLst/>
+          </a:prstGeom>
+          <a:solidFill>
+            <a:srgbClr val="1E2761"/>
+          </a:solidFill>
+          <a:ln>
+            <a:noFill/>
+          </a:ln>
+          <a:effectLst/>
+        </p:spPr>
+        <p:style>
+          <a:lnRef idx="1">
+            <a:schemeClr val="accent1"/>
+          </a:lnRef>
+          <a:fillRef idx="3">
+            <a:schemeClr val="accent1"/>
+          </a:fillRef>
+          <a:effectRef idx="2">
+            <a:schemeClr val="accent1"/>
+          </a:effectRef>
+          <a:fontRef idx="minor">
+            <a:schemeClr val="lt1"/>
+          </a:fontRef>
+        </p:style>
+        <p:txBody>
+          <a:bodyPr rtlCol="0" anchor="ctr"/>
+          <a:lstStyle/>
+          <a:p>
+            <a:pPr algn="ctr"/>
+          </a:p>
+        </p:txBody>
+      </p:sp>
+      <p:sp>
+        <p:nvSpPr>
+          <p:cNvPr id="14" name="TextBox 13"/>
+          <p:cNvSpPr txBox="1"/>
+          <p:nvPr/>
+        </p:nvSpPr>
+        <p:spPr>
+          <a:xfrm>
+            <a:off x="6355080" y="3611880"/>
+            <a:ext cx="640080" cy="548640"/>
+          </a:xfrm>
+          <a:prstGeom prst="rect">
+            <a:avLst/>
+          </a:prstGeom>
+          <a:noFill/>
+        </p:spPr>
+        <p:txBody>
+          <a:bodyPr wrap="square">
+            <a:spAutoFit/>
+          </a:bodyPr>
+          <a:lstStyle/>
+          <a:p>
+            <a:pPr algn="ctr"/>
+            <a:r>
+              <a:rPr sz="2200" b="1" i="0">
+                <a:solidFill>
+                  <a:srgbClr val="FFFFFF"/>
+                </a:solidFill>
+                <a:latin typeface="Montserrat"/>
+              </a:rPr>
+              <a:t>B</a:t>
+            </a:r>
+          </a:p>
+        </p:txBody>
+      </p:sp>
+      <p:sp>
+        <p:nvSpPr>
+          <p:cNvPr id="15" name="TextBox 14"/>
+          <p:cNvSpPr txBox="1"/>
+          <p:nvPr/>
+        </p:nvSpPr>
+        <p:spPr>
+          <a:xfrm>
+            <a:off x="7132320" y="3474720"/>
+            <a:ext cx="4114800" cy="868680"/>
+          </a:xfrm>
+          <a:prstGeom prst="rect">
+            <a:avLst/>
+          </a:prstGeom>
+          <a:noFill/>
+        </p:spPr>
+        <p:txBody>
+          <a:bodyPr wrap="square">
+            <a:spAutoFit/>
+          </a:bodyPr>
+          <a:lstStyle/>
+          <a:p>
+            <a:r>
+              <a:rPr sz="1400" b="0" i="0">
+                <a:solidFill>
+                  <a:srgbClr val="1B2330"/>
+                </a:solidFill>
+                <a:latin typeface="Montserrat"/>
+              </a:rPr>
+              <a:t>El especialista criogénico</a:t>
+            </a:r>
+          </a:p>
+        </p:txBody>
+      </p:sp>
+      <p:sp>
+        <p:nvSpPr>
+          <p:cNvPr id="16" name="Rounded Rectangle 15"/>
+          <p:cNvSpPr/>
+          <p:nvPr/>
+        </p:nvSpPr>
+        <p:spPr>
+          <a:xfrm>
+            <a:off x="822960" y="4617720"/>
+            <a:ext cx="4983480" cy="1143000"/>
+          </a:xfrm>
+          <a:prstGeom prst="roundRect">
+            <a:avLst/>
+          </a:prstGeom>
+          <a:solidFill>
+            <a:srgbClr val="F3F6FB"/>
+          </a:solidFill>
+          <a:ln w="12700">
+            <a:solidFill>
+              <a:srgbClr val="C7D2E6"/>
+            </a:solidFill>
+          </a:ln>
+          <a:effectLst/>
+        </p:spPr>
+        <p:style>
+          <a:lnRef idx="1">
+            <a:schemeClr val="accent1"/>
+          </a:lnRef>
+          <a:fillRef idx="3">
+            <a:schemeClr val="accent1"/>
+          </a:fillRef>
+          <a:effectRef idx="2">
+            <a:schemeClr val="accent1"/>
+          </a:effectRef>
+          <a:fontRef idx="minor">
+            <a:schemeClr val="lt1"/>
+          </a:fontRef>
+        </p:style>
+        <p:txBody>
+          <a:bodyPr rtlCol="0" anchor="ctr"/>
+          <a:lstStyle/>
+          <a:p>
+            <a:pPr algn="ctr"/>
+          </a:p>
+        </p:txBody>
+      </p:sp>
+      <p:sp>
+        <p:nvSpPr>
+          <p:cNvPr id="17" name="Rectangle 16"/>
+          <p:cNvSpPr/>
+          <p:nvPr/>
+        </p:nvSpPr>
+        <p:spPr>
+          <a:xfrm>
+            <a:off x="822960" y="4617720"/>
+            <a:ext cx="640080" cy="1143000"/>
+          </a:xfrm>
+          <a:prstGeom prst="rect">
+            <a:avLst/>
+          </a:prstGeom>
+          <a:solidFill>
+            <a:srgbClr val="1E2761"/>
+          </a:solidFill>
+          <a:ln>
+            <a:noFill/>
+          </a:ln>
+          <a:effectLst/>
+        </p:spPr>
+        <p:style>
+          <a:lnRef idx="1">
+            <a:schemeClr val="accent1"/>
+          </a:lnRef>
+          <a:fillRef idx="3">
+            <a:schemeClr val="accent1"/>
+          </a:fillRef>
+          <a:effectRef idx="2">
+            <a:schemeClr val="accent1"/>
+          </a:effectRef>
+          <a:fontRef idx="minor">
+            <a:schemeClr val="lt1"/>
+          </a:fontRef>
+        </p:style>
+        <p:txBody>
+          <a:bodyPr rtlCol="0" anchor="ctr"/>
+          <a:lstStyle/>
+          <a:p>
+            <a:pPr algn="ctr"/>
+          </a:p>
+        </p:txBody>
+      </p:sp>
+      <p:sp>
+        <p:nvSpPr>
+          <p:cNvPr id="18" name="TextBox 17"/>
+          <p:cNvSpPr txBox="1"/>
+          <p:nvPr/>
+        </p:nvSpPr>
+        <p:spPr>
+          <a:xfrm>
+            <a:off x="822960" y="4937760"/>
+            <a:ext cx="640080" cy="548640"/>
+          </a:xfrm>
+          <a:prstGeom prst="rect">
+            <a:avLst/>
+          </a:prstGeom>
+          <a:noFill/>
+        </p:spPr>
+        <p:txBody>
+          <a:bodyPr wrap="square">
+            <a:spAutoFit/>
+          </a:bodyPr>
+          <a:lstStyle/>
+          <a:p>
+            <a:pPr algn="ctr"/>
+            <a:r>
+              <a:rPr sz="2200" b="1" i="0">
+                <a:solidFill>
+                  <a:srgbClr val="FFFFFF"/>
+                </a:solidFill>
+                <a:latin typeface="Montserrat"/>
+              </a:rPr>
+              <a:t>C</a:t>
+            </a:r>
+          </a:p>
+        </p:txBody>
+      </p:sp>
+      <p:sp>
+        <p:nvSpPr>
+          <p:cNvPr id="19" name="TextBox 18"/>
+          <p:cNvSpPr txBox="1"/>
+          <p:nvPr/>
+        </p:nvSpPr>
+        <p:spPr>
+          <a:xfrm>
+            <a:off x="1600200" y="4800600"/>
+            <a:ext cx="4114800" cy="868680"/>
+          </a:xfrm>
+          <a:prstGeom prst="rect">
+            <a:avLst/>
+          </a:prstGeom>
+          <a:noFill/>
+        </p:spPr>
+        <p:txBody>
+          <a:bodyPr wrap="square">
+            <a:spAutoFit/>
+          </a:bodyPr>
+          <a:lstStyle/>
+          <a:p>
+            <a:r>
+              <a:rPr sz="1400" b="0" i="0">
+                <a:solidFill>
+                  <a:srgbClr val="1B2330"/>
+                </a:solidFill>
+                <a:latin typeface="Montserrat"/>
+              </a:rPr>
+              <a:t>Obligatoriamente un organismo de control</a:t>
+            </a:r>
+          </a:p>
+        </p:txBody>
+      </p:sp>
+      <p:sp>
+        <p:nvSpPr>
+          <p:cNvPr id="20" name="Rounded Rectangle 19"/>
+          <p:cNvSpPr/>
+          <p:nvPr/>
+        </p:nvSpPr>
+        <p:spPr>
+          <a:xfrm>
+            <a:off x="6355080" y="4617720"/>
+            <a:ext cx="4983480" cy="1143000"/>
+          </a:xfrm>
+          <a:prstGeom prst="roundRect">
+            <a:avLst/>
+          </a:prstGeom>
+          <a:solidFill>
+            <a:srgbClr val="F3F6FB"/>
+          </a:solidFill>
+          <a:ln w="12700">
+            <a:solidFill>
+              <a:srgbClr val="C7D2E6"/>
+            </a:solidFill>
+          </a:ln>
+          <a:effectLst/>
+        </p:spPr>
+        <p:style>
+          <a:lnRef idx="1">
+            <a:schemeClr val="accent1"/>
+          </a:lnRef>
+          <a:fillRef idx="3">
+            <a:schemeClr val="accent1"/>
+          </a:fillRef>
+          <a:effectRef idx="2">
+            <a:schemeClr val="accent1"/>
+          </a:effectRef>
+          <a:fontRef idx="minor">
+            <a:schemeClr val="lt1"/>
+          </a:fontRef>
+        </p:style>
+        <p:txBody>
+          <a:bodyPr rtlCol="0" anchor="ctr"/>
+          <a:lstStyle/>
+          <a:p>
+            <a:pPr algn="ctr"/>
+          </a:p>
+        </p:txBody>
+      </p:sp>
+      <p:sp>
+        <p:nvSpPr>
+          <p:cNvPr id="21" name="Rectangle 20"/>
+          <p:cNvSpPr/>
+          <p:nvPr/>
+        </p:nvSpPr>
+        <p:spPr>
+          <a:xfrm>
+            <a:off x="6355080" y="4617720"/>
+            <a:ext cx="640080" cy="1143000"/>
+          </a:xfrm>
+          <a:prstGeom prst="rect">
+            <a:avLst/>
+          </a:prstGeom>
+          <a:solidFill>
+            <a:srgbClr val="1E2761"/>
+          </a:solidFill>
+          <a:ln>
+            <a:noFill/>
+          </a:ln>
+          <a:effectLst/>
+        </p:spPr>
+        <p:style>
+          <a:lnRef idx="1">
+            <a:schemeClr val="accent1"/>
+          </a:lnRef>
+          <a:fillRef idx="3">
+            <a:schemeClr val="accent1"/>
+          </a:fillRef>
+          <a:effectRef idx="2">
+            <a:schemeClr val="accent1"/>
+          </a:effectRef>
+          <a:fontRef idx="minor">
+            <a:schemeClr val="lt1"/>
+          </a:fontRef>
+        </p:style>
+        <p:txBody>
+          <a:bodyPr rtlCol="0" anchor="ctr"/>
+          <a:lstStyle/>
+          <a:p>
+            <a:pPr algn="ctr"/>
+          </a:p>
+        </p:txBody>
+      </p:sp>
+      <p:sp>
+        <p:nvSpPr>
+          <p:cNvPr id="22" name="TextBox 21"/>
+          <p:cNvSpPr txBox="1"/>
+          <p:nvPr/>
+        </p:nvSpPr>
+        <p:spPr>
+          <a:xfrm>
+            <a:off x="6355080" y="4937760"/>
+            <a:ext cx="640080" cy="548640"/>
+          </a:xfrm>
+          <a:prstGeom prst="rect">
+            <a:avLst/>
+          </a:prstGeom>
+          <a:noFill/>
+        </p:spPr>
+        <p:txBody>
+          <a:bodyPr wrap="square">
+            <a:spAutoFit/>
+          </a:bodyPr>
+          <a:lstStyle/>
+          <a:p>
+            <a:pPr algn="ctr"/>
+            <a:r>
+              <a:rPr sz="2200" b="1" i="0">
+                <a:solidFill>
+                  <a:srgbClr val="FFFFFF"/>
+                </a:solidFill>
+                <a:latin typeface="Montserrat"/>
+              </a:rPr>
+              <a:t>D</a:t>
+            </a:r>
+          </a:p>
+        </p:txBody>
+      </p:sp>
+      <p:sp>
+        <p:nvSpPr>
+          <p:cNvPr id="23" name="TextBox 22"/>
+          <p:cNvSpPr txBox="1"/>
+          <p:nvPr/>
+        </p:nvSpPr>
+        <p:spPr>
+          <a:xfrm>
+            <a:off x="7132320" y="4800600"/>
+            <a:ext cx="4114800" cy="868680"/>
+          </a:xfrm>
+          <a:prstGeom prst="rect">
+            <a:avLst/>
+          </a:prstGeom>
+          <a:noFill/>
+        </p:spPr>
+        <p:txBody>
+          <a:bodyPr wrap="square">
+            <a:spAutoFit/>
+          </a:bodyPr>
+          <a:lstStyle/>
+          <a:p>
+            <a:r>
+              <a:rPr sz="1400" b="0" i="0">
+                <a:solidFill>
+                  <a:srgbClr val="1B2330"/>
+                </a:solidFill>
+                <a:latin typeface="Montserrat"/>
+              </a:rPr>
+              <a:t>No hace falta ningún control</a:t>
             </a:r>
           </a:p>
         </p:txBody>
@@ -7639,6 +8410,18 @@
   <p:clrMapOvr>
     <a:masterClrMapping/>
   </p:clrMapOvr>
+  <mc:AlternateContent xmlns:mc="http://schemas.openxmlformats.org/markup-compatibility/2006">
+    <mc:Choice xmlns:p14="http://schemas.microsoft.com/office/powerpoint/2010/main" Requires="p14">
+      <p:transition spd="med" p14:dur="700">
+        <p14:cube dir="l"/>
+      </p:transition>
+    </mc:Choice>
+    <mc:Fallback>
+      <p:transition spd="med">
+        <p:push dir="l"/>
+      </p:transition>
+    </mc:Fallback>
+  </mc:AlternateContent>
 </p:sld>
 </file>
 
@@ -7667,7 +8450,7 @@
             <a:avLst/>
           </a:prstGeom>
           <a:solidFill>
-            <a:srgbClr val="1E2761"/>
+            <a:srgbClr val="FFFFFF"/>
           </a:solidFill>
           <a:ln>
             <a:noFill/>
@@ -7704,8 +8487,8 @@
         </p:nvSpPr>
         <p:spPr>
           <a:xfrm>
-            <a:off x="822960" y="640080"/>
-            <a:ext cx="10515600" cy="457200"/>
+            <a:off x="10607040" y="320040"/>
+            <a:ext cx="1371600" cy="365760"/>
           </a:xfrm>
           <a:prstGeom prst="rect">
             <a:avLst/>
@@ -7718,30 +8501,520 @@
           </a:bodyPr>
           <a:lstStyle/>
           <a:p>
-            <a:r>
-              <a:rPr sz="1400" b="1" i="0">
-                <a:solidFill>
-                  <a:srgbClr val="F4A24C"/>
-                </a:solidFill>
-                <a:latin typeface="Montserrat"/>
-              </a:rPr>
-              <a:t>LO QUE YA DOMINAS</a:t>
-            </a:r>
-          </a:p>
-        </p:txBody>
-      </p:sp>
-      <p:sp>
-        <p:nvSpPr>
-          <p:cNvPr id="4" name="Rounded Rectangle 3"/>
+            <a:pPr algn="r"/>
+            <a:r>
+              <a:rPr sz="1000" b="1" i="0">
+                <a:solidFill>
+                  <a:srgbClr val="64748B"/>
+                </a:solidFill>
+                <a:latin typeface="Montserrat"/>
+              </a:rPr>
+              <a:t>016 / 020</a:t>
+            </a:r>
+          </a:p>
+        </p:txBody>
+      </p:sp>
+      <p:sp>
+        <p:nvSpPr>
+          <p:cNvPr id="4" name="TextBox 3"/>
+          <p:cNvSpPr txBox="1"/>
+          <p:nvPr/>
+        </p:nvSpPr>
+        <p:spPr>
+          <a:xfrm>
+            <a:off x="457200" y="6419088"/>
+            <a:ext cx="8229600" cy="365760"/>
+          </a:xfrm>
+          <a:prstGeom prst="rect">
+            <a:avLst/>
+          </a:prstGeom>
+          <a:noFill/>
+        </p:spPr>
+        <p:txBody>
+          <a:bodyPr wrap="square">
+            <a:spAutoFit/>
+          </a:bodyPr>
+          <a:lstStyle/>
+          <a:p>
+            <a:r>
+              <a:rPr sz="900" b="0" i="0">
+                <a:solidFill>
+                  <a:srgbClr val="64748B"/>
+                </a:solidFill>
+                <a:latin typeface="Montserrat"/>
+              </a:rPr>
+              <a:t>Curso Gas B · Tema 02 · Plantas satélite de GNL (ITC-ICG 04)</a:t>
+            </a:r>
+          </a:p>
+        </p:txBody>
+      </p:sp>
+      <p:sp>
+        <p:nvSpPr>
+          <p:cNvPr id="5" name="Rectangle 4"/>
           <p:cNvSpPr/>
           <p:nvPr/>
         </p:nvSpPr>
         <p:spPr>
           <a:xfrm>
-            <a:off x="868680" y="1051560"/>
-            <a:ext cx="1463040" cy="82296"/>
+            <a:off x="0" y="0"/>
+            <a:ext cx="12191695" cy="1143000"/>
+          </a:xfrm>
+          <a:prstGeom prst="rect">
+            <a:avLst/>
+          </a:prstGeom>
+          <a:solidFill>
+            <a:srgbClr val="1E8E4B"/>
+          </a:solidFill>
+          <a:ln>
+            <a:noFill/>
+          </a:ln>
+          <a:effectLst/>
+        </p:spPr>
+        <p:style>
+          <a:lnRef idx="1">
+            <a:schemeClr val="accent1"/>
+          </a:lnRef>
+          <a:fillRef idx="3">
+            <a:schemeClr val="accent1"/>
+          </a:fillRef>
+          <a:effectRef idx="2">
+            <a:schemeClr val="accent1"/>
+          </a:effectRef>
+          <a:fontRef idx="minor">
+            <a:schemeClr val="lt1"/>
+          </a:fontRef>
+        </p:style>
+        <p:txBody>
+          <a:bodyPr rtlCol="0" anchor="ctr"/>
+          <a:lstStyle/>
+          <a:p>
+            <a:pPr algn="ctr"/>
+          </a:p>
+        </p:txBody>
+      </p:sp>
+      <p:sp>
+        <p:nvSpPr>
+          <p:cNvPr id="6" name="TextBox 5"/>
+          <p:cNvSpPr txBox="1"/>
+          <p:nvPr/>
+        </p:nvSpPr>
+        <p:spPr>
+          <a:xfrm>
+            <a:off x="822960" y="274320"/>
+            <a:ext cx="10515600" cy="640080"/>
+          </a:xfrm>
+          <a:prstGeom prst="rect">
+            <a:avLst/>
+          </a:prstGeom>
+          <a:noFill/>
+        </p:spPr>
+        <p:txBody>
+          <a:bodyPr wrap="square">
+            <a:spAutoFit/>
+          </a:bodyPr>
+          <a:lstStyle/>
+          <a:p>
+            <a:r>
+              <a:rPr sz="2400" b="1" i="0">
+                <a:solidFill>
+                  <a:srgbClr val="FFFFFF"/>
+                </a:solidFill>
+                <a:latin typeface="Montserrat"/>
+              </a:rPr>
+              <a:t>✔  RESPUESTA:  C</a:t>
+            </a:r>
+          </a:p>
+        </p:txBody>
+      </p:sp>
+      <p:sp>
+        <p:nvSpPr>
+          <p:cNvPr id="7" name="TextBox 6"/>
+          <p:cNvSpPr txBox="1"/>
+          <p:nvPr/>
+        </p:nvSpPr>
+        <p:spPr>
+          <a:xfrm>
+            <a:off x="822960" y="1417320"/>
+            <a:ext cx="10515600" cy="914400"/>
+          </a:xfrm>
+          <a:prstGeom prst="rect">
+            <a:avLst/>
+          </a:prstGeom>
+          <a:noFill/>
+        </p:spPr>
+        <p:txBody>
+          <a:bodyPr wrap="square">
+            <a:spAutoFit/>
+          </a:bodyPr>
+          <a:lstStyle/>
+          <a:p>
+            <a:r>
+              <a:rPr sz="1800" b="1" i="0">
+                <a:solidFill>
+                  <a:srgbClr val="64748B"/>
+                </a:solidFill>
+                <a:latin typeface="Montserrat"/>
+              </a:rPr>
+              <a:t>En el control de una planta de GNL, si V × P supera 300, ¿quién debe hacerlo?</a:t>
+            </a:r>
+          </a:p>
+        </p:txBody>
+      </p:sp>
+      <p:sp>
+        <p:nvSpPr>
+          <p:cNvPr id="8" name="Rounded Rectangle 7"/>
+          <p:cNvSpPr/>
+          <p:nvPr/>
+        </p:nvSpPr>
+        <p:spPr>
+          <a:xfrm>
+            <a:off x="822960" y="2514600"/>
+            <a:ext cx="10515600" cy="914400"/>
           </a:xfrm>
           <a:prstGeom prst="roundRect">
+            <a:avLst/>
+          </a:prstGeom>
+          <a:solidFill>
+            <a:srgbClr val="E9F6EE"/>
+          </a:solidFill>
+          <a:ln w="12700">
+            <a:solidFill>
+              <a:srgbClr val="1E8E4B"/>
+            </a:solidFill>
+          </a:ln>
+          <a:effectLst/>
+        </p:spPr>
+        <p:style>
+          <a:lnRef idx="1">
+            <a:schemeClr val="accent1"/>
+          </a:lnRef>
+          <a:fillRef idx="3">
+            <a:schemeClr val="accent1"/>
+          </a:fillRef>
+          <a:effectRef idx="2">
+            <a:schemeClr val="accent1"/>
+          </a:effectRef>
+          <a:fontRef idx="minor">
+            <a:schemeClr val="lt1"/>
+          </a:fontRef>
+        </p:style>
+        <p:txBody>
+          <a:bodyPr rtlCol="0" anchor="ctr"/>
+          <a:lstStyle/>
+          <a:p>
+            <a:pPr algn="ctr"/>
+          </a:p>
+        </p:txBody>
+      </p:sp>
+      <p:sp>
+        <p:nvSpPr>
+          <p:cNvPr id="9" name="TextBox 8"/>
+          <p:cNvSpPr txBox="1"/>
+          <p:nvPr/>
+        </p:nvSpPr>
+        <p:spPr>
+          <a:xfrm>
+            <a:off x="1097280" y="2697480"/>
+            <a:ext cx="10058400" cy="640080"/>
+          </a:xfrm>
+          <a:prstGeom prst="rect">
+            <a:avLst/>
+          </a:prstGeom>
+          <a:noFill/>
+        </p:spPr>
+        <p:txBody>
+          <a:bodyPr wrap="square">
+            <a:spAutoFit/>
+          </a:bodyPr>
+          <a:lstStyle/>
+          <a:p>
+            <a:r>
+              <a:rPr sz="1800" b="1" i="0">
+                <a:solidFill>
+                  <a:srgbClr val="1E8E4B"/>
+                </a:solidFill>
+                <a:latin typeface="Montserrat"/>
+              </a:rPr>
+              <a:t>C.  </a:t>
+            </a:r>
+            <a:r>
+              <a:rPr sz="1800" b="1" i="0">
+                <a:solidFill>
+                  <a:srgbClr val="1E2761"/>
+                </a:solidFill>
+                <a:latin typeface="Montserrat"/>
+              </a:rPr>
+              <a:t>Obligatoriamente un organismo de control</a:t>
+            </a:r>
+          </a:p>
+        </p:txBody>
+      </p:sp>
+      <p:sp>
+        <p:nvSpPr>
+          <p:cNvPr id="10" name="TextBox 9"/>
+          <p:cNvSpPr txBox="1"/>
+          <p:nvPr/>
+        </p:nvSpPr>
+        <p:spPr>
+          <a:xfrm>
+            <a:off x="822960" y="3749039"/>
+            <a:ext cx="10515600" cy="2194560"/>
+          </a:xfrm>
+          <a:prstGeom prst="rect">
+            <a:avLst/>
+          </a:prstGeom>
+          <a:noFill/>
+        </p:spPr>
+        <p:txBody>
+          <a:bodyPr wrap="square">
+            <a:spAutoFit/>
+          </a:bodyPr>
+          <a:lstStyle/>
+          <a:p>
+            <a:r>
+              <a:rPr sz="1500" b="1" i="0">
+                <a:solidFill>
+                  <a:srgbClr val="E8801A"/>
+                </a:solidFill>
+                <a:latin typeface="Montserrat"/>
+              </a:rPr>
+              <a:t>Por qué:  </a:t>
+            </a:r>
+            <a:r>
+              <a:rPr sz="1500" b="0" i="0">
+                <a:solidFill>
+                  <a:srgbClr val="1B2330"/>
+                </a:solidFill>
+                <a:latin typeface="Montserrat"/>
+              </a:rPr>
+              <a:t>Con V × P mayor de 300 el control lo tiene que hacer sí o sí un organismo de control independiente.</a:t>
+            </a:r>
+          </a:p>
+        </p:txBody>
+      </p:sp>
+    </p:spTree>
+  </p:cSld>
+  <p:clrMapOvr>
+    <a:masterClrMapping/>
+  </p:clrMapOvr>
+  <mc:AlternateContent xmlns:mc="http://schemas.openxmlformats.org/markup-compatibility/2006">
+    <mc:Choice xmlns:p14="http://schemas.microsoft.com/office/powerpoint/2010/main" Requires="p14">
+      <p:transition spd="med" p14:dur="700">
+        <p14:cube dir="r"/>
+      </p:transition>
+    </mc:Choice>
+    <mc:Fallback>
+      <p:transition spd="med">
+        <p:push dir="r"/>
+      </p:transition>
+    </mc:Fallback>
+  </mc:AlternateContent>
+</p:sld>
+</file>
+
+<file path=ppt/slides/slide17.xml><?xml version="1.0" encoding="utf-8"?>
+<p:sld xmlns:a="http://schemas.openxmlformats.org/drawingml/2006/main" xmlns:p="http://schemas.openxmlformats.org/presentationml/2006/main" xmlns:r="http://schemas.openxmlformats.org/officeDocument/2006/relationships">
+  <p:cSld>
+    <p:spTree>
+      <p:nvGrpSpPr>
+        <p:cNvPr id="1" name=""/>
+        <p:cNvGrpSpPr/>
+        <p:nvPr/>
+      </p:nvGrpSpPr>
+      <p:grpSpPr/>
+      <p:sp>
+        <p:nvSpPr>
+          <p:cNvPr id="2" name="Rectangle 1"/>
+          <p:cNvSpPr/>
+          <p:nvPr/>
+        </p:nvSpPr>
+        <p:spPr>
+          <a:xfrm>
+            <a:off x="0" y="0"/>
+            <a:ext cx="12191695" cy="6858000"/>
+          </a:xfrm>
+          <a:prstGeom prst="rect">
+            <a:avLst/>
+          </a:prstGeom>
+          <a:solidFill>
+            <a:srgbClr val="FFFFFF"/>
+          </a:solidFill>
+          <a:ln>
+            <a:noFill/>
+          </a:ln>
+          <a:effectLst/>
+        </p:spPr>
+        <p:style>
+          <a:lnRef idx="1">
+            <a:schemeClr val="accent1"/>
+          </a:lnRef>
+          <a:fillRef idx="3">
+            <a:schemeClr val="accent1"/>
+          </a:fillRef>
+          <a:effectRef idx="2">
+            <a:schemeClr val="accent1"/>
+          </a:effectRef>
+          <a:fontRef idx="minor">
+            <a:schemeClr val="lt1"/>
+          </a:fontRef>
+        </p:style>
+        <p:txBody>
+          <a:bodyPr rtlCol="0" anchor="ctr"/>
+          <a:lstStyle/>
+          <a:p>
+            <a:pPr algn="ctr"/>
+          </a:p>
+        </p:txBody>
+      </p:sp>
+      <p:sp>
+        <p:nvSpPr>
+          <p:cNvPr id="3" name="TextBox 2"/>
+          <p:cNvSpPr txBox="1"/>
+          <p:nvPr/>
+        </p:nvSpPr>
+        <p:spPr>
+          <a:xfrm>
+            <a:off x="10607040" y="320040"/>
+            <a:ext cx="1371600" cy="365760"/>
+          </a:xfrm>
+          <a:prstGeom prst="rect">
+            <a:avLst/>
+          </a:prstGeom>
+          <a:noFill/>
+        </p:spPr>
+        <p:txBody>
+          <a:bodyPr wrap="square">
+            <a:spAutoFit/>
+          </a:bodyPr>
+          <a:lstStyle/>
+          <a:p>
+            <a:pPr algn="r"/>
+            <a:r>
+              <a:rPr sz="1000" b="1" i="0">
+                <a:solidFill>
+                  <a:srgbClr val="64748B"/>
+                </a:solidFill>
+                <a:latin typeface="Montserrat"/>
+              </a:rPr>
+              <a:t>017 / 020</a:t>
+            </a:r>
+          </a:p>
+        </p:txBody>
+      </p:sp>
+      <p:sp>
+        <p:nvSpPr>
+          <p:cNvPr id="4" name="TextBox 3"/>
+          <p:cNvSpPr txBox="1"/>
+          <p:nvPr/>
+        </p:nvSpPr>
+        <p:spPr>
+          <a:xfrm>
+            <a:off x="457200" y="6419088"/>
+            <a:ext cx="8229600" cy="365760"/>
+          </a:xfrm>
+          <a:prstGeom prst="rect">
+            <a:avLst/>
+          </a:prstGeom>
+          <a:noFill/>
+        </p:spPr>
+        <p:txBody>
+          <a:bodyPr wrap="square">
+            <a:spAutoFit/>
+          </a:bodyPr>
+          <a:lstStyle/>
+          <a:p>
+            <a:r>
+              <a:rPr sz="900" b="0" i="0">
+                <a:solidFill>
+                  <a:srgbClr val="64748B"/>
+                </a:solidFill>
+                <a:latin typeface="Montserrat"/>
+              </a:rPr>
+              <a:t>Curso Gas B · Tema 02 · Plantas satélite de GNL (ITC-ICG 04)</a:t>
+            </a:r>
+          </a:p>
+        </p:txBody>
+      </p:sp>
+      <p:sp>
+        <p:nvSpPr>
+          <p:cNvPr id="5" name="TextBox 4"/>
+          <p:cNvSpPr txBox="1"/>
+          <p:nvPr/>
+        </p:nvSpPr>
+        <p:spPr>
+          <a:xfrm>
+            <a:off x="822960" y="457200"/>
+            <a:ext cx="10058400" cy="365760"/>
+          </a:xfrm>
+          <a:prstGeom prst="rect">
+            <a:avLst/>
+          </a:prstGeom>
+          <a:noFill/>
+        </p:spPr>
+        <p:txBody>
+          <a:bodyPr wrap="square">
+            <a:spAutoFit/>
+          </a:bodyPr>
+          <a:lstStyle/>
+          <a:p>
+            <a:r>
+              <a:rPr sz="1300" b="1" i="0">
+                <a:solidFill>
+                  <a:srgbClr val="E8801A"/>
+                </a:solidFill>
+                <a:latin typeface="Montserrat"/>
+              </a:rPr>
+              <a:t>APARTADO 6.2 · PRUEBA DE PRESIÓN</a:t>
+            </a:r>
+          </a:p>
+        </p:txBody>
+      </p:sp>
+      <p:sp>
+        <p:nvSpPr>
+          <p:cNvPr id="6" name="TextBox 5"/>
+          <p:cNvSpPr txBox="1"/>
+          <p:nvPr/>
+        </p:nvSpPr>
+        <p:spPr>
+          <a:xfrm>
+            <a:off x="822960" y="868680"/>
+            <a:ext cx="10515600" cy="914400"/>
+          </a:xfrm>
+          <a:prstGeom prst="rect">
+            <a:avLst/>
+          </a:prstGeom>
+          <a:noFill/>
+        </p:spPr>
+        <p:txBody>
+          <a:bodyPr wrap="square">
+            <a:spAutoFit/>
+          </a:bodyPr>
+          <a:lstStyle/>
+          <a:p>
+            <a:r>
+              <a:rPr sz="2800" b="1" i="0">
+                <a:solidFill>
+                  <a:srgbClr val="1E2761"/>
+                </a:solidFill>
+                <a:latin typeface="Montserrat"/>
+              </a:rPr>
+              <a:t>Neumática, no hidráulica</a:t>
+            </a:r>
+          </a:p>
+        </p:txBody>
+      </p:sp>
+      <p:sp>
+        <p:nvSpPr>
+          <p:cNvPr id="7" name="Rectangle 6"/>
+          <p:cNvSpPr/>
+          <p:nvPr/>
+        </p:nvSpPr>
+        <p:spPr>
+          <a:xfrm>
+            <a:off x="868680" y="1627632"/>
+            <a:ext cx="2011680" cy="73152"/>
+          </a:xfrm>
+          <a:prstGeom prst="rect">
             <a:avLst/>
           </a:prstGeom>
           <a:solidFill>
@@ -7776,14 +9049,14 @@
       </p:sp>
       <p:sp>
         <p:nvSpPr>
-          <p:cNvPr id="5" name="TextBox 4"/>
+          <p:cNvPr id="8" name="TextBox 7"/>
           <p:cNvSpPr txBox="1"/>
           <p:nvPr/>
         </p:nvSpPr>
         <p:spPr>
           <a:xfrm>
-            <a:off x="822960" y="1234440"/>
-            <a:ext cx="10515600" cy="1097280"/>
+            <a:off x="6355080" y="1965960"/>
+            <a:ext cx="5029200" cy="4206240"/>
           </a:xfrm>
           <a:prstGeom prst="rect">
             <a:avLst/>
@@ -7796,28 +9069,163 @@
           </a:bodyPr>
           <a:lstStyle/>
           <a:p>
-            <a:r>
-              <a:rPr sz="3400" b="1" i="0">
-                <a:solidFill>
-                  <a:srgbClr val="FFFFFF"/>
-                </a:solidFill>
-                <a:latin typeface="Montserrat"/>
-              </a:rPr>
-              <a:t>Has cerrado el almacenamiento de gas de punta a punta</a:t>
-            </a:r>
-          </a:p>
-        </p:txBody>
-      </p:sp>
-      <p:sp>
-        <p:nvSpPr>
-          <p:cNvPr id="6" name="TextBox 5"/>
+            <a:pPr>
+              <a:spcAft>
+                <a:spcPts val="1100"/>
+              </a:spcAft>
+            </a:pPr>
+            <a:r>
+              <a:rPr sz="1600" b="1" i="0">
+                <a:solidFill>
+                  <a:srgbClr val="E8801A"/>
+                </a:solidFill>
+                <a:latin typeface="Montserrat"/>
+              </a:rPr>
+              <a:t>▸  </a:t>
+            </a:r>
+            <a:r>
+              <a:rPr sz="1600" b="0" i="0">
+                <a:solidFill>
+                  <a:srgbClr val="1B2330"/>
+                </a:solidFill>
+                <a:latin typeface="Montserrat"/>
+              </a:rPr>
+              <a:t>Prueba de presión cada 15 años</a:t>
+            </a:r>
+          </a:p>
+          <a:p>
+            <a:pPr>
+              <a:spcAft>
+                <a:spcPts val="1100"/>
+              </a:spcAft>
+            </a:pPr>
+            <a:r>
+              <a:rPr sz="1600" b="1" i="0">
+                <a:solidFill>
+                  <a:srgbClr val="E8801A"/>
+                </a:solidFill>
+                <a:latin typeface="Montserrat"/>
+              </a:rPr>
+              <a:t>▸  </a:t>
+            </a:r>
+            <a:r>
+              <a:rPr sz="1600" b="0" i="0">
+                <a:solidFill>
+                  <a:srgbClr val="1B2330"/>
+                </a:solidFill>
+                <a:latin typeface="Montserrat"/>
+              </a:rPr>
+              <a:t>Neumática: con gas, no con agua</a:t>
+            </a:r>
+          </a:p>
+          <a:p>
+            <a:pPr>
+              <a:spcAft>
+                <a:spcPts val="1100"/>
+              </a:spcAft>
+            </a:pPr>
+            <a:r>
+              <a:rPr sz="1600" b="1" i="0">
+                <a:solidFill>
+                  <a:srgbClr val="E8801A"/>
+                </a:solidFill>
+                <a:latin typeface="Montserrat"/>
+              </a:rPr>
+              <a:t>▸  </a:t>
+            </a:r>
+            <a:r>
+              <a:rPr sz="1600" b="0" i="0">
+                <a:solidFill>
+                  <a:srgbClr val="1B2330"/>
+                </a:solidFill>
+                <a:latin typeface="Montserrat"/>
+              </a:rPr>
+              <a:t>Evita meter humedad al depósito frío</a:t>
+            </a:r>
+          </a:p>
+          <a:p>
+            <a:pPr>
+              <a:spcAft>
+                <a:spcPts val="1100"/>
+              </a:spcAft>
+            </a:pPr>
+            <a:r>
+              <a:rPr sz="1600" b="1" i="0">
+                <a:solidFill>
+                  <a:srgbClr val="E8801A"/>
+                </a:solidFill>
+                <a:latin typeface="Montserrat"/>
+              </a:rPr>
+              <a:t>▸  </a:t>
+            </a:r>
+            <a:r>
+              <a:rPr sz="1600" b="0" i="0">
+                <a:solidFill>
+                  <a:srgbClr val="1B2330"/>
+                </a:solidFill>
+                <a:latin typeface="Montserrat"/>
+              </a:rPr>
+              <a:t>GLP era hidráulica; GNL es neumática</a:t>
+            </a:r>
+          </a:p>
+        </p:txBody>
+      </p:sp>
+      <p:sp>
+        <p:nvSpPr>
+          <p:cNvPr id="9" name="imgph" descr="IMGQ:nitrogen pressure test cryogenic equipment"/>
+          <p:cNvSpPr/>
+          <p:nvPr/>
+        </p:nvSpPr>
+        <p:spPr>
+          <a:xfrm>
+            <a:off x="822960" y="1965960"/>
+            <a:ext cx="5303520" cy="4572000"/>
+          </a:xfrm>
+          <a:prstGeom prst="roundRect">
+            <a:avLst/>
+          </a:prstGeom>
+          <a:solidFill>
+            <a:srgbClr val="F3F6FB"/>
+          </a:solidFill>
+          <a:ln w="12700">
+            <a:solidFill>
+              <a:srgbClr val="C7D2E6"/>
+            </a:solidFill>
+          </a:ln>
+          <a:effectLst/>
+        </p:spPr>
+        <p:style>
+          <a:lnRef idx="1">
+            <a:schemeClr val="accent1"/>
+          </a:lnRef>
+          <a:fillRef idx="3">
+            <a:schemeClr val="accent1"/>
+          </a:fillRef>
+          <a:effectRef idx="2">
+            <a:schemeClr val="accent1"/>
+          </a:effectRef>
+          <a:fontRef idx="minor">
+            <a:schemeClr val="lt1"/>
+          </a:fontRef>
+        </p:style>
+        <p:txBody>
+          <a:bodyPr rtlCol="0" anchor="ctr"/>
+          <a:lstStyle/>
+          <a:p>
+            <a:pPr algn="ctr"/>
+          </a:p>
+        </p:txBody>
+      </p:sp>
+      <p:sp>
+        <p:nvSpPr>
+          <p:cNvPr id="10" name="TextBox 9"/>
           <p:cNvSpPr txBox="1"/>
           <p:nvPr/>
         </p:nvSpPr>
         <p:spPr>
           <a:xfrm>
-            <a:off x="822960" y="2606040"/>
-            <a:ext cx="10515600" cy="2743200"/>
+            <a:off x="1097280" y="3611880"/>
+            <a:ext cx="4754880" cy="1280160"/>
           </a:xfrm>
           <a:prstGeom prst="rect">
             <a:avLst/>
@@ -7830,119 +9238,254 @@
           </a:bodyPr>
           <a:lstStyle/>
           <a:p>
-            <a:pPr>
-              <a:spcAft>
-                <a:spcPts val="1200"/>
-              </a:spcAft>
-            </a:pPr>
-            <a:r>
-              <a:rPr sz="2000" b="1" i="0">
-                <a:solidFill>
-                  <a:srgbClr val="F4A24C"/>
-                </a:solidFill>
-                <a:latin typeface="Montserrat"/>
-              </a:rPr>
-              <a:t>✓  </a:t>
-            </a:r>
-            <a:r>
-              <a:rPr sz="1900" b="0" i="0">
-                <a:solidFill>
-                  <a:srgbClr val="FFFFFF"/>
-                </a:solidFill>
-                <a:latin typeface="Montserrat"/>
-              </a:rPr>
-              <a:t>Distingues GNL de GLP: norma, técnico y pruebas</a:t>
-            </a:r>
-          </a:p>
-          <a:p>
-            <a:pPr>
-              <a:spcAft>
-                <a:spcPts val="1200"/>
-              </a:spcAft>
-            </a:pPr>
-            <a:r>
-              <a:rPr sz="2000" b="1" i="0">
-                <a:solidFill>
-                  <a:srgbClr val="F4A24C"/>
-                </a:solidFill>
-                <a:latin typeface="Montserrat"/>
-              </a:rPr>
-              <a:t>✓  </a:t>
-            </a:r>
-            <a:r>
-              <a:rPr sz="1900" b="0" i="0">
-                <a:solidFill>
-                  <a:srgbClr val="FFFFFF"/>
-                </a:solidFill>
-                <a:latin typeface="Montserrat"/>
-              </a:rPr>
-              <a:t>Sabes cuándo hay autorización, proyecto y qué plazo comunicar</a:t>
-            </a:r>
-          </a:p>
-          <a:p>
-            <a:pPr>
-              <a:spcAft>
-                <a:spcPts val="1200"/>
-              </a:spcAft>
-            </a:pPr>
-            <a:r>
-              <a:rPr sz="2000" b="1" i="0">
-                <a:solidFill>
-                  <a:srgbClr val="F4A24C"/>
-                </a:solidFill>
-                <a:latin typeface="Montserrat"/>
-              </a:rPr>
-              <a:t>✓  </a:t>
-            </a:r>
-            <a:r>
-              <a:rPr sz="1900" b="0" i="0">
-                <a:solidFill>
-                  <a:srgbClr val="FFFFFF"/>
-                </a:solidFill>
-                <a:latin typeface="Montserrat"/>
-              </a:rPr>
-              <a:t>Aplicas la fórmula V × P y el corte en 300</a:t>
-            </a:r>
-          </a:p>
-          <a:p>
-            <a:pPr>
-              <a:spcAft>
-                <a:spcPts val="1200"/>
-              </a:spcAft>
-            </a:pPr>
-            <a:r>
-              <a:rPr sz="2000" b="1" i="0">
-                <a:solidFill>
-                  <a:srgbClr val="F4A24C"/>
-                </a:solidFill>
-                <a:latin typeface="Montserrat"/>
-              </a:rPr>
-              <a:t>✓  </a:t>
-            </a:r>
-            <a:r>
-              <a:rPr sz="1900" b="0" i="0">
-                <a:solidFill>
-                  <a:srgbClr val="FFFFFF"/>
-                </a:solidFill>
-                <a:latin typeface="Montserrat"/>
-              </a:rPr>
-              <a:t>Cierras el tema: envases, depósitos fijos y plantas de GNL</a:t>
-            </a:r>
-          </a:p>
-        </p:txBody>
-      </p:sp>
-      <p:sp>
-        <p:nvSpPr>
-          <p:cNvPr id="7" name="Rounded Rectangle 6"/>
+            <a:pPr algn="ctr"/>
+            <a:r>
+              <a:rPr sz="1400" b="1" i="0">
+                <a:solidFill>
+                  <a:srgbClr val="64748B"/>
+                </a:solidFill>
+                <a:latin typeface="Montserrat"/>
+              </a:rPr>
+              <a:t>IMAGEN</a:t>
+            </a:r>
+          </a:p>
+          <a:p>
+            <a:pPr algn="ctr"/>
+            <a:r>
+              <a:rPr sz="1100" b="0" i="1">
+                <a:solidFill>
+                  <a:srgbClr val="64748B"/>
+                </a:solidFill>
+                <a:latin typeface="Montserrat"/>
+              </a:rPr>
+              <a:t>nitrogen pressure test cryogenic equipment</a:t>
+            </a:r>
+          </a:p>
+        </p:txBody>
+      </p:sp>
+    </p:spTree>
+  </p:cSld>
+  <p:clrMapOvr>
+    <a:masterClrMapping/>
+  </p:clrMapOvr>
+  <mc:AlternateContent xmlns:mc="http://schemas.openxmlformats.org/markup-compatibility/2006">
+    <mc:Choice xmlns:p14="http://schemas.microsoft.com/office/powerpoint/2010/main" Requires="p14">
+      <p:transition spd="med" p14:dur="700">
+        <p14:cube dir="l"/>
+      </p:transition>
+    </mc:Choice>
+    <mc:Fallback>
+      <p:transition spd="med">
+        <p:push dir="l"/>
+      </p:transition>
+    </mc:Fallback>
+  </mc:AlternateContent>
+</p:sld>
+</file>
+
+<file path=ppt/slides/slide18.xml><?xml version="1.0" encoding="utf-8"?>
+<p:sld xmlns:a="http://schemas.openxmlformats.org/drawingml/2006/main" xmlns:p="http://schemas.openxmlformats.org/presentationml/2006/main" xmlns:r="http://schemas.openxmlformats.org/officeDocument/2006/relationships">
+  <p:cSld>
+    <p:spTree>
+      <p:nvGrpSpPr>
+        <p:cNvPr id="1" name=""/>
+        <p:cNvGrpSpPr/>
+        <p:nvPr/>
+      </p:nvGrpSpPr>
+      <p:grpSpPr/>
+      <p:sp>
+        <p:nvSpPr>
+          <p:cNvPr id="2" name="Rectangle 1"/>
           <p:cNvSpPr/>
           <p:nvPr/>
         </p:nvSpPr>
         <p:spPr>
           <a:xfrm>
-            <a:off x="822960" y="5532120"/>
-            <a:ext cx="10515600" cy="822960"/>
-          </a:xfrm>
-          <a:prstGeom prst="roundRect">
+            <a:off x="0" y="0"/>
+            <a:ext cx="12191695" cy="6858000"/>
+          </a:xfrm>
+          <a:prstGeom prst="rect">
+            <a:avLst/>
+          </a:prstGeom>
+          <a:solidFill>
+            <a:srgbClr val="FFFFFF"/>
+          </a:solidFill>
+          <a:ln>
+            <a:noFill/>
+          </a:ln>
+          <a:effectLst/>
+        </p:spPr>
+        <p:style>
+          <a:lnRef idx="1">
+            <a:schemeClr val="accent1"/>
+          </a:lnRef>
+          <a:fillRef idx="3">
+            <a:schemeClr val="accent1"/>
+          </a:fillRef>
+          <a:effectRef idx="2">
+            <a:schemeClr val="accent1"/>
+          </a:effectRef>
+          <a:fontRef idx="minor">
+            <a:schemeClr val="lt1"/>
+          </a:fontRef>
+        </p:style>
+        <p:txBody>
+          <a:bodyPr rtlCol="0" anchor="ctr"/>
+          <a:lstStyle/>
+          <a:p>
+            <a:pPr algn="ctr"/>
+          </a:p>
+        </p:txBody>
+      </p:sp>
+      <p:sp>
+        <p:nvSpPr>
+          <p:cNvPr id="3" name="TextBox 2"/>
+          <p:cNvSpPr txBox="1"/>
+          <p:nvPr/>
+        </p:nvSpPr>
+        <p:spPr>
+          <a:xfrm>
+            <a:off x="10607040" y="320040"/>
+            <a:ext cx="1371600" cy="365760"/>
+          </a:xfrm>
+          <a:prstGeom prst="rect">
+            <a:avLst/>
+          </a:prstGeom>
+          <a:noFill/>
+        </p:spPr>
+        <p:txBody>
+          <a:bodyPr wrap="square">
+            <a:spAutoFit/>
+          </a:bodyPr>
+          <a:lstStyle/>
+          <a:p>
+            <a:pPr algn="r"/>
+            <a:r>
+              <a:rPr sz="1000" b="1" i="0">
+                <a:solidFill>
+                  <a:srgbClr val="64748B"/>
+                </a:solidFill>
+                <a:latin typeface="Montserrat"/>
+              </a:rPr>
+              <a:t>018 / 020</a:t>
+            </a:r>
+          </a:p>
+        </p:txBody>
+      </p:sp>
+      <p:sp>
+        <p:nvSpPr>
+          <p:cNvPr id="4" name="TextBox 3"/>
+          <p:cNvSpPr txBox="1"/>
+          <p:nvPr/>
+        </p:nvSpPr>
+        <p:spPr>
+          <a:xfrm>
+            <a:off x="457200" y="6419088"/>
+            <a:ext cx="8229600" cy="365760"/>
+          </a:xfrm>
+          <a:prstGeom prst="rect">
+            <a:avLst/>
+          </a:prstGeom>
+          <a:noFill/>
+        </p:spPr>
+        <p:txBody>
+          <a:bodyPr wrap="square">
+            <a:spAutoFit/>
+          </a:bodyPr>
+          <a:lstStyle/>
+          <a:p>
+            <a:r>
+              <a:rPr sz="900" b="0" i="0">
+                <a:solidFill>
+                  <a:srgbClr val="64748B"/>
+                </a:solidFill>
+                <a:latin typeface="Montserrat"/>
+              </a:rPr>
+              <a:t>Curso Gas B · Tema 02 · Plantas satélite de GNL (ITC-ICG 04)</a:t>
+            </a:r>
+          </a:p>
+        </p:txBody>
+      </p:sp>
+      <p:sp>
+        <p:nvSpPr>
+          <p:cNvPr id="5" name="TextBox 4"/>
+          <p:cNvSpPr txBox="1"/>
+          <p:nvPr/>
+        </p:nvSpPr>
+        <p:spPr>
+          <a:xfrm>
+            <a:off x="822960" y="457200"/>
+            <a:ext cx="10058400" cy="365760"/>
+          </a:xfrm>
+          <a:prstGeom prst="rect">
+            <a:avLst/>
+          </a:prstGeom>
+          <a:noFill/>
+        </p:spPr>
+        <p:txBody>
+          <a:bodyPr wrap="square">
+            <a:spAutoFit/>
+          </a:bodyPr>
+          <a:lstStyle/>
+          <a:p>
+            <a:r>
+              <a:rPr sz="1300" b="1" i="0">
+                <a:solidFill>
+                  <a:srgbClr val="E8801A"/>
+                </a:solidFill>
+                <a:latin typeface="Montserrat"/>
+              </a:rPr>
+              <a:t>APARTADO 6.3 · RETIRADA</a:t>
+            </a:r>
+          </a:p>
+        </p:txBody>
+      </p:sp>
+      <p:sp>
+        <p:nvSpPr>
+          <p:cNvPr id="6" name="TextBox 5"/>
+          <p:cNvSpPr txBox="1"/>
+          <p:nvPr/>
+        </p:nvSpPr>
+        <p:spPr>
+          <a:xfrm>
+            <a:off x="822960" y="868680"/>
+            <a:ext cx="10515600" cy="914400"/>
+          </a:xfrm>
+          <a:prstGeom prst="rect">
+            <a:avLst/>
+          </a:prstGeom>
+          <a:noFill/>
+        </p:spPr>
+        <p:txBody>
+          <a:bodyPr wrap="square">
+            <a:spAutoFit/>
+          </a:bodyPr>
+          <a:lstStyle/>
+          <a:p>
+            <a:r>
+              <a:rPr sz="2800" b="1" i="0">
+                <a:solidFill>
+                  <a:srgbClr val="1E2761"/>
+                </a:solidFill>
+                <a:latin typeface="Montserrat"/>
+              </a:rPr>
+              <a:t>Un año sin carga: inertizar</a:t>
+            </a:r>
+          </a:p>
+        </p:txBody>
+      </p:sp>
+      <p:sp>
+        <p:nvSpPr>
+          <p:cNvPr id="7" name="Rectangle 6"/>
+          <p:cNvSpPr/>
+          <p:nvPr/>
+        </p:nvSpPr>
+        <p:spPr>
+          <a:xfrm>
+            <a:off x="868680" y="1627632"/>
+            <a:ext cx="2011680" cy="73152"/>
+          </a:xfrm>
+          <a:prstGeom prst="rect">
             <a:avLst/>
           </a:prstGeom>
           <a:solidFill>
@@ -7983,8 +9526,8 @@
         </p:nvSpPr>
         <p:spPr>
           <a:xfrm>
-            <a:off x="1051560" y="5623560"/>
-            <a:ext cx="10058400" cy="640080"/>
+            <a:off x="822960" y="1965960"/>
+            <a:ext cx="5029200" cy="4206240"/>
           </a:xfrm>
           <a:prstGeom prst="rect">
             <a:avLst/>
@@ -7997,14 +9540,196 @@
           </a:bodyPr>
           <a:lstStyle/>
           <a:p>
-            <a:r>
-              <a:rPr sz="1500" b="1" i="1">
-                <a:solidFill>
-                  <a:srgbClr val="1E2761"/>
-                </a:solidFill>
-                <a:latin typeface="Montserrat"/>
-              </a:rPr>
-              <a:t>Tema 02 completo. Ya dominas dónde y cómo se guarda el gas antes de llegar al usuario.</a:t>
+            <a:pPr>
+              <a:spcAft>
+                <a:spcPts val="1100"/>
+              </a:spcAft>
+            </a:pPr>
+            <a:r>
+              <a:rPr sz="1600" b="1" i="0">
+                <a:solidFill>
+                  <a:srgbClr val="E8801A"/>
+                </a:solidFill>
+                <a:latin typeface="Montserrat"/>
+              </a:rPr>
+              <a:t>▸  </a:t>
+            </a:r>
+            <a:r>
+              <a:rPr sz="1600" b="0" i="0">
+                <a:solidFill>
+                  <a:srgbClr val="1B2330"/>
+                </a:solidFill>
+                <a:latin typeface="Montserrat"/>
+              </a:rPr>
+              <a:t>Un año sin recibir GNL: inertizado</a:t>
+            </a:r>
+          </a:p>
+          <a:p>
+            <a:pPr>
+              <a:spcAft>
+                <a:spcPts val="1100"/>
+              </a:spcAft>
+            </a:pPr>
+            <a:r>
+              <a:rPr sz="1600" b="1" i="0">
+                <a:solidFill>
+                  <a:srgbClr val="E8801A"/>
+                </a:solidFill>
+                <a:latin typeface="Montserrat"/>
+              </a:rPr>
+              <a:t>▸  </a:t>
+            </a:r>
+            <a:r>
+              <a:rPr sz="1600" b="0" i="0">
+                <a:solidFill>
+                  <a:srgbClr val="1B2330"/>
+                </a:solidFill>
+                <a:latin typeface="Montserrat"/>
+              </a:rPr>
+              <a:t>Con nitrógeno u otro gas inerte</a:t>
+            </a:r>
+          </a:p>
+          <a:p>
+            <a:pPr>
+              <a:spcAft>
+                <a:spcPts val="1100"/>
+              </a:spcAft>
+            </a:pPr>
+            <a:r>
+              <a:rPr sz="1600" b="1" i="0">
+                <a:solidFill>
+                  <a:srgbClr val="E8801A"/>
+                </a:solidFill>
+                <a:latin typeface="Montserrat"/>
+              </a:rPr>
+              <a:t>▸  </a:t>
+            </a:r>
+            <a:r>
+              <a:rPr sz="1600" b="0" i="0">
+                <a:solidFill>
+                  <a:srgbClr val="1B2330"/>
+                </a:solidFill>
+                <a:latin typeface="Montserrat"/>
+              </a:rPr>
+              <a:t>Lo supervisa un organismo de control</a:t>
+            </a:r>
+          </a:p>
+          <a:p>
+            <a:pPr>
+              <a:spcAft>
+                <a:spcPts val="1100"/>
+              </a:spcAft>
+            </a:pPr>
+            <a:r>
+              <a:rPr sz="1600" b="1" i="0">
+                <a:solidFill>
+                  <a:srgbClr val="E8801A"/>
+                </a:solidFill>
+                <a:latin typeface="Montserrat"/>
+              </a:rPr>
+              <a:t>▸  </a:t>
+            </a:r>
+            <a:r>
+              <a:rPr sz="1600" b="0" i="0">
+                <a:solidFill>
+                  <a:srgbClr val="1B2330"/>
+                </a:solidFill>
+                <a:latin typeface="Montserrat"/>
+              </a:rPr>
+              <a:t>Nunca desmontar sin inertizar antes</a:t>
+            </a:r>
+          </a:p>
+        </p:txBody>
+      </p:sp>
+      <p:sp>
+        <p:nvSpPr>
+          <p:cNvPr id="9" name="imgph" descr="IMGQ:nitrogen purge industrial gas tank"/>
+          <p:cNvSpPr/>
+          <p:nvPr/>
+        </p:nvSpPr>
+        <p:spPr>
+          <a:xfrm>
+            <a:off x="6080760" y="1965960"/>
+            <a:ext cx="5303520" cy="4572000"/>
+          </a:xfrm>
+          <a:prstGeom prst="roundRect">
+            <a:avLst/>
+          </a:prstGeom>
+          <a:solidFill>
+            <a:srgbClr val="F3F6FB"/>
+          </a:solidFill>
+          <a:ln w="12700">
+            <a:solidFill>
+              <a:srgbClr val="C7D2E6"/>
+            </a:solidFill>
+          </a:ln>
+          <a:effectLst/>
+        </p:spPr>
+        <p:style>
+          <a:lnRef idx="1">
+            <a:schemeClr val="accent1"/>
+          </a:lnRef>
+          <a:fillRef idx="3">
+            <a:schemeClr val="accent1"/>
+          </a:fillRef>
+          <a:effectRef idx="2">
+            <a:schemeClr val="accent1"/>
+          </a:effectRef>
+          <a:fontRef idx="minor">
+            <a:schemeClr val="lt1"/>
+          </a:fontRef>
+        </p:style>
+        <p:txBody>
+          <a:bodyPr rtlCol="0" anchor="ctr"/>
+          <a:lstStyle/>
+          <a:p>
+            <a:pPr algn="ctr"/>
+          </a:p>
+        </p:txBody>
+      </p:sp>
+      <p:sp>
+        <p:nvSpPr>
+          <p:cNvPr id="10" name="TextBox 9"/>
+          <p:cNvSpPr txBox="1"/>
+          <p:nvPr/>
+        </p:nvSpPr>
+        <p:spPr>
+          <a:xfrm>
+            <a:off x="6355080" y="3611880"/>
+            <a:ext cx="4754880" cy="1280160"/>
+          </a:xfrm>
+          <a:prstGeom prst="rect">
+            <a:avLst/>
+          </a:prstGeom>
+          <a:noFill/>
+        </p:spPr>
+        <p:txBody>
+          <a:bodyPr wrap="square">
+            <a:spAutoFit/>
+          </a:bodyPr>
+          <a:lstStyle/>
+          <a:p>
+            <a:pPr algn="ctr"/>
+            <a:r>
+              <a:rPr sz="1400" b="1" i="0">
+                <a:solidFill>
+                  <a:srgbClr val="64748B"/>
+                </a:solidFill>
+                <a:latin typeface="Montserrat"/>
+              </a:rPr>
+              <a:t>IMAGEN</a:t>
+            </a:r>
+          </a:p>
+          <a:p>
+            <a:pPr algn="ctr"/>
+            <a:r>
+              <a:rPr sz="1100" b="0" i="1">
+                <a:solidFill>
+                  <a:srgbClr val="64748B"/>
+                </a:solidFill>
+                <a:latin typeface="Montserrat"/>
+              </a:rPr>
+              <a:t>nitrogen purge industrial gas tank</a:t>
             </a:r>
           </a:p>
         </p:txBody>
@@ -8014,6 +9739,514 @@
   <p:clrMapOvr>
     <a:masterClrMapping/>
   </p:clrMapOvr>
+  <mc:AlternateContent xmlns:mc="http://schemas.openxmlformats.org/markup-compatibility/2006">
+    <mc:Choice xmlns:p14="http://schemas.microsoft.com/office/powerpoint/2010/main" Requires="p14">
+      <p:transition spd="med" p14:dur="700">
+        <p14:cube dir="r"/>
+      </p:transition>
+    </mc:Choice>
+    <mc:Fallback>
+      <p:transition spd="med">
+        <p:push dir="r"/>
+      </p:transition>
+    </mc:Fallback>
+  </mc:AlternateContent>
+</p:sld>
+</file>
+
+<file path=ppt/slides/slide19.xml><?xml version="1.0" encoding="utf-8"?>
+<p:sld xmlns:a="http://schemas.openxmlformats.org/drawingml/2006/main" xmlns:p="http://schemas.openxmlformats.org/presentationml/2006/main" xmlns:r="http://schemas.openxmlformats.org/officeDocument/2006/relationships">
+  <p:cSld>
+    <p:spTree>
+      <p:nvGrpSpPr>
+        <p:cNvPr id="1" name=""/>
+        <p:cNvGrpSpPr/>
+        <p:nvPr/>
+      </p:nvGrpSpPr>
+      <p:grpSpPr/>
+      <p:sp>
+        <p:nvSpPr>
+          <p:cNvPr id="2" name="Rectangle 1"/>
+          <p:cNvSpPr/>
+          <p:nvPr/>
+        </p:nvSpPr>
+        <p:spPr>
+          <a:xfrm>
+            <a:off x="0" y="0"/>
+            <a:ext cx="12191695" cy="6858000"/>
+          </a:xfrm>
+          <a:prstGeom prst="rect">
+            <a:avLst/>
+          </a:prstGeom>
+          <a:solidFill>
+            <a:srgbClr val="FFFFFF"/>
+          </a:solidFill>
+          <a:ln>
+            <a:noFill/>
+          </a:ln>
+          <a:effectLst/>
+        </p:spPr>
+        <p:style>
+          <a:lnRef idx="1">
+            <a:schemeClr val="accent1"/>
+          </a:lnRef>
+          <a:fillRef idx="3">
+            <a:schemeClr val="accent1"/>
+          </a:fillRef>
+          <a:effectRef idx="2">
+            <a:schemeClr val="accent1"/>
+          </a:effectRef>
+          <a:fontRef idx="minor">
+            <a:schemeClr val="lt1"/>
+          </a:fontRef>
+        </p:style>
+        <p:txBody>
+          <a:bodyPr rtlCol="0" anchor="ctr"/>
+          <a:lstStyle/>
+          <a:p>
+            <a:pPr algn="ctr"/>
+          </a:p>
+        </p:txBody>
+      </p:sp>
+      <p:sp>
+        <p:nvSpPr>
+          <p:cNvPr id="3" name="TextBox 2"/>
+          <p:cNvSpPr txBox="1"/>
+          <p:nvPr/>
+        </p:nvSpPr>
+        <p:spPr>
+          <a:xfrm>
+            <a:off x="10607040" y="320040"/>
+            <a:ext cx="1371600" cy="365760"/>
+          </a:xfrm>
+          <a:prstGeom prst="rect">
+            <a:avLst/>
+          </a:prstGeom>
+          <a:noFill/>
+        </p:spPr>
+        <p:txBody>
+          <a:bodyPr wrap="square">
+            <a:spAutoFit/>
+          </a:bodyPr>
+          <a:lstStyle/>
+          <a:p>
+            <a:pPr algn="r"/>
+            <a:r>
+              <a:rPr sz="1000" b="1" i="0">
+                <a:solidFill>
+                  <a:srgbClr val="64748B"/>
+                </a:solidFill>
+                <a:latin typeface="Montserrat"/>
+              </a:rPr>
+              <a:t>019 / 020</a:t>
+            </a:r>
+          </a:p>
+        </p:txBody>
+      </p:sp>
+      <p:sp>
+        <p:nvSpPr>
+          <p:cNvPr id="4" name="TextBox 3"/>
+          <p:cNvSpPr txBox="1"/>
+          <p:nvPr/>
+        </p:nvSpPr>
+        <p:spPr>
+          <a:xfrm>
+            <a:off x="457200" y="6419088"/>
+            <a:ext cx="8229600" cy="365760"/>
+          </a:xfrm>
+          <a:prstGeom prst="rect">
+            <a:avLst/>
+          </a:prstGeom>
+          <a:noFill/>
+        </p:spPr>
+        <p:txBody>
+          <a:bodyPr wrap="square">
+            <a:spAutoFit/>
+          </a:bodyPr>
+          <a:lstStyle/>
+          <a:p>
+            <a:r>
+              <a:rPr sz="900" b="0" i="0">
+                <a:solidFill>
+                  <a:srgbClr val="64748B"/>
+                </a:solidFill>
+                <a:latin typeface="Montserrat"/>
+              </a:rPr>
+              <a:t>Curso Gas B · Tema 02 · Plantas satélite de GNL (ITC-ICG 04)</a:t>
+            </a:r>
+          </a:p>
+        </p:txBody>
+      </p:sp>
+      <p:sp>
+        <p:nvSpPr>
+          <p:cNvPr id="5" name="TextBox 4"/>
+          <p:cNvSpPr txBox="1"/>
+          <p:nvPr/>
+        </p:nvSpPr>
+        <p:spPr>
+          <a:xfrm>
+            <a:off x="822960" y="457200"/>
+            <a:ext cx="10058400" cy="365760"/>
+          </a:xfrm>
+          <a:prstGeom prst="rect">
+            <a:avLst/>
+          </a:prstGeom>
+          <a:noFill/>
+        </p:spPr>
+        <p:txBody>
+          <a:bodyPr wrap="square">
+            <a:spAutoFit/>
+          </a:bodyPr>
+          <a:lstStyle/>
+          <a:p>
+            <a:r>
+              <a:rPr sz="1300" b="1" i="0">
+                <a:solidFill>
+                  <a:srgbClr val="E8801A"/>
+                </a:solidFill>
+                <a:latin typeface="Montserrat"/>
+              </a:rPr>
+              <a:t>REPASO RELÁMPAGO</a:t>
+            </a:r>
+          </a:p>
+        </p:txBody>
+      </p:sp>
+      <p:sp>
+        <p:nvSpPr>
+          <p:cNvPr id="6" name="TextBox 5"/>
+          <p:cNvSpPr txBox="1"/>
+          <p:nvPr/>
+        </p:nvSpPr>
+        <p:spPr>
+          <a:xfrm>
+            <a:off x="822960" y="868680"/>
+            <a:ext cx="10515600" cy="914400"/>
+          </a:xfrm>
+          <a:prstGeom prst="rect">
+            <a:avLst/>
+          </a:prstGeom>
+          <a:noFill/>
+        </p:spPr>
+        <p:txBody>
+          <a:bodyPr wrap="square">
+            <a:spAutoFit/>
+          </a:bodyPr>
+          <a:lstStyle/>
+          <a:p>
+            <a:r>
+              <a:rPr sz="2800" b="1" i="0">
+                <a:solidFill>
+                  <a:srgbClr val="1E2761"/>
+                </a:solidFill>
+                <a:latin typeface="Montserrat"/>
+              </a:rPr>
+              <a:t>GNL frente a GLP, en cinco líneas</a:t>
+            </a:r>
+          </a:p>
+        </p:txBody>
+      </p:sp>
+      <p:sp>
+        <p:nvSpPr>
+          <p:cNvPr id="7" name="Rectangle 6"/>
+          <p:cNvSpPr/>
+          <p:nvPr/>
+        </p:nvSpPr>
+        <p:spPr>
+          <a:xfrm>
+            <a:off x="868680" y="1627632"/>
+            <a:ext cx="2011680" cy="73152"/>
+          </a:xfrm>
+          <a:prstGeom prst="rect">
+            <a:avLst/>
+          </a:prstGeom>
+          <a:solidFill>
+            <a:srgbClr val="E8801A"/>
+          </a:solidFill>
+          <a:ln>
+            <a:noFill/>
+          </a:ln>
+          <a:effectLst/>
+        </p:spPr>
+        <p:style>
+          <a:lnRef idx="1">
+            <a:schemeClr val="accent1"/>
+          </a:lnRef>
+          <a:fillRef idx="3">
+            <a:schemeClr val="accent1"/>
+          </a:fillRef>
+          <a:effectRef idx="2">
+            <a:schemeClr val="accent1"/>
+          </a:effectRef>
+          <a:fontRef idx="minor">
+            <a:schemeClr val="lt1"/>
+          </a:fontRef>
+        </p:style>
+        <p:txBody>
+          <a:bodyPr rtlCol="0" anchor="ctr"/>
+          <a:lstStyle/>
+          <a:p>
+            <a:pPr algn="ctr"/>
+          </a:p>
+        </p:txBody>
+      </p:sp>
+      <p:sp>
+        <p:nvSpPr>
+          <p:cNvPr id="8" name="TextBox 7"/>
+          <p:cNvSpPr txBox="1"/>
+          <p:nvPr/>
+        </p:nvSpPr>
+        <p:spPr>
+          <a:xfrm>
+            <a:off x="6355080" y="1965960"/>
+            <a:ext cx="5029200" cy="4206240"/>
+          </a:xfrm>
+          <a:prstGeom prst="rect">
+            <a:avLst/>
+          </a:prstGeom>
+          <a:noFill/>
+        </p:spPr>
+        <p:txBody>
+          <a:bodyPr wrap="square">
+            <a:spAutoFit/>
+          </a:bodyPr>
+          <a:lstStyle/>
+          <a:p>
+            <a:pPr>
+              <a:spcAft>
+                <a:spcPts val="1100"/>
+              </a:spcAft>
+            </a:pPr>
+            <a:r>
+              <a:rPr sz="1600" b="1" i="0">
+                <a:solidFill>
+                  <a:srgbClr val="E8801A"/>
+                </a:solidFill>
+                <a:latin typeface="Montserrat"/>
+              </a:rPr>
+              <a:t>▸  </a:t>
+            </a:r>
+            <a:r>
+              <a:rPr sz="1600" b="0" i="0">
+                <a:solidFill>
+                  <a:srgbClr val="1B2330"/>
+                </a:solidFill>
+                <a:latin typeface="Montserrat"/>
+              </a:rPr>
+              <a:t>GNL → UNE 60210 → criogénico</a:t>
+            </a:r>
+          </a:p>
+          <a:p>
+            <a:pPr>
+              <a:spcAft>
+                <a:spcPts val="1100"/>
+              </a:spcAft>
+            </a:pPr>
+            <a:r>
+              <a:rPr sz="1600" b="1" i="0">
+                <a:solidFill>
+                  <a:srgbClr val="E8801A"/>
+                </a:solidFill>
+                <a:latin typeface="Montserrat"/>
+              </a:rPr>
+              <a:t>▸  </a:t>
+            </a:r>
+            <a:r>
+              <a:rPr sz="1600" b="0" i="0">
+                <a:solidFill>
+                  <a:srgbClr val="1B2330"/>
+                </a:solidFill>
+                <a:latin typeface="Montserrat"/>
+              </a:rPr>
+              <a:t>Autorización previa (salvo autoconsumo)</a:t>
+            </a:r>
+          </a:p>
+          <a:p>
+            <a:pPr>
+              <a:spcAft>
+                <a:spcPts val="1100"/>
+              </a:spcAft>
+            </a:pPr>
+            <a:r>
+              <a:rPr sz="1600" b="1" i="0">
+                <a:solidFill>
+                  <a:srgbClr val="E8801A"/>
+                </a:solidFill>
+                <a:latin typeface="Montserrat"/>
+              </a:rPr>
+              <a:t>▸  </a:t>
+            </a:r>
+            <a:r>
+              <a:rPr sz="1600" b="0" i="0">
+                <a:solidFill>
+                  <a:srgbClr val="1B2330"/>
+                </a:solidFill>
+                <a:latin typeface="Montserrat"/>
+              </a:rPr>
+              <a:t>Siempre proyecto + planes de emergencia</a:t>
+            </a:r>
+          </a:p>
+          <a:p>
+            <a:pPr>
+              <a:spcAft>
+                <a:spcPts val="1100"/>
+              </a:spcAft>
+            </a:pPr>
+            <a:r>
+              <a:rPr sz="1600" b="1" i="0">
+                <a:solidFill>
+                  <a:srgbClr val="E8801A"/>
+                </a:solidFill>
+                <a:latin typeface="Montserrat"/>
+              </a:rPr>
+              <a:t>▸  </a:t>
+            </a:r>
+            <a:r>
+              <a:rPr sz="1600" b="0" i="0">
+                <a:solidFill>
+                  <a:srgbClr val="1B2330"/>
+                </a:solidFill>
+                <a:latin typeface="Montserrat"/>
+              </a:rPr>
+              <a:t>Controles: 5 años · V × P · 300</a:t>
+            </a:r>
+          </a:p>
+          <a:p>
+            <a:pPr>
+              <a:spcAft>
+                <a:spcPts val="1100"/>
+              </a:spcAft>
+            </a:pPr>
+            <a:r>
+              <a:rPr sz="1600" b="1" i="0">
+                <a:solidFill>
+                  <a:srgbClr val="E8801A"/>
+                </a:solidFill>
+                <a:latin typeface="Montserrat"/>
+              </a:rPr>
+              <a:t>▸  </a:t>
+            </a:r>
+            <a:r>
+              <a:rPr sz="1600" b="0" i="0">
+                <a:solidFill>
+                  <a:srgbClr val="1B2330"/>
+                </a:solidFill>
+                <a:latin typeface="Montserrat"/>
+              </a:rPr>
+              <a:t>Prueba neumática cada 15 años</a:t>
+            </a:r>
+          </a:p>
+        </p:txBody>
+      </p:sp>
+      <p:sp>
+        <p:nvSpPr>
+          <p:cNvPr id="9" name="imgph" descr="IMGQ:LNG plant overview facility"/>
+          <p:cNvSpPr/>
+          <p:nvPr/>
+        </p:nvSpPr>
+        <p:spPr>
+          <a:xfrm>
+            <a:off x="822960" y="1965960"/>
+            <a:ext cx="5303520" cy="4572000"/>
+          </a:xfrm>
+          <a:prstGeom prst="roundRect">
+            <a:avLst/>
+          </a:prstGeom>
+          <a:solidFill>
+            <a:srgbClr val="F3F6FB"/>
+          </a:solidFill>
+          <a:ln w="12700">
+            <a:solidFill>
+              <a:srgbClr val="C7D2E6"/>
+            </a:solidFill>
+          </a:ln>
+          <a:effectLst/>
+        </p:spPr>
+        <p:style>
+          <a:lnRef idx="1">
+            <a:schemeClr val="accent1"/>
+          </a:lnRef>
+          <a:fillRef idx="3">
+            <a:schemeClr val="accent1"/>
+          </a:fillRef>
+          <a:effectRef idx="2">
+            <a:schemeClr val="accent1"/>
+          </a:effectRef>
+          <a:fontRef idx="minor">
+            <a:schemeClr val="lt1"/>
+          </a:fontRef>
+        </p:style>
+        <p:txBody>
+          <a:bodyPr rtlCol="0" anchor="ctr"/>
+          <a:lstStyle/>
+          <a:p>
+            <a:pPr algn="ctr"/>
+          </a:p>
+        </p:txBody>
+      </p:sp>
+      <p:sp>
+        <p:nvSpPr>
+          <p:cNvPr id="10" name="TextBox 9"/>
+          <p:cNvSpPr txBox="1"/>
+          <p:nvPr/>
+        </p:nvSpPr>
+        <p:spPr>
+          <a:xfrm>
+            <a:off x="1097280" y="3611880"/>
+            <a:ext cx="4754880" cy="1280160"/>
+          </a:xfrm>
+          <a:prstGeom prst="rect">
+            <a:avLst/>
+          </a:prstGeom>
+          <a:noFill/>
+        </p:spPr>
+        <p:txBody>
+          <a:bodyPr wrap="square">
+            <a:spAutoFit/>
+          </a:bodyPr>
+          <a:lstStyle/>
+          <a:p>
+            <a:pPr algn="ctr"/>
+            <a:r>
+              <a:rPr sz="1400" b="1" i="0">
+                <a:solidFill>
+                  <a:srgbClr val="64748B"/>
+                </a:solidFill>
+                <a:latin typeface="Montserrat"/>
+              </a:rPr>
+              <a:t>IMAGEN</a:t>
+            </a:r>
+          </a:p>
+          <a:p>
+            <a:pPr algn="ctr"/>
+            <a:r>
+              <a:rPr sz="1100" b="0" i="1">
+                <a:solidFill>
+                  <a:srgbClr val="64748B"/>
+                </a:solidFill>
+                <a:latin typeface="Montserrat"/>
+              </a:rPr>
+              <a:t>LNG plant overview facility</a:t>
+            </a:r>
+          </a:p>
+        </p:txBody>
+      </p:sp>
+    </p:spTree>
+  </p:cSld>
+  <p:clrMapOvr>
+    <a:masterClrMapping/>
+  </p:clrMapOvr>
+  <mc:AlternateContent xmlns:mc="http://schemas.openxmlformats.org/markup-compatibility/2006">
+    <mc:Choice xmlns:p14="http://schemas.microsoft.com/office/powerpoint/2010/main" Requires="p14">
+      <p:transition spd="med" p14:dur="700">
+        <p14:cube dir="l"/>
+      </p:transition>
+    </mc:Choice>
+    <mc:Fallback>
+      <p:transition spd="med">
+        <p:push dir="l"/>
+      </p:transition>
+    </mc:Fallback>
+  </mc:AlternateContent>
 </p:sld>
 </file>
 
@@ -8101,7 +10334,7 @@
                 </a:solidFill>
                 <a:latin typeface="Montserrat"/>
               </a:rPr>
-              <a:t>002 / 016</a:t>
+              <a:t>002 / 020</a:t>
             </a:r>
           </a:p>
         </p:txBody>
@@ -8176,7 +10409,7 @@
       </p:sp>
       <p:sp>
         <p:nvSpPr>
-          <p:cNvPr id="6" name="Rounded Rectangle 5"/>
+          <p:cNvPr id="6" name="Rectangle 5"/>
           <p:cNvSpPr/>
           <p:nvPr/>
         </p:nvSpPr>
@@ -8185,7 +10418,7 @@
             <a:off x="868680" y="1234440"/>
             <a:ext cx="1463040" cy="73152"/>
           </a:xfrm>
-          <a:prstGeom prst="roundRect">
+          <a:prstGeom prst="rect">
             <a:avLst/>
           </a:prstGeom>
           <a:solidFill>
@@ -8266,14 +10499,58 @@
       </p:sp>
       <p:sp>
         <p:nvSpPr>
-          <p:cNvPr id="8" name="TextBox 7"/>
+          <p:cNvPr id="8" name="Rectangle 7"/>
+          <p:cNvSpPr/>
+          <p:nvPr/>
+        </p:nvSpPr>
+        <p:spPr>
+          <a:xfrm>
+            <a:off x="822960" y="2011680"/>
+            <a:ext cx="3017520" cy="128016"/>
+          </a:xfrm>
+          <a:prstGeom prst="rect">
+            <a:avLst/>
+          </a:prstGeom>
+          <a:solidFill>
+            <a:srgbClr val="E8801A"/>
+          </a:solidFill>
+          <a:ln>
+            <a:noFill/>
+          </a:ln>
+          <a:effectLst/>
+        </p:spPr>
+        <p:style>
+          <a:lnRef idx="1">
+            <a:schemeClr val="accent1"/>
+          </a:lnRef>
+          <a:fillRef idx="3">
+            <a:schemeClr val="accent1"/>
+          </a:fillRef>
+          <a:effectRef idx="2">
+            <a:schemeClr val="accent1"/>
+          </a:effectRef>
+          <a:fontRef idx="minor">
+            <a:schemeClr val="lt1"/>
+          </a:fontRef>
+        </p:style>
+        <p:txBody>
+          <a:bodyPr rtlCol="0" anchor="ctr"/>
+          <a:lstStyle/>
+          <a:p>
+            <a:pPr algn="ctr"/>
+          </a:p>
+        </p:txBody>
+      </p:sp>
+      <p:sp>
+        <p:nvSpPr>
+          <p:cNvPr id="9" name="TextBox 8"/>
           <p:cNvSpPr txBox="1"/>
           <p:nvPr/>
         </p:nvSpPr>
         <p:spPr>
           <a:xfrm>
-            <a:off x="822960" y="2331720"/>
-            <a:ext cx="3017520" cy="1463040"/>
+            <a:off x="822960" y="2377440"/>
+            <a:ext cx="3017520" cy="1371600"/>
           </a:xfrm>
           <a:prstGeom prst="rect">
             <a:avLst/>
@@ -8288,7 +10565,7 @@
           <a:p>
             <a:pPr algn="ctr"/>
             <a:r>
-              <a:rPr sz="6000" b="1" i="0">
+              <a:rPr sz="5800" b="1" i="0">
                 <a:solidFill>
                   <a:srgbClr val="1E2761"/>
                 </a:solidFill>
@@ -8301,13 +10578,13 @@
       </p:sp>
       <p:sp>
         <p:nvSpPr>
-          <p:cNvPr id="9" name="TextBox 8"/>
+          <p:cNvPr id="10" name="TextBox 9"/>
           <p:cNvSpPr txBox="1"/>
           <p:nvPr/>
         </p:nvSpPr>
         <p:spPr>
           <a:xfrm>
-            <a:off x="1051560" y="3611880"/>
+            <a:off x="1051560" y="3657600"/>
             <a:ext cx="2560320" cy="1005840"/>
           </a:xfrm>
           <a:prstGeom prst="rect">
@@ -8336,7 +10613,7 @@
       </p:sp>
       <p:sp>
         <p:nvSpPr>
-          <p:cNvPr id="10" name="Rounded Rectangle 9"/>
+          <p:cNvPr id="11" name="Rounded Rectangle 10"/>
           <p:cNvSpPr/>
           <p:nvPr/>
         </p:nvSpPr>
@@ -8382,14 +10659,58 @@
       </p:sp>
       <p:sp>
         <p:nvSpPr>
-          <p:cNvPr id="11" name="TextBox 10"/>
+          <p:cNvPr id="12" name="Rectangle 11"/>
+          <p:cNvSpPr/>
+          <p:nvPr/>
+        </p:nvSpPr>
+        <p:spPr>
+          <a:xfrm>
+            <a:off x="4617720" y="2011680"/>
+            <a:ext cx="3017520" cy="128016"/>
+          </a:xfrm>
+          <a:prstGeom prst="rect">
+            <a:avLst/>
+          </a:prstGeom>
+          <a:solidFill>
+            <a:srgbClr val="E8801A"/>
+          </a:solidFill>
+          <a:ln>
+            <a:noFill/>
+          </a:ln>
+          <a:effectLst/>
+        </p:spPr>
+        <p:style>
+          <a:lnRef idx="1">
+            <a:schemeClr val="accent1"/>
+          </a:lnRef>
+          <a:fillRef idx="3">
+            <a:schemeClr val="accent1"/>
+          </a:fillRef>
+          <a:effectRef idx="2">
+            <a:schemeClr val="accent1"/>
+          </a:effectRef>
+          <a:fontRef idx="minor">
+            <a:schemeClr val="lt1"/>
+          </a:fontRef>
+        </p:style>
+        <p:txBody>
+          <a:bodyPr rtlCol="0" anchor="ctr"/>
+          <a:lstStyle/>
+          <a:p>
+            <a:pPr algn="ctr"/>
+          </a:p>
+        </p:txBody>
+      </p:sp>
+      <p:sp>
+        <p:nvSpPr>
+          <p:cNvPr id="13" name="TextBox 12"/>
           <p:cNvSpPr txBox="1"/>
           <p:nvPr/>
         </p:nvSpPr>
         <p:spPr>
           <a:xfrm>
-            <a:off x="4617720" y="2331720"/>
-            <a:ext cx="3017520" cy="1463040"/>
+            <a:off x="4617720" y="2377440"/>
+            <a:ext cx="3017520" cy="1371600"/>
           </a:xfrm>
           <a:prstGeom prst="rect">
             <a:avLst/>
@@ -8404,7 +10725,7 @@
           <a:p>
             <a:pPr algn="ctr"/>
             <a:r>
-              <a:rPr sz="6000" b="1" i="0">
+              <a:rPr sz="5800" b="1" i="0">
                 <a:solidFill>
                   <a:srgbClr val="1E2761"/>
                 </a:solidFill>
@@ -8417,13 +10738,13 @@
       </p:sp>
       <p:sp>
         <p:nvSpPr>
-          <p:cNvPr id="12" name="TextBox 11"/>
+          <p:cNvPr id="14" name="TextBox 13"/>
           <p:cNvSpPr txBox="1"/>
           <p:nvPr/>
         </p:nvSpPr>
         <p:spPr>
           <a:xfrm>
-            <a:off x="4846320" y="3611880"/>
+            <a:off x="4846320" y="3657600"/>
             <a:ext cx="2560320" cy="1005840"/>
           </a:xfrm>
           <a:prstGeom prst="rect">
@@ -8452,7 +10773,7 @@
       </p:sp>
       <p:sp>
         <p:nvSpPr>
-          <p:cNvPr id="13" name="Rounded Rectangle 12"/>
+          <p:cNvPr id="15" name="Rounded Rectangle 14"/>
           <p:cNvSpPr/>
           <p:nvPr/>
         </p:nvSpPr>
@@ -8498,14 +10819,58 @@
       </p:sp>
       <p:sp>
         <p:nvSpPr>
-          <p:cNvPr id="14" name="TextBox 13"/>
+          <p:cNvPr id="16" name="Rectangle 15"/>
+          <p:cNvSpPr/>
+          <p:nvPr/>
+        </p:nvSpPr>
+        <p:spPr>
+          <a:xfrm>
+            <a:off x="8412480" y="2011680"/>
+            <a:ext cx="3017520" cy="128016"/>
+          </a:xfrm>
+          <a:prstGeom prst="rect">
+            <a:avLst/>
+          </a:prstGeom>
+          <a:solidFill>
+            <a:srgbClr val="E8801A"/>
+          </a:solidFill>
+          <a:ln>
+            <a:noFill/>
+          </a:ln>
+          <a:effectLst/>
+        </p:spPr>
+        <p:style>
+          <a:lnRef idx="1">
+            <a:schemeClr val="accent1"/>
+          </a:lnRef>
+          <a:fillRef idx="3">
+            <a:schemeClr val="accent1"/>
+          </a:fillRef>
+          <a:effectRef idx="2">
+            <a:schemeClr val="accent1"/>
+          </a:effectRef>
+          <a:fontRef idx="minor">
+            <a:schemeClr val="lt1"/>
+          </a:fontRef>
+        </p:style>
+        <p:txBody>
+          <a:bodyPr rtlCol="0" anchor="ctr"/>
+          <a:lstStyle/>
+          <a:p>
+            <a:pPr algn="ctr"/>
+          </a:p>
+        </p:txBody>
+      </p:sp>
+      <p:sp>
+        <p:nvSpPr>
+          <p:cNvPr id="17" name="TextBox 16"/>
           <p:cNvSpPr txBox="1"/>
           <p:nvPr/>
         </p:nvSpPr>
         <p:spPr>
           <a:xfrm>
-            <a:off x="8412480" y="2331720"/>
-            <a:ext cx="3017520" cy="1463040"/>
+            <a:off x="8412480" y="2377440"/>
+            <a:ext cx="3017520" cy="1371600"/>
           </a:xfrm>
           <a:prstGeom prst="rect">
             <a:avLst/>
@@ -8520,7 +10885,7 @@
           <a:p>
             <a:pPr algn="ctr"/>
             <a:r>
-              <a:rPr sz="6000" b="1" i="0">
+              <a:rPr sz="5800" b="1" i="0">
                 <a:solidFill>
                   <a:srgbClr val="1E2761"/>
                 </a:solidFill>
@@ -8533,13 +10898,13 @@
       </p:sp>
       <p:sp>
         <p:nvSpPr>
-          <p:cNvPr id="15" name="TextBox 14"/>
+          <p:cNvPr id="18" name="TextBox 17"/>
           <p:cNvSpPr txBox="1"/>
           <p:nvPr/>
         </p:nvSpPr>
         <p:spPr>
           <a:xfrm>
-            <a:off x="8641080" y="3611880"/>
+            <a:off x="8641080" y="3657600"/>
             <a:ext cx="2560320" cy="1005840"/>
           </a:xfrm>
           <a:prstGeom prst="rect">
@@ -8571,6 +10936,405 @@
   <p:clrMapOvr>
     <a:masterClrMapping/>
   </p:clrMapOvr>
+  <mc:AlternateContent xmlns:mc="http://schemas.openxmlformats.org/markup-compatibility/2006">
+    <mc:Choice xmlns:p14="http://schemas.microsoft.com/office/powerpoint/2010/main" Requires="p14">
+      <p:transition spd="med" p14:dur="700">
+        <p14:cube dir="r"/>
+      </p:transition>
+    </mc:Choice>
+    <mc:Fallback>
+      <p:transition spd="med">
+        <p:push dir="r"/>
+      </p:transition>
+    </mc:Fallback>
+  </mc:AlternateContent>
+</p:sld>
+</file>
+
+<file path=ppt/slides/slide20.xml><?xml version="1.0" encoding="utf-8"?>
+<p:sld xmlns:a="http://schemas.openxmlformats.org/drawingml/2006/main" xmlns:p="http://schemas.openxmlformats.org/presentationml/2006/main" xmlns:r="http://schemas.openxmlformats.org/officeDocument/2006/relationships">
+  <p:cSld>
+    <p:spTree>
+      <p:nvGrpSpPr>
+        <p:cNvPr id="1" name=""/>
+        <p:cNvGrpSpPr/>
+        <p:nvPr/>
+      </p:nvGrpSpPr>
+      <p:grpSpPr/>
+      <p:sp>
+        <p:nvSpPr>
+          <p:cNvPr id="2" name="Rectangle 1"/>
+          <p:cNvSpPr/>
+          <p:nvPr/>
+        </p:nvSpPr>
+        <p:spPr>
+          <a:xfrm>
+            <a:off x="0" y="0"/>
+            <a:ext cx="12191695" cy="6858000"/>
+          </a:xfrm>
+          <a:prstGeom prst="rect">
+            <a:avLst/>
+          </a:prstGeom>
+          <a:solidFill>
+            <a:srgbClr val="1E2761"/>
+          </a:solidFill>
+          <a:ln>
+            <a:noFill/>
+          </a:ln>
+          <a:effectLst/>
+        </p:spPr>
+        <p:style>
+          <a:lnRef idx="1">
+            <a:schemeClr val="accent1"/>
+          </a:lnRef>
+          <a:fillRef idx="3">
+            <a:schemeClr val="accent1"/>
+          </a:fillRef>
+          <a:effectRef idx="2">
+            <a:schemeClr val="accent1"/>
+          </a:effectRef>
+          <a:fontRef idx="minor">
+            <a:schemeClr val="lt1"/>
+          </a:fontRef>
+        </p:style>
+        <p:txBody>
+          <a:bodyPr rtlCol="0" anchor="ctr"/>
+          <a:lstStyle/>
+          <a:p>
+            <a:pPr algn="ctr"/>
+          </a:p>
+        </p:txBody>
+      </p:sp>
+      <p:sp>
+        <p:nvSpPr>
+          <p:cNvPr id="3" name="TextBox 2"/>
+          <p:cNvSpPr txBox="1"/>
+          <p:nvPr/>
+        </p:nvSpPr>
+        <p:spPr>
+          <a:xfrm>
+            <a:off x="822960" y="640080"/>
+            <a:ext cx="10515600" cy="457200"/>
+          </a:xfrm>
+          <a:prstGeom prst="rect">
+            <a:avLst/>
+          </a:prstGeom>
+          <a:noFill/>
+        </p:spPr>
+        <p:txBody>
+          <a:bodyPr wrap="square">
+            <a:spAutoFit/>
+          </a:bodyPr>
+          <a:lstStyle/>
+          <a:p>
+            <a:r>
+              <a:rPr sz="1400" b="1" i="0">
+                <a:solidFill>
+                  <a:srgbClr val="F4A24C"/>
+                </a:solidFill>
+                <a:latin typeface="Montserrat"/>
+              </a:rPr>
+              <a:t>LO QUE YA DOMINAS</a:t>
+            </a:r>
+          </a:p>
+        </p:txBody>
+      </p:sp>
+      <p:sp>
+        <p:nvSpPr>
+          <p:cNvPr id="4" name="Rectangle 3"/>
+          <p:cNvSpPr/>
+          <p:nvPr/>
+        </p:nvSpPr>
+        <p:spPr>
+          <a:xfrm>
+            <a:off x="868680" y="1051560"/>
+            <a:ext cx="1463040" cy="82296"/>
+          </a:xfrm>
+          <a:prstGeom prst="rect">
+            <a:avLst/>
+          </a:prstGeom>
+          <a:solidFill>
+            <a:srgbClr val="E8801A"/>
+          </a:solidFill>
+          <a:ln>
+            <a:noFill/>
+          </a:ln>
+          <a:effectLst/>
+        </p:spPr>
+        <p:style>
+          <a:lnRef idx="1">
+            <a:schemeClr val="accent1"/>
+          </a:lnRef>
+          <a:fillRef idx="3">
+            <a:schemeClr val="accent1"/>
+          </a:fillRef>
+          <a:effectRef idx="2">
+            <a:schemeClr val="accent1"/>
+          </a:effectRef>
+          <a:fontRef idx="minor">
+            <a:schemeClr val="lt1"/>
+          </a:fontRef>
+        </p:style>
+        <p:txBody>
+          <a:bodyPr rtlCol="0" anchor="ctr"/>
+          <a:lstStyle/>
+          <a:p>
+            <a:pPr algn="ctr"/>
+          </a:p>
+        </p:txBody>
+      </p:sp>
+      <p:sp>
+        <p:nvSpPr>
+          <p:cNvPr id="5" name="TextBox 4"/>
+          <p:cNvSpPr txBox="1"/>
+          <p:nvPr/>
+        </p:nvSpPr>
+        <p:spPr>
+          <a:xfrm>
+            <a:off x="822960" y="1234440"/>
+            <a:ext cx="10515600" cy="1097280"/>
+          </a:xfrm>
+          <a:prstGeom prst="rect">
+            <a:avLst/>
+          </a:prstGeom>
+          <a:noFill/>
+        </p:spPr>
+        <p:txBody>
+          <a:bodyPr wrap="square">
+            <a:spAutoFit/>
+          </a:bodyPr>
+          <a:lstStyle/>
+          <a:p>
+            <a:r>
+              <a:rPr sz="3400" b="1" i="0">
+                <a:solidFill>
+                  <a:srgbClr val="FFFFFF"/>
+                </a:solidFill>
+                <a:latin typeface="Montserrat"/>
+              </a:rPr>
+              <a:t>Has cerrado el almacenamiento de gas de punta a punta</a:t>
+            </a:r>
+          </a:p>
+        </p:txBody>
+      </p:sp>
+      <p:sp>
+        <p:nvSpPr>
+          <p:cNvPr id="6" name="TextBox 5"/>
+          <p:cNvSpPr txBox="1"/>
+          <p:nvPr/>
+        </p:nvSpPr>
+        <p:spPr>
+          <a:xfrm>
+            <a:off x="822960" y="2606040"/>
+            <a:ext cx="10515600" cy="2743200"/>
+          </a:xfrm>
+          <a:prstGeom prst="rect">
+            <a:avLst/>
+          </a:prstGeom>
+          <a:noFill/>
+        </p:spPr>
+        <p:txBody>
+          <a:bodyPr wrap="square">
+            <a:spAutoFit/>
+          </a:bodyPr>
+          <a:lstStyle/>
+          <a:p>
+            <a:pPr>
+              <a:spcAft>
+                <a:spcPts val="1200"/>
+              </a:spcAft>
+            </a:pPr>
+            <a:r>
+              <a:rPr sz="2000" b="1" i="0">
+                <a:solidFill>
+                  <a:srgbClr val="F4A24C"/>
+                </a:solidFill>
+                <a:latin typeface="Montserrat"/>
+              </a:rPr>
+              <a:t>✓  </a:t>
+            </a:r>
+            <a:r>
+              <a:rPr sz="1900" b="0" i="0">
+                <a:solidFill>
+                  <a:srgbClr val="FFFFFF"/>
+                </a:solidFill>
+                <a:latin typeface="Montserrat"/>
+              </a:rPr>
+              <a:t>Distingues GNL de GLP: norma, técnico y pruebas</a:t>
+            </a:r>
+          </a:p>
+          <a:p>
+            <a:pPr>
+              <a:spcAft>
+                <a:spcPts val="1200"/>
+              </a:spcAft>
+            </a:pPr>
+            <a:r>
+              <a:rPr sz="2000" b="1" i="0">
+                <a:solidFill>
+                  <a:srgbClr val="F4A24C"/>
+                </a:solidFill>
+                <a:latin typeface="Montserrat"/>
+              </a:rPr>
+              <a:t>✓  </a:t>
+            </a:r>
+            <a:r>
+              <a:rPr sz="1900" b="0" i="0">
+                <a:solidFill>
+                  <a:srgbClr val="FFFFFF"/>
+                </a:solidFill>
+                <a:latin typeface="Montserrat"/>
+              </a:rPr>
+              <a:t>Sabes cuándo hay autorización, proyecto y qué plazo comunicar</a:t>
+            </a:r>
+          </a:p>
+          <a:p>
+            <a:pPr>
+              <a:spcAft>
+                <a:spcPts val="1200"/>
+              </a:spcAft>
+            </a:pPr>
+            <a:r>
+              <a:rPr sz="2000" b="1" i="0">
+                <a:solidFill>
+                  <a:srgbClr val="F4A24C"/>
+                </a:solidFill>
+                <a:latin typeface="Montserrat"/>
+              </a:rPr>
+              <a:t>✓  </a:t>
+            </a:r>
+            <a:r>
+              <a:rPr sz="1900" b="0" i="0">
+                <a:solidFill>
+                  <a:srgbClr val="FFFFFF"/>
+                </a:solidFill>
+                <a:latin typeface="Montserrat"/>
+              </a:rPr>
+              <a:t>Aplicas la fórmula V × P y el corte en 300</a:t>
+            </a:r>
+          </a:p>
+          <a:p>
+            <a:pPr>
+              <a:spcAft>
+                <a:spcPts val="1200"/>
+              </a:spcAft>
+            </a:pPr>
+            <a:r>
+              <a:rPr sz="2000" b="1" i="0">
+                <a:solidFill>
+                  <a:srgbClr val="F4A24C"/>
+                </a:solidFill>
+                <a:latin typeface="Montserrat"/>
+              </a:rPr>
+              <a:t>✓  </a:t>
+            </a:r>
+            <a:r>
+              <a:rPr sz="1900" b="0" i="0">
+                <a:solidFill>
+                  <a:srgbClr val="FFFFFF"/>
+                </a:solidFill>
+                <a:latin typeface="Montserrat"/>
+              </a:rPr>
+              <a:t>Cierras el tema: envases, depósitos fijos y plantas de GNL</a:t>
+            </a:r>
+          </a:p>
+        </p:txBody>
+      </p:sp>
+      <p:sp>
+        <p:nvSpPr>
+          <p:cNvPr id="7" name="Rounded Rectangle 6"/>
+          <p:cNvSpPr/>
+          <p:nvPr/>
+        </p:nvSpPr>
+        <p:spPr>
+          <a:xfrm>
+            <a:off x="822960" y="5532120"/>
+            <a:ext cx="10515600" cy="822960"/>
+          </a:xfrm>
+          <a:prstGeom prst="roundRect">
+            <a:avLst/>
+          </a:prstGeom>
+          <a:solidFill>
+            <a:srgbClr val="E8801A"/>
+          </a:solidFill>
+          <a:ln>
+            <a:noFill/>
+          </a:ln>
+          <a:effectLst/>
+        </p:spPr>
+        <p:style>
+          <a:lnRef idx="1">
+            <a:schemeClr val="accent1"/>
+          </a:lnRef>
+          <a:fillRef idx="3">
+            <a:schemeClr val="accent1"/>
+          </a:fillRef>
+          <a:effectRef idx="2">
+            <a:schemeClr val="accent1"/>
+          </a:effectRef>
+          <a:fontRef idx="minor">
+            <a:schemeClr val="lt1"/>
+          </a:fontRef>
+        </p:style>
+        <p:txBody>
+          <a:bodyPr rtlCol="0" anchor="ctr"/>
+          <a:lstStyle/>
+          <a:p>
+            <a:pPr algn="ctr"/>
+          </a:p>
+        </p:txBody>
+      </p:sp>
+      <p:sp>
+        <p:nvSpPr>
+          <p:cNvPr id="8" name="TextBox 7"/>
+          <p:cNvSpPr txBox="1"/>
+          <p:nvPr/>
+        </p:nvSpPr>
+        <p:spPr>
+          <a:xfrm>
+            <a:off x="1051560" y="5623560"/>
+            <a:ext cx="10058400" cy="640080"/>
+          </a:xfrm>
+          <a:prstGeom prst="rect">
+            <a:avLst/>
+          </a:prstGeom>
+          <a:noFill/>
+        </p:spPr>
+        <p:txBody>
+          <a:bodyPr wrap="square">
+            <a:spAutoFit/>
+          </a:bodyPr>
+          <a:lstStyle/>
+          <a:p>
+            <a:r>
+              <a:rPr sz="1500" b="1" i="1">
+                <a:solidFill>
+                  <a:srgbClr val="1E2761"/>
+                </a:solidFill>
+                <a:latin typeface="Montserrat"/>
+              </a:rPr>
+              <a:t>Tema 02 completo. Ya dominas dónde y cómo se guarda el gas antes de llegar al usuario.</a:t>
+            </a:r>
+          </a:p>
+        </p:txBody>
+      </p:sp>
+    </p:spTree>
+  </p:cSld>
+  <p:clrMapOvr>
+    <a:masterClrMapping/>
+  </p:clrMapOvr>
+  <mc:AlternateContent xmlns:mc="http://schemas.openxmlformats.org/markup-compatibility/2006">
+    <mc:Choice xmlns:p14="http://schemas.microsoft.com/office/powerpoint/2010/main" Requires="p14">
+      <p:transition spd="med" p14:dur="700">
+        <p14:cube dir="r"/>
+      </p:transition>
+    </mc:Choice>
+    <mc:Fallback>
+      <p:transition spd="med">
+        <p:push dir="r"/>
+      </p:transition>
+    </mc:Fallback>
+  </mc:AlternateContent>
 </p:sld>
 </file>
 
@@ -8658,7 +11422,7 @@
                 </a:solidFill>
                 <a:latin typeface="Montserrat"/>
               </a:rPr>
-              <a:t>003 / 016</a:t>
+              <a:t>003 / 020</a:t>
             </a:r>
           </a:p>
         </p:txBody>
@@ -8767,7 +11531,7 @@
       </p:sp>
       <p:sp>
         <p:nvSpPr>
-          <p:cNvPr id="7" name="Rounded Rectangle 6"/>
+          <p:cNvPr id="7" name="Rectangle 6"/>
           <p:cNvSpPr/>
           <p:nvPr/>
         </p:nvSpPr>
@@ -8776,7 +11540,7 @@
             <a:off x="868680" y="1673352"/>
             <a:ext cx="2011680" cy="73152"/>
           </a:xfrm>
-          <a:prstGeom prst="roundRect">
+          <a:prstGeom prst="rect">
             <a:avLst/>
           </a:prstGeom>
           <a:solidFill>
@@ -9062,6 +11826,18 @@
   <p:clrMapOvr>
     <a:masterClrMapping/>
   </p:clrMapOvr>
+  <mc:AlternateContent xmlns:mc="http://schemas.openxmlformats.org/markup-compatibility/2006">
+    <mc:Choice xmlns:p14="http://schemas.microsoft.com/office/powerpoint/2010/main" Requires="p14">
+      <p:transition spd="med" p14:dur="700">
+        <p14:cube dir="l"/>
+      </p:transition>
+    </mc:Choice>
+    <mc:Fallback>
+      <p:transition spd="med">
+        <p:push dir="l"/>
+      </p:transition>
+    </mc:Fallback>
+  </mc:AlternateContent>
 </p:sld>
 </file>
 
@@ -9149,7 +11925,7 @@
                 </a:solidFill>
                 <a:latin typeface="Montserrat"/>
               </a:rPr>
-              <a:t>004 / 016</a:t>
+              <a:t>004 / 020</a:t>
             </a:r>
           </a:p>
         </p:txBody>
@@ -9258,7 +12034,7 @@
       </p:sp>
       <p:sp>
         <p:nvSpPr>
-          <p:cNvPr id="7" name="Rounded Rectangle 6"/>
+          <p:cNvPr id="7" name="Rectangle 6"/>
           <p:cNvSpPr/>
           <p:nvPr/>
         </p:nvSpPr>
@@ -9267,7 +12043,7 @@
             <a:off x="868680" y="1627632"/>
             <a:ext cx="2011680" cy="73152"/>
           </a:xfrm>
-          <a:prstGeom prst="roundRect">
+          <a:prstGeom prst="rect">
             <a:avLst/>
           </a:prstGeom>
           <a:solidFill>
@@ -9309,7 +12085,7 @@
         <p:spPr>
           <a:xfrm>
             <a:off x="822960" y="1965960"/>
-            <a:ext cx="4983480" cy="4206240"/>
+            <a:ext cx="5029200" cy="4206240"/>
           </a:xfrm>
           <a:prstGeom prst="rect">
             <a:avLst/>
@@ -9431,8 +12207,8 @@
         </p:nvSpPr>
         <p:spPr>
           <a:xfrm>
-            <a:off x="5806440" y="1051560"/>
-            <a:ext cx="5298947" cy="4629150"/>
+            <a:off x="6080760" y="1965960"/>
+            <a:ext cx="5303520" cy="4572000"/>
           </a:xfrm>
           <a:prstGeom prst="roundRect">
             <a:avLst/>
@@ -9477,8 +12253,8 @@
         </p:nvSpPr>
         <p:spPr>
           <a:xfrm>
-            <a:off x="6080760" y="2726055"/>
-            <a:ext cx="4750307" cy="1280160"/>
+            <a:off x="6355080" y="3611880"/>
+            <a:ext cx="4754880" cy="1280160"/>
           </a:xfrm>
           <a:prstGeom prst="rect">
             <a:avLst/>
@@ -9499,7 +12275,7 @@
                 </a:solidFill>
                 <a:latin typeface="Montserrat"/>
               </a:rPr>
-              <a:t>IMAGEN REALISTA</a:t>
+              <a:t>IMAGEN</a:t>
             </a:r>
           </a:p>
           <a:p>
@@ -9521,6 +12297,18 @@
   <p:clrMapOvr>
     <a:masterClrMapping/>
   </p:clrMapOvr>
+  <mc:AlternateContent xmlns:mc="http://schemas.openxmlformats.org/markup-compatibility/2006">
+    <mc:Choice xmlns:p14="http://schemas.microsoft.com/office/powerpoint/2010/main" Requires="p14">
+      <p:transition spd="med" p14:dur="700">
+        <p14:cube dir="r"/>
+      </p:transition>
+    </mc:Choice>
+    <mc:Fallback>
+      <p:transition spd="med">
+        <p:push dir="r"/>
+      </p:transition>
+    </mc:Fallback>
+  </mc:AlternateContent>
 </p:sld>
 </file>
 
@@ -9608,7 +12396,7 @@
                 </a:solidFill>
                 <a:latin typeface="Montserrat"/>
               </a:rPr>
-              <a:t>005 / 016</a:t>
+              <a:t>005 / 020</a:t>
             </a:r>
           </a:p>
         </p:txBody>
@@ -9717,7 +12505,7 @@
       </p:sp>
       <p:sp>
         <p:nvSpPr>
-          <p:cNvPr id="7" name="Rounded Rectangle 6"/>
+          <p:cNvPr id="7" name="Rectangle 6"/>
           <p:cNvSpPr/>
           <p:nvPr/>
         </p:nvSpPr>
@@ -9726,7 +12514,7 @@
             <a:off x="868680" y="1627632"/>
             <a:ext cx="2011680" cy="73152"/>
           </a:xfrm>
-          <a:prstGeom prst="roundRect">
+          <a:prstGeom prst="rect">
             <a:avLst/>
           </a:prstGeom>
           <a:solidFill>
@@ -9767,8 +12555,8 @@
         </p:nvSpPr>
         <p:spPr>
           <a:xfrm>
-            <a:off x="822960" y="1965960"/>
-            <a:ext cx="4983480" cy="4206240"/>
+            <a:off x="6355080" y="1965960"/>
+            <a:ext cx="5029200" cy="4206240"/>
           </a:xfrm>
           <a:prstGeom prst="rect">
             <a:avLst/>
@@ -9890,8 +12678,8 @@
         </p:nvSpPr>
         <p:spPr>
           <a:xfrm>
-            <a:off x="5806440" y="1051560"/>
-            <a:ext cx="5298947" cy="4629150"/>
+            <a:off x="822960" y="1965960"/>
+            <a:ext cx="5303520" cy="4572000"/>
           </a:xfrm>
           <a:prstGeom prst="roundRect">
             <a:avLst/>
@@ -9936,8 +12724,8 @@
         </p:nvSpPr>
         <p:spPr>
           <a:xfrm>
-            <a:off x="6080760" y="2726055"/>
-            <a:ext cx="4750307" cy="1280160"/>
+            <a:off x="1097280" y="3611880"/>
+            <a:ext cx="4754880" cy="1280160"/>
           </a:xfrm>
           <a:prstGeom prst="rect">
             <a:avLst/>
@@ -9958,7 +12746,7 @@
                 </a:solidFill>
                 <a:latin typeface="Montserrat"/>
               </a:rPr>
-              <a:t>IMAGEN REALISTA</a:t>
+              <a:t>IMAGEN</a:t>
             </a:r>
           </a:p>
           <a:p>
@@ -9980,6 +12768,18 @@
   <p:clrMapOvr>
     <a:masterClrMapping/>
   </p:clrMapOvr>
+  <mc:AlternateContent xmlns:mc="http://schemas.openxmlformats.org/markup-compatibility/2006">
+    <mc:Choice xmlns:p14="http://schemas.microsoft.com/office/powerpoint/2010/main" Requires="p14">
+      <p:transition spd="med" p14:dur="700">
+        <p14:cube dir="l"/>
+      </p:transition>
+    </mc:Choice>
+    <mc:Fallback>
+      <p:transition spd="med">
+        <p:push dir="l"/>
+      </p:transition>
+    </mc:Fallback>
+  </mc:AlternateContent>
 </p:sld>
 </file>
 
@@ -10067,7 +12867,7 @@
                 </a:solidFill>
                 <a:latin typeface="Montserrat"/>
               </a:rPr>
-              <a:t>006 / 016</a:t>
+              <a:t>006 / 020</a:t>
             </a:r>
           </a:p>
         </p:txBody>
@@ -10176,7 +12976,7 @@
       </p:sp>
       <p:sp>
         <p:nvSpPr>
-          <p:cNvPr id="7" name="Rounded Rectangle 6"/>
+          <p:cNvPr id="7" name="Rectangle 6"/>
           <p:cNvSpPr/>
           <p:nvPr/>
         </p:nvSpPr>
@@ -10185,7 +12985,7 @@
             <a:off x="868680" y="1627632"/>
             <a:ext cx="2011680" cy="73152"/>
           </a:xfrm>
-          <a:prstGeom prst="roundRect">
+          <a:prstGeom prst="rect">
             <a:avLst/>
           </a:prstGeom>
           <a:solidFill>
@@ -10227,7 +13027,7 @@
         <p:spPr>
           <a:xfrm>
             <a:off x="822960" y="1965960"/>
-            <a:ext cx="4983480" cy="4206240"/>
+            <a:ext cx="5029200" cy="4206240"/>
           </a:xfrm>
           <a:prstGeom prst="rect">
             <a:avLst/>
@@ -10349,8 +13149,8 @@
         </p:nvSpPr>
         <p:spPr>
           <a:xfrm>
-            <a:off x="5806440" y="1051560"/>
-            <a:ext cx="5298947" cy="4629150"/>
+            <a:off x="6080760" y="1965960"/>
+            <a:ext cx="5303520" cy="4572000"/>
           </a:xfrm>
           <a:prstGeom prst="roundRect">
             <a:avLst/>
@@ -10395,8 +13195,8 @@
         </p:nvSpPr>
         <p:spPr>
           <a:xfrm>
-            <a:off x="6080760" y="2726055"/>
-            <a:ext cx="4750307" cy="1280160"/>
+            <a:off x="6355080" y="3611880"/>
+            <a:ext cx="4754880" cy="1280160"/>
           </a:xfrm>
           <a:prstGeom prst="rect">
             <a:avLst/>
@@ -10417,7 +13217,7 @@
                 </a:solidFill>
                 <a:latin typeface="Montserrat"/>
               </a:rPr>
-              <a:t>IMAGEN REALISTA</a:t>
+              <a:t>IMAGEN</a:t>
             </a:r>
           </a:p>
           <a:p>
@@ -10439,6 +13239,18 @@
   <p:clrMapOvr>
     <a:masterClrMapping/>
   </p:clrMapOvr>
+  <mc:AlternateContent xmlns:mc="http://schemas.openxmlformats.org/markup-compatibility/2006">
+    <mc:Choice xmlns:p14="http://schemas.microsoft.com/office/powerpoint/2010/main" Requires="p14">
+      <p:transition spd="med" p14:dur="700">
+        <p14:cube dir="r"/>
+      </p:transition>
+    </mc:Choice>
+    <mc:Fallback>
+      <p:transition spd="med">
+        <p:push dir="r"/>
+      </p:transition>
+    </mc:Fallback>
+  </mc:AlternateContent>
 </p:sld>
 </file>
 
@@ -10526,7 +13338,7 @@
                 </a:solidFill>
                 <a:latin typeface="Montserrat"/>
               </a:rPr>
-              <a:t>007 / 016</a:t>
+              <a:t>007 / 020</a:t>
             </a:r>
           </a:p>
         </p:txBody>
@@ -10567,84 +13379,16 @@
       </p:sp>
       <p:sp>
         <p:nvSpPr>
-          <p:cNvPr id="5" name="TextBox 4"/>
-          <p:cNvSpPr txBox="1"/>
-          <p:nvPr/>
-        </p:nvSpPr>
-        <p:spPr>
-          <a:xfrm>
-            <a:off x="822960" y="457200"/>
-            <a:ext cx="10058400" cy="365760"/>
-          </a:xfrm>
-          <a:prstGeom prst="rect">
-            <a:avLst/>
-          </a:prstGeom>
-          <a:noFill/>
-        </p:spPr>
-        <p:txBody>
-          <a:bodyPr wrap="square">
-            <a:spAutoFit/>
-          </a:bodyPr>
-          <a:lstStyle/>
-          <a:p>
-            <a:r>
-              <a:rPr sz="1300" b="1" i="0">
-                <a:solidFill>
-                  <a:srgbClr val="E8801A"/>
-                </a:solidFill>
-                <a:latin typeface="Montserrat"/>
-              </a:rPr>
-              <a:t>APARTADO 5.1 · AUTORIZACIÓN</a:t>
-            </a:r>
-          </a:p>
-        </p:txBody>
-      </p:sp>
-      <p:sp>
-        <p:nvSpPr>
-          <p:cNvPr id="6" name="TextBox 5"/>
-          <p:cNvSpPr txBox="1"/>
-          <p:nvPr/>
-        </p:nvSpPr>
-        <p:spPr>
-          <a:xfrm>
-            <a:off x="822960" y="868680"/>
-            <a:ext cx="10515600" cy="914400"/>
-          </a:xfrm>
-          <a:prstGeom prst="rect">
-            <a:avLst/>
-          </a:prstGeom>
-          <a:noFill/>
-        </p:spPr>
-        <p:txBody>
-          <a:bodyPr wrap="square">
-            <a:spAutoFit/>
-          </a:bodyPr>
-          <a:lstStyle/>
-          <a:p>
-            <a:r>
-              <a:rPr sz="2800" b="1" i="0">
-                <a:solidFill>
-                  <a:srgbClr val="1E2761"/>
-                </a:solidFill>
-                <a:latin typeface="Montserrat"/>
-              </a:rPr>
-              <a:t>Aquí sí, casi siempre</a:t>
-            </a:r>
-          </a:p>
-        </p:txBody>
-      </p:sp>
-      <p:sp>
-        <p:nvSpPr>
-          <p:cNvPr id="7" name="Rounded Rectangle 6"/>
+          <p:cNvPr id="5" name="Rectangle 4"/>
           <p:cNvSpPr/>
           <p:nvPr/>
         </p:nvSpPr>
         <p:spPr>
           <a:xfrm>
-            <a:off x="868680" y="1627632"/>
-            <a:ext cx="2011680" cy="73152"/>
-          </a:xfrm>
-          <a:prstGeom prst="roundRect">
+            <a:off x="0" y="0"/>
+            <a:ext cx="12191695" cy="1143000"/>
+          </a:xfrm>
+          <a:prstGeom prst="rect">
             <a:avLst/>
           </a:prstGeom>
           <a:solidFill>
@@ -10679,14 +13423,14 @@
       </p:sp>
       <p:sp>
         <p:nvSpPr>
-          <p:cNvPr id="8" name="TextBox 7"/>
+          <p:cNvPr id="6" name="TextBox 5"/>
           <p:cNvSpPr txBox="1"/>
           <p:nvPr/>
         </p:nvSpPr>
         <p:spPr>
           <a:xfrm>
-            <a:off x="822960" y="1965960"/>
-            <a:ext cx="4983480" cy="4206240"/>
+            <a:off x="822960" y="274320"/>
+            <a:ext cx="10515600" cy="640080"/>
           </a:xfrm>
           <a:prstGeom prst="rect">
             <a:avLst/>
@@ -10699,117 +13443,62 @@
           </a:bodyPr>
           <a:lstStyle/>
           <a:p>
-            <a:pPr>
-              <a:spcAft>
-                <a:spcPts val="1100"/>
-              </a:spcAft>
-            </a:pPr>
-            <a:r>
-              <a:rPr sz="1600" b="1" i="0">
-                <a:solidFill>
-                  <a:srgbClr val="E8801A"/>
-                </a:solidFill>
-                <a:latin typeface="Montserrat"/>
-              </a:rPr>
-              <a:t>▸  </a:t>
-            </a:r>
-            <a:r>
-              <a:rPr sz="1600" b="0" i="0">
-                <a:solidFill>
-                  <a:srgbClr val="1B2330"/>
-                </a:solidFill>
-                <a:latin typeface="Montserrat"/>
-              </a:rPr>
-              <a:t>Autorización previa a construir</a:t>
-            </a:r>
-          </a:p>
-          <a:p>
-            <a:pPr>
-              <a:spcAft>
-                <a:spcPts val="1100"/>
-              </a:spcAft>
-            </a:pPr>
-            <a:r>
-              <a:rPr sz="1600" b="1" i="0">
-                <a:solidFill>
-                  <a:srgbClr val="E8801A"/>
-                </a:solidFill>
-                <a:latin typeface="Montserrat"/>
-              </a:rPr>
-              <a:t>▸  </a:t>
-            </a:r>
-            <a:r>
-              <a:rPr sz="1600" b="0" i="0">
-                <a:solidFill>
-                  <a:srgbClr val="1B2330"/>
-                </a:solidFill>
-                <a:latin typeface="Montserrat"/>
-              </a:rPr>
-              <a:t>La otorga la Comunidad Autónoma</a:t>
-            </a:r>
-          </a:p>
-          <a:p>
-            <a:pPr>
-              <a:spcAft>
-                <a:spcPts val="1100"/>
-              </a:spcAft>
-            </a:pPr>
-            <a:r>
-              <a:rPr sz="1600" b="1" i="0">
-                <a:solidFill>
-                  <a:srgbClr val="E8801A"/>
-                </a:solidFill>
-                <a:latin typeface="Montserrat"/>
-              </a:rPr>
-              <a:t>▸  </a:t>
-            </a:r>
-            <a:r>
-              <a:rPr sz="1600" b="0" i="0">
-                <a:solidFill>
-                  <a:srgbClr val="1B2330"/>
-                </a:solidFill>
-                <a:latin typeface="Montserrat"/>
-              </a:rPr>
-              <a:t>Excepción: uso propio y exclusivo</a:t>
-            </a:r>
-          </a:p>
-          <a:p>
-            <a:pPr>
-              <a:spcAft>
-                <a:spcPts val="1100"/>
-              </a:spcAft>
-            </a:pPr>
-            <a:r>
-              <a:rPr sz="1600" b="1" i="0">
-                <a:solidFill>
-                  <a:srgbClr val="E8801A"/>
-                </a:solidFill>
-                <a:latin typeface="Montserrat"/>
-              </a:rPr>
-              <a:t>▸  </a:t>
-            </a:r>
-            <a:r>
-              <a:rPr sz="1600" b="0" i="0">
-                <a:solidFill>
-                  <a:srgbClr val="1B2330"/>
-                </a:solidFill>
-                <a:latin typeface="Montserrat"/>
-              </a:rPr>
-              <a:t>Se solicita con proyecto y modelo oficial</a:t>
-            </a:r>
-          </a:p>
-        </p:txBody>
-      </p:sp>
-      <p:sp>
-        <p:nvSpPr>
-          <p:cNvPr id="9" name="imgph" descr="IMGQ:government permit stamp document"/>
+            <a:r>
+              <a:rPr sz="2400" b="1" i="0">
+                <a:solidFill>
+                  <a:srgbClr val="FFFFFF"/>
+                </a:solidFill>
+                <a:latin typeface="Montserrat"/>
+              </a:rPr>
+              <a:t>⚡  PREGUNTA RÁPIDA</a:t>
+            </a:r>
+          </a:p>
+        </p:txBody>
+      </p:sp>
+      <p:sp>
+        <p:nvSpPr>
+          <p:cNvPr id="7" name="TextBox 6"/>
+          <p:cNvSpPr txBox="1"/>
+          <p:nvPr/>
+        </p:nvSpPr>
+        <p:spPr>
+          <a:xfrm>
+            <a:off x="822960" y="1508760"/>
+            <a:ext cx="10515600" cy="1371600"/>
+          </a:xfrm>
+          <a:prstGeom prst="rect">
+            <a:avLst/>
+          </a:prstGeom>
+          <a:noFill/>
+        </p:spPr>
+        <p:txBody>
+          <a:bodyPr wrap="square">
+            <a:spAutoFit/>
+          </a:bodyPr>
+          <a:lstStyle/>
+          <a:p>
+            <a:r>
+              <a:rPr sz="2400" b="1" i="0">
+                <a:solidFill>
+                  <a:srgbClr val="1E2761"/>
+                </a:solidFill>
+                <a:latin typeface="Montserrat"/>
+              </a:rPr>
+              <a:t>¿Quién debe montar y mantener una planta satélite de GNL?</a:t>
+            </a:r>
+          </a:p>
+        </p:txBody>
+      </p:sp>
+      <p:sp>
+        <p:nvSpPr>
+          <p:cNvPr id="8" name="Rounded Rectangle 7"/>
           <p:cNvSpPr/>
           <p:nvPr/>
         </p:nvSpPr>
         <p:spPr>
           <a:xfrm>
-            <a:off x="5806440" y="1051560"/>
-            <a:ext cx="5298947" cy="4629150"/>
+            <a:off x="822960" y="3291840"/>
+            <a:ext cx="4983480" cy="1143000"/>
           </a:xfrm>
           <a:prstGeom prst="roundRect">
             <a:avLst/>
@@ -10848,14 +13537,58 @@
       </p:sp>
       <p:sp>
         <p:nvSpPr>
+          <p:cNvPr id="9" name="Rectangle 8"/>
+          <p:cNvSpPr/>
+          <p:nvPr/>
+        </p:nvSpPr>
+        <p:spPr>
+          <a:xfrm>
+            <a:off x="822960" y="3291840"/>
+            <a:ext cx="640080" cy="1143000"/>
+          </a:xfrm>
+          <a:prstGeom prst="rect">
+            <a:avLst/>
+          </a:prstGeom>
+          <a:solidFill>
+            <a:srgbClr val="1E2761"/>
+          </a:solidFill>
+          <a:ln>
+            <a:noFill/>
+          </a:ln>
+          <a:effectLst/>
+        </p:spPr>
+        <p:style>
+          <a:lnRef idx="1">
+            <a:schemeClr val="accent1"/>
+          </a:lnRef>
+          <a:fillRef idx="3">
+            <a:schemeClr val="accent1"/>
+          </a:fillRef>
+          <a:effectRef idx="2">
+            <a:schemeClr val="accent1"/>
+          </a:effectRef>
+          <a:fontRef idx="minor">
+            <a:schemeClr val="lt1"/>
+          </a:fontRef>
+        </p:style>
+        <p:txBody>
+          <a:bodyPr rtlCol="0" anchor="ctr"/>
+          <a:lstStyle/>
+          <a:p>
+            <a:pPr algn="ctr"/>
+          </a:p>
+        </p:txBody>
+      </p:sp>
+      <p:sp>
+        <p:nvSpPr>
           <p:cNvPr id="10" name="TextBox 9"/>
           <p:cNvSpPr txBox="1"/>
           <p:nvPr/>
         </p:nvSpPr>
         <p:spPr>
           <a:xfrm>
-            <a:off x="6080760" y="2726055"/>
-            <a:ext cx="4750307" cy="1280160"/>
+            <a:off x="822960" y="3611880"/>
+            <a:ext cx="640080" cy="548640"/>
           </a:xfrm>
           <a:prstGeom prst="rect">
             <a:avLst/>
@@ -10870,25 +13603,524 @@
           <a:p>
             <a:pPr algn="ctr"/>
             <a:r>
-              <a:rPr sz="1400" b="1" i="0">
-                <a:solidFill>
-                  <a:srgbClr val="64748B"/>
-                </a:solidFill>
-                <a:latin typeface="Montserrat"/>
-              </a:rPr>
-              <a:t>IMAGEN REALISTA</a:t>
-            </a:r>
-          </a:p>
+              <a:rPr sz="2200" b="1" i="0">
+                <a:solidFill>
+                  <a:srgbClr val="FFFFFF"/>
+                </a:solidFill>
+                <a:latin typeface="Montserrat"/>
+              </a:rPr>
+              <a:t>A</a:t>
+            </a:r>
+          </a:p>
+        </p:txBody>
+      </p:sp>
+      <p:sp>
+        <p:nvSpPr>
+          <p:cNvPr id="11" name="TextBox 10"/>
+          <p:cNvSpPr txBox="1"/>
+          <p:nvPr/>
+        </p:nvSpPr>
+        <p:spPr>
+          <a:xfrm>
+            <a:off x="1600200" y="3474720"/>
+            <a:ext cx="4114800" cy="868680"/>
+          </a:xfrm>
+          <a:prstGeom prst="rect">
+            <a:avLst/>
+          </a:prstGeom>
+          <a:noFill/>
+        </p:spPr>
+        <p:txBody>
+          <a:bodyPr wrap="square">
+            <a:spAutoFit/>
+          </a:bodyPr>
+          <a:lstStyle/>
+          <a:p>
+            <a:r>
+              <a:rPr sz="1400" b="0" i="0">
+                <a:solidFill>
+                  <a:srgbClr val="1B2330"/>
+                </a:solidFill>
+                <a:latin typeface="Montserrat"/>
+              </a:rPr>
+              <a:t>Una empresa instaladora de gas normal</a:t>
+            </a:r>
+          </a:p>
+        </p:txBody>
+      </p:sp>
+      <p:sp>
+        <p:nvSpPr>
+          <p:cNvPr id="12" name="Rounded Rectangle 11"/>
+          <p:cNvSpPr/>
+          <p:nvPr/>
+        </p:nvSpPr>
+        <p:spPr>
+          <a:xfrm>
+            <a:off x="6355080" y="3291840"/>
+            <a:ext cx="4983480" cy="1143000"/>
+          </a:xfrm>
+          <a:prstGeom prst="roundRect">
+            <a:avLst/>
+          </a:prstGeom>
+          <a:solidFill>
+            <a:srgbClr val="F3F6FB"/>
+          </a:solidFill>
+          <a:ln w="12700">
+            <a:solidFill>
+              <a:srgbClr val="C7D2E6"/>
+            </a:solidFill>
+          </a:ln>
+          <a:effectLst/>
+        </p:spPr>
+        <p:style>
+          <a:lnRef idx="1">
+            <a:schemeClr val="accent1"/>
+          </a:lnRef>
+          <a:fillRef idx="3">
+            <a:schemeClr val="accent1"/>
+          </a:fillRef>
+          <a:effectRef idx="2">
+            <a:schemeClr val="accent1"/>
+          </a:effectRef>
+          <a:fontRef idx="minor">
+            <a:schemeClr val="lt1"/>
+          </a:fontRef>
+        </p:style>
+        <p:txBody>
+          <a:bodyPr rtlCol="0" anchor="ctr"/>
+          <a:lstStyle/>
           <a:p>
             <a:pPr algn="ctr"/>
-            <a:r>
-              <a:rPr sz="1100" b="0" i="1">
-                <a:solidFill>
-                  <a:srgbClr val="64748B"/>
-                </a:solidFill>
-                <a:latin typeface="Montserrat"/>
-              </a:rPr>
-              <a:t>government permit stamp document</a:t>
+          </a:p>
+        </p:txBody>
+      </p:sp>
+      <p:sp>
+        <p:nvSpPr>
+          <p:cNvPr id="13" name="Rectangle 12"/>
+          <p:cNvSpPr/>
+          <p:nvPr/>
+        </p:nvSpPr>
+        <p:spPr>
+          <a:xfrm>
+            <a:off x="6355080" y="3291840"/>
+            <a:ext cx="640080" cy="1143000"/>
+          </a:xfrm>
+          <a:prstGeom prst="rect">
+            <a:avLst/>
+          </a:prstGeom>
+          <a:solidFill>
+            <a:srgbClr val="1E2761"/>
+          </a:solidFill>
+          <a:ln>
+            <a:noFill/>
+          </a:ln>
+          <a:effectLst/>
+        </p:spPr>
+        <p:style>
+          <a:lnRef idx="1">
+            <a:schemeClr val="accent1"/>
+          </a:lnRef>
+          <a:fillRef idx="3">
+            <a:schemeClr val="accent1"/>
+          </a:fillRef>
+          <a:effectRef idx="2">
+            <a:schemeClr val="accent1"/>
+          </a:effectRef>
+          <a:fontRef idx="minor">
+            <a:schemeClr val="lt1"/>
+          </a:fontRef>
+        </p:style>
+        <p:txBody>
+          <a:bodyPr rtlCol="0" anchor="ctr"/>
+          <a:lstStyle/>
+          <a:p>
+            <a:pPr algn="ctr"/>
+          </a:p>
+        </p:txBody>
+      </p:sp>
+      <p:sp>
+        <p:nvSpPr>
+          <p:cNvPr id="14" name="TextBox 13"/>
+          <p:cNvSpPr txBox="1"/>
+          <p:nvPr/>
+        </p:nvSpPr>
+        <p:spPr>
+          <a:xfrm>
+            <a:off x="6355080" y="3611880"/>
+            <a:ext cx="640080" cy="548640"/>
+          </a:xfrm>
+          <a:prstGeom prst="rect">
+            <a:avLst/>
+          </a:prstGeom>
+          <a:noFill/>
+        </p:spPr>
+        <p:txBody>
+          <a:bodyPr wrap="square">
+            <a:spAutoFit/>
+          </a:bodyPr>
+          <a:lstStyle/>
+          <a:p>
+            <a:pPr algn="ctr"/>
+            <a:r>
+              <a:rPr sz="2200" b="1" i="0">
+                <a:solidFill>
+                  <a:srgbClr val="FFFFFF"/>
+                </a:solidFill>
+                <a:latin typeface="Montserrat"/>
+              </a:rPr>
+              <a:t>B</a:t>
+            </a:r>
+          </a:p>
+        </p:txBody>
+      </p:sp>
+      <p:sp>
+        <p:nvSpPr>
+          <p:cNvPr id="15" name="TextBox 14"/>
+          <p:cNvSpPr txBox="1"/>
+          <p:nvPr/>
+        </p:nvSpPr>
+        <p:spPr>
+          <a:xfrm>
+            <a:off x="7132320" y="3474720"/>
+            <a:ext cx="4114800" cy="868680"/>
+          </a:xfrm>
+          <a:prstGeom prst="rect">
+            <a:avLst/>
+          </a:prstGeom>
+          <a:noFill/>
+        </p:spPr>
+        <p:txBody>
+          <a:bodyPr wrap="square">
+            <a:spAutoFit/>
+          </a:bodyPr>
+          <a:lstStyle/>
+          <a:p>
+            <a:r>
+              <a:rPr sz="1400" b="0" i="0">
+                <a:solidFill>
+                  <a:srgbClr val="1B2330"/>
+                </a:solidFill>
+                <a:latin typeface="Montserrat"/>
+              </a:rPr>
+              <a:t>Un especialista en trabajos criogénicos</a:t>
+            </a:r>
+          </a:p>
+        </p:txBody>
+      </p:sp>
+      <p:sp>
+        <p:nvSpPr>
+          <p:cNvPr id="16" name="Rounded Rectangle 15"/>
+          <p:cNvSpPr/>
+          <p:nvPr/>
+        </p:nvSpPr>
+        <p:spPr>
+          <a:xfrm>
+            <a:off x="822960" y="4617720"/>
+            <a:ext cx="4983480" cy="1143000"/>
+          </a:xfrm>
+          <a:prstGeom prst="roundRect">
+            <a:avLst/>
+          </a:prstGeom>
+          <a:solidFill>
+            <a:srgbClr val="F3F6FB"/>
+          </a:solidFill>
+          <a:ln w="12700">
+            <a:solidFill>
+              <a:srgbClr val="C7D2E6"/>
+            </a:solidFill>
+          </a:ln>
+          <a:effectLst/>
+        </p:spPr>
+        <p:style>
+          <a:lnRef idx="1">
+            <a:schemeClr val="accent1"/>
+          </a:lnRef>
+          <a:fillRef idx="3">
+            <a:schemeClr val="accent1"/>
+          </a:fillRef>
+          <a:effectRef idx="2">
+            <a:schemeClr val="accent1"/>
+          </a:effectRef>
+          <a:fontRef idx="minor">
+            <a:schemeClr val="lt1"/>
+          </a:fontRef>
+        </p:style>
+        <p:txBody>
+          <a:bodyPr rtlCol="0" anchor="ctr"/>
+          <a:lstStyle/>
+          <a:p>
+            <a:pPr algn="ctr"/>
+          </a:p>
+        </p:txBody>
+      </p:sp>
+      <p:sp>
+        <p:nvSpPr>
+          <p:cNvPr id="17" name="Rectangle 16"/>
+          <p:cNvSpPr/>
+          <p:nvPr/>
+        </p:nvSpPr>
+        <p:spPr>
+          <a:xfrm>
+            <a:off x="822960" y="4617720"/>
+            <a:ext cx="640080" cy="1143000"/>
+          </a:xfrm>
+          <a:prstGeom prst="rect">
+            <a:avLst/>
+          </a:prstGeom>
+          <a:solidFill>
+            <a:srgbClr val="1E2761"/>
+          </a:solidFill>
+          <a:ln>
+            <a:noFill/>
+          </a:ln>
+          <a:effectLst/>
+        </p:spPr>
+        <p:style>
+          <a:lnRef idx="1">
+            <a:schemeClr val="accent1"/>
+          </a:lnRef>
+          <a:fillRef idx="3">
+            <a:schemeClr val="accent1"/>
+          </a:fillRef>
+          <a:effectRef idx="2">
+            <a:schemeClr val="accent1"/>
+          </a:effectRef>
+          <a:fontRef idx="minor">
+            <a:schemeClr val="lt1"/>
+          </a:fontRef>
+        </p:style>
+        <p:txBody>
+          <a:bodyPr rtlCol="0" anchor="ctr"/>
+          <a:lstStyle/>
+          <a:p>
+            <a:pPr algn="ctr"/>
+          </a:p>
+        </p:txBody>
+      </p:sp>
+      <p:sp>
+        <p:nvSpPr>
+          <p:cNvPr id="18" name="TextBox 17"/>
+          <p:cNvSpPr txBox="1"/>
+          <p:nvPr/>
+        </p:nvSpPr>
+        <p:spPr>
+          <a:xfrm>
+            <a:off x="822960" y="4937760"/>
+            <a:ext cx="640080" cy="548640"/>
+          </a:xfrm>
+          <a:prstGeom prst="rect">
+            <a:avLst/>
+          </a:prstGeom>
+          <a:noFill/>
+        </p:spPr>
+        <p:txBody>
+          <a:bodyPr wrap="square">
+            <a:spAutoFit/>
+          </a:bodyPr>
+          <a:lstStyle/>
+          <a:p>
+            <a:pPr algn="ctr"/>
+            <a:r>
+              <a:rPr sz="2200" b="1" i="0">
+                <a:solidFill>
+                  <a:srgbClr val="FFFFFF"/>
+                </a:solidFill>
+                <a:latin typeface="Montserrat"/>
+              </a:rPr>
+              <a:t>C</a:t>
+            </a:r>
+          </a:p>
+        </p:txBody>
+      </p:sp>
+      <p:sp>
+        <p:nvSpPr>
+          <p:cNvPr id="19" name="TextBox 18"/>
+          <p:cNvSpPr txBox="1"/>
+          <p:nvPr/>
+        </p:nvSpPr>
+        <p:spPr>
+          <a:xfrm>
+            <a:off x="1600200" y="4800600"/>
+            <a:ext cx="4114800" cy="868680"/>
+          </a:xfrm>
+          <a:prstGeom prst="rect">
+            <a:avLst/>
+          </a:prstGeom>
+          <a:noFill/>
+        </p:spPr>
+        <p:txBody>
+          <a:bodyPr wrap="square">
+            <a:spAutoFit/>
+          </a:bodyPr>
+          <a:lstStyle/>
+          <a:p>
+            <a:r>
+              <a:rPr sz="1400" b="0" i="0">
+                <a:solidFill>
+                  <a:srgbClr val="1B2330"/>
+                </a:solidFill>
+                <a:latin typeface="Montserrat"/>
+              </a:rPr>
+              <a:t>Cualquier titular con carné de Gas B</a:t>
+            </a:r>
+          </a:p>
+        </p:txBody>
+      </p:sp>
+      <p:sp>
+        <p:nvSpPr>
+          <p:cNvPr id="20" name="Rounded Rectangle 19"/>
+          <p:cNvSpPr/>
+          <p:nvPr/>
+        </p:nvSpPr>
+        <p:spPr>
+          <a:xfrm>
+            <a:off x="6355080" y="4617720"/>
+            <a:ext cx="4983480" cy="1143000"/>
+          </a:xfrm>
+          <a:prstGeom prst="roundRect">
+            <a:avLst/>
+          </a:prstGeom>
+          <a:solidFill>
+            <a:srgbClr val="F3F6FB"/>
+          </a:solidFill>
+          <a:ln w="12700">
+            <a:solidFill>
+              <a:srgbClr val="C7D2E6"/>
+            </a:solidFill>
+          </a:ln>
+          <a:effectLst/>
+        </p:spPr>
+        <p:style>
+          <a:lnRef idx="1">
+            <a:schemeClr val="accent1"/>
+          </a:lnRef>
+          <a:fillRef idx="3">
+            <a:schemeClr val="accent1"/>
+          </a:fillRef>
+          <a:effectRef idx="2">
+            <a:schemeClr val="accent1"/>
+          </a:effectRef>
+          <a:fontRef idx="minor">
+            <a:schemeClr val="lt1"/>
+          </a:fontRef>
+        </p:style>
+        <p:txBody>
+          <a:bodyPr rtlCol="0" anchor="ctr"/>
+          <a:lstStyle/>
+          <a:p>
+            <a:pPr algn="ctr"/>
+          </a:p>
+        </p:txBody>
+      </p:sp>
+      <p:sp>
+        <p:nvSpPr>
+          <p:cNvPr id="21" name="Rectangle 20"/>
+          <p:cNvSpPr/>
+          <p:nvPr/>
+        </p:nvSpPr>
+        <p:spPr>
+          <a:xfrm>
+            <a:off x="6355080" y="4617720"/>
+            <a:ext cx="640080" cy="1143000"/>
+          </a:xfrm>
+          <a:prstGeom prst="rect">
+            <a:avLst/>
+          </a:prstGeom>
+          <a:solidFill>
+            <a:srgbClr val="1E2761"/>
+          </a:solidFill>
+          <a:ln>
+            <a:noFill/>
+          </a:ln>
+          <a:effectLst/>
+        </p:spPr>
+        <p:style>
+          <a:lnRef idx="1">
+            <a:schemeClr val="accent1"/>
+          </a:lnRef>
+          <a:fillRef idx="3">
+            <a:schemeClr val="accent1"/>
+          </a:fillRef>
+          <a:effectRef idx="2">
+            <a:schemeClr val="accent1"/>
+          </a:effectRef>
+          <a:fontRef idx="minor">
+            <a:schemeClr val="lt1"/>
+          </a:fontRef>
+        </p:style>
+        <p:txBody>
+          <a:bodyPr rtlCol="0" anchor="ctr"/>
+          <a:lstStyle/>
+          <a:p>
+            <a:pPr algn="ctr"/>
+          </a:p>
+        </p:txBody>
+      </p:sp>
+      <p:sp>
+        <p:nvSpPr>
+          <p:cNvPr id="22" name="TextBox 21"/>
+          <p:cNvSpPr txBox="1"/>
+          <p:nvPr/>
+        </p:nvSpPr>
+        <p:spPr>
+          <a:xfrm>
+            <a:off x="6355080" y="4937760"/>
+            <a:ext cx="640080" cy="548640"/>
+          </a:xfrm>
+          <a:prstGeom prst="rect">
+            <a:avLst/>
+          </a:prstGeom>
+          <a:noFill/>
+        </p:spPr>
+        <p:txBody>
+          <a:bodyPr wrap="square">
+            <a:spAutoFit/>
+          </a:bodyPr>
+          <a:lstStyle/>
+          <a:p>
+            <a:pPr algn="ctr"/>
+            <a:r>
+              <a:rPr sz="2200" b="1" i="0">
+                <a:solidFill>
+                  <a:srgbClr val="FFFFFF"/>
+                </a:solidFill>
+                <a:latin typeface="Montserrat"/>
+              </a:rPr>
+              <a:t>D</a:t>
+            </a:r>
+          </a:p>
+        </p:txBody>
+      </p:sp>
+      <p:sp>
+        <p:nvSpPr>
+          <p:cNvPr id="23" name="TextBox 22"/>
+          <p:cNvSpPr txBox="1"/>
+          <p:nvPr/>
+        </p:nvSpPr>
+        <p:spPr>
+          <a:xfrm>
+            <a:off x="7132320" y="4800600"/>
+            <a:ext cx="4114800" cy="868680"/>
+          </a:xfrm>
+          <a:prstGeom prst="rect">
+            <a:avLst/>
+          </a:prstGeom>
+          <a:noFill/>
+        </p:spPr>
+        <p:txBody>
+          <a:bodyPr wrap="square">
+            <a:spAutoFit/>
+          </a:bodyPr>
+          <a:lstStyle/>
+          <a:p>
+            <a:r>
+              <a:rPr sz="1400" b="0" i="0">
+                <a:solidFill>
+                  <a:srgbClr val="1B2330"/>
+                </a:solidFill>
+                <a:latin typeface="Montserrat"/>
+              </a:rPr>
+              <a:t>El organismo de control</a:t>
             </a:r>
           </a:p>
         </p:txBody>
@@ -10898,6 +14130,18 @@
   <p:clrMapOvr>
     <a:masterClrMapping/>
   </p:clrMapOvr>
+  <mc:AlternateContent xmlns:mc="http://schemas.openxmlformats.org/markup-compatibility/2006">
+    <mc:Choice xmlns:p14="http://schemas.microsoft.com/office/powerpoint/2010/main" Requires="p14">
+      <p:transition spd="med" p14:dur="700">
+        <p14:cube dir="l"/>
+      </p:transition>
+    </mc:Choice>
+    <mc:Fallback>
+      <p:transition spd="med">
+        <p:push dir="l"/>
+      </p:transition>
+    </mc:Fallback>
+  </mc:AlternateContent>
 </p:sld>
 </file>
 
@@ -10985,7 +14229,7 @@
                 </a:solidFill>
                 <a:latin typeface="Montserrat"/>
               </a:rPr>
-              <a:t>008 / 016</a:t>
+              <a:t>008 / 020</a:t>
             </a:r>
           </a:p>
         </p:txBody>
@@ -11026,88 +14270,20 @@
       </p:sp>
       <p:sp>
         <p:nvSpPr>
-          <p:cNvPr id="5" name="TextBox 4"/>
-          <p:cNvSpPr txBox="1"/>
-          <p:nvPr/>
-        </p:nvSpPr>
-        <p:spPr>
-          <a:xfrm>
-            <a:off x="822960" y="457200"/>
-            <a:ext cx="10058400" cy="365760"/>
-          </a:xfrm>
-          <a:prstGeom prst="rect">
-            <a:avLst/>
-          </a:prstGeom>
-          <a:noFill/>
-        </p:spPr>
-        <p:txBody>
-          <a:bodyPr wrap="square">
-            <a:spAutoFit/>
-          </a:bodyPr>
-          <a:lstStyle/>
-          <a:p>
-            <a:r>
-              <a:rPr sz="1300" b="1" i="0">
-                <a:solidFill>
-                  <a:srgbClr val="E8801A"/>
-                </a:solidFill>
-                <a:latin typeface="Montserrat"/>
-              </a:rPr>
-              <a:t>APARTADO 5.2 · DOCUMENTACIÓN</a:t>
-            </a:r>
-          </a:p>
-        </p:txBody>
-      </p:sp>
-      <p:sp>
-        <p:nvSpPr>
-          <p:cNvPr id="6" name="TextBox 5"/>
-          <p:cNvSpPr txBox="1"/>
-          <p:nvPr/>
-        </p:nvSpPr>
-        <p:spPr>
-          <a:xfrm>
-            <a:off x="822960" y="868680"/>
-            <a:ext cx="10515600" cy="914400"/>
-          </a:xfrm>
-          <a:prstGeom prst="rect">
-            <a:avLst/>
-          </a:prstGeom>
-          <a:noFill/>
-        </p:spPr>
-        <p:txBody>
-          <a:bodyPr wrap="square">
-            <a:spAutoFit/>
-          </a:bodyPr>
-          <a:lstStyle/>
-          <a:p>
-            <a:r>
-              <a:rPr sz="2800" b="1" i="0">
-                <a:solidFill>
-                  <a:srgbClr val="1E2761"/>
-                </a:solidFill>
-                <a:latin typeface="Montserrat"/>
-              </a:rPr>
-              <a:t>Siempre proyecto</a:t>
-            </a:r>
-          </a:p>
-        </p:txBody>
-      </p:sp>
-      <p:sp>
-        <p:nvSpPr>
-          <p:cNvPr id="7" name="Rounded Rectangle 6"/>
+          <p:cNvPr id="5" name="Rectangle 4"/>
           <p:cNvSpPr/>
           <p:nvPr/>
         </p:nvSpPr>
         <p:spPr>
           <a:xfrm>
-            <a:off x="868680" y="1627632"/>
-            <a:ext cx="2011680" cy="73152"/>
-          </a:xfrm>
-          <a:prstGeom prst="roundRect">
+            <a:off x="0" y="0"/>
+            <a:ext cx="12191695" cy="1143000"/>
+          </a:xfrm>
+          <a:prstGeom prst="rect">
             <a:avLst/>
           </a:prstGeom>
           <a:solidFill>
-            <a:srgbClr val="E8801A"/>
+            <a:srgbClr val="1E8E4B"/>
           </a:solidFill>
           <a:ln>
             <a:noFill/>
@@ -11138,14 +14314,14 @@
       </p:sp>
       <p:sp>
         <p:nvSpPr>
-          <p:cNvPr id="8" name="TextBox 7"/>
+          <p:cNvPr id="6" name="TextBox 5"/>
           <p:cNvSpPr txBox="1"/>
           <p:nvPr/>
         </p:nvSpPr>
         <p:spPr>
           <a:xfrm>
-            <a:off x="822960" y="1965960"/>
-            <a:ext cx="4983480" cy="4206240"/>
+            <a:off x="822960" y="274320"/>
+            <a:ext cx="10515600" cy="640080"/>
           </a:xfrm>
           <a:prstGeom prst="rect">
             <a:avLst/>
@@ -11158,127 +14334,72 @@
           </a:bodyPr>
           <a:lstStyle/>
           <a:p>
-            <a:pPr>
-              <a:spcAft>
-                <a:spcPts val="1100"/>
-              </a:spcAft>
-            </a:pPr>
-            <a:r>
-              <a:rPr sz="1600" b="1" i="0">
-                <a:solidFill>
-                  <a:srgbClr val="E8801A"/>
-                </a:solidFill>
-                <a:latin typeface="Montserrat"/>
-              </a:rPr>
-              <a:t>▸  </a:t>
-            </a:r>
-            <a:r>
-              <a:rPr sz="1600" b="0" i="0">
-                <a:solidFill>
-                  <a:srgbClr val="1B2330"/>
-                </a:solidFill>
-                <a:latin typeface="Montserrat"/>
-              </a:rPr>
-              <a:t>Toda planta de GNL exige proyecto</a:t>
-            </a:r>
-          </a:p>
-          <a:p>
-            <a:pPr>
-              <a:spcAft>
-                <a:spcPts val="1100"/>
-              </a:spcAft>
-            </a:pPr>
-            <a:r>
-              <a:rPr sz="1600" b="1" i="0">
-                <a:solidFill>
-                  <a:srgbClr val="E8801A"/>
-                </a:solidFill>
-                <a:latin typeface="Montserrat"/>
-              </a:rPr>
-              <a:t>▸  </a:t>
-            </a:r>
-            <a:r>
-              <a:rPr sz="1600" b="0" i="0">
-                <a:solidFill>
-                  <a:srgbClr val="1B2330"/>
-                </a:solidFill>
-                <a:latin typeface="Montserrat"/>
-              </a:rPr>
-              <a:t>Lo firma técnico facultativo competente</a:t>
-            </a:r>
-          </a:p>
-          <a:p>
-            <a:pPr>
-              <a:spcAft>
-                <a:spcPts val="1100"/>
-              </a:spcAft>
-            </a:pPr>
-            <a:r>
-              <a:rPr sz="1600" b="1" i="0">
-                <a:solidFill>
-                  <a:srgbClr val="E8801A"/>
-                </a:solidFill>
-                <a:latin typeface="Montserrat"/>
-              </a:rPr>
-              <a:t>▸  </a:t>
-            </a:r>
-            <a:r>
-              <a:rPr sz="1600" b="0" i="0">
-                <a:solidFill>
-                  <a:srgbClr val="1B2330"/>
-                </a:solidFill>
-                <a:latin typeface="Montserrat"/>
-              </a:rPr>
-              <a:t>Nada de memoria técnica</a:t>
-            </a:r>
-          </a:p>
-          <a:p>
-            <a:pPr>
-              <a:spcAft>
-                <a:spcPts val="1100"/>
-              </a:spcAft>
-            </a:pPr>
-            <a:r>
-              <a:rPr sz="1600" b="1" i="0">
-                <a:solidFill>
-                  <a:srgbClr val="E8801A"/>
-                </a:solidFill>
-                <a:latin typeface="Montserrat"/>
-              </a:rPr>
-              <a:t>▸  </a:t>
-            </a:r>
-            <a:r>
-              <a:rPr sz="1600" b="0" i="0">
-                <a:solidFill>
-                  <a:srgbClr val="1B2330"/>
-                </a:solidFill>
-                <a:latin typeface="Montserrat"/>
-              </a:rPr>
-              <a:t>Extra: planes de emergencia</a:t>
-            </a:r>
-          </a:p>
-        </p:txBody>
-      </p:sp>
-      <p:sp>
-        <p:nvSpPr>
-          <p:cNvPr id="9" name="imgph" descr="IMGQ:safety emergency plan engineering documents"/>
+            <a:r>
+              <a:rPr sz="2400" b="1" i="0">
+                <a:solidFill>
+                  <a:srgbClr val="FFFFFF"/>
+                </a:solidFill>
+                <a:latin typeface="Montserrat"/>
+              </a:rPr>
+              <a:t>✔  RESPUESTA:  B</a:t>
+            </a:r>
+          </a:p>
+        </p:txBody>
+      </p:sp>
+      <p:sp>
+        <p:nvSpPr>
+          <p:cNvPr id="7" name="TextBox 6"/>
+          <p:cNvSpPr txBox="1"/>
+          <p:nvPr/>
+        </p:nvSpPr>
+        <p:spPr>
+          <a:xfrm>
+            <a:off x="822960" y="1417320"/>
+            <a:ext cx="10515600" cy="914400"/>
+          </a:xfrm>
+          <a:prstGeom prst="rect">
+            <a:avLst/>
+          </a:prstGeom>
+          <a:noFill/>
+        </p:spPr>
+        <p:txBody>
+          <a:bodyPr wrap="square">
+            <a:spAutoFit/>
+          </a:bodyPr>
+          <a:lstStyle/>
+          <a:p>
+            <a:r>
+              <a:rPr sz="1800" b="1" i="0">
+                <a:solidFill>
+                  <a:srgbClr val="64748B"/>
+                </a:solidFill>
+                <a:latin typeface="Montserrat"/>
+              </a:rPr>
+              <a:t>¿Quién debe montar y mantener una planta satélite de GNL?</a:t>
+            </a:r>
+          </a:p>
+        </p:txBody>
+      </p:sp>
+      <p:sp>
+        <p:nvSpPr>
+          <p:cNvPr id="8" name="Rounded Rectangle 7"/>
           <p:cNvSpPr/>
           <p:nvPr/>
         </p:nvSpPr>
         <p:spPr>
           <a:xfrm>
-            <a:off x="5806440" y="1051560"/>
-            <a:ext cx="5298947" cy="4629150"/>
+            <a:off x="822960" y="2514600"/>
+            <a:ext cx="10515600" cy="914400"/>
           </a:xfrm>
           <a:prstGeom prst="roundRect">
             <a:avLst/>
           </a:prstGeom>
           <a:solidFill>
-            <a:srgbClr val="F3F6FB"/>
+            <a:srgbClr val="E9F6EE"/>
           </a:solidFill>
           <a:ln w="12700">
             <a:solidFill>
-              <a:srgbClr val="C7D2E6"/>
+              <a:srgbClr val="1E8E4B"/>
             </a:solidFill>
           </a:ln>
           <a:effectLst/>
@@ -11307,14 +14428,14 @@
       </p:sp>
       <p:sp>
         <p:nvSpPr>
-          <p:cNvPr id="10" name="TextBox 9"/>
+          <p:cNvPr id="9" name="TextBox 8"/>
           <p:cNvSpPr txBox="1"/>
           <p:nvPr/>
         </p:nvSpPr>
         <p:spPr>
           <a:xfrm>
-            <a:off x="6080760" y="2726055"/>
-            <a:ext cx="4750307" cy="1280160"/>
+            <a:off x="1097280" y="2697480"/>
+            <a:ext cx="10058400" cy="640080"/>
           </a:xfrm>
           <a:prstGeom prst="rect">
             <a:avLst/>
@@ -11327,27 +14448,66 @@
           </a:bodyPr>
           <a:lstStyle/>
           <a:p>
-            <a:pPr algn="ctr"/>
-            <a:r>
-              <a:rPr sz="1400" b="1" i="0">
-                <a:solidFill>
-                  <a:srgbClr val="64748B"/>
-                </a:solidFill>
-                <a:latin typeface="Montserrat"/>
-              </a:rPr>
-              <a:t>IMAGEN REALISTA</a:t>
-            </a:r>
-          </a:p>
-          <a:p>
-            <a:pPr algn="ctr"/>
-            <a:r>
-              <a:rPr sz="1100" b="0" i="1">
-                <a:solidFill>
-                  <a:srgbClr val="64748B"/>
-                </a:solidFill>
-                <a:latin typeface="Montserrat"/>
-              </a:rPr>
-              <a:t>safety emergency plan engineering documents</a:t>
+            <a:r>
+              <a:rPr sz="1800" b="1" i="0">
+                <a:solidFill>
+                  <a:srgbClr val="1E8E4B"/>
+                </a:solidFill>
+                <a:latin typeface="Montserrat"/>
+              </a:rPr>
+              <a:t>B.  </a:t>
+            </a:r>
+            <a:r>
+              <a:rPr sz="1800" b="1" i="0">
+                <a:solidFill>
+                  <a:srgbClr val="1E2761"/>
+                </a:solidFill>
+                <a:latin typeface="Montserrat"/>
+              </a:rPr>
+              <a:t>Un especialista en trabajos criogénicos</a:t>
+            </a:r>
+          </a:p>
+        </p:txBody>
+      </p:sp>
+      <p:sp>
+        <p:nvSpPr>
+          <p:cNvPr id="10" name="TextBox 9"/>
+          <p:cNvSpPr txBox="1"/>
+          <p:nvPr/>
+        </p:nvSpPr>
+        <p:spPr>
+          <a:xfrm>
+            <a:off x="822960" y="3749039"/>
+            <a:ext cx="10515600" cy="2194560"/>
+          </a:xfrm>
+          <a:prstGeom prst="rect">
+            <a:avLst/>
+          </a:prstGeom>
+          <a:noFill/>
+        </p:spPr>
+        <p:txBody>
+          <a:bodyPr wrap="square">
+            <a:spAutoFit/>
+          </a:bodyPr>
+          <a:lstStyle/>
+          <a:p>
+            <a:r>
+              <a:rPr sz="1500" b="1" i="0">
+                <a:solidFill>
+                  <a:srgbClr val="E8801A"/>
+                </a:solidFill>
+                <a:latin typeface="Montserrat"/>
+              </a:rPr>
+              <a:t>Por qué:  </a:t>
+            </a:r>
+            <a:r>
+              <a:rPr sz="1500" b="0" i="0">
+                <a:solidFill>
+                  <a:srgbClr val="1B2330"/>
+                </a:solidFill>
+                <a:latin typeface="Montserrat"/>
+              </a:rPr>
+              <a:t>El GNL está a unos -160 °C: exige una empresa especializada en trabajos criogénicos, no un instalador corriente.</a:t>
             </a:r>
           </a:p>
         </p:txBody>
@@ -11357,6 +14517,18 @@
   <p:clrMapOvr>
     <a:masterClrMapping/>
   </p:clrMapOvr>
+  <mc:AlternateContent xmlns:mc="http://schemas.openxmlformats.org/markup-compatibility/2006">
+    <mc:Choice xmlns:p14="http://schemas.microsoft.com/office/powerpoint/2010/main" Requires="p14">
+      <p:transition spd="med" p14:dur="700">
+        <p14:cube dir="r"/>
+      </p:transition>
+    </mc:Choice>
+    <mc:Fallback>
+      <p:transition spd="med">
+        <p:push dir="r"/>
+      </p:transition>
+    </mc:Fallback>
+  </mc:AlternateContent>
 </p:sld>
 </file>
 
@@ -11444,7 +14616,7 @@
                 </a:solidFill>
                 <a:latin typeface="Montserrat"/>
               </a:rPr>
-              <a:t>009 / 016</a:t>
+              <a:t>009 / 020</a:t>
             </a:r>
           </a:p>
         </p:txBody>
@@ -11512,7 +14684,7 @@
                 </a:solidFill>
                 <a:latin typeface="Montserrat"/>
               </a:rPr>
-              <a:t>APARTADOS 5.3 Y 5.4 · CERTIFICADOS</a:t>
+              <a:t>APARTADO 5.1 · AUTORIZACIÓN</a:t>
             </a:r>
           </a:p>
         </p:txBody>
@@ -11546,14 +14718,14 @@
                 </a:solidFill>
                 <a:latin typeface="Montserrat"/>
               </a:rPr>
-              <a:t>Dos papeles y hay gas</a:t>
-            </a:r>
-          </a:p>
-        </p:txBody>
-      </p:sp>
-      <p:sp>
-        <p:nvSpPr>
-          <p:cNvPr id="7" name="Rounded Rectangle 6"/>
+              <a:t>Aquí sí, casi siempre</a:t>
+            </a:r>
+          </a:p>
+        </p:txBody>
+      </p:sp>
+      <p:sp>
+        <p:nvSpPr>
+          <p:cNvPr id="7" name="Rectangle 6"/>
           <p:cNvSpPr/>
           <p:nvPr/>
         </p:nvSpPr>
@@ -11562,7 +14734,7 @@
             <a:off x="868680" y="1627632"/>
             <a:ext cx="2011680" cy="73152"/>
           </a:xfrm>
-          <a:prstGeom prst="roundRect">
+          <a:prstGeom prst="rect">
             <a:avLst/>
           </a:prstGeom>
           <a:solidFill>
@@ -11603,8 +14775,8 @@
         </p:nvSpPr>
         <p:spPr>
           <a:xfrm>
-            <a:off x="822960" y="1965960"/>
-            <a:ext cx="4983480" cy="4206240"/>
+            <a:off x="6355080" y="1965960"/>
+            <a:ext cx="5029200" cy="4206240"/>
           </a:xfrm>
           <a:prstGeom prst="rect">
             <a:avLst/>
@@ -11638,7 +14810,7 @@
                 </a:solidFill>
                 <a:latin typeface="Montserrat"/>
               </a:rPr>
-              <a:t>Pruebas en obra: organismo de control</a:t>
+              <a:t>Autorización previa a construir</a:t>
             </a:r>
           </a:p>
           <a:p>
@@ -11663,7 +14835,7 @@
                 </a:solidFill>
                 <a:latin typeface="Montserrat"/>
               </a:rPr>
-              <a:t>Certificado de dirección de obra</a:t>
+              <a:t>La otorga la Comunidad Autónoma</a:t>
             </a:r>
           </a:p>
           <a:p>
@@ -11688,7 +14860,7 @@
                 </a:solidFill>
                 <a:latin typeface="Montserrat"/>
               </a:rPr>
-              <a:t>Certificado de inspección</a:t>
+              <a:t>Excepción: uso propio y exclusivo</a:t>
             </a:r>
           </a:p>
           <a:p>
@@ -11713,21 +14885,21 @@
                 </a:solidFill>
                 <a:latin typeface="Montserrat"/>
               </a:rPr>
-              <a:t>Aquí no hay certificado de instalación</a:t>
-            </a:r>
-          </a:p>
-        </p:txBody>
-      </p:sp>
-      <p:sp>
-        <p:nvSpPr>
-          <p:cNvPr id="9" name="imgph" descr="IMGQ:inspector signing certificate site"/>
+              <a:t>Se solicita con proyecto y modelo oficial</a:t>
+            </a:r>
+          </a:p>
+        </p:txBody>
+      </p:sp>
+      <p:sp>
+        <p:nvSpPr>
+          <p:cNvPr id="9" name="imgph" descr="IMGQ:government permit stamp document"/>
           <p:cNvSpPr/>
           <p:nvPr/>
         </p:nvSpPr>
         <p:spPr>
           <a:xfrm>
-            <a:off x="5806440" y="1051560"/>
-            <a:ext cx="5298947" cy="4629150"/>
+            <a:off x="822960" y="1965960"/>
+            <a:ext cx="5303520" cy="4572000"/>
           </a:xfrm>
           <a:prstGeom prst="roundRect">
             <a:avLst/>
@@ -11772,8 +14944,8 @@
         </p:nvSpPr>
         <p:spPr>
           <a:xfrm>
-            <a:off x="6080760" y="2726055"/>
-            <a:ext cx="4750307" cy="1280160"/>
+            <a:off x="1097280" y="3611880"/>
+            <a:ext cx="4754880" cy="1280160"/>
           </a:xfrm>
           <a:prstGeom prst="rect">
             <a:avLst/>
@@ -11794,7 +14966,7 @@
                 </a:solidFill>
                 <a:latin typeface="Montserrat"/>
               </a:rPr>
-              <a:t>IMAGEN REALISTA</a:t>
+              <a:t>IMAGEN</a:t>
             </a:r>
           </a:p>
           <a:p>
@@ -11806,7 +14978,7 @@
                 </a:solidFill>
                 <a:latin typeface="Montserrat"/>
               </a:rPr>
-              <a:t>inspector signing certificate site</a:t>
+              <a:t>government permit stamp document</a:t>
             </a:r>
           </a:p>
         </p:txBody>
@@ -11816,6 +14988,18 @@
   <p:clrMapOvr>
     <a:masterClrMapping/>
   </p:clrMapOvr>
+  <mc:AlternateContent xmlns:mc="http://schemas.openxmlformats.org/markup-compatibility/2006">
+    <mc:Choice xmlns:p14="http://schemas.microsoft.com/office/powerpoint/2010/main" Requires="p14">
+      <p:transition spd="med" p14:dur="700">
+        <p14:cube dir="l"/>
+      </p:transition>
+    </mc:Choice>
+    <mc:Fallback>
+      <p:transition spd="med">
+        <p:push dir="l"/>
+      </p:transition>
+    </mc:Fallback>
+  </mc:AlternateContent>
 </p:sld>
 </file>
 

--- a/Curso Gas B/02 - ITC-ICG 02-03-04 - Almacenamiento GLP y plantas GNL/02 - ITC-ICG 02-03-04 - Almacenamiento GLP y plantas GNL - Vídeo 4.pptx
+++ b/Curso Gas B/02 - ITC-ICG 02-03-04 - Almacenamiento GLP y plantas GNL/02 - ITC-ICG 02-03-04 - Almacenamiento GLP y plantas GNL - Vídeo 4.pptx
@@ -971,12 +971,12 @@
           <a:lstStyle/>
           <a:p>
             <a:r>
-              <a:t>N1: Multiplica volumen por presión. Si pasa de trescientos, ¿quién controla?</a:t>
-            </a:r>
-          </a:p>
-          <a:p>
-            <a:r>
-              <a:t>N2: Cuanto más grande y más presión, más ojos externos exige.</a:t>
+              <a:t>N1: Multiplica volumen por presión, la fórmula uve por pe. En el control de una planta de GNL, si uve por pe supera trescientos, ¿quién debe hacerlo? Opción A, el propio usuario. Opción B, el especialista criogénico. Opción C, obligatoriamente un organismo de control. Opción D, no hace falta ningún control. Piénsalo.</a:t>
+            </a:r>
+          </a:p>
+          <a:p>
+            <a:r>
+              <a:t>N2: Pista: cuanto más grande y más presión, más ojos externos exige.</a:t>
             </a:r>
           </a:p>
         </p:txBody>
@@ -1046,12 +1046,12 @@
           <a:lstStyle/>
           <a:p>
             <a:r>
-              <a:t>N1: ¿Por qué el organismo de control?</a:t>
-            </a:r>
-          </a:p>
-          <a:p>
-            <a:r>
-              <a:t>N2: Porque la fórmula uve por pe mide el riesgo: si el volumen por la presión pasa de trescientos, la planta es lo bastante seria como para exigir un organismo de control independiente. Si es trescientos o menos, vale gente de la casa, el especialista criogénico o el propio usuario. El número que decide es el trescientos.</a:t>
+              <a:t>N2: La respuesta correcta es la opción C: obligatoriamente un organismo de control. ¿Por qué? Porque la fórmula uve por pe mide el riesgo: si el volumen por la presión supera trescientos, la planta es lo bastante seria como para exigir un organismo de control independiente. Si es trescientos o menos, vale gente de la casa, el especialista criogénico o el propio usuario. El número que decide es el trescientos.</a:t>
+            </a:r>
+          </a:p>
+          <a:p>
+            <a:r>
+              <a:t>N1: Pasa de trescientos, ojos de fuera.</a:t>
             </a:r>
           </a:p>
         </p:txBody>
@@ -1797,12 +1797,12 @@
           <a:lstStyle/>
           <a:p>
             <a:r>
-              <a:t>N1: El GNL va muy frío. ¿Quién puede trabajarlo?</a:t>
-            </a:r>
-          </a:p>
-          <a:p>
-            <a:r>
-              <a:t>N2: Piensa en que a esa temperatura un material normal se vuelve frágil como el cristal.</a:t>
+              <a:t>N1: El gas natural licuado va muy frío. ¿Quién debe montar y mantener una planta satélite de GNL? Opción A, una empresa instaladora de gas normal. Opción B, un especialista en trabajos criogénicos. Opción C, cualquier titular con carné de Gas B. Opción D, el organismo de control. Decídete.</a:t>
+            </a:r>
+          </a:p>
+          <a:p>
+            <a:r>
+              <a:t>N2: Pista: piensa en que a esa temperatura un material normal se vuelve frágil como el cristal.</a:t>
             </a:r>
           </a:p>
         </p:txBody>
@@ -1872,12 +1872,12 @@
           <a:lstStyle/>
           <a:p>
             <a:r>
-              <a:t>N1: ¿Por qué el criogénico y no un instalador cualquiera?</a:t>
-            </a:r>
-          </a:p>
-          <a:p>
-            <a:r>
-              <a:t>N2: Porque el gas natural licuado está a unos ciento sesenta grados bajo cero, y trabajarlo pide formación y materiales especiales. Por eso lo monta y lo mantiene el especialista criogénico, y la norma de referencia es la une sesenta mil doscientos diez. La cadena para no confundirla con el GLP: gas natural licuado, norma sesenta mil doscientos diez, especialista criogénico.</a:t>
+              <a:t>N2: La respuesta correcta es la opción B: un especialista en trabajos criogénicos. ¿Por qué? Porque el gas natural licuado está a unos ciento sesenta grados bajo cero, y trabajarlo pide formación y materiales especiales. Por eso lo monta y lo mantiene el especialista criogénico, y la norma de referencia es la une sesenta mil doscientos diez. La cadena para no confundirla con el GLP: gas natural licuado, norma sesenta mil doscientos diez, especialista criogénico.</a:t>
+            </a:r>
+          </a:p>
+          <a:p>
+            <a:r>
+              <a:t>N1: Frío de verdad, manos especializadas.</a:t>
             </a:r>
           </a:p>
         </p:txBody>
